--- a/UK_Rail_Analytics_Presentation_CEO_V5.pptx
+++ b/UK_Rail_Analytics_Presentation_CEO_V5.pptx
@@ -5,7 +5,7 @@
     <p:sldMasterId id="2147483648" r:id="rId1"/>
   </p:sldMasterIdLst>
   <p:notesMasterIdLst>
-    <p:notesMasterId r:id="rId11"/>
+    <p:notesMasterId r:id="rId12"/>
   </p:notesMasterIdLst>
   <p:sldIdLst>
     <p:sldId id="256" r:id="rId2"/>
@@ -14,14 +14,15 @@
     <p:sldId id="259" r:id="rId5"/>
     <p:sldId id="275" r:id="rId6"/>
     <p:sldId id="277" r:id="rId7"/>
-    <p:sldId id="269" r:id="rId8"/>
-    <p:sldId id="273" r:id="rId9"/>
-    <p:sldId id="274" r:id="rId10"/>
+    <p:sldId id="291" r:id="rId8"/>
+    <p:sldId id="269" r:id="rId9"/>
+    <p:sldId id="273" r:id="rId10"/>
+    <p:sldId id="274" r:id="rId11"/>
   </p:sldIdLst>
-  <p:sldSz cx="9144000" cy="6858000" type="screen4x3"/>
+  <p:sldSz cx="12192000" cy="6858000"/>
   <p:notesSz cx="6858000" cy="9144000"/>
   <p:custDataLst>
-    <p:tags r:id="rId12"/>
+    <p:tags r:id="rId13"/>
   </p:custDataLst>
   <p:defaultTextStyle>
     <a:defPPr>
@@ -121,12 +122,12 @@
   <p:extLst>
     <p:ext uri="{EFAFB233-063F-42B5-8137-9DF3F51BA10A}">
       <p15:sldGuideLst xmlns:p15="http://schemas.microsoft.com/office/powerpoint/2012/main">
-        <p15:guide id="1" orient="horz" pos="2160">
+        <p15:guide id="1" orient="horz" pos="2160" userDrawn="1">
           <p15:clr>
             <a:srgbClr val="A4A3A4"/>
           </p15:clr>
         </p15:guide>
-        <p15:guide id="2" pos="2880">
+        <p15:guide id="2" pos="3840" userDrawn="1">
           <p15:clr>
             <a:srgbClr val="A4A3A4"/>
           </p15:clr>
@@ -7383,7 +7384,7 @@
             </a:lnSpc>
           </a:pPr>
           <a:r>
-            <a:rPr lang="en-US"/>
+            <a:rPr lang="en-US" dirty="0"/>
             <a:t>Automate refund handling workflows.</a:t>
           </a:r>
         </a:p>
@@ -7424,7 +7425,7 @@
             </a:lnSpc>
           </a:pPr>
           <a:r>
-            <a:rPr lang="en-US"/>
+            <a:rPr lang="en-US" dirty="0"/>
             <a:t>Increase transparency of service disruptions.</a:t>
           </a:r>
         </a:p>
@@ -11430,7 +11431,7 @@
             <a:buNone/>
           </a:pPr>
           <a:r>
-            <a:rPr lang="en-US" sz="1600" kern="1200"/>
+            <a:rPr lang="en-US" sz="1600" kern="1200" dirty="0"/>
             <a:t>Automate refund handling workflows.</a:t>
           </a:r>
         </a:p>
@@ -11448,7 +11449,7 @@
             <a:buNone/>
           </a:pPr>
           <a:r>
-            <a:rPr lang="en-US" sz="1600" kern="1200"/>
+            <a:rPr lang="en-US" sz="1600" kern="1200" dirty="0"/>
             <a:t>Increase transparency of service disruptions.</a:t>
           </a:r>
         </a:p>
@@ -20237,7 +20238,7 @@
           <a:p>
             <a:fld id="{14F9119A-F2D0-4CFF-BED2-47984A0F79E7}" type="datetimeFigureOut">
               <a:rPr lang="en-US" smtClean="0"/>
-              <a:t>3/12/2025</a:t>
+              <a:t>5/12/2025</a:t>
             </a:fld>
             <a:endParaRPr lang="en-US"/>
           </a:p>
@@ -20255,8 +20256,8 @@
         </p:nvSpPr>
         <p:spPr>
           <a:xfrm>
-            <a:off x="1371600" y="1143000"/>
-            <a:ext cx="4114800" cy="3086100"/>
+            <a:off x="685800" y="1143000"/>
+            <a:ext cx="5486400" cy="3086100"/>
           </a:xfrm>
           <a:prstGeom prst="rect">
             <a:avLst/>
@@ -20533,8 +20534,8 @@
         </p:nvSpPr>
         <p:spPr>
           <a:xfrm>
-            <a:off x="685800" y="2130425"/>
-            <a:ext cx="7772400" cy="1470025"/>
+            <a:off x="914400" y="2130426"/>
+            <a:ext cx="10363200" cy="1470025"/>
           </a:xfrm>
         </p:spPr>
         <p:txBody>
@@ -20560,8 +20561,8 @@
         </p:nvSpPr>
         <p:spPr>
           <a:xfrm>
-            <a:off x="1371600" y="3886200"/>
-            <a:ext cx="6400800" cy="1752600"/>
+            <a:off x="1828800" y="3886200"/>
+            <a:ext cx="8534400" cy="1752600"/>
           </a:xfrm>
         </p:spPr>
         <p:txBody>
@@ -20683,7 +20684,7 @@
           <a:p>
             <a:fld id="{5BCAD085-E8A6-8845-BD4E-CB4CCA059FC4}" type="datetimeFigureOut">
               <a:rPr lang="en-US" smtClean="0"/>
-              <a:t>3/12/2025</a:t>
+              <a:t>5/12/2025</a:t>
             </a:fld>
             <a:endParaRPr lang="en-US"/>
           </a:p>
@@ -20851,7 +20852,7 @@
           <a:p>
             <a:fld id="{5BCAD085-E8A6-8845-BD4E-CB4CCA059FC4}" type="datetimeFigureOut">
               <a:rPr lang="en-US" smtClean="0"/>
-              <a:t>3/12/2025</a:t>
+              <a:t>5/12/2025</a:t>
             </a:fld>
             <a:endParaRPr lang="en-US"/>
           </a:p>
@@ -20941,8 +20942,8 @@
         </p:nvSpPr>
         <p:spPr>
           <a:xfrm>
-            <a:off x="6629400" y="274638"/>
-            <a:ext cx="2057400" cy="5851525"/>
+            <a:off x="8839200" y="274639"/>
+            <a:ext cx="2743200" cy="5851525"/>
           </a:xfrm>
         </p:spPr>
         <p:txBody>
@@ -20968,8 +20969,8 @@
         </p:nvSpPr>
         <p:spPr>
           <a:xfrm>
-            <a:off x="457200" y="274638"/>
-            <a:ext cx="6019800" cy="5851525"/>
+            <a:off x="609600" y="274639"/>
+            <a:ext cx="8026400" cy="5851525"/>
           </a:xfrm>
         </p:spPr>
         <p:txBody>
@@ -21029,7 +21030,7 @@
           <a:p>
             <a:fld id="{5BCAD085-E8A6-8845-BD4E-CB4CCA059FC4}" type="datetimeFigureOut">
               <a:rPr lang="en-US" smtClean="0"/>
-              <a:t>3/12/2025</a:t>
+              <a:t>5/12/2025</a:t>
             </a:fld>
             <a:endParaRPr lang="en-US"/>
           </a:p>
@@ -21197,7 +21198,7 @@
           <a:p>
             <a:fld id="{5BCAD085-E8A6-8845-BD4E-CB4CCA059FC4}" type="datetimeFigureOut">
               <a:rPr lang="en-US" smtClean="0"/>
-              <a:t>3/12/2025</a:t>
+              <a:t>5/12/2025</a:t>
             </a:fld>
             <a:endParaRPr lang="en-US"/>
           </a:p>
@@ -21287,8 +21288,8 @@
         </p:nvSpPr>
         <p:spPr>
           <a:xfrm>
-            <a:off x="722313" y="4406900"/>
-            <a:ext cx="7772400" cy="1362075"/>
+            <a:off x="963084" y="4406901"/>
+            <a:ext cx="10363200" cy="1362075"/>
           </a:xfrm>
         </p:spPr>
         <p:txBody>
@@ -21318,8 +21319,8 @@
         </p:nvSpPr>
         <p:spPr>
           <a:xfrm>
-            <a:off x="722313" y="2906713"/>
-            <a:ext cx="7772400" cy="1500187"/>
+            <a:off x="963084" y="2906713"/>
+            <a:ext cx="10363200" cy="1500187"/>
           </a:xfrm>
         </p:spPr>
         <p:txBody>
@@ -21442,7 +21443,7 @@
           <a:p>
             <a:fld id="{5BCAD085-E8A6-8845-BD4E-CB4CCA059FC4}" type="datetimeFigureOut">
               <a:rPr lang="en-US" smtClean="0"/>
-              <a:t>3/12/2025</a:t>
+              <a:t>5/12/2025</a:t>
             </a:fld>
             <a:endParaRPr lang="en-US"/>
           </a:p>
@@ -21554,8 +21555,8 @@
         </p:nvSpPr>
         <p:spPr>
           <a:xfrm>
-            <a:off x="457200" y="1600200"/>
-            <a:ext cx="4038600" cy="4525963"/>
+            <a:off x="609600" y="1600201"/>
+            <a:ext cx="5384800" cy="4525963"/>
           </a:xfrm>
         </p:spPr>
         <p:txBody>
@@ -21638,8 +21639,8 @@
         </p:nvSpPr>
         <p:spPr>
           <a:xfrm>
-            <a:off x="4648200" y="1600200"/>
-            <a:ext cx="4038600" cy="4525963"/>
+            <a:off x="6197600" y="1600201"/>
+            <a:ext cx="5384800" cy="4525963"/>
           </a:xfrm>
         </p:spPr>
         <p:txBody>
@@ -21727,7 +21728,7 @@
           <a:p>
             <a:fld id="{5BCAD085-E8A6-8845-BD4E-CB4CCA059FC4}" type="datetimeFigureOut">
               <a:rPr lang="en-US" smtClean="0"/>
-              <a:t>3/12/2025</a:t>
+              <a:t>5/12/2025</a:t>
             </a:fld>
             <a:endParaRPr lang="en-US"/>
           </a:p>
@@ -21843,8 +21844,8 @@
         </p:nvSpPr>
         <p:spPr>
           <a:xfrm>
-            <a:off x="457200" y="1535113"/>
-            <a:ext cx="4040188" cy="639762"/>
+            <a:off x="609600" y="1535113"/>
+            <a:ext cx="5386917" cy="639762"/>
           </a:xfrm>
         </p:spPr>
         <p:txBody>
@@ -21908,8 +21909,8 @@
         </p:nvSpPr>
         <p:spPr>
           <a:xfrm>
-            <a:off x="457200" y="2174875"/>
-            <a:ext cx="4040188" cy="3951288"/>
+            <a:off x="609600" y="2174875"/>
+            <a:ext cx="5386917" cy="3951288"/>
           </a:xfrm>
         </p:spPr>
         <p:txBody>
@@ -21992,8 +21993,8 @@
         </p:nvSpPr>
         <p:spPr>
           <a:xfrm>
-            <a:off x="4645025" y="1535113"/>
-            <a:ext cx="4041775" cy="639762"/>
+            <a:off x="6193368" y="1535113"/>
+            <a:ext cx="5389033" cy="639762"/>
           </a:xfrm>
         </p:spPr>
         <p:txBody>
@@ -22057,8 +22058,8 @@
         </p:nvSpPr>
         <p:spPr>
           <a:xfrm>
-            <a:off x="4645025" y="2174875"/>
-            <a:ext cx="4041775" cy="3951288"/>
+            <a:off x="6193368" y="2174875"/>
+            <a:ext cx="5389033" cy="3951288"/>
           </a:xfrm>
         </p:spPr>
         <p:txBody>
@@ -22146,7 +22147,7 @@
           <a:p>
             <a:fld id="{5BCAD085-E8A6-8845-BD4E-CB4CCA059FC4}" type="datetimeFigureOut">
               <a:rPr lang="en-US" smtClean="0"/>
-              <a:t>3/12/2025</a:t>
+              <a:t>5/12/2025</a:t>
             </a:fld>
             <a:endParaRPr lang="en-US"/>
           </a:p>
@@ -22263,7 +22264,7 @@
           <a:p>
             <a:fld id="{5BCAD085-E8A6-8845-BD4E-CB4CCA059FC4}" type="datetimeFigureOut">
               <a:rPr lang="en-US" smtClean="0"/>
-              <a:t>3/12/2025</a:t>
+              <a:t>5/12/2025</a:t>
             </a:fld>
             <a:endParaRPr lang="en-US"/>
           </a:p>
@@ -22358,7 +22359,7 @@
           <a:p>
             <a:fld id="{5BCAD085-E8A6-8845-BD4E-CB4CCA059FC4}" type="datetimeFigureOut">
               <a:rPr lang="en-US" smtClean="0"/>
-              <a:t>3/12/2025</a:t>
+              <a:t>5/12/2025</a:t>
             </a:fld>
             <a:endParaRPr lang="en-US"/>
           </a:p>
@@ -22448,8 +22449,8 @@
         </p:nvSpPr>
         <p:spPr>
           <a:xfrm>
-            <a:off x="457200" y="273050"/>
-            <a:ext cx="3008313" cy="1162050"/>
+            <a:off x="609601" y="273050"/>
+            <a:ext cx="4011084" cy="1162050"/>
           </a:xfrm>
         </p:spPr>
         <p:txBody>
@@ -22479,8 +22480,8 @@
         </p:nvSpPr>
         <p:spPr>
           <a:xfrm>
-            <a:off x="3575050" y="273050"/>
-            <a:ext cx="5111750" cy="5853113"/>
+            <a:off x="4766733" y="273051"/>
+            <a:ext cx="6815667" cy="5853113"/>
           </a:xfrm>
         </p:spPr>
         <p:txBody>
@@ -22563,8 +22564,8 @@
         </p:nvSpPr>
         <p:spPr>
           <a:xfrm>
-            <a:off x="457200" y="1435100"/>
-            <a:ext cx="3008313" cy="4691063"/>
+            <a:off x="609601" y="1435101"/>
+            <a:ext cx="4011084" cy="4691063"/>
           </a:xfrm>
         </p:spPr>
         <p:txBody>
@@ -22633,7 +22634,7 @@
           <a:p>
             <a:fld id="{5BCAD085-E8A6-8845-BD4E-CB4CCA059FC4}" type="datetimeFigureOut">
               <a:rPr lang="en-US" smtClean="0"/>
-              <a:t>3/12/2025</a:t>
+              <a:t>5/12/2025</a:t>
             </a:fld>
             <a:endParaRPr lang="en-US"/>
           </a:p>
@@ -22723,8 +22724,8 @@
         </p:nvSpPr>
         <p:spPr>
           <a:xfrm>
-            <a:off x="1792288" y="4800600"/>
-            <a:ext cx="5486400" cy="566738"/>
+            <a:off x="2389717" y="4800600"/>
+            <a:ext cx="7315200" cy="566738"/>
           </a:xfrm>
         </p:spPr>
         <p:txBody>
@@ -22754,8 +22755,8 @@
         </p:nvSpPr>
         <p:spPr>
           <a:xfrm>
-            <a:off x="1792288" y="612775"/>
-            <a:ext cx="5486400" cy="4114800"/>
+            <a:off x="2389717" y="612775"/>
+            <a:ext cx="7315200" cy="4114800"/>
           </a:xfrm>
         </p:spPr>
         <p:txBody>
@@ -22815,8 +22816,8 @@
         </p:nvSpPr>
         <p:spPr>
           <a:xfrm>
-            <a:off x="1792288" y="5367338"/>
-            <a:ext cx="5486400" cy="804862"/>
+            <a:off x="2389717" y="5367338"/>
+            <a:ext cx="7315200" cy="804862"/>
           </a:xfrm>
         </p:spPr>
         <p:txBody>
@@ -22885,7 +22886,7 @@
           <a:p>
             <a:fld id="{5BCAD085-E8A6-8845-BD4E-CB4CCA059FC4}" type="datetimeFigureOut">
               <a:rPr lang="en-US" smtClean="0"/>
-              <a:t>3/12/2025</a:t>
+              <a:t>5/12/2025</a:t>
             </a:fld>
             <a:endParaRPr lang="en-US"/>
           </a:p>
@@ -22980,8 +22981,8 @@
         </p:nvSpPr>
         <p:spPr>
           <a:xfrm>
-            <a:off x="457200" y="274638"/>
-            <a:ext cx="8229600" cy="1143000"/>
+            <a:off x="609600" y="274638"/>
+            <a:ext cx="10972800" cy="1143000"/>
           </a:xfrm>
           <a:prstGeom prst="rect">
             <a:avLst/>
@@ -23012,8 +23013,8 @@
         </p:nvSpPr>
         <p:spPr>
           <a:xfrm>
-            <a:off x="457200" y="1600200"/>
-            <a:ext cx="8229600" cy="4525963"/>
+            <a:off x="609600" y="1600201"/>
+            <a:ext cx="10972800" cy="4525963"/>
           </a:xfrm>
           <a:prstGeom prst="rect">
             <a:avLst/>
@@ -23073,8 +23074,8 @@
         </p:nvSpPr>
         <p:spPr>
           <a:xfrm>
-            <a:off x="457200" y="6356350"/>
-            <a:ext cx="2133600" cy="365125"/>
+            <a:off x="609600" y="6356351"/>
+            <a:ext cx="2844800" cy="365125"/>
           </a:xfrm>
           <a:prstGeom prst="rect">
             <a:avLst/>
@@ -23096,7 +23097,7 @@
           <a:p>
             <a:fld id="{5BCAD085-E8A6-8845-BD4E-CB4CCA059FC4}" type="datetimeFigureOut">
               <a:rPr lang="en-US" smtClean="0"/>
-              <a:t>3/12/2025</a:t>
+              <a:t>5/12/2025</a:t>
             </a:fld>
             <a:endParaRPr lang="en-US"/>
           </a:p>
@@ -23114,8 +23115,8 @@
         </p:nvSpPr>
         <p:spPr>
           <a:xfrm>
-            <a:off x="3124200" y="6356350"/>
-            <a:ext cx="2895600" cy="365125"/>
+            <a:off x="4165600" y="6356351"/>
+            <a:ext cx="3860800" cy="365125"/>
           </a:xfrm>
           <a:prstGeom prst="rect">
             <a:avLst/>
@@ -23151,8 +23152,8 @@
         </p:nvSpPr>
         <p:spPr>
           <a:xfrm>
-            <a:off x="6553200" y="6356350"/>
-            <a:ext cx="2133600" cy="365125"/>
+            <a:off x="8737600" y="6356351"/>
+            <a:ext cx="2844800" cy="365125"/>
           </a:xfrm>
           <a:prstGeom prst="rect">
             <a:avLst/>
@@ -23504,7 +23505,7 @@
         </p:nvSpPr>
         <p:spPr>
           <a:xfrm>
-            <a:off x="0" y="0"/>
+            <a:off x="1524000" y="0"/>
             <a:ext cx="9141714" cy="6858000"/>
           </a:xfrm>
           <a:prstGeom prst="rect">
@@ -23551,7 +23552,7 @@
         </p:nvSpPr>
         <p:spPr>
           <a:xfrm>
-            <a:off x="480060" y="325369"/>
+            <a:off x="2004061" y="325370"/>
             <a:ext cx="3276451" cy="1956841"/>
           </a:xfrm>
         </p:spPr>
@@ -23598,7 +23599,7 @@
         </p:nvSpPr>
         <p:spPr>
           <a:xfrm>
-            <a:off x="480060" y="2586994"/>
+            <a:off x="2004060" y="2586994"/>
             <a:ext cx="2606040" cy="18288"/>
           </a:xfrm>
           <a:custGeom>
@@ -23840,7 +23841,7 @@
         </p:nvSpPr>
         <p:spPr>
           <a:xfrm>
-            <a:off x="480060" y="2872899"/>
+            <a:off x="2004061" y="2872899"/>
             <a:ext cx="3182691" cy="3320668"/>
           </a:xfrm>
           <a:prstGeom prst="rect">
@@ -23903,7 +23904,7 @@
         </p:blipFill>
         <p:spPr>
           <a:xfrm>
-            <a:off x="3983776" y="10"/>
+            <a:off x="5507777" y="10"/>
             <a:ext cx="5159081" cy="6857990"/>
           </a:xfrm>
           <a:custGeom>
@@ -24031,6 +24032,452 @@
 </p:sld>
 </file>
 
+<file path=ppt/slides/slide10.xml><?xml version="1.0" encoding="utf-8"?>
+<p:sld xmlns:a="http://schemas.openxmlformats.org/drawingml/2006/main" xmlns:r="http://schemas.openxmlformats.org/officeDocument/2006/relationships" xmlns:p="http://schemas.openxmlformats.org/presentationml/2006/main">
+  <p:cSld>
+    <p:bg>
+      <p:bgPr>
+        <a:solidFill>
+          <a:schemeClr val="bg1"/>
+        </a:solidFill>
+        <a:effectLst/>
+      </p:bgPr>
+    </p:bg>
+    <p:spTree>
+      <p:nvGrpSpPr>
+        <p:cNvPr id="1" name=""/>
+        <p:cNvGrpSpPr/>
+        <p:nvPr/>
+      </p:nvGrpSpPr>
+      <p:grpSpPr>
+        <a:xfrm>
+          <a:off x="0" y="0"/>
+          <a:ext cx="0" cy="0"/>
+          <a:chOff x="0" y="0"/>
+          <a:chExt cx="0" cy="0"/>
+        </a:xfrm>
+      </p:grpSpPr>
+      <p:sp useBgFill="1">
+        <p:nvSpPr>
+          <p:cNvPr id="9" name="Rectangle 8">
+            <a:extLst>
+              <a:ext uri="{FF2B5EF4-FFF2-40B4-BE49-F238E27FC236}">
+                <a16:creationId xmlns:a16="http://schemas.microsoft.com/office/drawing/2014/main" id="{BACC6370-2D7E-4714-9D71-7542949D7D5D}"/>
+              </a:ext>
+              <a:ext uri="{C183D7F6-B498-43B3-948B-1728B52AA6E4}">
+                <adec:decorative xmlns:adec="http://schemas.microsoft.com/office/drawing/2017/decorative" val="1"/>
+              </a:ext>
+            </a:extLst>
+          </p:cNvPr>
+          <p:cNvSpPr>
+            <a:spLocks noGrp="1" noRot="1" noChangeAspect="1" noMove="1" noResize="1" noEditPoints="1" noAdjustHandles="1" noChangeArrowheads="1" noChangeShapeType="1" noTextEdit="1"/>
+          </p:cNvSpPr>
+          <p:nvPr>
+            <p:extLst>
+              <p:ext uri="{386F3935-93C4-4BCD-93E2-E3B085C9AB24}">
+                <p16:designElem xmlns:p16="http://schemas.microsoft.com/office/powerpoint/2015/main" val="1"/>
+              </p:ext>
+            </p:extLst>
+          </p:nvPr>
+        </p:nvSpPr>
+        <p:spPr>
+          <a:xfrm>
+            <a:off x="1524000" y="0"/>
+            <a:ext cx="9144000" cy="6858000"/>
+          </a:xfrm>
+          <a:prstGeom prst="rect">
+            <a:avLst/>
+          </a:prstGeom>
+          <a:ln w="12700" cap="flat" cmpd="sng" algn="ctr">
+            <a:noFill/>
+            <a:prstDash val="solid"/>
+            <a:miter lim="800000"/>
+          </a:ln>
+          <a:effectLst/>
+          <a:extLst>
+            <a:ext uri="{91240B29-F687-4F45-9708-019B960494DF}">
+              <a14:hiddenLine xmlns:a14="http://schemas.microsoft.com/office/drawing/2010/main" w="12700" cap="flat" cmpd="sng" algn="ctr">
+                <a:solidFill>
+                  <a:schemeClr val="accent1">
+                    <a:shade val="50000"/>
+                  </a:schemeClr>
+                </a:solidFill>
+                <a:prstDash val="solid"/>
+                <a:miter lim="800000"/>
+              </a14:hiddenLine>
+            </a:ext>
+          </a:extLst>
+        </p:spPr>
+        <p:style>
+          <a:lnRef idx="2">
+            <a:schemeClr val="accent1">
+              <a:shade val="50000"/>
+            </a:schemeClr>
+          </a:lnRef>
+          <a:fillRef idx="1">
+            <a:schemeClr val="accent1"/>
+          </a:fillRef>
+          <a:effectRef idx="0">
+            <a:schemeClr val="accent1"/>
+          </a:effectRef>
+          <a:fontRef idx="minor">
+            <a:schemeClr val="lt1"/>
+          </a:fontRef>
+        </p:style>
+        <p:txBody>
+          <a:bodyPr rtlCol="0" anchor="ctr"/>
+          <a:lstStyle/>
+          <a:p>
+            <a:pPr algn="ctr"/>
+            <a:endParaRPr lang="en-US"/>
+          </a:p>
+        </p:txBody>
+      </p:sp>
+      <p:sp>
+        <p:nvSpPr>
+          <p:cNvPr id="11" name="Rectangle 10">
+            <a:extLst>
+              <a:ext uri="{FF2B5EF4-FFF2-40B4-BE49-F238E27FC236}">
+                <a16:creationId xmlns:a16="http://schemas.microsoft.com/office/drawing/2014/main" id="{F68B3F68-107C-434F-AA38-110D5EA91B85}"/>
+              </a:ext>
+              <a:ext uri="{C183D7F6-B498-43B3-948B-1728B52AA6E4}">
+                <adec:decorative xmlns:adec="http://schemas.microsoft.com/office/drawing/2017/decorative" val="1"/>
+              </a:ext>
+            </a:extLst>
+          </p:cNvPr>
+          <p:cNvSpPr>
+            <a:spLocks noGrp="1" noRot="1" noChangeAspect="1" noMove="1" noResize="1" noEditPoints="1" noAdjustHandles="1" noChangeArrowheads="1" noChangeShapeType="1" noTextEdit="1"/>
+          </p:cNvSpPr>
+          <p:nvPr>
+            <p:extLst>
+              <p:ext uri="{386F3935-93C4-4BCD-93E2-E3B085C9AB24}">
+                <p16:designElem xmlns:p16="http://schemas.microsoft.com/office/powerpoint/2015/main" val="1"/>
+              </p:ext>
+            </p:extLst>
+          </p:nvPr>
+        </p:nvSpPr>
+        <p:spPr>
+          <a:xfrm flipH="1">
+            <a:off x="1524002" y="1"/>
+            <a:ext cx="9143999" cy="1575955"/>
+          </a:xfrm>
+          <a:prstGeom prst="rect">
+            <a:avLst/>
+          </a:prstGeom>
+          <a:gradFill>
+            <a:gsLst>
+              <a:gs pos="0">
+                <a:srgbClr val="000000">
+                  <a:alpha val="96000"/>
+                </a:srgbClr>
+              </a:gs>
+              <a:gs pos="100000">
+                <a:schemeClr val="accent1">
+                  <a:lumMod val="75000"/>
+                </a:schemeClr>
+              </a:gs>
+            </a:gsLst>
+            <a:lin ang="8400000" scaled="0"/>
+          </a:gradFill>
+          <a:ln>
+            <a:noFill/>
+          </a:ln>
+        </p:spPr>
+        <p:style>
+          <a:lnRef idx="2">
+            <a:schemeClr val="accent1">
+              <a:shade val="50000"/>
+            </a:schemeClr>
+          </a:lnRef>
+          <a:fillRef idx="1">
+            <a:schemeClr val="accent1"/>
+          </a:fillRef>
+          <a:effectRef idx="0">
+            <a:schemeClr val="accent1"/>
+          </a:effectRef>
+          <a:fontRef idx="minor">
+            <a:schemeClr val="lt1"/>
+          </a:fontRef>
+        </p:style>
+        <p:txBody>
+          <a:bodyPr rtlCol="0" anchor="ctr"/>
+          <a:lstStyle/>
+          <a:p>
+            <a:pPr algn="ctr"/>
+            <a:endParaRPr lang="en-US"/>
+          </a:p>
+        </p:txBody>
+      </p:sp>
+      <p:sp>
+        <p:nvSpPr>
+          <p:cNvPr id="13" name="Rectangle 12">
+            <a:extLst>
+              <a:ext uri="{FF2B5EF4-FFF2-40B4-BE49-F238E27FC236}">
+                <a16:creationId xmlns:a16="http://schemas.microsoft.com/office/drawing/2014/main" id="{AAD0DBB9-1A4B-4391-81D4-CB19F9AB918A}"/>
+              </a:ext>
+              <a:ext uri="{C183D7F6-B498-43B3-948B-1728B52AA6E4}">
+                <adec:decorative xmlns:adec="http://schemas.microsoft.com/office/drawing/2017/decorative" val="1"/>
+              </a:ext>
+            </a:extLst>
+          </p:cNvPr>
+          <p:cNvSpPr>
+            <a:spLocks noGrp="1" noRot="1" noChangeAspect="1" noMove="1" noResize="1" noEditPoints="1" noAdjustHandles="1" noChangeArrowheads="1" noChangeShapeType="1" noTextEdit="1"/>
+          </p:cNvSpPr>
+          <p:nvPr>
+            <p:extLst>
+              <p:ext uri="{386F3935-93C4-4BCD-93E2-E3B085C9AB24}">
+                <p16:designElem xmlns:p16="http://schemas.microsoft.com/office/powerpoint/2015/main" val="1"/>
+              </p:ext>
+            </p:extLst>
+          </p:nvPr>
+        </p:nvSpPr>
+        <p:spPr>
+          <a:xfrm rot="10800000" flipH="1">
+            <a:off x="7620642" y="0"/>
+            <a:ext cx="3047358" cy="1576412"/>
+          </a:xfrm>
+          <a:prstGeom prst="rect">
+            <a:avLst/>
+          </a:prstGeom>
+          <a:gradFill>
+            <a:gsLst>
+              <a:gs pos="19000">
+                <a:schemeClr val="accent1">
+                  <a:lumMod val="50000"/>
+                  <a:alpha val="68000"/>
+                </a:schemeClr>
+              </a:gs>
+              <a:gs pos="100000">
+                <a:schemeClr val="accent1">
+                  <a:alpha val="79000"/>
+                </a:schemeClr>
+              </a:gs>
+            </a:gsLst>
+            <a:lin ang="19200000" scaled="0"/>
+          </a:gradFill>
+          <a:ln>
+            <a:noFill/>
+          </a:ln>
+        </p:spPr>
+        <p:style>
+          <a:lnRef idx="2">
+            <a:schemeClr val="accent1">
+              <a:shade val="50000"/>
+            </a:schemeClr>
+          </a:lnRef>
+          <a:fillRef idx="1">
+            <a:schemeClr val="accent1"/>
+          </a:fillRef>
+          <a:effectRef idx="0">
+            <a:schemeClr val="accent1"/>
+          </a:effectRef>
+          <a:fontRef idx="minor">
+            <a:schemeClr val="lt1"/>
+          </a:fontRef>
+        </p:style>
+        <p:txBody>
+          <a:bodyPr rtlCol="0" anchor="ctr"/>
+          <a:lstStyle/>
+          <a:p>
+            <a:pPr algn="ctr"/>
+            <a:endParaRPr lang="en-US"/>
+          </a:p>
+        </p:txBody>
+      </p:sp>
+      <p:sp>
+        <p:nvSpPr>
+          <p:cNvPr id="15" name="Rectangle 14">
+            <a:extLst>
+              <a:ext uri="{FF2B5EF4-FFF2-40B4-BE49-F238E27FC236}">
+                <a16:creationId xmlns:a16="http://schemas.microsoft.com/office/drawing/2014/main" id="{063BBA22-50EA-4C4D-BE05-F1CE4E63AA56}"/>
+              </a:ext>
+              <a:ext uri="{C183D7F6-B498-43B3-948B-1728B52AA6E4}">
+                <adec:decorative xmlns:adec="http://schemas.microsoft.com/office/drawing/2017/decorative" val="1"/>
+              </a:ext>
+            </a:extLst>
+          </p:cNvPr>
+          <p:cNvSpPr>
+            <a:spLocks noGrp="1" noRot="1" noChangeAspect="1" noMove="1" noResize="1" noEditPoints="1" noAdjustHandles="1" noChangeArrowheads="1" noChangeShapeType="1" noTextEdit="1"/>
+          </p:cNvSpPr>
+          <p:nvPr>
+            <p:extLst>
+              <p:ext uri="{386F3935-93C4-4BCD-93E2-E3B085C9AB24}">
+                <p16:designElem xmlns:p16="http://schemas.microsoft.com/office/powerpoint/2015/main" val="1"/>
+              </p:ext>
+            </p:extLst>
+          </p:nvPr>
+        </p:nvSpPr>
+        <p:spPr>
+          <a:xfrm rot="5400000">
+            <a:off x="5307777" y="-3783778"/>
+            <a:ext cx="1576446" cy="9144002"/>
+          </a:xfrm>
+          <a:prstGeom prst="rect">
+            <a:avLst/>
+          </a:prstGeom>
+          <a:gradFill>
+            <a:gsLst>
+              <a:gs pos="23000">
+                <a:schemeClr val="accent1">
+                  <a:alpha val="0"/>
+                </a:schemeClr>
+              </a:gs>
+              <a:gs pos="99000">
+                <a:srgbClr val="000000">
+                  <a:alpha val="74000"/>
+                </a:srgbClr>
+              </a:gs>
+            </a:gsLst>
+            <a:lin ang="20400000" scaled="0"/>
+          </a:gradFill>
+          <a:ln>
+            <a:noFill/>
+          </a:ln>
+        </p:spPr>
+        <p:style>
+          <a:lnRef idx="2">
+            <a:schemeClr val="accent1">
+              <a:shade val="50000"/>
+            </a:schemeClr>
+          </a:lnRef>
+          <a:fillRef idx="1">
+            <a:schemeClr val="accent1"/>
+          </a:fillRef>
+          <a:effectRef idx="0">
+            <a:schemeClr val="accent1"/>
+          </a:effectRef>
+          <a:fontRef idx="minor">
+            <a:schemeClr val="lt1"/>
+          </a:fontRef>
+        </p:style>
+        <p:txBody>
+          <a:bodyPr rtlCol="0" anchor="ctr"/>
+          <a:lstStyle/>
+          <a:p>
+            <a:pPr algn="ctr"/>
+            <a:endParaRPr lang="en-US" dirty="0"/>
+          </a:p>
+        </p:txBody>
+      </p:sp>
+      <p:sp>
+        <p:nvSpPr>
+          <p:cNvPr id="2" name="Title 1"/>
+          <p:cNvSpPr>
+            <a:spLocks noGrp="1"/>
+          </p:cNvSpPr>
+          <p:nvPr>
+            <p:ph type="title"/>
+          </p:nvPr>
+        </p:nvSpPr>
+        <p:spPr>
+          <a:xfrm>
+            <a:off x="2552698" y="348866"/>
+            <a:ext cx="5951223" cy="877729"/>
+          </a:xfrm>
+        </p:spPr>
+        <p:txBody>
+          <a:bodyPr anchor="ctr">
+            <a:normAutofit/>
+          </a:bodyPr>
+          <a:lstStyle/>
+          <a:p>
+            <a:r>
+              <a:rPr lang="en-US" sz="3500" dirty="0">
+                <a:solidFill>
+                  <a:srgbClr val="FFFFFF"/>
+                </a:solidFill>
+              </a:rPr>
+              <a:t>Value for Leadership</a:t>
+            </a:r>
+          </a:p>
+        </p:txBody>
+      </p:sp>
+      <p:graphicFrame>
+        <p:nvGraphicFramePr>
+          <p:cNvPr id="5" name="Content Placeholder 2">
+            <a:extLst>
+              <a:ext uri="{FF2B5EF4-FFF2-40B4-BE49-F238E27FC236}">
+                <a16:creationId xmlns:a16="http://schemas.microsoft.com/office/drawing/2014/main" id="{6D226046-7DB7-07C1-81B7-619F24A84D9E}"/>
+              </a:ext>
+            </a:extLst>
+          </p:cNvPr>
+          <p:cNvGraphicFramePr>
+            <a:graphicFrameLocks noGrp="1"/>
+          </p:cNvGraphicFramePr>
+          <p:nvPr>
+            <p:ph idx="1"/>
+            <p:extLst>
+              <p:ext uri="{D42A27DB-BD31-4B8C-83A1-F6EECF244321}">
+                <p14:modId xmlns:p14="http://schemas.microsoft.com/office/powerpoint/2010/main" val="3566384662"/>
+              </p:ext>
+            </p:extLst>
+          </p:nvPr>
+        </p:nvGraphicFramePr>
+        <p:xfrm>
+          <a:off x="2007043" y="2112580"/>
+          <a:ext cx="8195871" cy="4192805"/>
+        </p:xfrm>
+        <a:graphic>
+          <a:graphicData uri="http://schemas.openxmlformats.org/drawingml/2006/diagram">
+            <dgm:relIds xmlns:dgm="http://schemas.openxmlformats.org/drawingml/2006/diagram" xmlns:r="http://schemas.openxmlformats.org/officeDocument/2006/relationships" r:dm="rId3" r:lo="rId4" r:qs="rId5" r:cs="rId6"/>
+          </a:graphicData>
+        </a:graphic>
+      </p:graphicFrame>
+      <p:pic>
+        <p:nvPicPr>
+          <p:cNvPr id="4" name="Picture Placeholder 8">
+            <a:extLst>
+              <a:ext uri="{FF2B5EF4-FFF2-40B4-BE49-F238E27FC236}">
+                <a16:creationId xmlns:a16="http://schemas.microsoft.com/office/drawing/2014/main" id="{E55CC28C-F057-2108-F90A-53C7DE73D9AC}"/>
+              </a:ext>
+            </a:extLst>
+          </p:cNvPr>
+          <p:cNvPicPr>
+            <a:picLocks noChangeAspect="1"/>
+          </p:cNvPicPr>
+          <p:nvPr>
+            <p:custDataLst>
+              <p:tags r:id="rId1"/>
+            </p:custDataLst>
+          </p:nvPr>
+        </p:nvPicPr>
+        <p:blipFill rotWithShape="1">
+          <a:blip r:embed="rId8" cstate="screen">
+            <a:extLst>
+              <a:ext uri="{28A0092B-C50C-407E-A947-70E740481C1C}">
+                <a14:useLocalDpi xmlns:a14="http://schemas.microsoft.com/office/drawing/2010/main"/>
+              </a:ext>
+            </a:extLst>
+          </a:blip>
+          <a:srcRect l="4761" r="4761"/>
+          <a:stretch>
+            <a:fillRect/>
+          </a:stretch>
+        </p:blipFill>
+        <p:spPr>
+          <a:xfrm>
+            <a:off x="1524020" y="6"/>
+            <a:ext cx="1605261" cy="1559957"/>
+          </a:xfrm>
+          <a:prstGeom prst="rect">
+            <a:avLst/>
+          </a:prstGeom>
+          <a:ln>
+            <a:noFill/>
+          </a:ln>
+          <a:effectLst>
+            <a:softEdge rad="112500"/>
+          </a:effectLst>
+        </p:spPr>
+      </p:pic>
+    </p:spTree>
+  </p:cSld>
+  <p:clrMapOvr>
+    <a:masterClrMapping/>
+  </p:clrMapOvr>
+</p:sld>
+</file>
+
 <file path=ppt/slides/slide2.xml><?xml version="1.0" encoding="utf-8"?>
 <p:sld xmlns:a="http://schemas.openxmlformats.org/drawingml/2006/main" xmlns:r="http://schemas.openxmlformats.org/officeDocument/2006/relationships" xmlns:p="http://schemas.openxmlformats.org/presentationml/2006/main">
   <p:cSld>
@@ -24081,7 +24528,7 @@
         </p:nvSpPr>
         <p:spPr>
           <a:xfrm>
-            <a:off x="0" y="0"/>
+            <a:off x="1524000" y="0"/>
             <a:ext cx="9144000" cy="6858000"/>
           </a:xfrm>
           <a:prstGeom prst="rect">
@@ -24157,7 +24604,7 @@
         </p:nvSpPr>
         <p:spPr>
           <a:xfrm flipH="1">
-            <a:off x="1" y="0"/>
+            <a:off x="1524002" y="1"/>
             <a:ext cx="9143999" cy="1575955"/>
           </a:xfrm>
           <a:prstGeom prst="rect">
@@ -24232,7 +24679,7 @@
         </p:nvSpPr>
         <p:spPr>
           <a:xfrm rot="10800000" flipH="1">
-            <a:off x="6096642" y="0"/>
+            <a:off x="7620642" y="0"/>
             <a:ext cx="3047358" cy="1576412"/>
           </a:xfrm>
           <a:prstGeom prst="rect">
@@ -24308,7 +24755,7 @@
         </p:nvSpPr>
         <p:spPr>
           <a:xfrm rot="5400000">
-            <a:off x="3783777" y="-3783778"/>
+            <a:off x="5307777" y="-3783778"/>
             <a:ext cx="1576446" cy="9144002"/>
           </a:xfrm>
           <a:prstGeom prst="rect">
@@ -24370,7 +24817,7 @@
         </p:nvSpPr>
         <p:spPr>
           <a:xfrm>
-            <a:off x="1747519" y="348865"/>
+            <a:off x="3271520" y="348866"/>
             <a:ext cx="4349121" cy="877729"/>
           </a:xfrm>
         </p:spPr>
@@ -24424,7 +24871,7 @@
         </p:blipFill>
         <p:spPr>
           <a:xfrm>
-            <a:off x="19" y="5"/>
+            <a:off x="1524020" y="6"/>
             <a:ext cx="1605261" cy="1559957"/>
           </a:xfrm>
           <a:prstGeom prst="rect">
@@ -24456,7 +24903,7 @@
         </p:nvSpPr>
         <p:spPr>
           <a:xfrm>
-            <a:off x="314325" y="5972810"/>
+            <a:off x="1838326" y="5972810"/>
             <a:ext cx="1769935" cy="190500"/>
           </a:xfrm>
           <a:prstGeom prst="rect">
@@ -24519,7 +24966,7 @@
         </p:nvSpPr>
         <p:spPr>
           <a:xfrm>
-            <a:off x="314326" y="3836194"/>
+            <a:off x="1838327" y="3836194"/>
             <a:ext cx="1641541" cy="411480"/>
           </a:xfrm>
           <a:prstGeom prst="rect">
@@ -24738,7 +25185,7 @@
         </p:nvSpPr>
         <p:spPr>
           <a:xfrm>
-            <a:off x="2034790" y="3836194"/>
+            <a:off x="3558791" y="3836194"/>
             <a:ext cx="1641541" cy="411480"/>
           </a:xfrm>
           <a:prstGeom prst="rect">
@@ -24957,7 +25404,7 @@
         </p:nvSpPr>
         <p:spPr>
           <a:xfrm>
-            <a:off x="3752328" y="3836194"/>
+            <a:off x="5276329" y="3836194"/>
             <a:ext cx="1641541" cy="411480"/>
           </a:xfrm>
           <a:prstGeom prst="rect">
@@ -25176,7 +25623,7 @@
         </p:nvSpPr>
         <p:spPr>
           <a:xfrm>
-            <a:off x="5469866" y="3836194"/>
+            <a:off x="6993867" y="3836194"/>
             <a:ext cx="1641541" cy="411480"/>
           </a:xfrm>
           <a:prstGeom prst="rect">
@@ -25395,7 +25842,7 @@
         </p:nvSpPr>
         <p:spPr>
           <a:xfrm>
-            <a:off x="7187404" y="3836194"/>
+            <a:off x="8711405" y="3836194"/>
             <a:ext cx="1641541" cy="411480"/>
           </a:xfrm>
           <a:prstGeom prst="rect">
@@ -25589,7 +26036,7 @@
                 </a:solidFill>
                 <a:latin typeface="Aptos Display" panose="02110004020202020204"/>
               </a:rPr>
-              <a:t>Karim</a:t>
+              <a:t>Karim AbdelSalam</a:t>
             </a:r>
           </a:p>
         </p:txBody>
@@ -25616,7 +26063,7 @@
         </p:blipFill>
         <p:spPr>
           <a:xfrm>
-            <a:off x="7180038" y="2541867"/>
+            <a:off x="8704038" y="2541867"/>
             <a:ext cx="1097280" cy="1097280"/>
           </a:xfrm>
           <a:prstGeom prst="roundRect">
@@ -25672,7 +26119,7 @@
         </p:blipFill>
         <p:spPr>
           <a:xfrm>
-            <a:off x="270120" y="2541867"/>
+            <a:off x="1794120" y="2541867"/>
             <a:ext cx="1097280" cy="1097280"/>
           </a:xfrm>
           <a:prstGeom prst="roundRect">
@@ -25728,7 +26175,7 @@
         </p:blipFill>
         <p:spPr>
           <a:xfrm>
-            <a:off x="5461315" y="2541867"/>
+            <a:off x="6985315" y="2541867"/>
             <a:ext cx="1097280" cy="1097280"/>
           </a:xfrm>
           <a:prstGeom prst="roundRect">
@@ -25785,7 +26232,7 @@
         </p:blipFill>
         <p:spPr>
           <a:xfrm>
-            <a:off x="3701030" y="2564110"/>
+            <a:off x="5225030" y="2564110"/>
             <a:ext cx="1097280" cy="1097280"/>
           </a:xfrm>
           <a:prstGeom prst="roundRect">
@@ -25841,7 +26288,7 @@
         </p:blipFill>
         <p:spPr>
           <a:xfrm>
-            <a:off x="1999639" y="2541867"/>
+            <a:off x="3523639" y="2541867"/>
             <a:ext cx="1097280" cy="1097280"/>
           </a:xfrm>
           <a:prstGeom prst="roundRect">
@@ -25939,7 +26386,7 @@
         </p:nvSpPr>
         <p:spPr>
           <a:xfrm>
-            <a:off x="0" y="0"/>
+            <a:off x="1524000" y="0"/>
             <a:ext cx="9144000" cy="6858000"/>
           </a:xfrm>
           <a:prstGeom prst="rect">
@@ -26015,7 +26462,7 @@
         </p:nvSpPr>
         <p:spPr>
           <a:xfrm flipH="1">
-            <a:off x="1" y="0"/>
+            <a:off x="1524002" y="1"/>
             <a:ext cx="9143999" cy="1575955"/>
           </a:xfrm>
           <a:prstGeom prst="rect">
@@ -26090,7 +26537,7 @@
         </p:nvSpPr>
         <p:spPr>
           <a:xfrm rot="10800000" flipH="1">
-            <a:off x="6096642" y="0"/>
+            <a:off x="7620642" y="0"/>
             <a:ext cx="3047358" cy="1576412"/>
           </a:xfrm>
           <a:prstGeom prst="rect">
@@ -26166,7 +26613,7 @@
         </p:nvSpPr>
         <p:spPr>
           <a:xfrm rot="5400000">
-            <a:off x="3783777" y="-3783778"/>
+            <a:off x="5307777" y="-3783778"/>
             <a:ext cx="1576446" cy="9144002"/>
           </a:xfrm>
           <a:prstGeom prst="rect">
@@ -26234,7 +26681,7 @@
         </p:nvSpPr>
         <p:spPr>
           <a:xfrm>
-            <a:off x="1747519" y="348865"/>
+            <a:off x="3271520" y="348866"/>
             <a:ext cx="4349121" cy="877729"/>
           </a:xfrm>
         </p:spPr>
@@ -26272,7 +26719,7 @@
           </p:nvPr>
         </p:nvGraphicFramePr>
         <p:xfrm>
-          <a:off x="483042" y="2112579"/>
+          <a:off x="2007043" y="2112580"/>
           <a:ext cx="8195871" cy="4192805"/>
         </p:xfrm>
         <a:graphic>
@@ -26314,7 +26761,7 @@
         </p:blipFill>
         <p:spPr>
           <a:xfrm>
-            <a:off x="19" y="5"/>
+            <a:off x="1524020" y="6"/>
             <a:ext cx="1605261" cy="1559957"/>
           </a:xfrm>
           <a:prstGeom prst="rect">
@@ -26391,7 +26838,7 @@
         </p:nvSpPr>
         <p:spPr>
           <a:xfrm>
-            <a:off x="0" y="0"/>
+            <a:off x="1524000" y="0"/>
             <a:ext cx="9144000" cy="6858000"/>
           </a:xfrm>
           <a:prstGeom prst="rect">
@@ -26467,7 +26914,7 @@
         </p:nvSpPr>
         <p:spPr>
           <a:xfrm flipH="1">
-            <a:off x="1" y="0"/>
+            <a:off x="1524002" y="1"/>
             <a:ext cx="9143999" cy="1575955"/>
           </a:xfrm>
           <a:prstGeom prst="rect">
@@ -26542,7 +26989,7 @@
         </p:nvSpPr>
         <p:spPr>
           <a:xfrm rot="10800000" flipH="1">
-            <a:off x="6096642" y="0"/>
+            <a:off x="7620642" y="0"/>
             <a:ext cx="3047358" cy="1576412"/>
           </a:xfrm>
           <a:prstGeom prst="rect">
@@ -26618,7 +27065,7 @@
         </p:nvSpPr>
         <p:spPr>
           <a:xfrm rot="5400000">
-            <a:off x="3783777" y="-3783778"/>
+            <a:off x="5307777" y="-3783778"/>
             <a:ext cx="1576446" cy="9144002"/>
           </a:xfrm>
           <a:prstGeom prst="rect">
@@ -26680,7 +27127,7 @@
         </p:nvSpPr>
         <p:spPr>
           <a:xfrm>
-            <a:off x="1028697" y="348865"/>
+            <a:off x="2552698" y="348866"/>
             <a:ext cx="6946903" cy="877729"/>
           </a:xfrm>
         </p:spPr>
@@ -26723,7 +27170,7 @@
           </p:nvPr>
         </p:nvGraphicFramePr>
         <p:xfrm>
-          <a:off x="483042" y="2112579"/>
+          <a:off x="2007043" y="2112580"/>
           <a:ext cx="8195871" cy="4192805"/>
         </p:xfrm>
         <a:graphic>
@@ -26765,7 +27212,7 @@
         </p:blipFill>
         <p:spPr>
           <a:xfrm>
-            <a:off x="19" y="5"/>
+            <a:off x="1524020" y="6"/>
             <a:ext cx="1605261" cy="1559957"/>
           </a:xfrm>
           <a:prstGeom prst="rect">
@@ -26843,7 +27290,7 @@
         </p:nvSpPr>
         <p:spPr>
           <a:xfrm>
-            <a:off x="10713" y="0"/>
+            <a:off x="1534713" y="0"/>
             <a:ext cx="9144000" cy="6858000"/>
           </a:xfrm>
           <a:prstGeom prst="rect">
@@ -26919,7 +27366,7 @@
         </p:nvGrpSpPr>
         <p:grpSpPr>
           <a:xfrm>
-            <a:off x="0" y="0"/>
+            <a:off x="1524000" y="0"/>
             <a:ext cx="9149272" cy="1576446"/>
             <a:chOff x="0" y="0"/>
             <a:chExt cx="12192002" cy="1576446"/>
@@ -27164,7 +27611,7 @@
         </p:nvSpPr>
         <p:spPr>
           <a:xfrm>
-            <a:off x="2458721" y="319314"/>
+            <a:off x="3982721" y="319315"/>
             <a:ext cx="3048000" cy="1030515"/>
           </a:xfrm>
         </p:spPr>
@@ -27219,7 +27666,7 @@
         </p:blipFill>
         <p:spPr>
           <a:xfrm>
-            <a:off x="4872054" y="1656627"/>
+            <a:off x="6396054" y="1656628"/>
             <a:ext cx="3936668" cy="3028691"/>
           </a:xfrm>
           <a:prstGeom prst="rect">
@@ -27256,7 +27703,7 @@
         </p:blipFill>
         <p:spPr>
           <a:xfrm>
-            <a:off x="335280" y="1656627"/>
+            <a:off x="1859280" y="1656628"/>
             <a:ext cx="3936668" cy="3041207"/>
           </a:xfrm>
           <a:prstGeom prst="rect">
@@ -27311,7 +27758,7 @@
         </p:blipFill>
         <p:spPr>
           <a:xfrm>
-            <a:off x="19" y="5"/>
+            <a:off x="1524020" y="6"/>
             <a:ext cx="1605261" cy="1559957"/>
           </a:xfrm>
           <a:prstGeom prst="rect">
@@ -27344,7 +27791,7 @@
           </p:nvPr>
         </p:nvGraphicFramePr>
         <p:xfrm>
-          <a:off x="-91915" y="4666091"/>
+          <a:off x="1432086" y="4666091"/>
           <a:ext cx="9154713" cy="2160166"/>
         </p:xfrm>
         <a:graphic>
@@ -27422,7 +27869,7 @@
         </p:nvSpPr>
         <p:spPr>
           <a:xfrm>
-            <a:off x="10713" y="0"/>
+            <a:off x="1534713" y="0"/>
             <a:ext cx="9144000" cy="6858000"/>
           </a:xfrm>
           <a:prstGeom prst="rect">
@@ -27468,36 +27915,14 @@
           <a:bodyPr rtlCol="0" anchor="ctr"/>
           <a:lstStyle/>
           <a:p>
-            <a:pPr marL="0" marR="0" lvl="0" indent="0" algn="ctr" defTabSz="457200" rtl="0" eaLnBrk="1" fontAlgn="auto" latinLnBrk="0" hangingPunct="1">
-              <a:lnSpc>
-                <a:spcPct val="100000"/>
-              </a:lnSpc>
-              <a:spcBef>
-                <a:spcPts val="0"/>
-              </a:spcBef>
-              <a:spcAft>
-                <a:spcPts val="0"/>
-              </a:spcAft>
-              <a:buClrTx/>
-              <a:buSzTx/>
-              <a:buFontTx/>
-              <a:buNone/>
-              <a:tabLst/>
+            <a:pPr algn="ctr">
               <a:defRPr/>
             </a:pPr>
-            <a:endParaRPr kumimoji="0" lang="en-US" sz="1800" b="0" i="0" u="none" strike="noStrike" kern="1200" cap="none" spc="0" normalizeH="0" baseline="0" noProof="0">
-              <a:ln>
-                <a:noFill/>
-              </a:ln>
+            <a:endParaRPr lang="en-US">
               <a:solidFill>
                 <a:prstClr val="white"/>
               </a:solidFill>
-              <a:effectLst/>
-              <a:uLnTx/>
-              <a:uFillTx/>
               <a:latin typeface="Calibri"/>
-              <a:ea typeface="+mn-ea"/>
-              <a:cs typeface="+mn-cs"/>
             </a:endParaRPr>
           </a:p>
         </p:txBody>
@@ -27527,7 +27952,7 @@
         </p:nvGrpSpPr>
         <p:grpSpPr>
           <a:xfrm>
-            <a:off x="0" y="0"/>
+            <a:off x="1524000" y="0"/>
             <a:ext cx="9149272" cy="1576446"/>
             <a:chOff x="0" y="0"/>
             <a:chExt cx="12192002" cy="1576446"/>
@@ -27601,36 +28026,14 @@
             <a:bodyPr rtlCol="0" anchor="ctr"/>
             <a:lstStyle/>
             <a:p>
-              <a:pPr marL="0" marR="0" lvl="0" indent="0" algn="ctr" defTabSz="457200" rtl="0" eaLnBrk="1" fontAlgn="auto" latinLnBrk="0" hangingPunct="1">
-                <a:lnSpc>
-                  <a:spcPct val="100000"/>
-                </a:lnSpc>
-                <a:spcBef>
-                  <a:spcPts val="0"/>
-                </a:spcBef>
-                <a:spcAft>
-                  <a:spcPts val="0"/>
-                </a:spcAft>
-                <a:buClrTx/>
-                <a:buSzTx/>
-                <a:buFontTx/>
-                <a:buNone/>
-                <a:tabLst/>
+              <a:pPr algn="ctr">
                 <a:defRPr/>
               </a:pPr>
-              <a:endParaRPr kumimoji="0" lang="en-US" sz="1800" b="0" i="0" u="none" strike="noStrike" kern="1200" cap="none" spc="0" normalizeH="0" baseline="0" noProof="0">
-                <a:ln>
-                  <a:noFill/>
-                </a:ln>
+              <a:endParaRPr lang="en-US">
                 <a:solidFill>
                   <a:prstClr val="white"/>
                 </a:solidFill>
-                <a:effectLst/>
-                <a:uLnTx/>
-                <a:uFillTx/>
                 <a:latin typeface="Calibri"/>
-                <a:ea typeface="+mn-ea"/>
-                <a:cs typeface="+mn-cs"/>
               </a:endParaRPr>
             </a:p>
           </p:txBody>
@@ -27703,36 +28106,14 @@
             <a:bodyPr rtlCol="0" anchor="ctr"/>
             <a:lstStyle/>
             <a:p>
-              <a:pPr marL="0" marR="0" lvl="0" indent="0" algn="ctr" defTabSz="457200" rtl="0" eaLnBrk="1" fontAlgn="auto" latinLnBrk="0" hangingPunct="1">
-                <a:lnSpc>
-                  <a:spcPct val="100000"/>
-                </a:lnSpc>
-                <a:spcBef>
-                  <a:spcPts val="0"/>
-                </a:spcBef>
-                <a:spcAft>
-                  <a:spcPts val="0"/>
-                </a:spcAft>
-                <a:buClrTx/>
-                <a:buSzTx/>
-                <a:buFontTx/>
-                <a:buNone/>
-                <a:tabLst/>
+              <a:pPr algn="ctr">
                 <a:defRPr/>
               </a:pPr>
-              <a:endParaRPr kumimoji="0" lang="en-US" sz="1800" b="0" i="0" u="none" strike="noStrike" kern="1200" cap="none" spc="0" normalizeH="0" baseline="0" noProof="0" dirty="0">
-                <a:ln>
-                  <a:noFill/>
-                </a:ln>
+              <a:endParaRPr lang="en-US" dirty="0">
                 <a:solidFill>
                   <a:prstClr val="white"/>
                 </a:solidFill>
-                <a:effectLst/>
-                <a:uLnTx/>
-                <a:uFillTx/>
                 <a:latin typeface="Calibri"/>
-                <a:ea typeface="+mn-ea"/>
-                <a:cs typeface="+mn-cs"/>
               </a:endParaRPr>
             </a:p>
           </p:txBody>
@@ -27806,36 +28187,14 @@
             <a:bodyPr rtlCol="0" anchor="ctr"/>
             <a:lstStyle/>
             <a:p>
-              <a:pPr marL="0" marR="0" lvl="0" indent="0" algn="ctr" defTabSz="457200" rtl="0" eaLnBrk="1" fontAlgn="auto" latinLnBrk="0" hangingPunct="1">
-                <a:lnSpc>
-                  <a:spcPct val="100000"/>
-                </a:lnSpc>
-                <a:spcBef>
-                  <a:spcPts val="0"/>
-                </a:spcBef>
-                <a:spcAft>
-                  <a:spcPts val="0"/>
-                </a:spcAft>
-                <a:buClrTx/>
-                <a:buSzTx/>
-                <a:buFontTx/>
-                <a:buNone/>
-                <a:tabLst/>
+              <a:pPr algn="ctr">
                 <a:defRPr/>
               </a:pPr>
-              <a:endParaRPr kumimoji="0" lang="en-US" sz="1800" b="0" i="0" u="none" strike="noStrike" kern="1200" cap="none" spc="0" normalizeH="0" baseline="0" noProof="0">
-                <a:ln>
-                  <a:noFill/>
-                </a:ln>
+              <a:endParaRPr lang="en-US">
                 <a:solidFill>
                   <a:prstClr val="white"/>
                 </a:solidFill>
-                <a:effectLst/>
-                <a:uLnTx/>
-                <a:uFillTx/>
                 <a:latin typeface="Calibri"/>
-                <a:ea typeface="+mn-ea"/>
-                <a:cs typeface="+mn-cs"/>
               </a:endParaRPr>
             </a:p>
           </p:txBody>
@@ -27859,7 +28218,7 @@
         </p:nvSpPr>
         <p:spPr>
           <a:xfrm>
-            <a:off x="2458721" y="319314"/>
+            <a:off x="3982721" y="319315"/>
             <a:ext cx="3048000" cy="1030515"/>
           </a:xfrm>
         </p:spPr>
@@ -27918,7 +28277,7 @@
         </p:blipFill>
         <p:spPr>
           <a:xfrm>
-            <a:off x="19" y="5"/>
+            <a:off x="1524020" y="6"/>
             <a:ext cx="1605261" cy="1559957"/>
           </a:xfrm>
           <a:prstGeom prst="rect">
@@ -27961,7 +28320,7 @@
         </p:blipFill>
         <p:spPr>
           <a:xfrm>
-            <a:off x="3291840" y="1559962"/>
+            <a:off x="4815840" y="1559962"/>
             <a:ext cx="5800808" cy="5086546"/>
           </a:xfrm>
           <a:prstGeom prst="rect">
@@ -27989,7 +28348,7 @@
         </p:nvSpPr>
         <p:spPr>
           <a:xfrm>
-            <a:off x="152400" y="2586900"/>
+            <a:off x="1676401" y="2586901"/>
             <a:ext cx="3077375" cy="2584539"/>
           </a:xfrm>
           <a:prstGeom prst="rect">
@@ -28170,34 +28529,15 @@
             </a:lvl9pPr>
           </a:lstStyle>
           <a:p>
-            <a:pPr marL="11113" marR="0" lvl="0" indent="0" algn="l" defTabSz="914354" rtl="0" eaLnBrk="1" fontAlgn="auto" latinLnBrk="0" hangingPunct="1">
+            <a:pPr marL="11113" indent="0">
               <a:lnSpc>
                 <a:spcPct val="114000"/>
               </a:lnSpc>
-              <a:spcBef>
-                <a:spcPts val="1200"/>
-              </a:spcBef>
-              <a:spcAft>
-                <a:spcPts val="0"/>
-              </a:spcAft>
-              <a:buClrTx/>
-              <a:buSzTx/>
-              <a:buFont typeface="Arial" panose="020B0604020202020204" pitchFamily="34" charset="0"/>
               <a:buNone/>
-              <a:tabLst/>
               <a:defRPr/>
             </a:pPr>
             <a:r>
-              <a:rPr kumimoji="0" lang="en-US" sz="2000" b="0" i="0" u="none" strike="noStrike" kern="1200" cap="none" spc="0" normalizeH="0" baseline="0" noProof="1">
-                <a:ln>
-                  <a:noFill/>
-                </a:ln>
-                <a:effectLst/>
-                <a:uLnTx/>
-                <a:uFillTx/>
-                <a:ea typeface="+mn-ea"/>
-                <a:cs typeface="Arial" panose="020B0604020202020204" pitchFamily="34" charset="0"/>
-              </a:rPr>
+              <a:rPr lang="en-US" sz="2000" noProof="1"/>
               <a:t>Implemented a star schema with fact tables for journeys and revenue, and dimension tables for stations, routes, and dates to optimize query performance and reporting.</a:t>
             </a:r>
           </a:p>
@@ -28223,7 +28563,7 @@
         </p:nvSpPr>
         <p:spPr>
           <a:xfrm>
-            <a:off x="419101" y="2179469"/>
+            <a:off x="1943101" y="2179469"/>
             <a:ext cx="2608580" cy="407432"/>
           </a:xfrm>
           <a:prstGeom prst="rect">
@@ -28404,34 +28744,15 @@
             </a:lvl9pPr>
           </a:lstStyle>
           <a:p>
-            <a:pPr marL="0" marR="0" lvl="0" indent="0" algn="l" defTabSz="914354" rtl="0" eaLnBrk="1" fontAlgn="auto" latinLnBrk="0" hangingPunct="1">
+            <a:pPr>
               <a:lnSpc>
                 <a:spcPct val="100000"/>
               </a:lnSpc>
-              <a:spcBef>
-                <a:spcPts val="1200"/>
-              </a:spcBef>
-              <a:spcAft>
-                <a:spcPts val="0"/>
-              </a:spcAft>
-              <a:buClrTx/>
-              <a:buSzTx/>
-              <a:buFont typeface="Arial" panose="020B0604020202020204" pitchFamily="34" charset="0"/>
-              <a:buNone/>
-              <a:tabLst/>
               <a:defRPr/>
             </a:pPr>
             <a:r>
-              <a:rPr kumimoji="0" lang="en-US" sz="2400" b="1" i="0" u="none" strike="noStrike" kern="1200" cap="none" spc="0" normalizeH="0" baseline="0" noProof="1">
-                <a:ln>
-                  <a:noFill/>
-                </a:ln>
-                <a:effectLst/>
-                <a:uLnTx/>
-                <a:uFillTx/>
+              <a:rPr lang="en-US" sz="2400" noProof="1">
                 <a:latin typeface="Aptos Display" panose="02110004020202020204"/>
-                <a:ea typeface="+mn-ea"/>
-                <a:cs typeface="Arial" panose="020B0604020202020204" pitchFamily="34" charset="0"/>
               </a:rPr>
               <a:t>Modeling Approach</a:t>
             </a:r>
@@ -28452,6 +28773,90 @@
 </file>
 
 <file path=ppt/slides/slide7.xml><?xml version="1.0" encoding="utf-8"?>
+<p:sld xmlns:a="http://schemas.openxmlformats.org/drawingml/2006/main" xmlns:r="http://schemas.openxmlformats.org/officeDocument/2006/relationships" xmlns:p="http://schemas.openxmlformats.org/presentationml/2006/main">
+  <p:cSld>
+    <p:spTree>
+      <p:nvGrpSpPr>
+        <p:cNvPr id="1" name=""/>
+        <p:cNvGrpSpPr/>
+        <p:nvPr/>
+      </p:nvGrpSpPr>
+      <p:grpSpPr>
+        <a:xfrm>
+          <a:off x="0" y="0"/>
+          <a:ext cx="0" cy="0"/>
+          <a:chOff x="0" y="0"/>
+          <a:chExt cx="0" cy="0"/>
+        </a:xfrm>
+      </p:grpSpPr>
+      <mc:AlternateContent xmlns:mc="http://schemas.openxmlformats.org/markup-compatibility/2006">
+        <mc:Choice xmlns:we="http://schemas.microsoft.com/office/webextensions/webextension/2010/11" xmlns:pca="http://schemas.microsoft.com/office/powerpoint/2013/contentapp" Requires="we pca">
+          <p:graphicFrame>
+            <p:nvGraphicFramePr>
+              <p:cNvPr id="2" name="Add-in" descr="Add-in content for Microsoft Power BI."/>
+              <p:cNvGraphicFramePr>
+                <a:graphicFrameLocks noGrp="1"/>
+              </p:cNvGraphicFramePr>
+              <p:nvPr>
+                <p:extLst>
+                  <p:ext uri="{D42A27DB-BD31-4B8C-83A1-F6EECF244321}">
+                    <p14:modId xmlns:p14="http://schemas.microsoft.com/office/powerpoint/2010/main" val="1416743559"/>
+                  </p:ext>
+                </p:extLst>
+              </p:nvPr>
+            </p:nvGraphicFramePr>
+            <p:xfrm>
+              <a:off x="0" y="0"/>
+              <a:ext cx="12192000" cy="6858000"/>
+            </p:xfrm>
+            <a:graphic>
+              <a:graphicData uri="http://schemas.microsoft.com/office/webextensions/webextension/2010/11">
+                <we:webextensionref xmlns:we="http://schemas.microsoft.com/office/webextensions/webextension/2010/11" xmlns:r="http://schemas.openxmlformats.org/officeDocument/2006/relationships" r:id="rId2"/>
+              </a:graphicData>
+            </a:graphic>
+          </p:graphicFrame>
+        </mc:Choice>
+        <mc:Fallback>
+          <p:pic>
+            <p:nvPicPr>
+              <p:cNvPr id="2" name="Add-in" descr="Add-in content for Microsoft Power BI."/>
+              <p:cNvPicPr>
+                <a:picLocks noGrp="1" noRot="1" noChangeAspect="1" noMove="1" noResize="1" noEditPoints="1" noAdjustHandles="1" noChangeArrowheads="1" noChangeShapeType="1"/>
+              </p:cNvPicPr>
+              <p:nvPr/>
+            </p:nvPicPr>
+            <p:blipFill>
+              <a:blip r:embed="rId3"/>
+              <a:stretch>
+                <a:fillRect/>
+              </a:stretch>
+            </p:blipFill>
+            <p:spPr>
+              <a:xfrm>
+                <a:off x="0" y="0"/>
+                <a:ext cx="12192000" cy="6858000"/>
+              </a:xfrm>
+              <a:prstGeom prst="rect">
+                <a:avLst/>
+              </a:prstGeom>
+            </p:spPr>
+          </p:pic>
+        </mc:Fallback>
+      </mc:AlternateContent>
+    </p:spTree>
+    <p:extLst>
+      <p:ext uri="{BB962C8B-B14F-4D97-AF65-F5344CB8AC3E}">
+        <p14:creationId xmlns:p14="http://schemas.microsoft.com/office/powerpoint/2010/main" val="3211859542"/>
+      </p:ext>
+    </p:extLst>
+  </p:cSld>
+  <p:clrMapOvr>
+    <a:masterClrMapping/>
+  </p:clrMapOvr>
+</p:sld>
+</file>
+
+<file path=ppt/slides/slide8.xml><?xml version="1.0" encoding="utf-8"?>
 <p:sld xmlns:a="http://schemas.openxmlformats.org/drawingml/2006/main" xmlns:r="http://schemas.openxmlformats.org/officeDocument/2006/relationships" xmlns:p="http://schemas.openxmlformats.org/presentationml/2006/main">
   <p:cSld>
     <p:bg>
@@ -28501,7 +28906,7 @@
         </p:nvSpPr>
         <p:spPr>
           <a:xfrm>
-            <a:off x="0" y="0"/>
+            <a:off x="1524000" y="0"/>
             <a:ext cx="9144000" cy="6858000"/>
           </a:xfrm>
           <a:prstGeom prst="rect">
@@ -28577,7 +28982,7 @@
         </p:nvSpPr>
         <p:spPr>
           <a:xfrm flipH="1">
-            <a:off x="1" y="0"/>
+            <a:off x="1524002" y="1"/>
             <a:ext cx="9143999" cy="1575955"/>
           </a:xfrm>
           <a:prstGeom prst="rect">
@@ -28652,7 +29057,7 @@
         </p:nvSpPr>
         <p:spPr>
           <a:xfrm rot="10800000" flipH="1">
-            <a:off x="6096642" y="0"/>
+            <a:off x="7620642" y="0"/>
             <a:ext cx="3047358" cy="1576412"/>
           </a:xfrm>
           <a:prstGeom prst="rect">
@@ -28728,7 +29133,7 @@
         </p:nvSpPr>
         <p:spPr>
           <a:xfrm rot="5400000">
-            <a:off x="3783777" y="-3783778"/>
+            <a:off x="5307777" y="-3783778"/>
             <a:ext cx="1576446" cy="9144002"/>
           </a:xfrm>
           <a:prstGeom prst="rect">
@@ -28790,7 +29195,7 @@
         </p:nvSpPr>
         <p:spPr>
           <a:xfrm>
-            <a:off x="1028697" y="348865"/>
+            <a:off x="2552698" y="348866"/>
             <a:ext cx="5880103" cy="877729"/>
           </a:xfrm>
         </p:spPr>
@@ -28833,7 +29238,7 @@
           </p:nvPr>
         </p:nvGraphicFramePr>
         <p:xfrm>
-          <a:off x="483042" y="1563939"/>
+          <a:off x="2007043" y="1563940"/>
           <a:ext cx="8195871" cy="4192805"/>
         </p:xfrm>
         <a:graphic>
@@ -28875,7 +29280,7 @@
         </p:blipFill>
         <p:spPr>
           <a:xfrm>
-            <a:off x="19" y="5"/>
+            <a:off x="1524020" y="6"/>
             <a:ext cx="1605261" cy="1559957"/>
           </a:xfrm>
           <a:prstGeom prst="rect">
@@ -28897,7 +29302,7 @@
 </p:sld>
 </file>
 
-<file path=ppt/slides/slide8.xml><?xml version="1.0" encoding="utf-8"?>
+<file path=ppt/slides/slide9.xml><?xml version="1.0" encoding="utf-8"?>
 <p:sld xmlns:a="http://schemas.openxmlformats.org/drawingml/2006/main" xmlns:r="http://schemas.openxmlformats.org/officeDocument/2006/relationships" xmlns:p="http://schemas.openxmlformats.org/presentationml/2006/main">
   <p:cSld>
     <p:bg>
@@ -28947,7 +29352,7 @@
         </p:nvSpPr>
         <p:spPr>
           <a:xfrm>
-            <a:off x="0" y="0"/>
+            <a:off x="1524000" y="0"/>
             <a:ext cx="9144000" cy="6858000"/>
           </a:xfrm>
           <a:prstGeom prst="rect">
@@ -29023,7 +29428,7 @@
         </p:nvSpPr>
         <p:spPr>
           <a:xfrm flipH="1">
-            <a:off x="1" y="0"/>
+            <a:off x="1524002" y="1"/>
             <a:ext cx="9143999" cy="1575955"/>
           </a:xfrm>
           <a:prstGeom prst="rect">
@@ -29098,7 +29503,7 @@
         </p:nvSpPr>
         <p:spPr>
           <a:xfrm rot="10800000" flipH="1">
-            <a:off x="6096642" y="0"/>
+            <a:off x="7620642" y="0"/>
             <a:ext cx="3047358" cy="1576412"/>
           </a:xfrm>
           <a:prstGeom prst="rect">
@@ -29174,7 +29579,7 @@
         </p:nvSpPr>
         <p:spPr>
           <a:xfrm rot="5400000">
-            <a:off x="3783777" y="-3783778"/>
+            <a:off x="5307777" y="-3783778"/>
             <a:ext cx="1576446" cy="9144002"/>
           </a:xfrm>
           <a:prstGeom prst="rect">
@@ -29243,7 +29648,7 @@
           </p:nvPr>
         </p:nvGraphicFramePr>
         <p:xfrm>
-          <a:off x="483042" y="2112579"/>
+          <a:off x="2007043" y="2112580"/>
           <a:ext cx="8195871" cy="4192805"/>
         </p:xfrm>
         <a:graphic>
@@ -29285,7 +29690,7 @@
         </p:blipFill>
         <p:spPr>
           <a:xfrm>
-            <a:off x="19" y="5"/>
+            <a:off x="1524020" y="6"/>
             <a:ext cx="1605261" cy="1559957"/>
           </a:xfrm>
           <a:prstGeom prst="rect">
@@ -29317,7 +29722,7 @@
         </p:nvSpPr>
         <p:spPr>
           <a:xfrm>
-            <a:off x="1303017" y="348865"/>
+            <a:off x="2827018" y="348866"/>
             <a:ext cx="4782823" cy="877729"/>
           </a:xfrm>
         </p:spPr>
@@ -29344,452 +29749,6 @@
         <p14:creationId xmlns:p14="http://schemas.microsoft.com/office/powerpoint/2010/main" val="425137403"/>
       </p:ext>
     </p:extLst>
-  </p:cSld>
-  <p:clrMapOvr>
-    <a:masterClrMapping/>
-  </p:clrMapOvr>
-</p:sld>
-</file>
-
-<file path=ppt/slides/slide9.xml><?xml version="1.0" encoding="utf-8"?>
-<p:sld xmlns:a="http://schemas.openxmlformats.org/drawingml/2006/main" xmlns:r="http://schemas.openxmlformats.org/officeDocument/2006/relationships" xmlns:p="http://schemas.openxmlformats.org/presentationml/2006/main">
-  <p:cSld>
-    <p:bg>
-      <p:bgPr>
-        <a:solidFill>
-          <a:schemeClr val="bg1"/>
-        </a:solidFill>
-        <a:effectLst/>
-      </p:bgPr>
-    </p:bg>
-    <p:spTree>
-      <p:nvGrpSpPr>
-        <p:cNvPr id="1" name=""/>
-        <p:cNvGrpSpPr/>
-        <p:nvPr/>
-      </p:nvGrpSpPr>
-      <p:grpSpPr>
-        <a:xfrm>
-          <a:off x="0" y="0"/>
-          <a:ext cx="0" cy="0"/>
-          <a:chOff x="0" y="0"/>
-          <a:chExt cx="0" cy="0"/>
-        </a:xfrm>
-      </p:grpSpPr>
-      <p:sp useBgFill="1">
-        <p:nvSpPr>
-          <p:cNvPr id="9" name="Rectangle 8">
-            <a:extLst>
-              <a:ext uri="{FF2B5EF4-FFF2-40B4-BE49-F238E27FC236}">
-                <a16:creationId xmlns:a16="http://schemas.microsoft.com/office/drawing/2014/main" id="{BACC6370-2D7E-4714-9D71-7542949D7D5D}"/>
-              </a:ext>
-              <a:ext uri="{C183D7F6-B498-43B3-948B-1728B52AA6E4}">
-                <adec:decorative xmlns:adec="http://schemas.microsoft.com/office/drawing/2017/decorative" val="1"/>
-              </a:ext>
-            </a:extLst>
-          </p:cNvPr>
-          <p:cNvSpPr>
-            <a:spLocks noGrp="1" noRot="1" noChangeAspect="1" noMove="1" noResize="1" noEditPoints="1" noAdjustHandles="1" noChangeArrowheads="1" noChangeShapeType="1" noTextEdit="1"/>
-          </p:cNvSpPr>
-          <p:nvPr>
-            <p:extLst>
-              <p:ext uri="{386F3935-93C4-4BCD-93E2-E3B085C9AB24}">
-                <p16:designElem xmlns:p16="http://schemas.microsoft.com/office/powerpoint/2015/main" val="1"/>
-              </p:ext>
-            </p:extLst>
-          </p:nvPr>
-        </p:nvSpPr>
-        <p:spPr>
-          <a:xfrm>
-            <a:off x="0" y="0"/>
-            <a:ext cx="9144000" cy="6858000"/>
-          </a:xfrm>
-          <a:prstGeom prst="rect">
-            <a:avLst/>
-          </a:prstGeom>
-          <a:ln w="12700" cap="flat" cmpd="sng" algn="ctr">
-            <a:noFill/>
-            <a:prstDash val="solid"/>
-            <a:miter lim="800000"/>
-          </a:ln>
-          <a:effectLst/>
-          <a:extLst>
-            <a:ext uri="{91240B29-F687-4F45-9708-019B960494DF}">
-              <a14:hiddenLine xmlns:a14="http://schemas.microsoft.com/office/drawing/2010/main" w="12700" cap="flat" cmpd="sng" algn="ctr">
-                <a:solidFill>
-                  <a:schemeClr val="accent1">
-                    <a:shade val="50000"/>
-                  </a:schemeClr>
-                </a:solidFill>
-                <a:prstDash val="solid"/>
-                <a:miter lim="800000"/>
-              </a14:hiddenLine>
-            </a:ext>
-          </a:extLst>
-        </p:spPr>
-        <p:style>
-          <a:lnRef idx="2">
-            <a:schemeClr val="accent1">
-              <a:shade val="50000"/>
-            </a:schemeClr>
-          </a:lnRef>
-          <a:fillRef idx="1">
-            <a:schemeClr val="accent1"/>
-          </a:fillRef>
-          <a:effectRef idx="0">
-            <a:schemeClr val="accent1"/>
-          </a:effectRef>
-          <a:fontRef idx="minor">
-            <a:schemeClr val="lt1"/>
-          </a:fontRef>
-        </p:style>
-        <p:txBody>
-          <a:bodyPr rtlCol="0" anchor="ctr"/>
-          <a:lstStyle/>
-          <a:p>
-            <a:pPr algn="ctr"/>
-            <a:endParaRPr lang="en-US"/>
-          </a:p>
-        </p:txBody>
-      </p:sp>
-      <p:sp>
-        <p:nvSpPr>
-          <p:cNvPr id="11" name="Rectangle 10">
-            <a:extLst>
-              <a:ext uri="{FF2B5EF4-FFF2-40B4-BE49-F238E27FC236}">
-                <a16:creationId xmlns:a16="http://schemas.microsoft.com/office/drawing/2014/main" id="{F68B3F68-107C-434F-AA38-110D5EA91B85}"/>
-              </a:ext>
-              <a:ext uri="{C183D7F6-B498-43B3-948B-1728B52AA6E4}">
-                <adec:decorative xmlns:adec="http://schemas.microsoft.com/office/drawing/2017/decorative" val="1"/>
-              </a:ext>
-            </a:extLst>
-          </p:cNvPr>
-          <p:cNvSpPr>
-            <a:spLocks noGrp="1" noRot="1" noChangeAspect="1" noMove="1" noResize="1" noEditPoints="1" noAdjustHandles="1" noChangeArrowheads="1" noChangeShapeType="1" noTextEdit="1"/>
-          </p:cNvSpPr>
-          <p:nvPr>
-            <p:extLst>
-              <p:ext uri="{386F3935-93C4-4BCD-93E2-E3B085C9AB24}">
-                <p16:designElem xmlns:p16="http://schemas.microsoft.com/office/powerpoint/2015/main" val="1"/>
-              </p:ext>
-            </p:extLst>
-          </p:nvPr>
-        </p:nvSpPr>
-        <p:spPr>
-          <a:xfrm flipH="1">
-            <a:off x="1" y="0"/>
-            <a:ext cx="9143999" cy="1575955"/>
-          </a:xfrm>
-          <a:prstGeom prst="rect">
-            <a:avLst/>
-          </a:prstGeom>
-          <a:gradFill>
-            <a:gsLst>
-              <a:gs pos="0">
-                <a:srgbClr val="000000">
-                  <a:alpha val="96000"/>
-                </a:srgbClr>
-              </a:gs>
-              <a:gs pos="100000">
-                <a:schemeClr val="accent1">
-                  <a:lumMod val="75000"/>
-                </a:schemeClr>
-              </a:gs>
-            </a:gsLst>
-            <a:lin ang="8400000" scaled="0"/>
-          </a:gradFill>
-          <a:ln>
-            <a:noFill/>
-          </a:ln>
-        </p:spPr>
-        <p:style>
-          <a:lnRef idx="2">
-            <a:schemeClr val="accent1">
-              <a:shade val="50000"/>
-            </a:schemeClr>
-          </a:lnRef>
-          <a:fillRef idx="1">
-            <a:schemeClr val="accent1"/>
-          </a:fillRef>
-          <a:effectRef idx="0">
-            <a:schemeClr val="accent1"/>
-          </a:effectRef>
-          <a:fontRef idx="minor">
-            <a:schemeClr val="lt1"/>
-          </a:fontRef>
-        </p:style>
-        <p:txBody>
-          <a:bodyPr rtlCol="0" anchor="ctr"/>
-          <a:lstStyle/>
-          <a:p>
-            <a:pPr algn="ctr"/>
-            <a:endParaRPr lang="en-US"/>
-          </a:p>
-        </p:txBody>
-      </p:sp>
-      <p:sp>
-        <p:nvSpPr>
-          <p:cNvPr id="13" name="Rectangle 12">
-            <a:extLst>
-              <a:ext uri="{FF2B5EF4-FFF2-40B4-BE49-F238E27FC236}">
-                <a16:creationId xmlns:a16="http://schemas.microsoft.com/office/drawing/2014/main" id="{AAD0DBB9-1A4B-4391-81D4-CB19F9AB918A}"/>
-              </a:ext>
-              <a:ext uri="{C183D7F6-B498-43B3-948B-1728B52AA6E4}">
-                <adec:decorative xmlns:adec="http://schemas.microsoft.com/office/drawing/2017/decorative" val="1"/>
-              </a:ext>
-            </a:extLst>
-          </p:cNvPr>
-          <p:cNvSpPr>
-            <a:spLocks noGrp="1" noRot="1" noChangeAspect="1" noMove="1" noResize="1" noEditPoints="1" noAdjustHandles="1" noChangeArrowheads="1" noChangeShapeType="1" noTextEdit="1"/>
-          </p:cNvSpPr>
-          <p:nvPr>
-            <p:extLst>
-              <p:ext uri="{386F3935-93C4-4BCD-93E2-E3B085C9AB24}">
-                <p16:designElem xmlns:p16="http://schemas.microsoft.com/office/powerpoint/2015/main" val="1"/>
-              </p:ext>
-            </p:extLst>
-          </p:nvPr>
-        </p:nvSpPr>
-        <p:spPr>
-          <a:xfrm rot="10800000" flipH="1">
-            <a:off x="6096642" y="0"/>
-            <a:ext cx="3047358" cy="1576412"/>
-          </a:xfrm>
-          <a:prstGeom prst="rect">
-            <a:avLst/>
-          </a:prstGeom>
-          <a:gradFill>
-            <a:gsLst>
-              <a:gs pos="19000">
-                <a:schemeClr val="accent1">
-                  <a:lumMod val="50000"/>
-                  <a:alpha val="68000"/>
-                </a:schemeClr>
-              </a:gs>
-              <a:gs pos="100000">
-                <a:schemeClr val="accent1">
-                  <a:alpha val="79000"/>
-                </a:schemeClr>
-              </a:gs>
-            </a:gsLst>
-            <a:lin ang="19200000" scaled="0"/>
-          </a:gradFill>
-          <a:ln>
-            <a:noFill/>
-          </a:ln>
-        </p:spPr>
-        <p:style>
-          <a:lnRef idx="2">
-            <a:schemeClr val="accent1">
-              <a:shade val="50000"/>
-            </a:schemeClr>
-          </a:lnRef>
-          <a:fillRef idx="1">
-            <a:schemeClr val="accent1"/>
-          </a:fillRef>
-          <a:effectRef idx="0">
-            <a:schemeClr val="accent1"/>
-          </a:effectRef>
-          <a:fontRef idx="minor">
-            <a:schemeClr val="lt1"/>
-          </a:fontRef>
-        </p:style>
-        <p:txBody>
-          <a:bodyPr rtlCol="0" anchor="ctr"/>
-          <a:lstStyle/>
-          <a:p>
-            <a:pPr algn="ctr"/>
-            <a:endParaRPr lang="en-US"/>
-          </a:p>
-        </p:txBody>
-      </p:sp>
-      <p:sp>
-        <p:nvSpPr>
-          <p:cNvPr id="15" name="Rectangle 14">
-            <a:extLst>
-              <a:ext uri="{FF2B5EF4-FFF2-40B4-BE49-F238E27FC236}">
-                <a16:creationId xmlns:a16="http://schemas.microsoft.com/office/drawing/2014/main" id="{063BBA22-50EA-4C4D-BE05-F1CE4E63AA56}"/>
-              </a:ext>
-              <a:ext uri="{C183D7F6-B498-43B3-948B-1728B52AA6E4}">
-                <adec:decorative xmlns:adec="http://schemas.microsoft.com/office/drawing/2017/decorative" val="1"/>
-              </a:ext>
-            </a:extLst>
-          </p:cNvPr>
-          <p:cNvSpPr>
-            <a:spLocks noGrp="1" noRot="1" noChangeAspect="1" noMove="1" noResize="1" noEditPoints="1" noAdjustHandles="1" noChangeArrowheads="1" noChangeShapeType="1" noTextEdit="1"/>
-          </p:cNvSpPr>
-          <p:nvPr>
-            <p:extLst>
-              <p:ext uri="{386F3935-93C4-4BCD-93E2-E3B085C9AB24}">
-                <p16:designElem xmlns:p16="http://schemas.microsoft.com/office/powerpoint/2015/main" val="1"/>
-              </p:ext>
-            </p:extLst>
-          </p:nvPr>
-        </p:nvSpPr>
-        <p:spPr>
-          <a:xfrm rot="5400000">
-            <a:off x="3783777" y="-3783778"/>
-            <a:ext cx="1576446" cy="9144002"/>
-          </a:xfrm>
-          <a:prstGeom prst="rect">
-            <a:avLst/>
-          </a:prstGeom>
-          <a:gradFill>
-            <a:gsLst>
-              <a:gs pos="23000">
-                <a:schemeClr val="accent1">
-                  <a:alpha val="0"/>
-                </a:schemeClr>
-              </a:gs>
-              <a:gs pos="99000">
-                <a:srgbClr val="000000">
-                  <a:alpha val="74000"/>
-                </a:srgbClr>
-              </a:gs>
-            </a:gsLst>
-            <a:lin ang="20400000" scaled="0"/>
-          </a:gradFill>
-          <a:ln>
-            <a:noFill/>
-          </a:ln>
-        </p:spPr>
-        <p:style>
-          <a:lnRef idx="2">
-            <a:schemeClr val="accent1">
-              <a:shade val="50000"/>
-            </a:schemeClr>
-          </a:lnRef>
-          <a:fillRef idx="1">
-            <a:schemeClr val="accent1"/>
-          </a:fillRef>
-          <a:effectRef idx="0">
-            <a:schemeClr val="accent1"/>
-          </a:effectRef>
-          <a:fontRef idx="minor">
-            <a:schemeClr val="lt1"/>
-          </a:fontRef>
-        </p:style>
-        <p:txBody>
-          <a:bodyPr rtlCol="0" anchor="ctr"/>
-          <a:lstStyle/>
-          <a:p>
-            <a:pPr algn="ctr"/>
-            <a:endParaRPr lang="en-US" dirty="0"/>
-          </a:p>
-        </p:txBody>
-      </p:sp>
-      <p:sp>
-        <p:nvSpPr>
-          <p:cNvPr id="2" name="Title 1"/>
-          <p:cNvSpPr>
-            <a:spLocks noGrp="1"/>
-          </p:cNvSpPr>
-          <p:nvPr>
-            <p:ph type="title"/>
-          </p:nvPr>
-        </p:nvSpPr>
-        <p:spPr>
-          <a:xfrm>
-            <a:off x="1028697" y="348865"/>
-            <a:ext cx="5951223" cy="877729"/>
-          </a:xfrm>
-        </p:spPr>
-        <p:txBody>
-          <a:bodyPr anchor="ctr">
-            <a:normAutofit/>
-          </a:bodyPr>
-          <a:lstStyle/>
-          <a:p>
-            <a:r>
-              <a:rPr lang="en-US" sz="3500" dirty="0">
-                <a:solidFill>
-                  <a:srgbClr val="FFFFFF"/>
-                </a:solidFill>
-              </a:rPr>
-              <a:t>Value for Leadership</a:t>
-            </a:r>
-          </a:p>
-        </p:txBody>
-      </p:sp>
-      <p:graphicFrame>
-        <p:nvGraphicFramePr>
-          <p:cNvPr id="5" name="Content Placeholder 2">
-            <a:extLst>
-              <a:ext uri="{FF2B5EF4-FFF2-40B4-BE49-F238E27FC236}">
-                <a16:creationId xmlns:a16="http://schemas.microsoft.com/office/drawing/2014/main" id="{6D226046-7DB7-07C1-81B7-619F24A84D9E}"/>
-              </a:ext>
-            </a:extLst>
-          </p:cNvPr>
-          <p:cNvGraphicFramePr>
-            <a:graphicFrameLocks noGrp="1"/>
-          </p:cNvGraphicFramePr>
-          <p:nvPr>
-            <p:ph idx="1"/>
-            <p:extLst>
-              <p:ext uri="{D42A27DB-BD31-4B8C-83A1-F6EECF244321}">
-                <p14:modId xmlns:p14="http://schemas.microsoft.com/office/powerpoint/2010/main" val="3566384662"/>
-              </p:ext>
-            </p:extLst>
-          </p:nvPr>
-        </p:nvGraphicFramePr>
-        <p:xfrm>
-          <a:off x="483042" y="2112579"/>
-          <a:ext cx="8195871" cy="4192805"/>
-        </p:xfrm>
-        <a:graphic>
-          <a:graphicData uri="http://schemas.openxmlformats.org/drawingml/2006/diagram">
-            <dgm:relIds xmlns:dgm="http://schemas.openxmlformats.org/drawingml/2006/diagram" xmlns:r="http://schemas.openxmlformats.org/officeDocument/2006/relationships" r:dm="rId3" r:lo="rId4" r:qs="rId5" r:cs="rId6"/>
-          </a:graphicData>
-        </a:graphic>
-      </p:graphicFrame>
-      <p:pic>
-        <p:nvPicPr>
-          <p:cNvPr id="4" name="Picture Placeholder 8">
-            <a:extLst>
-              <a:ext uri="{FF2B5EF4-FFF2-40B4-BE49-F238E27FC236}">
-                <a16:creationId xmlns:a16="http://schemas.microsoft.com/office/drawing/2014/main" id="{E55CC28C-F057-2108-F90A-53C7DE73D9AC}"/>
-              </a:ext>
-            </a:extLst>
-          </p:cNvPr>
-          <p:cNvPicPr>
-            <a:picLocks noChangeAspect="1"/>
-          </p:cNvPicPr>
-          <p:nvPr>
-            <p:custDataLst>
-              <p:tags r:id="rId1"/>
-            </p:custDataLst>
-          </p:nvPr>
-        </p:nvPicPr>
-        <p:blipFill rotWithShape="1">
-          <a:blip r:embed="rId8" cstate="screen">
-            <a:extLst>
-              <a:ext uri="{28A0092B-C50C-407E-A947-70E740481C1C}">
-                <a14:useLocalDpi xmlns:a14="http://schemas.microsoft.com/office/drawing/2010/main"/>
-              </a:ext>
-            </a:extLst>
-          </a:blip>
-          <a:srcRect l="4761" r="4761"/>
-          <a:stretch>
-            <a:fillRect/>
-          </a:stretch>
-        </p:blipFill>
-        <p:spPr>
-          <a:xfrm>
-            <a:off x="19" y="5"/>
-            <a:ext cx="1605261" cy="1559957"/>
-          </a:xfrm>
-          <a:prstGeom prst="rect">
-            <a:avLst/>
-          </a:prstGeom>
-          <a:ln>
-            <a:noFill/>
-          </a:ln>
-          <a:effectLst>
-            <a:softEdge rad="112500"/>
-          </a:effectLst>
-        </p:spPr>
-      </p:pic>
-    </p:spTree>
   </p:cSld>
   <p:clrMapOvr>
     <a:masterClrMapping/>
@@ -30558,4 +30517,33 @@
   <we:bindings/>
   <we:snapshot xmlns:r="http://schemas.openxmlformats.org/officeDocument/2006/relationships"/>
 </we:webextension>
+</file>
+
+<file path=ppt/webextensions/webextension2.xml><?xml version="1.0" encoding="utf-8"?>
+<we:webextension xmlns:we="http://schemas.microsoft.com/office/webextensions/webextension/2010/11" id="{e8df99cc-b256-4084-b154-521f9ed472d0}">
+  <we:reference id="WA200003233" version="2.0.0.3" store="en-US" storeType="OMEX"/>
+  <we:alternateReferences/>
+  <we:properties>
+    <we:property name="Microsoft.Office.CampaignId" value="&quot;none&quot;"/>
+    <we:property name="artifactViewState" value="&quot;live&quot;"/>
+    <we:property name="backgroundColor" value="&quot;#EFF7F9&quot;"/>
+    <we:property name="bookmark" value="&quot;H4sIAAAAAAAAA+1ab2/bNhP/KoaAIXsAYyBFiZT6rk2aLU/TIkuCDkMRFEfyZGuRJU+S03hFvvuOku04jh07dlKkQ/1K4tHH3/0/nv3Vs2k1zGD8AQbovfLeFMXlAMrLDo+8rpe3ixa0AMFCqZTGONY+jxlRi2GdFnnlvfrq1VD2sP6YViPIHCda/HTR9SDLTqDn3hLIKux6QyyrIocs/QfbzUSqyxHedD28HmZFCY7lWQ01OrZXtJ3eCQL/hXM6EkydXuEZmrpd1lIaw4MoZEz7PmcCQoe7ajc00JZucbyb8/eLvIY0p3PcmmUMQ6EUY0YyjdwGMnbrSZrVky16/PZ6WJJ4JPR46LSzT2B7RZkayLxGjBKrFvVXb7/IRoPm6e2d9bNiVBo8xaQh5XVaj4nTCYwHmNef32PdL6x3Q1o5KQvS2Ty1M0ftF1/2S6TzrfeK3XRnkF7bK8gNrS7ied3rldiDevL6dgewJaTZFxh/Pi8hr6A1yALiOVLn6KChHo7yie3ChwR4Op2ep+YS688N30V4DalzPiXdBXNBK1Wa97KJp976zHmL0WSjirwCbQtovw9l7aJC/0Xe53yFGBSlxfLNuHGXg7Sc+q3fXcD+suxyczGNNPrSX3OxNDFLK88z2eHixpGjJBYsiSOrQ9Q+MFAB/4aReJ4O8PMp5L0lYAfYuaU8vwPvQ4Y5edEikAMYd5qk/R0kgv/TF3Mcd1xiH1Ub5YK14TdMr4r6HHSGGwYdXwy6J7fDyrg5Lb5UW8TMBkfSiS3Pbfhv6OUXbXUm605rc3tYWWTNUyseIcnwCrOW9vcIyzGd19CncvwyA06b04rAZjCsnL1dD+CWTtI8n7472cqiqB3k1GID+iNkI3dmPsqyJlV0PRGYgIdBwFgYM8ljjQrXZooXEhcvoUCucrKjqvMH4iXRtimOtshH9Y+SuLvm23JopI8YmiRmoGXEmMXggcZ00rbTbgYsZrHmoeJRGPlBSNZY6kEtI8fn47TnJosclsWg4Ti5HZS0cwb/lLS6D6WLodbozCnpjz61RBNl5Dadmu9DG8d31XK0oKpH5LD2pYG0oD0HyzhYjc2mCeMTMT5OScTWV5tl2rz3ochxz211ep6luq09baaT1aC2KNbvEapRiZuCeEeVdvKVakUlrjpf0rrfeTGwXl/1OscIttMUnp8tjKv/vQhQh1BudTlY3Z08ZYOwgbu1+cOPmAyDxEiI/SgIFBOKfcN2+mBMKSk1nXcnR/d6mQXSI/UMEz84y1KD5WTTvMa9AZa9xh16mLfhTxIOWwApVrdauPv0UBq082lwXoBNMuFTJL17Bp8D0TlMMbPVZulvb28+APb2Pk0KT+eMSjd2frqY5caLNj26WgSmj/aw0dRBOzw6qnHQypFax78yhOzIto4yGEKZVlO3mb69S3Nn4a53jEn9XB51q4uud5r2+s1BW+uhiaS747KFbd5EQxKBQ+AbFSoMWEAV+1Et6WZeeDnvhXfy2CZu+LBd+K1dNkuoM9e8vNdZFTVknWndWWsKduytqMRPmNmXYHp0ofktJeil6Y+P3a3nPqoZ/T5piuQjqbwdeE60t0XfOHGGGStv4aZYt+VrDk2z2LldcOSJDN6fCOXWc43/pEZ+H9EdBn8o5Y5S3hd53f8RNjN9HMD4G00Dn2+cnaU5Lr2wr7/2/idtOvXxtoHGSPiRUkaGAi36yIIgekxJf7ZSNm31Z9XMdSFb/JjRXuS3mtQ8uzRtVxUnECBPrEamkDMWCRAvwgQbXl6/FxusEKc1ggYVoEjCwAdNV0pm4xCajv/BS1qD+s2orpugnBPQsaRGWYWxZBgDCxgIwUKxI8s4SpjmCfXdNo5EyE0sza4sSSOxb4REZGAYU0oFO7JkAixCQFdyHUsR+ozLXQUPRKQVhFIKLqxkjHGmdkWZJCJSNuARWO2HBnW8K8vIWm7DSAoZmlAx7ut2GrGLeYSSlBCkiNxP+FJriHBXlHHk2ygmoxNGJpjhIl7LMh1AD5f4uI5EYjHCWLMQlPZ9pdfyqvG61sX1fW5aoyCvjpBx1BSHDNV6ZCu5xbHxrQmNYdoiSl+LYBdsfkLxBjEzxJNFlCKM3J4boFU60BQpKoKQUW6AHbiRK/uS8QTJh10QSyb9bS0aWJ/FWnLiY30jrdZiPa+VyDhpn0nJICYpI82jOFzvviu5kdNiHFlBkWD8wChULNqem68xosJLGiM2KpQGcQdulI4TjUEgITAUYEJQTlnLrerDcIkNEu5La30AYBGpTJEx1ifQFbxMGBidoLWRYehTIMRsfU5awSsAFiKGilSGEQ8YF0q9iE7l3rjqu21S7kviZl3Du5eU2fTzmY92ShtCSdePqXnnTsbGzs84MU/pAnTdjFLpLtSjO8sr3k5ru4v/cfu1LEbDBp8MdSIoF1J7xFzjgX7roaafZrbEBhinGqWE5ZKap1jwkPl+ExFp9VtqrdvT/KnvZjIYXTZyL0Z1NQSDJ5Djkrl786cCi3by3KhpyUiwOWY6FaTPv+66Mva0KAAA&quot;"/>
+    <we:property name="creatorSessionId" value="&quot;af07b493-7afe-4206-8f57-e873817eed98&quot;"/>
+    <we:property name="creatorTenantId" value="&quot;2ebd1adb-7a61-4d99-9b72-8a52b2766b4c&quot;"/>
+    <we:property name="creatorUserId" value="&quot;10032005449B8D91&quot;"/>
+    <we:property name="datasetId" value="&quot;69f22828-40c4-4c2f-b741-0e829c58fdcd&quot;"/>
+    <we:property name="embedUrl" value="&quot;/reportEmbed?reportId=8e5cb3cf-89bd-4167-96d3-da9bcf968549&amp;config=eyJjbHVzdGVyVXJsIjoiaHR0cHM6Ly9XQUJJLVNPVVRILUFGUklDQS1OT1JUSC1BLVBSSU1BUlktcmVkaXJlY3QuYW5hbHlzaXMud2luZG93cy5uZXQiLCJlbWJlZEZlYXR1cmVzIjp7InVzYWdlTWV0cmljc1ZOZXh0Ijp0cnVlfX0%3D&amp;disableSensitivityBanner=true&amp;storytellingChangeViewModeShortcutKeys=true&quot;"/>
+    <we:property name="initialStateBookmark" value="&quot;H4sIAAAAAAAAA+1bW2/bOhL+K4afdoHsgqR4PW9p2u4520uCJug+HBTFkBwlamTJK8lpvUX/+44k59LEju04yXGC9qGISHo433wzw+HI/j6MWT3OYfoeRjj8bfiiLE9HUJ0OuB3uDIvZ4P7+m3e7H958fr/77hUNl+MmK4t6+Nv3YQPVMTYfs3oCeSuCBv/8tDOEPD+A4/YphbzGneEYq7osIM/+h/1immqqCf7YGeK3cV5W0Io8bKDBVuwZLadn2pv/M6EdITTZGR5iaPpRZyJXyLkKOqjgXLDG0bK6X9BpNndJK7rbfq8sGsgK2qYdSxOudUL/BeMSNNyljnXjWd7Mlvjpq2/jitAR5um4tcpuPIMiYBx2ECqse42/D3ePjys8hmb2+Oqnyb0yn4zmjB+WkyrgB0y7qaLJmintUUGWf4Xp56MKihp69D/IZgdVSRbtlhxUWcBu8PWkmNmHtY8n5de9CsmgsR34RCN1VhznM/tfmuKohxOgaqGU/gsZsYVMHyiriNWLaYf6ZVadm1/sXFN+KxATRBqyARNnbeTaeeak0amXd6fyHUI9qXBV5d/gdDD7SH1da1o7KeJgdzyuyjOkP0blpGiGj8zUYwDqiQhRMIsm+Oh8BAja8/BUYuooC6fYDFp7D/54ec3V1LMOrmXQe3Il8zJJhUo0F1IyLTHBrYiyw8lo8IU+VeC0HtDgIML0CcfYAjg9CS5KFU1UAEaBA6ulga0g4ahsIB/stfvkOWWGf/cInjAPixH1VGBMQTohvLQhlZFTSOitoGK/+MdRNsLBAVZpWY3a/QZ/2z86+PsTJuM2TD0dXEsZtEYfLBgfpHYgltKxR3Y4Lqm2IOTXGbn3NPuSNhuU6S2hsbNth+J9FZo5ld17J1A1K7oSv+5Kj0DGj0/ndw5a9uXKrWLmJL2Sj6AIuXNbS6WgQkBGdxOmBDCp+7vML3/epNK5nLqfIu+XY6/t2JpbCClLRBLIqYPjiXgyl4QV8+HOSgH5e4YVVOFk+hbPML+p5cX8zalzlT5ClfVdlA7Rqkj3IMeC/LNDMusCXYga3mCxW3ZFm57ay4F2eoZh+K4smpO7FBpfaWWVQp7PDafl/vusrdlHDuNCRECQQSAKpqxK0sWRM2vkpZ4ZhUqyGI2xyiScKVJqrn/2glo5H8+bcVTUva7KUSdxhq0NwgvwLzGnkPlAZVuHtSeTtSnnPyfY1n5dailidh6h78vmpmH/uBak9eop6ZwrUutGs6JVakD14qDTcthlwo+QT7qWJW3wNiO4vS92w/ShYpLn7cLW4j86r93kFP3JOsvVu8v5WWXNyQibrMuhbzFtHuQa1Gn400n/ITs+6fY6DLQ2vjqDOUH3CHp027cd6PZhn1ZDU5ILJ3dIQbEsJs06p/nNvs0vNhax8RBVyJrh1WdRGaVIWUpXRBcjKKUgjU+l/li3fl2tEFlPzRndn9sXN5MbjjGbHVyZffwo3CpOHsLx1+Sgd3wU1msuQUcOKTrpU7Udr0kOqzMqqwevydY0PajOi6Sn2aqaj2bWvoWUGW4Md8am3LDoIl+HgtUKtNOrBdpPqq5SoO2VozFVr/X1pzdZEbsL7Pmxtslhd1G1nc4/WWYuXN/34bbWvreVFhc6zakh2dvhgurxkeqDh7LeXVVYvUZ7iAOrf731uZO7+M3XreX3/Snz02XxiibdTW/QBfAdUt/JpIgVxgOkHYuG8j7Bir1id7xOPwCq/hQCSD0w72N0aRI1RBOfY19zK79F8KtbuXa3MmHWy+ACZ2nquIgu4HP7mtAD5ty9HOqbB0SfdC/nnvkFYeF3l+7f0dcw+8y9QYBMtNfRsxQ9Z0Esf4m9NXfJrXu/tBuayWXxM1P8L7up9wfH5w/43wnWzYJj5ersuheufFKTl9xaaWxnSK7O0/bc3k3CUs/AGRMxRC6EUa3UWxnq0b+YNE3Xnb/CTCvSG+OZTpiRzCQYWNAMNxQppPZJ+9UkJZ3nzqIzyYYiIU0Tm2jBmOIBELUNfkORjmNijGAxYdI5xQTgplqqRCdgLXcxeI/MJ8zrDUVyz5x1hnAnCbcxGGfthiKDQivTVEofgbQUMsCmthRKJ5pbyaLgglltkkRsKDKJRhqmDXjvhXDOesaXisxGcIw3ZaHwRnGPVkcpmBPeWrZUVoPfGl9+mxMxKCACcIfAuFAhMLbcfgul2cgjCMWkdkIji1bJ5SG9UBpEYZyKzHNya+WEinEDpJJ5pR2kTlCoSBeI4OUcLJRmtIzIgrRS8GBV0MIszzQLGKX7o4XECOEpIgguha+8u2bctgRQuHLGgXwOddhAGoPoUwEMMdpIfCbg492lRZEIIYEb5MLZEFS0G+imFQCLCIZCi2kEwfxy/6hPYDyHg1SqiAhOxyR64aRFtjw1LZBFZoKglJEgidDANMDyKJgri4Rd+6XHv6pyMu6Oa2WiAxEDc0Bca/Jm06EPJ1keK+xO61RzQ4lRMiA8EnUisUtlWf17FmO7pvtlS9fb+3F17+EIq+POoctJU48h4AEUfWt13B/sGXbrqJqDImKc/d11cuc0ELtthueAMp/jkg+0P6s57znSv/8DsaJZj+IzAAA=&quot;"/>
+    <we:property name="isFiltersActionButtonVisible" value="true"/>
+    <we:property name="isVisualContainerHeaderHidden" value="false"/>
+    <we:property name="pageDisplayName" value="&quot;Demand &quot;"/>
+    <we:property name="pageName" value="&quot;b66cc148500b22103a58&quot;"/>
+    <we:property name="reportEmbeddedTime" value="&quot;2025-12-05T14:04:35.422Z&quot;"/>
+    <we:property name="reportName" value="&quot;UK Railway Train #9.4.8&quot;"/>
+    <we:property name="reportState" value="&quot;CONNECTED&quot;"/>
+    <we:property name="reportUrl" value="&quot;/groups/me/reports/8e5cb3cf-89bd-4167-96d3-da9bcf968549/b66cc148500b22103a58?bookmarkGuid=c823fb4f-a214-440f-9364-748239e6e182&amp;bookmarkUsage=1&amp;ctid=2ebd1adb-7a61-4d99-9b72-8a52b2766b4c&amp;fromEntryPoint=export&amp;pbi_source=storytelling_addin&quot;"/>
+  </we:properties>
+  <we:bindings/>
+  <we:snapshot xmlns:r="http://schemas.openxmlformats.org/officeDocument/2006/relationships"/>
+</we:webextension>
 </file>
--- a/UK_Rail_Analytics_Presentation_CEO_V5.pptx
+++ b/UK_Rail_Analytics_Presentation_CEO_V5.pptx
@@ -14,10 +14,10 @@
     <p:sldId id="259" r:id="rId5"/>
     <p:sldId id="275" r:id="rId6"/>
     <p:sldId id="277" r:id="rId7"/>
-    <p:sldId id="291" r:id="rId8"/>
+    <p:sldId id="295" r:id="rId8"/>
     <p:sldId id="269" r:id="rId9"/>
     <p:sldId id="273" r:id="rId10"/>
-    <p:sldId id="274" r:id="rId11"/>
+    <p:sldId id="292" r:id="rId11"/>
   </p:sldIdLst>
   <p:sldSz cx="12192000" cy="6858000"/>
   <p:notesSz cx="6858000" cy="9144000"/>
@@ -3508,927 +3508,6 @@
 </file>
 
 <file path=ppt/diagrams/colors5.xml><?xml version="1.0" encoding="utf-8"?>
-<dgm:colorsDef xmlns:dgm="http://schemas.openxmlformats.org/drawingml/2006/diagram" xmlns:a="http://schemas.openxmlformats.org/drawingml/2006/main" uniqueId="urn:microsoft.com/office/officeart/2018/5/colors/Iconchunking_neutralicon_colorful1">
-  <dgm:title val=""/>
-  <dgm:desc val=""/>
-  <dgm:catLst>
-    <dgm:cat type="colorful" pri="10100"/>
-  </dgm:catLst>
-  <dgm:styleLbl name="node0">
-    <dgm:fillClrLst meth="repeat">
-      <a:schemeClr val="accent1"/>
-    </dgm:fillClrLst>
-    <dgm:linClrLst meth="repeat">
-      <a:schemeClr val="lt1"/>
-    </dgm:linClrLst>
-    <dgm:effectClrLst/>
-    <dgm:txLinClrLst/>
-    <dgm:txFillClrLst/>
-    <dgm:txEffectClrLst/>
-  </dgm:styleLbl>
-  <dgm:styleLbl name="node1">
-    <dgm:fillClrLst meth="repeat">
-      <a:schemeClr val="bg1"/>
-    </dgm:fillClrLst>
-    <dgm:linClrLst meth="repeat">
-      <a:schemeClr val="lt1">
-        <a:alpha val="0"/>
-      </a:schemeClr>
-    </dgm:linClrLst>
-    <dgm:effectClrLst/>
-    <dgm:txLinClrLst/>
-    <dgm:txFillClrLst meth="repeat">
-      <a:schemeClr val="dk1"/>
-    </dgm:txFillClrLst>
-    <dgm:txEffectClrLst/>
-  </dgm:styleLbl>
-  <dgm:styleLbl name="alignNode1">
-    <dgm:fillClrLst meth="repeat">
-      <a:schemeClr val="accent2"/>
-      <a:schemeClr val="accent3"/>
-      <a:schemeClr val="accent4"/>
-      <a:schemeClr val="accent5"/>
-      <a:schemeClr val="accent6"/>
-    </dgm:fillClrLst>
-    <dgm:linClrLst meth="repeat">
-      <a:schemeClr val="accent2"/>
-      <a:schemeClr val="accent3"/>
-      <a:schemeClr val="accent4"/>
-      <a:schemeClr val="accent5"/>
-      <a:schemeClr val="accent6"/>
-    </dgm:linClrLst>
-    <dgm:effectClrLst/>
-    <dgm:txLinClrLst/>
-    <dgm:txFillClrLst/>
-    <dgm:txEffectClrLst/>
-  </dgm:styleLbl>
-  <dgm:styleLbl name="lnNode1">
-    <dgm:fillClrLst meth="repeat">
-      <a:schemeClr val="accent2"/>
-      <a:schemeClr val="accent3"/>
-      <a:schemeClr val="accent4"/>
-      <a:schemeClr val="accent5"/>
-      <a:schemeClr val="accent6"/>
-    </dgm:fillClrLst>
-    <dgm:linClrLst meth="repeat">
-      <a:schemeClr val="lt1"/>
-    </dgm:linClrLst>
-    <dgm:effectClrLst/>
-    <dgm:txLinClrLst/>
-    <dgm:txFillClrLst/>
-    <dgm:txEffectClrLst/>
-  </dgm:styleLbl>
-  <dgm:styleLbl name="vennNode1">
-    <dgm:fillClrLst meth="repeat">
-      <a:schemeClr val="accent2">
-        <a:alpha val="50000"/>
-      </a:schemeClr>
-      <a:schemeClr val="accent3">
-        <a:alpha val="50000"/>
-      </a:schemeClr>
-      <a:schemeClr val="accent4">
-        <a:alpha val="50000"/>
-      </a:schemeClr>
-      <a:schemeClr val="accent5">
-        <a:alpha val="50000"/>
-      </a:schemeClr>
-      <a:schemeClr val="accent6">
-        <a:alpha val="50000"/>
-      </a:schemeClr>
-    </dgm:fillClrLst>
-    <dgm:linClrLst meth="repeat">
-      <a:schemeClr val="lt1"/>
-    </dgm:linClrLst>
-    <dgm:effectClrLst/>
-    <dgm:txLinClrLst/>
-    <dgm:txFillClrLst/>
-    <dgm:txEffectClrLst/>
-  </dgm:styleLbl>
-  <dgm:styleLbl name="node2">
-    <dgm:fillClrLst>
-      <a:schemeClr val="accent2"/>
-    </dgm:fillClrLst>
-    <dgm:linClrLst meth="repeat">
-      <a:schemeClr val="lt1"/>
-    </dgm:linClrLst>
-    <dgm:effectClrLst/>
-    <dgm:txLinClrLst/>
-    <dgm:txFillClrLst/>
-    <dgm:txEffectClrLst/>
-  </dgm:styleLbl>
-  <dgm:styleLbl name="node3">
-    <dgm:fillClrLst>
-      <a:schemeClr val="accent3"/>
-    </dgm:fillClrLst>
-    <dgm:linClrLst meth="repeat">
-      <a:schemeClr val="lt1"/>
-    </dgm:linClrLst>
-    <dgm:effectClrLst/>
-    <dgm:txLinClrLst/>
-    <dgm:txFillClrLst/>
-    <dgm:txEffectClrLst/>
-  </dgm:styleLbl>
-  <dgm:styleLbl name="node4">
-    <dgm:fillClrLst>
-      <a:schemeClr val="accent4"/>
-    </dgm:fillClrLst>
-    <dgm:linClrLst meth="repeat">
-      <a:schemeClr val="lt1"/>
-    </dgm:linClrLst>
-    <dgm:effectClrLst/>
-    <dgm:txLinClrLst/>
-    <dgm:txFillClrLst/>
-    <dgm:txEffectClrLst/>
-  </dgm:styleLbl>
-  <dgm:styleLbl name="fgImgPlace1">
-    <dgm:fillClrLst meth="repeat">
-      <a:schemeClr val="accent2">
-        <a:tint val="50000"/>
-      </a:schemeClr>
-      <a:schemeClr val="accent3">
-        <a:tint val="50000"/>
-      </a:schemeClr>
-      <a:schemeClr val="accent4">
-        <a:tint val="50000"/>
-      </a:schemeClr>
-      <a:schemeClr val="accent5">
-        <a:tint val="50000"/>
-      </a:schemeClr>
-      <a:schemeClr val="accent6">
-        <a:tint val="50000"/>
-      </a:schemeClr>
-    </dgm:fillClrLst>
-    <dgm:linClrLst meth="repeat">
-      <a:schemeClr val="lt1"/>
-    </dgm:linClrLst>
-    <dgm:effectClrLst/>
-    <dgm:txLinClrLst/>
-    <dgm:txFillClrLst meth="repeat">
-      <a:schemeClr val="lt1"/>
-    </dgm:txFillClrLst>
-    <dgm:txEffectClrLst/>
-  </dgm:styleLbl>
-  <dgm:styleLbl name="alignImgPlace1">
-    <dgm:fillClrLst>
-      <a:schemeClr val="accent1">
-        <a:tint val="50000"/>
-      </a:schemeClr>
-      <a:schemeClr val="accent2">
-        <a:tint val="20000"/>
-      </a:schemeClr>
-    </dgm:fillClrLst>
-    <dgm:linClrLst meth="repeat">
-      <a:schemeClr val="lt1"/>
-    </dgm:linClrLst>
-    <dgm:effectClrLst/>
-    <dgm:txLinClrLst/>
-    <dgm:txFillClrLst meth="repeat">
-      <a:schemeClr val="lt1"/>
-    </dgm:txFillClrLst>
-    <dgm:txEffectClrLst/>
-  </dgm:styleLbl>
-  <dgm:styleLbl name="bgImgPlace1">
-    <dgm:fillClrLst>
-      <a:schemeClr val="accent1">
-        <a:tint val="50000"/>
-      </a:schemeClr>
-      <a:schemeClr val="accent2">
-        <a:tint val="20000"/>
-      </a:schemeClr>
-    </dgm:fillClrLst>
-    <dgm:linClrLst meth="repeat">
-      <a:schemeClr val="lt1"/>
-    </dgm:linClrLst>
-    <dgm:effectClrLst/>
-    <dgm:txLinClrLst/>
-    <dgm:txFillClrLst meth="repeat">
-      <a:schemeClr val="lt1"/>
-    </dgm:txFillClrLst>
-    <dgm:txEffectClrLst/>
-  </dgm:styleLbl>
-  <dgm:styleLbl name="sibTrans2D1">
-    <dgm:fillClrLst meth="repeat">
-      <a:schemeClr val="accent2"/>
-      <a:schemeClr val="accent3"/>
-      <a:schemeClr val="accent4"/>
-      <a:schemeClr val="accent5"/>
-      <a:schemeClr val="accent6"/>
-    </dgm:fillClrLst>
-    <dgm:linClrLst meth="cycle">
-      <a:schemeClr val="lt1"/>
-    </dgm:linClrLst>
-    <dgm:effectClrLst/>
-    <dgm:txLinClrLst/>
-    <dgm:txFillClrLst/>
-    <dgm:txEffectClrLst/>
-  </dgm:styleLbl>
-  <dgm:styleLbl name="fgSibTrans2D1">
-    <dgm:fillClrLst meth="repeat">
-      <a:schemeClr val="accent2"/>
-      <a:schemeClr val="accent3"/>
-      <a:schemeClr val="accent4"/>
-      <a:schemeClr val="accent5"/>
-      <a:schemeClr val="accent6"/>
-    </dgm:fillClrLst>
-    <dgm:linClrLst meth="cycle">
-      <a:schemeClr val="lt1"/>
-    </dgm:linClrLst>
-    <dgm:effectClrLst/>
-    <dgm:txLinClrLst/>
-    <dgm:txFillClrLst meth="repeat">
-      <a:schemeClr val="lt1"/>
-    </dgm:txFillClrLst>
-    <dgm:txEffectClrLst/>
-  </dgm:styleLbl>
-  <dgm:styleLbl name="bgSibTrans2D1">
-    <dgm:fillClrLst meth="repeat">
-      <a:schemeClr val="accent2"/>
-      <a:schemeClr val="accent3"/>
-      <a:schemeClr val="accent4"/>
-      <a:schemeClr val="accent5"/>
-      <a:schemeClr val="accent6"/>
-    </dgm:fillClrLst>
-    <dgm:linClrLst meth="cycle">
-      <a:schemeClr val="lt1"/>
-    </dgm:linClrLst>
-    <dgm:effectClrLst/>
-    <dgm:txLinClrLst/>
-    <dgm:txFillClrLst meth="repeat">
-      <a:schemeClr val="lt1"/>
-    </dgm:txFillClrLst>
-    <dgm:txEffectClrLst/>
-  </dgm:styleLbl>
-  <dgm:styleLbl name="sibTrans1D1">
-    <dgm:fillClrLst meth="repeat">
-      <a:schemeClr val="accent2"/>
-      <a:schemeClr val="accent3"/>
-      <a:schemeClr val="accent4"/>
-      <a:schemeClr val="accent5"/>
-      <a:schemeClr val="accent6"/>
-    </dgm:fillClrLst>
-    <dgm:linClrLst meth="repeat">
-      <a:schemeClr val="accent2"/>
-      <a:schemeClr val="accent3"/>
-      <a:schemeClr val="accent4"/>
-      <a:schemeClr val="accent5"/>
-      <a:schemeClr val="accent6"/>
-    </dgm:linClrLst>
-    <dgm:effectClrLst/>
-    <dgm:txLinClrLst/>
-    <dgm:txFillClrLst meth="repeat">
-      <a:schemeClr val="tx1"/>
-    </dgm:txFillClrLst>
-    <dgm:txEffectClrLst/>
-  </dgm:styleLbl>
-  <dgm:styleLbl name="callout">
-    <dgm:fillClrLst meth="repeat">
-      <a:schemeClr val="accent2"/>
-    </dgm:fillClrLst>
-    <dgm:linClrLst meth="repeat">
-      <a:schemeClr val="accent2">
-        <a:tint val="50000"/>
-      </a:schemeClr>
-    </dgm:linClrLst>
-    <dgm:effectClrLst/>
-    <dgm:txLinClrLst/>
-    <dgm:txFillClrLst meth="repeat">
-      <a:schemeClr val="tx1"/>
-    </dgm:txFillClrLst>
-    <dgm:txEffectClrLst/>
-  </dgm:styleLbl>
-  <dgm:styleLbl name="asst0">
-    <dgm:fillClrLst meth="repeat">
-      <a:schemeClr val="accent1"/>
-    </dgm:fillClrLst>
-    <dgm:linClrLst meth="repeat">
-      <a:schemeClr val="lt1"/>
-    </dgm:linClrLst>
-    <dgm:effectClrLst/>
-    <dgm:txLinClrLst/>
-    <dgm:txFillClrLst/>
-    <dgm:txEffectClrLst/>
-  </dgm:styleLbl>
-  <dgm:styleLbl name="asst1">
-    <dgm:fillClrLst meth="repeat">
-      <a:schemeClr val="accent2"/>
-    </dgm:fillClrLst>
-    <dgm:linClrLst meth="repeat">
-      <a:schemeClr val="lt1"/>
-    </dgm:linClrLst>
-    <dgm:effectClrLst/>
-    <dgm:txLinClrLst/>
-    <dgm:txFillClrLst/>
-    <dgm:txEffectClrLst/>
-  </dgm:styleLbl>
-  <dgm:styleLbl name="asst2">
-    <dgm:fillClrLst>
-      <a:schemeClr val="accent3"/>
-    </dgm:fillClrLst>
-    <dgm:linClrLst meth="repeat">
-      <a:schemeClr val="lt1"/>
-    </dgm:linClrLst>
-    <dgm:effectClrLst/>
-    <dgm:txLinClrLst/>
-    <dgm:txFillClrLst/>
-    <dgm:txEffectClrLst/>
-  </dgm:styleLbl>
-  <dgm:styleLbl name="asst3">
-    <dgm:fillClrLst>
-      <a:schemeClr val="accent4"/>
-    </dgm:fillClrLst>
-    <dgm:linClrLst meth="repeat">
-      <a:schemeClr val="lt1"/>
-    </dgm:linClrLst>
-    <dgm:effectClrLst/>
-    <dgm:txLinClrLst/>
-    <dgm:txFillClrLst/>
-    <dgm:txEffectClrLst/>
-  </dgm:styleLbl>
-  <dgm:styleLbl name="asst4">
-    <dgm:fillClrLst>
-      <a:schemeClr val="accent5"/>
-    </dgm:fillClrLst>
-    <dgm:linClrLst meth="repeat">
-      <a:schemeClr val="lt1"/>
-    </dgm:linClrLst>
-    <dgm:effectClrLst/>
-    <dgm:txLinClrLst/>
-    <dgm:txFillClrLst/>
-    <dgm:txEffectClrLst/>
-  </dgm:styleLbl>
-  <dgm:styleLbl name="parChTrans2D1">
-    <dgm:fillClrLst meth="repeat">
-      <a:schemeClr val="accent2"/>
-    </dgm:fillClrLst>
-    <dgm:linClrLst meth="repeat">
-      <a:schemeClr val="lt1"/>
-    </dgm:linClrLst>
-    <dgm:effectClrLst/>
-    <dgm:txLinClrLst/>
-    <dgm:txFillClrLst meth="repeat">
-      <a:schemeClr val="lt1"/>
-    </dgm:txFillClrLst>
-    <dgm:txEffectClrLst/>
-  </dgm:styleLbl>
-  <dgm:styleLbl name="parChTrans2D2">
-    <dgm:fillClrLst meth="repeat">
-      <a:schemeClr val="accent3"/>
-    </dgm:fillClrLst>
-    <dgm:linClrLst meth="repeat">
-      <a:schemeClr val="lt1"/>
-    </dgm:linClrLst>
-    <dgm:effectClrLst/>
-    <dgm:txLinClrLst/>
-    <dgm:txFillClrLst/>
-    <dgm:txEffectClrLst/>
-  </dgm:styleLbl>
-  <dgm:styleLbl name="parChTrans2D3">
-    <dgm:fillClrLst meth="repeat">
-      <a:schemeClr val="accent4"/>
-    </dgm:fillClrLst>
-    <dgm:linClrLst meth="repeat">
-      <a:schemeClr val="lt1"/>
-    </dgm:linClrLst>
-    <dgm:effectClrLst/>
-    <dgm:txLinClrLst/>
-    <dgm:txFillClrLst/>
-    <dgm:txEffectClrLst/>
-  </dgm:styleLbl>
-  <dgm:styleLbl name="parChTrans2D4">
-    <dgm:fillClrLst meth="repeat">
-      <a:schemeClr val="accent5"/>
-    </dgm:fillClrLst>
-    <dgm:linClrLst meth="repeat">
-      <a:schemeClr val="lt1"/>
-    </dgm:linClrLst>
-    <dgm:effectClrLst/>
-    <dgm:txLinClrLst/>
-    <dgm:txFillClrLst meth="repeat">
-      <a:schemeClr val="lt1"/>
-    </dgm:txFillClrLst>
-    <dgm:txEffectClrLst/>
-  </dgm:styleLbl>
-  <dgm:styleLbl name="parChTrans1D1">
-    <dgm:fillClrLst meth="repeat">
-      <a:schemeClr val="accent2"/>
-    </dgm:fillClrLst>
-    <dgm:linClrLst meth="repeat">
-      <a:schemeClr val="accent1"/>
-    </dgm:linClrLst>
-    <dgm:effectClrLst/>
-    <dgm:txLinClrLst/>
-    <dgm:txFillClrLst meth="repeat">
-      <a:schemeClr val="tx1"/>
-    </dgm:txFillClrLst>
-    <dgm:txEffectClrLst/>
-  </dgm:styleLbl>
-  <dgm:styleLbl name="parChTrans1D2">
-    <dgm:fillClrLst meth="repeat">
-      <a:schemeClr val="accent3">
-        <a:tint val="90000"/>
-      </a:schemeClr>
-    </dgm:fillClrLst>
-    <dgm:linClrLst meth="repeat">
-      <a:schemeClr val="accent2"/>
-    </dgm:linClrLst>
-    <dgm:effectClrLst/>
-    <dgm:txLinClrLst/>
-    <dgm:txFillClrLst meth="repeat">
-      <a:schemeClr val="tx1"/>
-    </dgm:txFillClrLst>
-    <dgm:txEffectClrLst/>
-  </dgm:styleLbl>
-  <dgm:styleLbl name="parChTrans1D3">
-    <dgm:fillClrLst meth="repeat">
-      <a:schemeClr val="accent4">
-        <a:tint val="70000"/>
-      </a:schemeClr>
-    </dgm:fillClrLst>
-    <dgm:linClrLst meth="repeat">
-      <a:schemeClr val="accent3"/>
-    </dgm:linClrLst>
-    <dgm:effectClrLst/>
-    <dgm:txLinClrLst/>
-    <dgm:txFillClrLst meth="repeat">
-      <a:schemeClr val="tx1"/>
-    </dgm:txFillClrLst>
-    <dgm:txEffectClrLst/>
-  </dgm:styleLbl>
-  <dgm:styleLbl name="parChTrans1D4">
-    <dgm:fillClrLst meth="repeat">
-      <a:schemeClr val="accent5">
-        <a:tint val="50000"/>
-      </a:schemeClr>
-    </dgm:fillClrLst>
-    <dgm:linClrLst meth="repeat">
-      <a:schemeClr val="accent4"/>
-    </dgm:linClrLst>
-    <dgm:effectClrLst/>
-    <dgm:txLinClrLst/>
-    <dgm:txFillClrLst meth="repeat">
-      <a:schemeClr val="tx1"/>
-    </dgm:txFillClrLst>
-    <dgm:txEffectClrLst/>
-  </dgm:styleLbl>
-  <dgm:styleLbl name="fgAcc1">
-    <dgm:fillClrLst meth="repeat">
-      <a:schemeClr val="lt1">
-        <a:alpha val="90000"/>
-      </a:schemeClr>
-    </dgm:fillClrLst>
-    <dgm:linClrLst meth="repeat">
-      <a:schemeClr val="accent2"/>
-      <a:schemeClr val="accent3"/>
-      <a:schemeClr val="accent4"/>
-      <a:schemeClr val="accent5"/>
-      <a:schemeClr val="accent6"/>
-    </dgm:linClrLst>
-    <dgm:effectClrLst/>
-    <dgm:txLinClrLst/>
-    <dgm:txFillClrLst meth="repeat">
-      <a:schemeClr val="dk1"/>
-    </dgm:txFillClrLst>
-    <dgm:txEffectClrLst/>
-  </dgm:styleLbl>
-  <dgm:styleLbl name="conFgAcc1">
-    <dgm:fillClrLst meth="repeat">
-      <a:schemeClr val="lt1">
-        <a:alpha val="90000"/>
-      </a:schemeClr>
-    </dgm:fillClrLst>
-    <dgm:linClrLst meth="repeat">
-      <a:schemeClr val="accent2"/>
-      <a:schemeClr val="accent3"/>
-      <a:schemeClr val="accent4"/>
-      <a:schemeClr val="accent5"/>
-      <a:schemeClr val="accent6"/>
-    </dgm:linClrLst>
-    <dgm:effectClrLst/>
-    <dgm:txLinClrLst/>
-    <dgm:txFillClrLst meth="repeat">
-      <a:schemeClr val="dk1"/>
-    </dgm:txFillClrLst>
-    <dgm:txEffectClrLst/>
-  </dgm:styleLbl>
-  <dgm:styleLbl name="alignAcc1">
-    <dgm:fillClrLst meth="repeat">
-      <a:schemeClr val="lt1">
-        <a:alpha val="90000"/>
-      </a:schemeClr>
-    </dgm:fillClrLst>
-    <dgm:linClrLst meth="repeat">
-      <a:schemeClr val="accent2"/>
-      <a:schemeClr val="accent3"/>
-      <a:schemeClr val="accent4"/>
-      <a:schemeClr val="accent5"/>
-      <a:schemeClr val="accent6"/>
-    </dgm:linClrLst>
-    <dgm:effectClrLst/>
-    <dgm:txLinClrLst/>
-    <dgm:txFillClrLst meth="repeat">
-      <a:schemeClr val="dk1"/>
-    </dgm:txFillClrLst>
-    <dgm:txEffectClrLst/>
-  </dgm:styleLbl>
-  <dgm:styleLbl name="trAlignAcc1">
-    <dgm:fillClrLst meth="repeat">
-      <a:schemeClr val="lt1">
-        <a:alpha val="40000"/>
-      </a:schemeClr>
-    </dgm:fillClrLst>
-    <dgm:linClrLst meth="repeat">
-      <a:schemeClr val="accent1"/>
-    </dgm:linClrLst>
-    <dgm:effectClrLst/>
-    <dgm:txLinClrLst/>
-    <dgm:txFillClrLst meth="repeat">
-      <a:schemeClr val="dk1"/>
-    </dgm:txFillClrLst>
-    <dgm:txEffectClrLst/>
-  </dgm:styleLbl>
-  <dgm:styleLbl name="bgAcc1">
-    <dgm:fillClrLst meth="repeat">
-      <a:schemeClr val="lt1">
-        <a:alpha val="90000"/>
-      </a:schemeClr>
-    </dgm:fillClrLst>
-    <dgm:linClrLst meth="repeat">
-      <a:schemeClr val="accent2"/>
-      <a:schemeClr val="accent3"/>
-      <a:schemeClr val="accent4"/>
-      <a:schemeClr val="accent5"/>
-      <a:schemeClr val="accent6"/>
-    </dgm:linClrLst>
-    <dgm:effectClrLst/>
-    <dgm:txLinClrLst/>
-    <dgm:txFillClrLst meth="repeat">
-      <a:schemeClr val="dk1"/>
-    </dgm:txFillClrLst>
-    <dgm:txEffectClrLst/>
-  </dgm:styleLbl>
-  <dgm:styleLbl name="solidFgAcc1">
-    <dgm:fillClrLst meth="repeat">
-      <a:schemeClr val="lt1"/>
-    </dgm:fillClrLst>
-    <dgm:linClrLst meth="repeat">
-      <a:schemeClr val="accent2"/>
-      <a:schemeClr val="accent3"/>
-      <a:schemeClr val="accent4"/>
-      <a:schemeClr val="accent5"/>
-      <a:schemeClr val="accent6"/>
-    </dgm:linClrLst>
-    <dgm:effectClrLst/>
-    <dgm:txLinClrLst/>
-    <dgm:txFillClrLst meth="repeat">
-      <a:schemeClr val="dk1"/>
-    </dgm:txFillClrLst>
-    <dgm:txEffectClrLst/>
-  </dgm:styleLbl>
-  <dgm:styleLbl name="solidAlignAcc1">
-    <dgm:fillClrLst meth="repeat">
-      <a:schemeClr val="lt1"/>
-    </dgm:fillClrLst>
-    <dgm:linClrLst meth="repeat">
-      <a:schemeClr val="accent2"/>
-      <a:schemeClr val="accent3"/>
-      <a:schemeClr val="accent4"/>
-      <a:schemeClr val="accent5"/>
-      <a:schemeClr val="accent6"/>
-    </dgm:linClrLst>
-    <dgm:effectClrLst/>
-    <dgm:txLinClrLst/>
-    <dgm:txFillClrLst meth="repeat">
-      <a:schemeClr val="dk1"/>
-    </dgm:txFillClrLst>
-    <dgm:txEffectClrLst/>
-  </dgm:styleLbl>
-  <dgm:styleLbl name="solidBgAcc1">
-    <dgm:fillClrLst meth="repeat">
-      <a:schemeClr val="lt1"/>
-    </dgm:fillClrLst>
-    <dgm:linClrLst meth="repeat">
-      <a:schemeClr val="accent2"/>
-      <a:schemeClr val="accent3"/>
-      <a:schemeClr val="accent4"/>
-      <a:schemeClr val="accent5"/>
-      <a:schemeClr val="accent6"/>
-    </dgm:linClrLst>
-    <dgm:effectClrLst/>
-    <dgm:txLinClrLst/>
-    <dgm:txFillClrLst meth="repeat">
-      <a:schemeClr val="dk1"/>
-    </dgm:txFillClrLst>
-    <dgm:txEffectClrLst/>
-  </dgm:styleLbl>
-  <dgm:styleLbl name="fgAccFollowNode1">
-    <dgm:fillClrLst meth="repeat">
-      <a:schemeClr val="accent2">
-        <a:tint val="40000"/>
-        <a:alpha val="90000"/>
-      </a:schemeClr>
-      <a:schemeClr val="accent3">
-        <a:tint val="40000"/>
-        <a:alpha val="90000"/>
-      </a:schemeClr>
-      <a:schemeClr val="accent4">
-        <a:tint val="40000"/>
-        <a:alpha val="90000"/>
-      </a:schemeClr>
-      <a:schemeClr val="accent5">
-        <a:tint val="40000"/>
-        <a:alpha val="90000"/>
-      </a:schemeClr>
-      <a:schemeClr val="accent6">
-        <a:tint val="40000"/>
-        <a:alpha val="90000"/>
-      </a:schemeClr>
-    </dgm:fillClrLst>
-    <dgm:linClrLst meth="repeat">
-      <a:schemeClr val="accent2">
-        <a:tint val="40000"/>
-        <a:alpha val="90000"/>
-      </a:schemeClr>
-      <a:schemeClr val="accent3">
-        <a:tint val="40000"/>
-        <a:alpha val="90000"/>
-      </a:schemeClr>
-      <a:schemeClr val="accent4">
-        <a:tint val="40000"/>
-        <a:alpha val="90000"/>
-      </a:schemeClr>
-      <a:schemeClr val="accent5">
-        <a:tint val="40000"/>
-        <a:alpha val="90000"/>
-      </a:schemeClr>
-      <a:schemeClr val="accent6">
-        <a:tint val="40000"/>
-        <a:alpha val="90000"/>
-      </a:schemeClr>
-    </dgm:linClrLst>
-    <dgm:effectClrLst/>
-    <dgm:txLinClrLst/>
-    <dgm:txFillClrLst meth="repeat">
-      <a:schemeClr val="dk1"/>
-    </dgm:txFillClrLst>
-    <dgm:txEffectClrLst/>
-  </dgm:styleLbl>
-  <dgm:styleLbl name="alignAccFollowNode1">
-    <dgm:fillClrLst meth="repeat">
-      <a:schemeClr val="accent2">
-        <a:tint val="40000"/>
-        <a:alpha val="90000"/>
-      </a:schemeClr>
-      <a:schemeClr val="accent3">
-        <a:tint val="40000"/>
-        <a:alpha val="90000"/>
-      </a:schemeClr>
-      <a:schemeClr val="accent4">
-        <a:tint val="40000"/>
-        <a:alpha val="90000"/>
-      </a:schemeClr>
-      <a:schemeClr val="accent5">
-        <a:tint val="40000"/>
-        <a:alpha val="90000"/>
-      </a:schemeClr>
-      <a:schemeClr val="accent6">
-        <a:tint val="40000"/>
-        <a:alpha val="90000"/>
-      </a:schemeClr>
-    </dgm:fillClrLst>
-    <dgm:linClrLst meth="repeat">
-      <a:schemeClr val="accent2">
-        <a:tint val="40000"/>
-        <a:alpha val="90000"/>
-      </a:schemeClr>
-      <a:schemeClr val="accent3">
-        <a:tint val="40000"/>
-        <a:alpha val="90000"/>
-      </a:schemeClr>
-      <a:schemeClr val="accent4">
-        <a:tint val="40000"/>
-        <a:alpha val="90000"/>
-      </a:schemeClr>
-      <a:schemeClr val="accent5">
-        <a:tint val="40000"/>
-        <a:alpha val="90000"/>
-      </a:schemeClr>
-      <a:schemeClr val="accent6">
-        <a:tint val="40000"/>
-        <a:alpha val="90000"/>
-      </a:schemeClr>
-    </dgm:linClrLst>
-    <dgm:effectClrLst/>
-    <dgm:txLinClrLst/>
-    <dgm:txFillClrLst meth="repeat">
-      <a:schemeClr val="dk1"/>
-    </dgm:txFillClrLst>
-    <dgm:txEffectClrLst/>
-  </dgm:styleLbl>
-  <dgm:styleLbl name="bgAccFollowNode1">
-    <dgm:fillClrLst meth="repeat">
-      <a:schemeClr val="accent2">
-        <a:tint val="40000"/>
-        <a:alpha val="90000"/>
-      </a:schemeClr>
-      <a:schemeClr val="accent3">
-        <a:tint val="40000"/>
-        <a:alpha val="90000"/>
-      </a:schemeClr>
-      <a:schemeClr val="accent4">
-        <a:tint val="40000"/>
-        <a:alpha val="90000"/>
-      </a:schemeClr>
-      <a:schemeClr val="accent5">
-        <a:tint val="40000"/>
-        <a:alpha val="90000"/>
-      </a:schemeClr>
-      <a:schemeClr val="accent6">
-        <a:tint val="40000"/>
-        <a:alpha val="90000"/>
-      </a:schemeClr>
-    </dgm:fillClrLst>
-    <dgm:linClrLst meth="repeat">
-      <a:schemeClr val="accent2">
-        <a:tint val="40000"/>
-        <a:alpha val="90000"/>
-      </a:schemeClr>
-      <a:schemeClr val="accent3">
-        <a:tint val="40000"/>
-        <a:alpha val="90000"/>
-      </a:schemeClr>
-      <a:schemeClr val="accent4">
-        <a:tint val="40000"/>
-        <a:alpha val="90000"/>
-      </a:schemeClr>
-      <a:schemeClr val="accent5">
-        <a:tint val="40000"/>
-        <a:alpha val="90000"/>
-      </a:schemeClr>
-      <a:schemeClr val="accent6">
-        <a:tint val="40000"/>
-        <a:alpha val="90000"/>
-      </a:schemeClr>
-    </dgm:linClrLst>
-    <dgm:effectClrLst/>
-    <dgm:txLinClrLst/>
-    <dgm:txFillClrLst meth="repeat">
-      <a:schemeClr val="dk1"/>
-    </dgm:txFillClrLst>
-    <dgm:txEffectClrLst/>
-  </dgm:styleLbl>
-  <dgm:styleLbl name="fgAcc0">
-    <dgm:fillClrLst meth="repeat">
-      <a:schemeClr val="lt1">
-        <a:alpha val="90000"/>
-      </a:schemeClr>
-    </dgm:fillClrLst>
-    <dgm:linClrLst>
-      <a:schemeClr val="accent1"/>
-    </dgm:linClrLst>
-    <dgm:effectClrLst/>
-    <dgm:txLinClrLst/>
-    <dgm:txFillClrLst meth="repeat">
-      <a:schemeClr val="dk1"/>
-    </dgm:txFillClrLst>
-    <dgm:txEffectClrLst/>
-  </dgm:styleLbl>
-  <dgm:styleLbl name="fgAcc2">
-    <dgm:fillClrLst meth="repeat">
-      <a:schemeClr val="lt1">
-        <a:alpha val="90000"/>
-      </a:schemeClr>
-    </dgm:fillClrLst>
-    <dgm:linClrLst>
-      <a:schemeClr val="accent2"/>
-    </dgm:linClrLst>
-    <dgm:effectClrLst/>
-    <dgm:txLinClrLst/>
-    <dgm:txFillClrLst meth="repeat">
-      <a:schemeClr val="dk1"/>
-    </dgm:txFillClrLst>
-    <dgm:txEffectClrLst/>
-  </dgm:styleLbl>
-  <dgm:styleLbl name="fgAcc3">
-    <dgm:fillClrLst meth="repeat">
-      <a:schemeClr val="lt1">
-        <a:alpha val="90000"/>
-      </a:schemeClr>
-    </dgm:fillClrLst>
-    <dgm:linClrLst>
-      <a:schemeClr val="accent3"/>
-    </dgm:linClrLst>
-    <dgm:effectClrLst/>
-    <dgm:txLinClrLst/>
-    <dgm:txFillClrLst meth="repeat">
-      <a:schemeClr val="dk1"/>
-    </dgm:txFillClrLst>
-    <dgm:txEffectClrLst/>
-  </dgm:styleLbl>
-  <dgm:styleLbl name="fgAcc4">
-    <dgm:fillClrLst meth="repeat">
-      <a:schemeClr val="lt1">
-        <a:alpha val="90000"/>
-      </a:schemeClr>
-    </dgm:fillClrLst>
-    <dgm:linClrLst>
-      <a:schemeClr val="accent4"/>
-    </dgm:linClrLst>
-    <dgm:effectClrLst/>
-    <dgm:txLinClrLst/>
-    <dgm:txFillClrLst meth="repeat">
-      <a:schemeClr val="dk1"/>
-    </dgm:txFillClrLst>
-    <dgm:txEffectClrLst/>
-  </dgm:styleLbl>
-  <dgm:styleLbl name="bgShp">
-    <dgm:fillClrLst meth="repeat">
-      <a:schemeClr val="accent2"/>
-      <a:schemeClr val="accent3"/>
-      <a:schemeClr val="accent4"/>
-      <a:schemeClr val="accent5"/>
-      <a:schemeClr val="accent6"/>
-    </dgm:fillClrLst>
-    <dgm:linClrLst meth="repeat">
-      <a:schemeClr val="lt1">
-        <a:alpha val="0"/>
-      </a:schemeClr>
-    </dgm:linClrLst>
-    <dgm:effectClrLst/>
-    <dgm:txLinClrLst/>
-    <dgm:txFillClrLst/>
-    <dgm:txEffectClrLst/>
-  </dgm:styleLbl>
-  <dgm:styleLbl name="dkBgShp">
-    <dgm:fillClrLst meth="repeat">
-      <a:schemeClr val="accent2">
-        <a:shade val="90000"/>
-      </a:schemeClr>
-    </dgm:fillClrLst>
-    <dgm:linClrLst meth="repeat">
-      <a:schemeClr val="dk1"/>
-    </dgm:linClrLst>
-    <dgm:effectClrLst/>
-    <dgm:txLinClrLst/>
-    <dgm:txFillClrLst meth="repeat">
-      <a:schemeClr val="lt1"/>
-    </dgm:txFillClrLst>
-    <dgm:txEffectClrLst/>
-  </dgm:styleLbl>
-  <dgm:styleLbl name="trBgShp">
-    <dgm:fillClrLst meth="repeat">
-      <a:schemeClr val="accent1">
-        <a:tint val="50000"/>
-        <a:alpha val="40000"/>
-      </a:schemeClr>
-    </dgm:fillClrLst>
-    <dgm:linClrLst meth="repeat">
-      <a:schemeClr val="accent2"/>
-    </dgm:linClrLst>
-    <dgm:effectClrLst/>
-    <dgm:txLinClrLst/>
-    <dgm:txFillClrLst meth="repeat">
-      <a:schemeClr val="lt1"/>
-    </dgm:txFillClrLst>
-    <dgm:txEffectClrLst/>
-  </dgm:styleLbl>
-  <dgm:styleLbl name="fgShp">
-    <dgm:fillClrLst meth="repeat">
-      <a:schemeClr val="accent2">
-        <a:tint val="40000"/>
-      </a:schemeClr>
-    </dgm:fillClrLst>
-    <dgm:linClrLst meth="repeat">
-      <a:schemeClr val="lt1"/>
-    </dgm:linClrLst>
-    <dgm:effectClrLst/>
-    <dgm:txLinClrLst/>
-    <dgm:txFillClrLst meth="repeat">
-      <a:schemeClr val="dk1"/>
-    </dgm:txFillClrLst>
-    <dgm:txEffectClrLst/>
-  </dgm:styleLbl>
-  <dgm:styleLbl name="revTx">
-    <dgm:fillClrLst meth="repeat">
-      <a:schemeClr val="lt1">
-        <a:alpha val="0"/>
-      </a:schemeClr>
-    </dgm:fillClrLst>
-    <dgm:linClrLst meth="repeat">
-      <a:schemeClr val="dk1">
-        <a:alpha val="0"/>
-      </a:schemeClr>
-    </dgm:linClrLst>
-    <dgm:effectClrLst/>
-    <dgm:txLinClrLst/>
-    <dgm:txFillClrLst meth="repeat">
-      <a:schemeClr val="tx1"/>
-    </dgm:txFillClrLst>
-    <dgm:txEffectClrLst/>
-  </dgm:styleLbl>
-</dgm:colorsDef>
-</file>
-
-<file path=ppt/diagrams/colors6.xml><?xml version="1.0" encoding="utf-8"?>
 <dgm:colorsDef xmlns:dgm="http://schemas.openxmlformats.org/drawingml/2006/diagram" xmlns:a="http://schemas.openxmlformats.org/drawingml/2006/main" uniqueId="urn:microsoft.com/office/officeart/2018/5/colors/Iconchunking_neutralicon_colorful1">
   <dgm:title val=""/>
   <dgm:desc val=""/>
@@ -7061,7 +6140,7 @@
   <dgm:whole/>
   <dgm:extLst>
     <a:ext uri="http://schemas.microsoft.com/office/drawing/2008/diagram">
-      <dsp:dataModelExt xmlns:dsp="http://schemas.microsoft.com/office/drawing/2008/diagram" relId="rId10" minVer="http://schemas.openxmlformats.org/drawingml/2006/diagram"/>
+      <dsp:dataModelExt xmlns:dsp="http://schemas.microsoft.com/office/drawing/2008/diagram" relId="rId9" minVer="http://schemas.openxmlformats.org/drawingml/2006/diagram"/>
     </a:ext>
   </dgm:extLst>
 </dgm:dataModel>
@@ -7177,7 +6256,7 @@
             </a:lnSpc>
           </a:pPr>
           <a:r>
-            <a:rPr lang="en-US"/>
+            <a:rPr lang="en-US" dirty="0"/>
             <a:t>Strengthen teams during peak demand slots.</a:t>
           </a:r>
         </a:p>
@@ -7753,7 +6832,7 @@
           </a:pPr>
           <a:r>
             <a:rPr lang="en-US" sz="1400" b="1" dirty="0"/>
-            <a:t>• Enhance Route-Level Performance• Strengthen Customer Experience &amp; Refund Governance.</a:t>
+            <a:t>• Enhance Route-Level Performance</a:t>
           </a:r>
         </a:p>
       </dgm:t>
@@ -7880,6 +6959,49 @@
         </a:p>
       </dgm:t>
     </dgm:pt>
+    <dgm:pt modelId="{DB681521-CFE9-4105-B6FB-FEB921EAAA62}">
+      <dgm:prSet custT="1"/>
+      <dgm:spPr/>
+      <dgm:t>
+        <a:bodyPr/>
+        <a:lstStyle/>
+        <a:p>
+          <a:pPr>
+            <a:lnSpc>
+              <a:spcPct val="100000"/>
+            </a:lnSpc>
+            <a:defRPr cap="all"/>
+          </a:pPr>
+          <a:r>
+            <a:rPr lang="en-US" sz="1400" b="1"/>
+            <a:t>• Strengthen Customer Experience &amp; Refund Governance.</a:t>
+          </a:r>
+          <a:endParaRPr lang="en-US" sz="1400" b="1" dirty="0"/>
+        </a:p>
+      </dgm:t>
+    </dgm:pt>
+    <dgm:pt modelId="{BA7A9C98-3FA2-4FF5-AD97-822F4650C2C0}" type="parTrans" cxnId="{C8BFF14B-D4AA-451E-BA3E-1476E4169DFD}">
+      <dgm:prSet/>
+      <dgm:spPr/>
+      <dgm:t>
+        <a:bodyPr/>
+        <a:lstStyle/>
+        <a:p>
+          <a:endParaRPr lang="en-US"/>
+        </a:p>
+      </dgm:t>
+    </dgm:pt>
+    <dgm:pt modelId="{43BC9454-7B49-4F2E-B0C5-3BE0EC526DA2}" type="sibTrans" cxnId="{C8BFF14B-D4AA-451E-BA3E-1476E4169DFD}">
+      <dgm:prSet/>
+      <dgm:spPr/>
+      <dgm:t>
+        <a:bodyPr/>
+        <a:lstStyle/>
+        <a:p>
+          <a:endParaRPr lang="en-US"/>
+        </a:p>
+      </dgm:t>
+    </dgm:pt>
     <dgm:pt modelId="{AF575045-95EF-4C7F-B1E3-9F4A5072B2AC}" type="pres">
       <dgm:prSet presAssocID="{3187B96F-0702-4ED8-A7D9-553458B42169}" presName="root" presStyleCnt="0">
         <dgm:presLayoutVars>
@@ -7894,11 +7016,11 @@
       <dgm:spPr/>
     </dgm:pt>
     <dgm:pt modelId="{014832D4-C0E1-4681-A08D-125EA52F7109}" type="pres">
-      <dgm:prSet presAssocID="{7C6A379E-86B5-4347-8BD4-BBF20DAA5E92}" presName="iconBgRect" presStyleLbl="bgShp" presStyleIdx="0" presStyleCnt="4"/>
+      <dgm:prSet presAssocID="{7C6A379E-86B5-4347-8BD4-BBF20DAA5E92}" presName="iconBgRect" presStyleLbl="bgShp" presStyleIdx="0" presStyleCnt="5"/>
       <dgm:spPr/>
     </dgm:pt>
     <dgm:pt modelId="{444129BB-BCD4-4635-856E-F156E7E9DF6C}" type="pres">
-      <dgm:prSet presAssocID="{7C6A379E-86B5-4347-8BD4-BBF20DAA5E92}" presName="iconRect" presStyleLbl="node1" presStyleIdx="0" presStyleCnt="4"/>
+      <dgm:prSet presAssocID="{7C6A379E-86B5-4347-8BD4-BBF20DAA5E92}" presName="iconRect" presStyleLbl="node1" presStyleIdx="0" presStyleCnt="5"/>
       <dgm:spPr>
         <a:blipFill>
           <a:blip xmlns:r="http://schemas.openxmlformats.org/officeDocument/2006/relationships" r:embed="rId1">
@@ -7930,7 +7052,7 @@
       <dgm:spPr/>
     </dgm:pt>
     <dgm:pt modelId="{9ECC93B8-EAFE-4905-A63B-08B7D7016A8B}" type="pres">
-      <dgm:prSet presAssocID="{7C6A379E-86B5-4347-8BD4-BBF20DAA5E92}" presName="textRect" presStyleLbl="revTx" presStyleIdx="0" presStyleCnt="4">
+      <dgm:prSet presAssocID="{7C6A379E-86B5-4347-8BD4-BBF20DAA5E92}" presName="textRect" presStyleLbl="revTx" presStyleIdx="0" presStyleCnt="5">
         <dgm:presLayoutVars>
           <dgm:chMax val="1"/>
           <dgm:chPref val="1"/>
@@ -7947,11 +7069,11 @@
       <dgm:spPr/>
     </dgm:pt>
     <dgm:pt modelId="{40BA8E2D-BF29-4495-AF34-72C1ECCEFBB7}" type="pres">
-      <dgm:prSet presAssocID="{33E79361-D52E-4279-AA58-01EC5EBCD5F2}" presName="iconBgRect" presStyleLbl="bgShp" presStyleIdx="1" presStyleCnt="4"/>
+      <dgm:prSet presAssocID="{33E79361-D52E-4279-AA58-01EC5EBCD5F2}" presName="iconBgRect" presStyleLbl="bgShp" presStyleIdx="1" presStyleCnt="5"/>
       <dgm:spPr/>
     </dgm:pt>
     <dgm:pt modelId="{AEC85B16-9C49-4C1C-A415-89B93EEB56FC}" type="pres">
-      <dgm:prSet presAssocID="{33E79361-D52E-4279-AA58-01EC5EBCD5F2}" presName="iconRect" presStyleLbl="node1" presStyleIdx="1" presStyleCnt="4"/>
+      <dgm:prSet presAssocID="{33E79361-D52E-4279-AA58-01EC5EBCD5F2}" presName="iconRect" presStyleLbl="node1" presStyleIdx="1" presStyleCnt="5"/>
       <dgm:spPr>
         <a:blipFill>
           <a:blip xmlns:r="http://schemas.openxmlformats.org/officeDocument/2006/relationships" r:embed="rId3">
@@ -7983,7 +7105,7 @@
       <dgm:spPr/>
     </dgm:pt>
     <dgm:pt modelId="{E89F56BD-BF2F-457E-93AD-3152C12071AB}" type="pres">
-      <dgm:prSet presAssocID="{33E79361-D52E-4279-AA58-01EC5EBCD5F2}" presName="textRect" presStyleLbl="revTx" presStyleIdx="1" presStyleCnt="4">
+      <dgm:prSet presAssocID="{33E79361-D52E-4279-AA58-01EC5EBCD5F2}" presName="textRect" presStyleLbl="revTx" presStyleIdx="1" presStyleCnt="5">
         <dgm:presLayoutVars>
           <dgm:chMax val="1"/>
           <dgm:chPref val="1"/>
@@ -7995,16 +7117,45 @@
       <dgm:prSet presAssocID="{0A940575-D5DF-4E4B-A7D4-C7F2ECA52118}" presName="sibTrans" presStyleCnt="0"/>
       <dgm:spPr/>
     </dgm:pt>
+    <dgm:pt modelId="{3D42DB2D-47B5-4344-A86C-8AB83AF07E96}" type="pres">
+      <dgm:prSet presAssocID="{DB681521-CFE9-4105-B6FB-FEB921EAAA62}" presName="compNode" presStyleCnt="0"/>
+      <dgm:spPr/>
+    </dgm:pt>
+    <dgm:pt modelId="{68DA30CA-37D9-46D4-BE81-8552844C94E2}" type="pres">
+      <dgm:prSet presAssocID="{DB681521-CFE9-4105-B6FB-FEB921EAAA62}" presName="iconBgRect" presStyleLbl="bgShp" presStyleIdx="2" presStyleCnt="5"/>
+      <dgm:spPr/>
+    </dgm:pt>
+    <dgm:pt modelId="{FB76394F-E746-4E81-85B5-40F1DEF4E0A4}" type="pres">
+      <dgm:prSet presAssocID="{DB681521-CFE9-4105-B6FB-FEB921EAAA62}" presName="iconRect" presStyleLbl="node1" presStyleIdx="2" presStyleCnt="5"/>
+      <dgm:spPr/>
+    </dgm:pt>
+    <dgm:pt modelId="{93FA0C08-EA64-4710-A353-F5D6401159A1}" type="pres">
+      <dgm:prSet presAssocID="{DB681521-CFE9-4105-B6FB-FEB921EAAA62}" presName="spaceRect" presStyleCnt="0"/>
+      <dgm:spPr/>
+    </dgm:pt>
+    <dgm:pt modelId="{CF7296DD-F79E-424A-A60A-A257E5A8B4B7}" type="pres">
+      <dgm:prSet presAssocID="{DB681521-CFE9-4105-B6FB-FEB921EAAA62}" presName="textRect" presStyleLbl="revTx" presStyleIdx="2" presStyleCnt="5">
+        <dgm:presLayoutVars>
+          <dgm:chMax val="1"/>
+          <dgm:chPref val="1"/>
+        </dgm:presLayoutVars>
+      </dgm:prSet>
+      <dgm:spPr/>
+    </dgm:pt>
+    <dgm:pt modelId="{8C0AEC8D-1DAD-49C2-AF3A-F33A2C3C503B}" type="pres">
+      <dgm:prSet presAssocID="{43BC9454-7B49-4F2E-B0C5-3BE0EC526DA2}" presName="sibTrans" presStyleCnt="0"/>
+      <dgm:spPr/>
+    </dgm:pt>
     <dgm:pt modelId="{7F2520E7-FAB5-40AD-B72D-FCFB6B878F80}" type="pres">
       <dgm:prSet presAssocID="{52CE655C-D9A9-4832-A6AA-FD6C649C9D67}" presName="compNode" presStyleCnt="0"/>
       <dgm:spPr/>
     </dgm:pt>
     <dgm:pt modelId="{9C4AF39B-B0E9-490B-871B-5B4316A9CCA4}" type="pres">
-      <dgm:prSet presAssocID="{52CE655C-D9A9-4832-A6AA-FD6C649C9D67}" presName="iconBgRect" presStyleLbl="bgShp" presStyleIdx="2" presStyleCnt="4"/>
+      <dgm:prSet presAssocID="{52CE655C-D9A9-4832-A6AA-FD6C649C9D67}" presName="iconBgRect" presStyleLbl="bgShp" presStyleIdx="3" presStyleCnt="5"/>
       <dgm:spPr/>
     </dgm:pt>
     <dgm:pt modelId="{43340B32-021A-4D9E-997C-E78FB0BD115E}" type="pres">
-      <dgm:prSet presAssocID="{52CE655C-D9A9-4832-A6AA-FD6C649C9D67}" presName="iconRect" presStyleLbl="node1" presStyleIdx="2" presStyleCnt="4"/>
+      <dgm:prSet presAssocID="{52CE655C-D9A9-4832-A6AA-FD6C649C9D67}" presName="iconRect" presStyleLbl="node1" presStyleIdx="3" presStyleCnt="5"/>
       <dgm:spPr>
         <a:blipFill>
           <a:blip xmlns:r="http://schemas.openxmlformats.org/officeDocument/2006/relationships" r:embed="rId5">
@@ -8036,7 +7187,7 @@
       <dgm:spPr/>
     </dgm:pt>
     <dgm:pt modelId="{6BAE4E10-5428-4726-92FD-FED66E69FD54}" type="pres">
-      <dgm:prSet presAssocID="{52CE655C-D9A9-4832-A6AA-FD6C649C9D67}" presName="textRect" presStyleLbl="revTx" presStyleIdx="2" presStyleCnt="4">
+      <dgm:prSet presAssocID="{52CE655C-D9A9-4832-A6AA-FD6C649C9D67}" presName="textRect" presStyleLbl="revTx" presStyleIdx="3" presStyleCnt="5">
         <dgm:presLayoutVars>
           <dgm:chMax val="1"/>
           <dgm:chPref val="1"/>
@@ -8053,11 +7204,11 @@
       <dgm:spPr/>
     </dgm:pt>
     <dgm:pt modelId="{73252C37-C64E-4605-B969-AB9EB9B64AD4}" type="pres">
-      <dgm:prSet presAssocID="{42A8EF7D-285D-4246-B133-A7C9FB0DED20}" presName="iconBgRect" presStyleLbl="bgShp" presStyleIdx="3" presStyleCnt="4"/>
+      <dgm:prSet presAssocID="{42A8EF7D-285D-4246-B133-A7C9FB0DED20}" presName="iconBgRect" presStyleLbl="bgShp" presStyleIdx="4" presStyleCnt="5"/>
       <dgm:spPr/>
     </dgm:pt>
     <dgm:pt modelId="{D8910772-FB7A-47F4-BA2E-83DADAF3D2FA}" type="pres">
-      <dgm:prSet presAssocID="{42A8EF7D-285D-4246-B133-A7C9FB0DED20}" presName="iconRect" presStyleLbl="node1" presStyleIdx="3" presStyleCnt="4"/>
+      <dgm:prSet presAssocID="{42A8EF7D-285D-4246-B133-A7C9FB0DED20}" presName="iconRect" presStyleLbl="node1" presStyleIdx="4" presStyleCnt="5"/>
       <dgm:spPr>
         <a:blipFill>
           <a:blip xmlns:r="http://schemas.openxmlformats.org/officeDocument/2006/relationships" r:embed="rId7">
@@ -8089,7 +7240,7 @@
       <dgm:spPr/>
     </dgm:pt>
     <dgm:pt modelId="{D84DFC44-89E8-4851-963F-7966D05C5328}" type="pres">
-      <dgm:prSet presAssocID="{42A8EF7D-285D-4246-B133-A7C9FB0DED20}" presName="textRect" presStyleLbl="revTx" presStyleIdx="3" presStyleCnt="4">
+      <dgm:prSet presAssocID="{42A8EF7D-285D-4246-B133-A7C9FB0DED20}" presName="textRect" presStyleLbl="revTx" presStyleIdx="4" presStyleCnt="5">
         <dgm:presLayoutVars>
           <dgm:chMax val="1"/>
           <dgm:chPref val="1"/>
@@ -8100,10 +7251,12 @@
   </dgm:ptLst>
   <dgm:cxnLst>
     <dgm:cxn modelId="{10FDE015-DF6D-4DFB-BFF9-2C62E52E5F7C}" type="presOf" srcId="{7C6A379E-86B5-4347-8BD4-BBF20DAA5E92}" destId="{9ECC93B8-EAFE-4905-A63B-08B7D7016A8B}" srcOrd="0" destOrd="0" presId="urn:microsoft.com/office/officeart/2018/5/layout/IconCircleLabelList"/>
+    <dgm:cxn modelId="{DE11841B-5CAF-4C43-A520-423C097876AA}" type="presOf" srcId="{DB681521-CFE9-4105-B6FB-FEB921EAAA62}" destId="{CF7296DD-F79E-424A-A60A-A257E5A8B4B7}" srcOrd="0" destOrd="0" presId="urn:microsoft.com/office/officeart/2018/5/layout/IconCircleLabelList"/>
     <dgm:cxn modelId="{F27B5524-4CCD-46B8-8484-F27E8ADA663A}" type="presOf" srcId="{3187B96F-0702-4ED8-A7D9-553458B42169}" destId="{AF575045-95EF-4C7F-B1E3-9F4A5072B2AC}" srcOrd="0" destOrd="0" presId="urn:microsoft.com/office/officeart/2018/5/layout/IconCircleLabelList"/>
-    <dgm:cxn modelId="{5CC78C2A-EB37-4DF6-86CE-D0FE5DBEE381}" srcId="{3187B96F-0702-4ED8-A7D9-553458B42169}" destId="{42A8EF7D-285D-4246-B133-A7C9FB0DED20}" srcOrd="3" destOrd="0" parTransId="{77348AF8-C965-4220-89B6-F738D1CC04F3}" sibTransId="{F78082C0-0302-4617-BE99-947BB0D3040E}"/>
+    <dgm:cxn modelId="{5CC78C2A-EB37-4DF6-86CE-D0FE5DBEE381}" srcId="{3187B96F-0702-4ED8-A7D9-553458B42169}" destId="{42A8EF7D-285D-4246-B133-A7C9FB0DED20}" srcOrd="4" destOrd="0" parTransId="{77348AF8-C965-4220-89B6-F738D1CC04F3}" sibTransId="{F78082C0-0302-4617-BE99-947BB0D3040E}"/>
     <dgm:cxn modelId="{6D7ED364-5443-4E5C-B174-09B28894B68A}" type="presOf" srcId="{52CE655C-D9A9-4832-A6AA-FD6C649C9D67}" destId="{6BAE4E10-5428-4726-92FD-FED66E69FD54}" srcOrd="0" destOrd="0" presId="urn:microsoft.com/office/officeart/2018/5/layout/IconCircleLabelList"/>
-    <dgm:cxn modelId="{198A7D45-4882-4764-85F5-3D7F500A907F}" srcId="{3187B96F-0702-4ED8-A7D9-553458B42169}" destId="{52CE655C-D9A9-4832-A6AA-FD6C649C9D67}" srcOrd="2" destOrd="0" parTransId="{1B000721-0600-4163-976B-E61A2453AE61}" sibTransId="{2ED54CB6-304B-4A0C-AA36-83F965E7FC68}"/>
+    <dgm:cxn modelId="{198A7D45-4882-4764-85F5-3D7F500A907F}" srcId="{3187B96F-0702-4ED8-A7D9-553458B42169}" destId="{52CE655C-D9A9-4832-A6AA-FD6C649C9D67}" srcOrd="3" destOrd="0" parTransId="{1B000721-0600-4163-976B-E61A2453AE61}" sibTransId="{2ED54CB6-304B-4A0C-AA36-83F965E7FC68}"/>
+    <dgm:cxn modelId="{C8BFF14B-D4AA-451E-BA3E-1476E4169DFD}" srcId="{3187B96F-0702-4ED8-A7D9-553458B42169}" destId="{DB681521-CFE9-4105-B6FB-FEB921EAAA62}" srcOrd="2" destOrd="0" parTransId="{BA7A9C98-3FA2-4FF5-AD97-822F4650C2C0}" sibTransId="{43BC9454-7B49-4F2E-B0C5-3BE0EC526DA2}"/>
     <dgm:cxn modelId="{992FC474-1C1D-4FFD-8441-6902A3697E03}" type="presOf" srcId="{33E79361-D52E-4279-AA58-01EC5EBCD5F2}" destId="{E89F56BD-BF2F-457E-93AD-3152C12071AB}" srcOrd="0" destOrd="0" presId="urn:microsoft.com/office/officeart/2018/5/layout/IconCircleLabelList"/>
     <dgm:cxn modelId="{F406A390-6C1F-41D8-8002-65FD08FBB1B9}" type="presOf" srcId="{42A8EF7D-285D-4246-B133-A7C9FB0DED20}" destId="{D84DFC44-89E8-4851-963F-7966D05C5328}" srcOrd="0" destOrd="0" presId="urn:microsoft.com/office/officeart/2018/5/layout/IconCircleLabelList"/>
     <dgm:cxn modelId="{BFD04EB9-E5C2-46A2-88D7-55273452258B}" srcId="{3187B96F-0702-4ED8-A7D9-553458B42169}" destId="{7C6A379E-86B5-4347-8BD4-BBF20DAA5E92}" srcOrd="0" destOrd="0" parTransId="{B4C350D3-36D4-49B6-98CA-8863F6EBA95E}" sibTransId="{A2AB5F4E-6980-4390-9F9A-492C4BF8C072}"/>
@@ -8120,449 +7273,23 @@
     <dgm:cxn modelId="{03C00F63-C214-48D3-B9A2-96FB8E3E0B8A}" type="presParOf" srcId="{42FA4F26-ED73-4204-8A05-F36FBF4D389C}" destId="{322C5881-2559-4AF9-9BE1-DC6EC1D758C2}" srcOrd="2" destOrd="0" presId="urn:microsoft.com/office/officeart/2018/5/layout/IconCircleLabelList"/>
     <dgm:cxn modelId="{2C2C38BB-FB66-4FC7-B1D5-8AF3F78FA4A6}" type="presParOf" srcId="{42FA4F26-ED73-4204-8A05-F36FBF4D389C}" destId="{E89F56BD-BF2F-457E-93AD-3152C12071AB}" srcOrd="3" destOrd="0" presId="urn:microsoft.com/office/officeart/2018/5/layout/IconCircleLabelList"/>
     <dgm:cxn modelId="{1860E0D7-80E2-470F-93A8-379E44B34C7D}" type="presParOf" srcId="{AF575045-95EF-4C7F-B1E3-9F4A5072B2AC}" destId="{360126B6-0EFD-450D-9844-4DDD8813AB9D}" srcOrd="3" destOrd="0" presId="urn:microsoft.com/office/officeart/2018/5/layout/IconCircleLabelList"/>
-    <dgm:cxn modelId="{8D506E16-9E20-4A9C-BC3F-D67F500F8202}" type="presParOf" srcId="{AF575045-95EF-4C7F-B1E3-9F4A5072B2AC}" destId="{7F2520E7-FAB5-40AD-B72D-FCFB6B878F80}" srcOrd="4" destOrd="0" presId="urn:microsoft.com/office/officeart/2018/5/layout/IconCircleLabelList"/>
+    <dgm:cxn modelId="{FCC6C5CC-B8C8-4534-9BE2-4EC42396AAF9}" type="presParOf" srcId="{AF575045-95EF-4C7F-B1E3-9F4A5072B2AC}" destId="{3D42DB2D-47B5-4344-A86C-8AB83AF07E96}" srcOrd="4" destOrd="0" presId="urn:microsoft.com/office/officeart/2018/5/layout/IconCircleLabelList"/>
+    <dgm:cxn modelId="{B23C803D-4790-4092-8D8D-E66BF4EF4CE5}" type="presParOf" srcId="{3D42DB2D-47B5-4344-A86C-8AB83AF07E96}" destId="{68DA30CA-37D9-46D4-BE81-8552844C94E2}" srcOrd="0" destOrd="0" presId="urn:microsoft.com/office/officeart/2018/5/layout/IconCircleLabelList"/>
+    <dgm:cxn modelId="{C67CB757-9B2F-4E5D-89D9-6F574A4E1C89}" type="presParOf" srcId="{3D42DB2D-47B5-4344-A86C-8AB83AF07E96}" destId="{FB76394F-E746-4E81-85B5-40F1DEF4E0A4}" srcOrd="1" destOrd="0" presId="urn:microsoft.com/office/officeart/2018/5/layout/IconCircleLabelList"/>
+    <dgm:cxn modelId="{F826106D-3FE3-4DC3-B55D-DE8AFAB808B8}" type="presParOf" srcId="{3D42DB2D-47B5-4344-A86C-8AB83AF07E96}" destId="{93FA0C08-EA64-4710-A353-F5D6401159A1}" srcOrd="2" destOrd="0" presId="urn:microsoft.com/office/officeart/2018/5/layout/IconCircleLabelList"/>
+    <dgm:cxn modelId="{58141ABC-5B04-4853-8964-253104907E49}" type="presParOf" srcId="{3D42DB2D-47B5-4344-A86C-8AB83AF07E96}" destId="{CF7296DD-F79E-424A-A60A-A257E5A8B4B7}" srcOrd="3" destOrd="0" presId="urn:microsoft.com/office/officeart/2018/5/layout/IconCircleLabelList"/>
+    <dgm:cxn modelId="{1B36560F-0FC3-45C2-8767-CA557E7E596B}" type="presParOf" srcId="{AF575045-95EF-4C7F-B1E3-9F4A5072B2AC}" destId="{8C0AEC8D-1DAD-49C2-AF3A-F33A2C3C503B}" srcOrd="5" destOrd="0" presId="urn:microsoft.com/office/officeart/2018/5/layout/IconCircleLabelList"/>
+    <dgm:cxn modelId="{8D506E16-9E20-4A9C-BC3F-D67F500F8202}" type="presParOf" srcId="{AF575045-95EF-4C7F-B1E3-9F4A5072B2AC}" destId="{7F2520E7-FAB5-40AD-B72D-FCFB6B878F80}" srcOrd="6" destOrd="0" presId="urn:microsoft.com/office/officeart/2018/5/layout/IconCircleLabelList"/>
     <dgm:cxn modelId="{EE092040-2A2A-43D6-96D2-4A1BEBFA5F14}" type="presParOf" srcId="{7F2520E7-FAB5-40AD-B72D-FCFB6B878F80}" destId="{9C4AF39B-B0E9-490B-871B-5B4316A9CCA4}" srcOrd="0" destOrd="0" presId="urn:microsoft.com/office/officeart/2018/5/layout/IconCircleLabelList"/>
     <dgm:cxn modelId="{965FE9BF-4EEF-453F-9B61-35F0F1DFB4C9}" type="presParOf" srcId="{7F2520E7-FAB5-40AD-B72D-FCFB6B878F80}" destId="{43340B32-021A-4D9E-997C-E78FB0BD115E}" srcOrd="1" destOrd="0" presId="urn:microsoft.com/office/officeart/2018/5/layout/IconCircleLabelList"/>
     <dgm:cxn modelId="{E7B5694A-F28D-4D74-8C37-F2882601FB26}" type="presParOf" srcId="{7F2520E7-FAB5-40AD-B72D-FCFB6B878F80}" destId="{0680B4C1-078F-468D-8153-6A686AED1DF2}" srcOrd="2" destOrd="0" presId="urn:microsoft.com/office/officeart/2018/5/layout/IconCircleLabelList"/>
     <dgm:cxn modelId="{1B6B79D3-CAF4-4A6A-A4E0-55986AC5478B}" type="presParOf" srcId="{7F2520E7-FAB5-40AD-B72D-FCFB6B878F80}" destId="{6BAE4E10-5428-4726-92FD-FED66E69FD54}" srcOrd="3" destOrd="0" presId="urn:microsoft.com/office/officeart/2018/5/layout/IconCircleLabelList"/>
-    <dgm:cxn modelId="{DBC85D15-1636-479B-8950-FDC03ACB1644}" type="presParOf" srcId="{AF575045-95EF-4C7F-B1E3-9F4A5072B2AC}" destId="{A754ED02-EE15-4CA3-8BA6-4683CC3CD7C2}" srcOrd="5" destOrd="0" presId="urn:microsoft.com/office/officeart/2018/5/layout/IconCircleLabelList"/>
-    <dgm:cxn modelId="{57D9CE26-7638-43F6-BC05-3B95DDA89EA2}" type="presParOf" srcId="{AF575045-95EF-4C7F-B1E3-9F4A5072B2AC}" destId="{462044C8-7FDA-4D18-A033-BC31BF7C5AA0}" srcOrd="6" destOrd="0" presId="urn:microsoft.com/office/officeart/2018/5/layout/IconCircleLabelList"/>
+    <dgm:cxn modelId="{DBC85D15-1636-479B-8950-FDC03ACB1644}" type="presParOf" srcId="{AF575045-95EF-4C7F-B1E3-9F4A5072B2AC}" destId="{A754ED02-EE15-4CA3-8BA6-4683CC3CD7C2}" srcOrd="7" destOrd="0" presId="urn:microsoft.com/office/officeart/2018/5/layout/IconCircleLabelList"/>
+    <dgm:cxn modelId="{57D9CE26-7638-43F6-BC05-3B95DDA89EA2}" type="presParOf" srcId="{AF575045-95EF-4C7F-B1E3-9F4A5072B2AC}" destId="{462044C8-7FDA-4D18-A033-BC31BF7C5AA0}" srcOrd="8" destOrd="0" presId="urn:microsoft.com/office/officeart/2018/5/layout/IconCircleLabelList"/>
     <dgm:cxn modelId="{B104EEB9-E927-438C-8E8E-358DB1DC2F3F}" type="presParOf" srcId="{462044C8-7FDA-4D18-A033-BC31BF7C5AA0}" destId="{73252C37-C64E-4605-B969-AB9EB9B64AD4}" srcOrd="0" destOrd="0" presId="urn:microsoft.com/office/officeart/2018/5/layout/IconCircleLabelList"/>
     <dgm:cxn modelId="{6E8B93D0-227B-4C22-9BD3-E59F146B909C}" type="presParOf" srcId="{462044C8-7FDA-4D18-A033-BC31BF7C5AA0}" destId="{D8910772-FB7A-47F4-BA2E-83DADAF3D2FA}" srcOrd="1" destOrd="0" presId="urn:microsoft.com/office/officeart/2018/5/layout/IconCircleLabelList"/>
     <dgm:cxn modelId="{7C38E824-D8E3-41EC-8B50-DF1AB098E322}" type="presParOf" srcId="{462044C8-7FDA-4D18-A033-BC31BF7C5AA0}" destId="{75F3FE7D-E034-4F85-939C-4913706C7CE1}" srcOrd="2" destOrd="0" presId="urn:microsoft.com/office/officeart/2018/5/layout/IconCircleLabelList"/>
     <dgm:cxn modelId="{ED6BCC71-0331-4C27-AEEA-BA3438FDCBFD}" type="presParOf" srcId="{462044C8-7FDA-4D18-A033-BC31BF7C5AA0}" destId="{D84DFC44-89E8-4851-963F-7966D05C5328}" srcOrd="3" destOrd="0" presId="urn:microsoft.com/office/officeart/2018/5/layout/IconCircleLabelList"/>
-  </dgm:cxnLst>
-  <dgm:bg/>
-  <dgm:whole/>
-  <dgm:extLst>
-    <a:ext uri="http://schemas.microsoft.com/office/drawing/2008/diagram">
-      <dsp:dataModelExt xmlns:dsp="http://schemas.microsoft.com/office/drawing/2008/diagram" relId="rId7" minVer="http://schemas.openxmlformats.org/drawingml/2006/diagram"/>
-    </a:ext>
-  </dgm:extLst>
-</dgm:dataModel>
-</file>
-
-<file path=ppt/diagrams/data6.xml><?xml version="1.0" encoding="utf-8"?>
-<dgm:dataModel xmlns:dgm="http://schemas.openxmlformats.org/drawingml/2006/diagram" xmlns:a="http://schemas.openxmlformats.org/drawingml/2006/main">
-  <dgm:ptLst>
-    <dgm:pt modelId="{1D3ECB66-4BB9-4307-9E4E-6B2315C839DB}" type="doc">
-      <dgm:prSet loTypeId="urn:microsoft.com/office/officeart/2018/5/layout/IconCircleLabelList" loCatId="icon" qsTypeId="urn:microsoft.com/office/officeart/2005/8/quickstyle/simple1" qsCatId="simple" csTypeId="urn:microsoft.com/office/officeart/2018/5/colors/Iconchunking_neutralicon_colorful1" csCatId="colorful" phldr="1"/>
-      <dgm:spPr/>
-      <dgm:t>
-        <a:bodyPr/>
-        <a:lstStyle/>
-        <a:p>
-          <a:endParaRPr lang="en-US"/>
-        </a:p>
-      </dgm:t>
-    </dgm:pt>
-    <dgm:pt modelId="{90B4B78F-5AAE-41B8-B5E1-16EF159D871B}">
-      <dgm:prSet custT="1"/>
-      <dgm:spPr/>
-      <dgm:t>
-        <a:bodyPr/>
-        <a:lstStyle/>
-        <a:p>
-          <a:pPr>
-            <a:defRPr cap="all"/>
-          </a:pPr>
-          <a:r>
-            <a:rPr lang="en-US" sz="1800" dirty="0"/>
-            <a:t>• Real-time visibility across routes and journey performance.</a:t>
-          </a:r>
-        </a:p>
-      </dgm:t>
-    </dgm:pt>
-    <dgm:pt modelId="{FA13E5C6-7210-4A40-9504-D04BA8725A1F}" type="parTrans" cxnId="{28189E35-8CD6-4265-BF7E-D111AF5D9680}">
-      <dgm:prSet/>
-      <dgm:spPr/>
-      <dgm:t>
-        <a:bodyPr/>
-        <a:lstStyle/>
-        <a:p>
-          <a:endParaRPr lang="en-US"/>
-        </a:p>
-      </dgm:t>
-    </dgm:pt>
-    <dgm:pt modelId="{155ACEB9-E36D-43A8-A6C0-54C8A7903F5C}" type="sibTrans" cxnId="{28189E35-8CD6-4265-BF7E-D111AF5D9680}">
-      <dgm:prSet/>
-      <dgm:spPr/>
-      <dgm:t>
-        <a:bodyPr/>
-        <a:lstStyle/>
-        <a:p>
-          <a:endParaRPr lang="en-US"/>
-        </a:p>
-      </dgm:t>
-    </dgm:pt>
-    <dgm:pt modelId="{D715E2C8-AB37-49A2-9617-D83144B02D36}">
-      <dgm:prSet/>
-      <dgm:spPr/>
-      <dgm:t>
-        <a:bodyPr/>
-        <a:lstStyle/>
-        <a:p>
-          <a:pPr>
-            <a:defRPr cap="all"/>
-          </a:pPr>
-          <a:r>
-            <a:rPr lang="en-US"/>
-            <a:t>• Predictive disruption and refund risk indicators.</a:t>
-          </a:r>
-        </a:p>
-      </dgm:t>
-    </dgm:pt>
-    <dgm:pt modelId="{BD32DCA5-0D48-4384-B31F-AF5559EF28AA}" type="parTrans" cxnId="{7F0C7C46-B382-4D93-B9A2-A744DFB9D243}">
-      <dgm:prSet/>
-      <dgm:spPr/>
-      <dgm:t>
-        <a:bodyPr/>
-        <a:lstStyle/>
-        <a:p>
-          <a:endParaRPr lang="en-US"/>
-        </a:p>
-      </dgm:t>
-    </dgm:pt>
-    <dgm:pt modelId="{3EDFFEBA-B207-4DAD-803E-CD527D0F969E}" type="sibTrans" cxnId="{7F0C7C46-B382-4D93-B9A2-A744DFB9D243}">
-      <dgm:prSet/>
-      <dgm:spPr/>
-      <dgm:t>
-        <a:bodyPr/>
-        <a:lstStyle/>
-        <a:p>
-          <a:endParaRPr lang="en-US"/>
-        </a:p>
-      </dgm:t>
-    </dgm:pt>
-    <dgm:pt modelId="{B7CA8BB5-0527-46A4-AEB0-09DA73CA2AF4}">
-      <dgm:prSet/>
-      <dgm:spPr/>
-      <dgm:t>
-        <a:bodyPr/>
-        <a:lstStyle/>
-        <a:p>
-          <a:pPr>
-            <a:defRPr cap="all"/>
-          </a:pPr>
-          <a:r>
-            <a:rPr lang="en-US"/>
-            <a:t>• Stronger governance over refunds and customer satisfaction.</a:t>
-          </a:r>
-        </a:p>
-      </dgm:t>
-    </dgm:pt>
-    <dgm:pt modelId="{E1D18EB8-0D94-40B5-B410-C96FBBCB4530}" type="parTrans" cxnId="{3D887AC8-4C98-4104-82A7-04C211CCBAAA}">
-      <dgm:prSet/>
-      <dgm:spPr/>
-      <dgm:t>
-        <a:bodyPr/>
-        <a:lstStyle/>
-        <a:p>
-          <a:endParaRPr lang="en-US"/>
-        </a:p>
-      </dgm:t>
-    </dgm:pt>
-    <dgm:pt modelId="{833799AF-114C-42A2-88ED-078A25DE7E9B}" type="sibTrans" cxnId="{3D887AC8-4C98-4104-82A7-04C211CCBAAA}">
-      <dgm:prSet/>
-      <dgm:spPr/>
-      <dgm:t>
-        <a:bodyPr/>
-        <a:lstStyle/>
-        <a:p>
-          <a:endParaRPr lang="en-US"/>
-        </a:p>
-      </dgm:t>
-    </dgm:pt>
-    <dgm:pt modelId="{B852A021-BC4F-420A-A8AD-9F266FC8F86A}">
-      <dgm:prSet/>
-      <dgm:spPr/>
-      <dgm:t>
-        <a:bodyPr/>
-        <a:lstStyle/>
-        <a:p>
-          <a:pPr>
-            <a:defRPr cap="all"/>
-          </a:pPr>
-          <a:r>
-            <a:rPr lang="en-US"/>
-            <a:t>• Improved operational planning and resource allocation.</a:t>
-          </a:r>
-        </a:p>
-      </dgm:t>
-    </dgm:pt>
-    <dgm:pt modelId="{B5C4FB6A-6063-48A9-84DE-5EBB6EFF5196}" type="parTrans" cxnId="{A9CCE9D5-3150-410B-8F8F-D02227FEE1D1}">
-      <dgm:prSet/>
-      <dgm:spPr/>
-      <dgm:t>
-        <a:bodyPr/>
-        <a:lstStyle/>
-        <a:p>
-          <a:endParaRPr lang="en-US"/>
-        </a:p>
-      </dgm:t>
-    </dgm:pt>
-    <dgm:pt modelId="{265C4B25-776D-4366-BE54-FE10B75B9F22}" type="sibTrans" cxnId="{A9CCE9D5-3150-410B-8F8F-D02227FEE1D1}">
-      <dgm:prSet/>
-      <dgm:spPr/>
-      <dgm:t>
-        <a:bodyPr/>
-        <a:lstStyle/>
-        <a:p>
-          <a:endParaRPr lang="en-US"/>
-        </a:p>
-      </dgm:t>
-    </dgm:pt>
-    <dgm:pt modelId="{BC2AD0FA-273C-4CF7-A00A-E2B58FF3CD36}" type="pres">
-      <dgm:prSet presAssocID="{1D3ECB66-4BB9-4307-9E4E-6B2315C839DB}" presName="root" presStyleCnt="0">
-        <dgm:presLayoutVars>
-          <dgm:dir/>
-          <dgm:resizeHandles val="exact"/>
-        </dgm:presLayoutVars>
-      </dgm:prSet>
-      <dgm:spPr/>
-    </dgm:pt>
-    <dgm:pt modelId="{F6B4F4A0-065C-498C-9A88-EA95796CC7DD}" type="pres">
-      <dgm:prSet presAssocID="{90B4B78F-5AAE-41B8-B5E1-16EF159D871B}" presName="compNode" presStyleCnt="0"/>
-      <dgm:spPr/>
-    </dgm:pt>
-    <dgm:pt modelId="{89A618F2-946B-4DBB-89CE-13F7BD6BA040}" type="pres">
-      <dgm:prSet presAssocID="{90B4B78F-5AAE-41B8-B5E1-16EF159D871B}" presName="iconBgRect" presStyleLbl="bgShp" presStyleIdx="0" presStyleCnt="4"/>
-      <dgm:spPr/>
-    </dgm:pt>
-    <dgm:pt modelId="{32ECB2C2-1FF8-4FB4-AB73-8BE57BEA64EC}" type="pres">
-      <dgm:prSet presAssocID="{90B4B78F-5AAE-41B8-B5E1-16EF159D871B}" presName="iconRect" presStyleLbl="node1" presStyleIdx="0" presStyleCnt="4"/>
-      <dgm:spPr>
-        <a:blipFill>
-          <a:blip xmlns:r="http://schemas.openxmlformats.org/officeDocument/2006/relationships" r:embed="rId1">
-            <a:extLst>
-              <a:ext uri="{28A0092B-C50C-407E-A947-70E740481C1C}">
-                <a14:useLocalDpi xmlns:a14="http://schemas.microsoft.com/office/drawing/2010/main" val="0"/>
-              </a:ext>
-              <a:ext uri="{96DAC541-7B7A-43D3-8B79-37D633B846F1}">
-                <asvg:svgBlip xmlns:asvg="http://schemas.microsoft.com/office/drawing/2016/SVG/main" r:embed="rId2"/>
-              </a:ext>
-            </a:extLst>
-          </a:blip>
-          <a:stretch>
-            <a:fillRect/>
-          </a:stretch>
-        </a:blipFill>
-        <a:ln>
-          <a:noFill/>
-        </a:ln>
-      </dgm:spPr>
-      <dgm:extLst>
-        <a:ext uri="{E40237B7-FDA0-4F09-8148-C483321AD2D9}">
-          <dgm14:cNvPr xmlns:dgm14="http://schemas.microsoft.com/office/drawing/2010/diagram" id="0" name="" descr="Compass"/>
-        </a:ext>
-      </dgm:extLst>
-    </dgm:pt>
-    <dgm:pt modelId="{1CDB6E60-CE3D-44AC-B50B-95B04BDB4AC7}" type="pres">
-      <dgm:prSet presAssocID="{90B4B78F-5AAE-41B8-B5E1-16EF159D871B}" presName="spaceRect" presStyleCnt="0"/>
-      <dgm:spPr/>
-    </dgm:pt>
-    <dgm:pt modelId="{5C5A512C-90C6-4164-B991-75FD568C40EF}" type="pres">
-      <dgm:prSet presAssocID="{90B4B78F-5AAE-41B8-B5E1-16EF159D871B}" presName="textRect" presStyleLbl="revTx" presStyleIdx="0" presStyleCnt="4">
-        <dgm:presLayoutVars>
-          <dgm:chMax val="1"/>
-          <dgm:chPref val="1"/>
-        </dgm:presLayoutVars>
-      </dgm:prSet>
-      <dgm:spPr/>
-    </dgm:pt>
-    <dgm:pt modelId="{C70937AB-73F2-4785-B1C9-608F28CF5B15}" type="pres">
-      <dgm:prSet presAssocID="{155ACEB9-E36D-43A8-A6C0-54C8A7903F5C}" presName="sibTrans" presStyleCnt="0"/>
-      <dgm:spPr/>
-    </dgm:pt>
-    <dgm:pt modelId="{69F1A2BA-3F58-4A7D-836B-A90DD0A70216}" type="pres">
-      <dgm:prSet presAssocID="{D715E2C8-AB37-49A2-9617-D83144B02D36}" presName="compNode" presStyleCnt="0"/>
-      <dgm:spPr/>
-    </dgm:pt>
-    <dgm:pt modelId="{FCE603E2-DC72-46DB-882A-EB10FC95D085}" type="pres">
-      <dgm:prSet presAssocID="{D715E2C8-AB37-49A2-9617-D83144B02D36}" presName="iconBgRect" presStyleLbl="bgShp" presStyleIdx="1" presStyleCnt="4"/>
-      <dgm:spPr/>
-    </dgm:pt>
-    <dgm:pt modelId="{E2EF9737-63C0-449F-990F-61F3638E46AD}" type="pres">
-      <dgm:prSet presAssocID="{D715E2C8-AB37-49A2-9617-D83144B02D36}" presName="iconRect" presStyleLbl="node1" presStyleIdx="1" presStyleCnt="4"/>
-      <dgm:spPr>
-        <a:blipFill>
-          <a:blip xmlns:r="http://schemas.openxmlformats.org/officeDocument/2006/relationships" r:embed="rId3">
-            <a:extLst>
-              <a:ext uri="{28A0092B-C50C-407E-A947-70E740481C1C}">
-                <a14:useLocalDpi xmlns:a14="http://schemas.microsoft.com/office/drawing/2010/main" val="0"/>
-              </a:ext>
-              <a:ext uri="{96DAC541-7B7A-43D3-8B79-37D633B846F1}">
-                <asvg:svgBlip xmlns:asvg="http://schemas.microsoft.com/office/drawing/2016/SVG/main" r:embed="rId4"/>
-              </a:ext>
-            </a:extLst>
-          </a:blip>
-          <a:stretch>
-            <a:fillRect/>
-          </a:stretch>
-        </a:blipFill>
-        <a:ln>
-          <a:noFill/>
-        </a:ln>
-      </dgm:spPr>
-      <dgm:extLst>
-        <a:ext uri="{E40237B7-FDA0-4F09-8148-C483321AD2D9}">
-          <dgm14:cNvPr xmlns:dgm14="http://schemas.microsoft.com/office/drawing/2010/diagram" id="0" name="" descr="Playing Cards"/>
-        </a:ext>
-      </dgm:extLst>
-    </dgm:pt>
-    <dgm:pt modelId="{15011A49-3918-4550-93DF-F55CD05451D2}" type="pres">
-      <dgm:prSet presAssocID="{D715E2C8-AB37-49A2-9617-D83144B02D36}" presName="spaceRect" presStyleCnt="0"/>
-      <dgm:spPr/>
-    </dgm:pt>
-    <dgm:pt modelId="{C197E439-8829-45EA-A488-88818DE634DB}" type="pres">
-      <dgm:prSet presAssocID="{D715E2C8-AB37-49A2-9617-D83144B02D36}" presName="textRect" presStyleLbl="revTx" presStyleIdx="1" presStyleCnt="4">
-        <dgm:presLayoutVars>
-          <dgm:chMax val="1"/>
-          <dgm:chPref val="1"/>
-        </dgm:presLayoutVars>
-      </dgm:prSet>
-      <dgm:spPr/>
-    </dgm:pt>
-    <dgm:pt modelId="{6F8C6AD0-5BDF-4631-A858-FD62E34FE242}" type="pres">
-      <dgm:prSet presAssocID="{3EDFFEBA-B207-4DAD-803E-CD527D0F969E}" presName="sibTrans" presStyleCnt="0"/>
-      <dgm:spPr/>
-    </dgm:pt>
-    <dgm:pt modelId="{4B11BF51-FF55-41C6-8129-DBC9376BC911}" type="pres">
-      <dgm:prSet presAssocID="{B7CA8BB5-0527-46A4-AEB0-09DA73CA2AF4}" presName="compNode" presStyleCnt="0"/>
-      <dgm:spPr/>
-    </dgm:pt>
-    <dgm:pt modelId="{27D1416A-B77F-4F43-BF69-5CE99BF33651}" type="pres">
-      <dgm:prSet presAssocID="{B7CA8BB5-0527-46A4-AEB0-09DA73CA2AF4}" presName="iconBgRect" presStyleLbl="bgShp" presStyleIdx="2" presStyleCnt="4"/>
-      <dgm:spPr/>
-    </dgm:pt>
-    <dgm:pt modelId="{3D1CF9A1-6EA4-41DD-8ABC-394FB05DCEE7}" type="pres">
-      <dgm:prSet presAssocID="{B7CA8BB5-0527-46A4-AEB0-09DA73CA2AF4}" presName="iconRect" presStyleLbl="node1" presStyleIdx="2" presStyleCnt="4"/>
-      <dgm:spPr>
-        <a:blipFill>
-          <a:blip xmlns:r="http://schemas.openxmlformats.org/officeDocument/2006/relationships" r:embed="rId5">
-            <a:extLst>
-              <a:ext uri="{28A0092B-C50C-407E-A947-70E740481C1C}">
-                <a14:useLocalDpi xmlns:a14="http://schemas.microsoft.com/office/drawing/2010/main" val="0"/>
-              </a:ext>
-              <a:ext uri="{96DAC541-7B7A-43D3-8B79-37D633B846F1}">
-                <asvg:svgBlip xmlns:asvg="http://schemas.microsoft.com/office/drawing/2016/SVG/main" r:embed="rId6"/>
-              </a:ext>
-            </a:extLst>
-          </a:blip>
-          <a:stretch>
-            <a:fillRect/>
-          </a:stretch>
-        </a:blipFill>
-        <a:ln>
-          <a:noFill/>
-        </a:ln>
-      </dgm:spPr>
-      <dgm:extLst>
-        <a:ext uri="{E40237B7-FDA0-4F09-8148-C483321AD2D9}">
-          <dgm14:cNvPr xmlns:dgm14="http://schemas.microsoft.com/office/drawing/2010/diagram" id="0" name="" descr="Share With Person"/>
-        </a:ext>
-      </dgm:extLst>
-    </dgm:pt>
-    <dgm:pt modelId="{6CA14DB2-4CAF-40C7-95A9-D51B58B7591D}" type="pres">
-      <dgm:prSet presAssocID="{B7CA8BB5-0527-46A4-AEB0-09DA73CA2AF4}" presName="spaceRect" presStyleCnt="0"/>
-      <dgm:spPr/>
-    </dgm:pt>
-    <dgm:pt modelId="{EABB931D-60BB-4D2C-8969-7902CF2BAED6}" type="pres">
-      <dgm:prSet presAssocID="{B7CA8BB5-0527-46A4-AEB0-09DA73CA2AF4}" presName="textRect" presStyleLbl="revTx" presStyleIdx="2" presStyleCnt="4">
-        <dgm:presLayoutVars>
-          <dgm:chMax val="1"/>
-          <dgm:chPref val="1"/>
-        </dgm:presLayoutVars>
-      </dgm:prSet>
-      <dgm:spPr/>
-    </dgm:pt>
-    <dgm:pt modelId="{C2F7B7D7-C10F-43DB-8D1F-C1EDB7574C5A}" type="pres">
-      <dgm:prSet presAssocID="{833799AF-114C-42A2-88ED-078A25DE7E9B}" presName="sibTrans" presStyleCnt="0"/>
-      <dgm:spPr/>
-    </dgm:pt>
-    <dgm:pt modelId="{47C9CED9-25F2-430A-9F16-6F98D0B7A1B9}" type="pres">
-      <dgm:prSet presAssocID="{B852A021-BC4F-420A-A8AD-9F266FC8F86A}" presName="compNode" presStyleCnt="0"/>
-      <dgm:spPr/>
-    </dgm:pt>
-    <dgm:pt modelId="{EE5FB275-E4B7-426F-8E91-8B470FBDC1F0}" type="pres">
-      <dgm:prSet presAssocID="{B852A021-BC4F-420A-A8AD-9F266FC8F86A}" presName="iconBgRect" presStyleLbl="bgShp" presStyleIdx="3" presStyleCnt="4"/>
-      <dgm:spPr/>
-    </dgm:pt>
-    <dgm:pt modelId="{19E23D34-B513-4BF7-9348-7151986074B3}" type="pres">
-      <dgm:prSet presAssocID="{B852A021-BC4F-420A-A8AD-9F266FC8F86A}" presName="iconRect" presStyleLbl="node1" presStyleIdx="3" presStyleCnt="4"/>
-      <dgm:spPr>
-        <a:blipFill>
-          <a:blip xmlns:r="http://schemas.openxmlformats.org/officeDocument/2006/relationships" r:embed="rId7">
-            <a:extLst>
-              <a:ext uri="{28A0092B-C50C-407E-A947-70E740481C1C}">
-                <a14:useLocalDpi xmlns:a14="http://schemas.microsoft.com/office/drawing/2010/main" val="0"/>
-              </a:ext>
-              <a:ext uri="{96DAC541-7B7A-43D3-8B79-37D633B846F1}">
-                <asvg:svgBlip xmlns:asvg="http://schemas.microsoft.com/office/drawing/2016/SVG/main" r:embed="rId8"/>
-              </a:ext>
-            </a:extLst>
-          </a:blip>
-          <a:stretch>
-            <a:fillRect/>
-          </a:stretch>
-        </a:blipFill>
-        <a:ln>
-          <a:noFill/>
-        </a:ln>
-      </dgm:spPr>
-      <dgm:extLst>
-        <a:ext uri="{E40237B7-FDA0-4F09-8148-C483321AD2D9}">
-          <dgm14:cNvPr xmlns:dgm14="http://schemas.microsoft.com/office/drawing/2010/diagram" id="0" name="" descr="Hierarchy"/>
-        </a:ext>
-      </dgm:extLst>
-    </dgm:pt>
-    <dgm:pt modelId="{076E0CB7-8392-45F2-ADF3-DB60436145F9}" type="pres">
-      <dgm:prSet presAssocID="{B852A021-BC4F-420A-A8AD-9F266FC8F86A}" presName="spaceRect" presStyleCnt="0"/>
-      <dgm:spPr/>
-    </dgm:pt>
-    <dgm:pt modelId="{A0356D7C-74F4-4EEB-9E19-DE0D49F24FED}" type="pres">
-      <dgm:prSet presAssocID="{B852A021-BC4F-420A-A8AD-9F266FC8F86A}" presName="textRect" presStyleLbl="revTx" presStyleIdx="3" presStyleCnt="4">
-        <dgm:presLayoutVars>
-          <dgm:chMax val="1"/>
-          <dgm:chPref val="1"/>
-        </dgm:presLayoutVars>
-      </dgm:prSet>
-      <dgm:spPr/>
-    </dgm:pt>
-  </dgm:ptLst>
-  <dgm:cxnLst>
-    <dgm:cxn modelId="{73A74508-B581-4B73-B921-0B3ACD4C4612}" type="presOf" srcId="{90B4B78F-5AAE-41B8-B5E1-16EF159D871B}" destId="{5C5A512C-90C6-4164-B991-75FD568C40EF}" srcOrd="0" destOrd="0" presId="urn:microsoft.com/office/officeart/2018/5/layout/IconCircleLabelList"/>
-    <dgm:cxn modelId="{CDD7282C-9536-401E-A1BF-432274A110B9}" type="presOf" srcId="{D715E2C8-AB37-49A2-9617-D83144B02D36}" destId="{C197E439-8829-45EA-A488-88818DE634DB}" srcOrd="0" destOrd="0" presId="urn:microsoft.com/office/officeart/2018/5/layout/IconCircleLabelList"/>
-    <dgm:cxn modelId="{28189E35-8CD6-4265-BF7E-D111AF5D9680}" srcId="{1D3ECB66-4BB9-4307-9E4E-6B2315C839DB}" destId="{90B4B78F-5AAE-41B8-B5E1-16EF159D871B}" srcOrd="0" destOrd="0" parTransId="{FA13E5C6-7210-4A40-9504-D04BA8725A1F}" sibTransId="{155ACEB9-E36D-43A8-A6C0-54C8A7903F5C}"/>
-    <dgm:cxn modelId="{77F49665-601A-45B2-AB17-E4B1F7D19E94}" type="presOf" srcId="{B852A021-BC4F-420A-A8AD-9F266FC8F86A}" destId="{A0356D7C-74F4-4EEB-9E19-DE0D49F24FED}" srcOrd="0" destOrd="0" presId="urn:microsoft.com/office/officeart/2018/5/layout/IconCircleLabelList"/>
-    <dgm:cxn modelId="{7F0C7C46-B382-4D93-B9A2-A744DFB9D243}" srcId="{1D3ECB66-4BB9-4307-9E4E-6B2315C839DB}" destId="{D715E2C8-AB37-49A2-9617-D83144B02D36}" srcOrd="1" destOrd="0" parTransId="{BD32DCA5-0D48-4384-B31F-AF5559EF28AA}" sibTransId="{3EDFFEBA-B207-4DAD-803E-CD527D0F969E}"/>
-    <dgm:cxn modelId="{DCEB9DB6-BA71-4281-86AE-FA79D00DD5FD}" type="presOf" srcId="{B7CA8BB5-0527-46A4-AEB0-09DA73CA2AF4}" destId="{EABB931D-60BB-4D2C-8969-7902CF2BAED6}" srcOrd="0" destOrd="0" presId="urn:microsoft.com/office/officeart/2018/5/layout/IconCircleLabelList"/>
-    <dgm:cxn modelId="{3D887AC8-4C98-4104-82A7-04C211CCBAAA}" srcId="{1D3ECB66-4BB9-4307-9E4E-6B2315C839DB}" destId="{B7CA8BB5-0527-46A4-AEB0-09DA73CA2AF4}" srcOrd="2" destOrd="0" parTransId="{E1D18EB8-0D94-40B5-B410-C96FBBCB4530}" sibTransId="{833799AF-114C-42A2-88ED-078A25DE7E9B}"/>
-    <dgm:cxn modelId="{A9CCE9D5-3150-410B-8F8F-D02227FEE1D1}" srcId="{1D3ECB66-4BB9-4307-9E4E-6B2315C839DB}" destId="{B852A021-BC4F-420A-A8AD-9F266FC8F86A}" srcOrd="3" destOrd="0" parTransId="{B5C4FB6A-6063-48A9-84DE-5EBB6EFF5196}" sibTransId="{265C4B25-776D-4366-BE54-FE10B75B9F22}"/>
-    <dgm:cxn modelId="{2BC3A3F6-396D-47BB-9093-5B9FB355C10C}" type="presOf" srcId="{1D3ECB66-4BB9-4307-9E4E-6B2315C839DB}" destId="{BC2AD0FA-273C-4CF7-A00A-E2B58FF3CD36}" srcOrd="0" destOrd="0" presId="urn:microsoft.com/office/officeart/2018/5/layout/IconCircleLabelList"/>
-    <dgm:cxn modelId="{53A961C7-76BA-46AA-8A21-B4FA43AE4A79}" type="presParOf" srcId="{BC2AD0FA-273C-4CF7-A00A-E2B58FF3CD36}" destId="{F6B4F4A0-065C-498C-9A88-EA95796CC7DD}" srcOrd="0" destOrd="0" presId="urn:microsoft.com/office/officeart/2018/5/layout/IconCircleLabelList"/>
-    <dgm:cxn modelId="{06AC1BC4-59E9-43DE-AA96-B665D1DDB544}" type="presParOf" srcId="{F6B4F4A0-065C-498C-9A88-EA95796CC7DD}" destId="{89A618F2-946B-4DBB-89CE-13F7BD6BA040}" srcOrd="0" destOrd="0" presId="urn:microsoft.com/office/officeart/2018/5/layout/IconCircleLabelList"/>
-    <dgm:cxn modelId="{614549CC-94CF-491D-A462-2063DF2D40F2}" type="presParOf" srcId="{F6B4F4A0-065C-498C-9A88-EA95796CC7DD}" destId="{32ECB2C2-1FF8-4FB4-AB73-8BE57BEA64EC}" srcOrd="1" destOrd="0" presId="urn:microsoft.com/office/officeart/2018/5/layout/IconCircleLabelList"/>
-    <dgm:cxn modelId="{67CCB05A-972D-449B-B2FD-E98A740F9558}" type="presParOf" srcId="{F6B4F4A0-065C-498C-9A88-EA95796CC7DD}" destId="{1CDB6E60-CE3D-44AC-B50B-95B04BDB4AC7}" srcOrd="2" destOrd="0" presId="urn:microsoft.com/office/officeart/2018/5/layout/IconCircleLabelList"/>
-    <dgm:cxn modelId="{F1BBCAB3-0938-4C93-ADC7-6EABCC2E1F38}" type="presParOf" srcId="{F6B4F4A0-065C-498C-9A88-EA95796CC7DD}" destId="{5C5A512C-90C6-4164-B991-75FD568C40EF}" srcOrd="3" destOrd="0" presId="urn:microsoft.com/office/officeart/2018/5/layout/IconCircleLabelList"/>
-    <dgm:cxn modelId="{A06A8704-D297-49FB-8E14-778855081124}" type="presParOf" srcId="{BC2AD0FA-273C-4CF7-A00A-E2B58FF3CD36}" destId="{C70937AB-73F2-4785-B1C9-608F28CF5B15}" srcOrd="1" destOrd="0" presId="urn:microsoft.com/office/officeart/2018/5/layout/IconCircleLabelList"/>
-    <dgm:cxn modelId="{34298BA7-5C04-4285-B15E-DB30FA878A74}" type="presParOf" srcId="{BC2AD0FA-273C-4CF7-A00A-E2B58FF3CD36}" destId="{69F1A2BA-3F58-4A7D-836B-A90DD0A70216}" srcOrd="2" destOrd="0" presId="urn:microsoft.com/office/officeart/2018/5/layout/IconCircleLabelList"/>
-    <dgm:cxn modelId="{D2013BE0-6365-4EC1-AE95-F21E5BD07C28}" type="presParOf" srcId="{69F1A2BA-3F58-4A7D-836B-A90DD0A70216}" destId="{FCE603E2-DC72-46DB-882A-EB10FC95D085}" srcOrd="0" destOrd="0" presId="urn:microsoft.com/office/officeart/2018/5/layout/IconCircleLabelList"/>
-    <dgm:cxn modelId="{FC1E03C8-D849-436D-ADEC-F097BD04C357}" type="presParOf" srcId="{69F1A2BA-3F58-4A7D-836B-A90DD0A70216}" destId="{E2EF9737-63C0-449F-990F-61F3638E46AD}" srcOrd="1" destOrd="0" presId="urn:microsoft.com/office/officeart/2018/5/layout/IconCircleLabelList"/>
-    <dgm:cxn modelId="{AFAA2CEB-CE8E-4189-B57B-DA1DE592A5DD}" type="presParOf" srcId="{69F1A2BA-3F58-4A7D-836B-A90DD0A70216}" destId="{15011A49-3918-4550-93DF-F55CD05451D2}" srcOrd="2" destOrd="0" presId="urn:microsoft.com/office/officeart/2018/5/layout/IconCircleLabelList"/>
-    <dgm:cxn modelId="{D05B9DF4-9A5F-4A30-8753-956AA955E096}" type="presParOf" srcId="{69F1A2BA-3F58-4A7D-836B-A90DD0A70216}" destId="{C197E439-8829-45EA-A488-88818DE634DB}" srcOrd="3" destOrd="0" presId="urn:microsoft.com/office/officeart/2018/5/layout/IconCircleLabelList"/>
-    <dgm:cxn modelId="{233A94DF-3AD7-4F29-98B4-96382B3C9505}" type="presParOf" srcId="{BC2AD0FA-273C-4CF7-A00A-E2B58FF3CD36}" destId="{6F8C6AD0-5BDF-4631-A858-FD62E34FE242}" srcOrd="3" destOrd="0" presId="urn:microsoft.com/office/officeart/2018/5/layout/IconCircleLabelList"/>
-    <dgm:cxn modelId="{674C22BB-25C2-4C98-B7C6-BC2A54A4C6F5}" type="presParOf" srcId="{BC2AD0FA-273C-4CF7-A00A-E2B58FF3CD36}" destId="{4B11BF51-FF55-41C6-8129-DBC9376BC911}" srcOrd="4" destOrd="0" presId="urn:microsoft.com/office/officeart/2018/5/layout/IconCircleLabelList"/>
-    <dgm:cxn modelId="{E6093344-86C3-47AA-BFD7-154D9A9C5F57}" type="presParOf" srcId="{4B11BF51-FF55-41C6-8129-DBC9376BC911}" destId="{27D1416A-B77F-4F43-BF69-5CE99BF33651}" srcOrd="0" destOrd="0" presId="urn:microsoft.com/office/officeart/2018/5/layout/IconCircleLabelList"/>
-    <dgm:cxn modelId="{E9BB5C00-6F40-42F4-BA2A-60EBB2B910BF}" type="presParOf" srcId="{4B11BF51-FF55-41C6-8129-DBC9376BC911}" destId="{3D1CF9A1-6EA4-41DD-8ABC-394FB05DCEE7}" srcOrd="1" destOrd="0" presId="urn:microsoft.com/office/officeart/2018/5/layout/IconCircleLabelList"/>
-    <dgm:cxn modelId="{1BCE4F44-A097-4C5F-B004-3CA3533F9CEB}" type="presParOf" srcId="{4B11BF51-FF55-41C6-8129-DBC9376BC911}" destId="{6CA14DB2-4CAF-40C7-95A9-D51B58B7591D}" srcOrd="2" destOrd="0" presId="urn:microsoft.com/office/officeart/2018/5/layout/IconCircleLabelList"/>
-    <dgm:cxn modelId="{A468F401-6E32-4FE2-B987-1102AF71715D}" type="presParOf" srcId="{4B11BF51-FF55-41C6-8129-DBC9376BC911}" destId="{EABB931D-60BB-4D2C-8969-7902CF2BAED6}" srcOrd="3" destOrd="0" presId="urn:microsoft.com/office/officeart/2018/5/layout/IconCircleLabelList"/>
-    <dgm:cxn modelId="{5A2D3B7D-E893-4B15-81B4-C28939BEC9A0}" type="presParOf" srcId="{BC2AD0FA-273C-4CF7-A00A-E2B58FF3CD36}" destId="{C2F7B7D7-C10F-43DB-8D1F-C1EDB7574C5A}" srcOrd="5" destOrd="0" presId="urn:microsoft.com/office/officeart/2018/5/layout/IconCircleLabelList"/>
-    <dgm:cxn modelId="{CA2F76F7-742F-45F7-A981-8783E23A47FE}" type="presParOf" srcId="{BC2AD0FA-273C-4CF7-A00A-E2B58FF3CD36}" destId="{47C9CED9-25F2-430A-9F16-6F98D0B7A1B9}" srcOrd="6" destOrd="0" presId="urn:microsoft.com/office/officeart/2018/5/layout/IconCircleLabelList"/>
-    <dgm:cxn modelId="{A5EE8CAE-F32E-46A1-957A-2208B288AE19}" type="presParOf" srcId="{47C9CED9-25F2-430A-9F16-6F98D0B7A1B9}" destId="{EE5FB275-E4B7-426F-8E91-8B470FBDC1F0}" srcOrd="0" destOrd="0" presId="urn:microsoft.com/office/officeart/2018/5/layout/IconCircleLabelList"/>
-    <dgm:cxn modelId="{ECA4BDD4-C648-471C-BC9E-C5E71620DD57}" type="presParOf" srcId="{47C9CED9-25F2-430A-9F16-6F98D0B7A1B9}" destId="{19E23D34-B513-4BF7-9348-7151986074B3}" srcOrd="1" destOrd="0" presId="urn:microsoft.com/office/officeart/2018/5/layout/IconCircleLabelList"/>
-    <dgm:cxn modelId="{5D9BC3F8-C807-4DD2-96E2-AFD3713914DC}" type="presParOf" srcId="{47C9CED9-25F2-430A-9F16-6F98D0B7A1B9}" destId="{076E0CB7-8392-45F2-ADF3-DB60436145F9}" srcOrd="2" destOrd="0" presId="urn:microsoft.com/office/officeart/2018/5/layout/IconCircleLabelList"/>
-    <dgm:cxn modelId="{B7674E8F-62ED-4B4D-A334-A3CDF327174B}" type="presParOf" srcId="{47C9CED9-25F2-430A-9F16-6F98D0B7A1B9}" destId="{A0356D7C-74F4-4EEB-9E19-DE0D49F24FED}" srcOrd="3" destOrd="0" presId="urn:microsoft.com/office/officeart/2018/5/layout/IconCircleLabelList"/>
   </dgm:cxnLst>
   <dgm:bg/>
   <dgm:whole/>
@@ -8589,8 +7316,8 @@
       </dsp:nvSpPr>
       <dsp:spPr>
         <a:xfrm>
-          <a:off x="616935" y="1100"/>
-          <a:ext cx="921683" cy="921683"/>
+          <a:off x="76086" y="696314"/>
+          <a:ext cx="1043699" cy="1043699"/>
         </a:xfrm>
         <a:prstGeom prst="ellipse">
           <a:avLst/>
@@ -8628,8 +7355,8 @@
       </dsp:nvSpPr>
       <dsp:spPr>
         <a:xfrm>
-          <a:off x="810488" y="194654"/>
-          <a:ext cx="534576" cy="534576"/>
+          <a:off x="295263" y="915491"/>
+          <a:ext cx="605345" cy="605345"/>
         </a:xfrm>
         <a:prstGeom prst="rect">
           <a:avLst/>
@@ -8685,8 +7412,8 @@
       </dsp:nvSpPr>
       <dsp:spPr>
         <a:xfrm>
-          <a:off x="1736122" y="1100"/>
-          <a:ext cx="2172539" cy="921683"/>
+          <a:off x="1343436" y="696314"/>
+          <a:ext cx="2460149" cy="1043699"/>
         </a:xfrm>
         <a:prstGeom prst="rect">
           <a:avLst/>
@@ -8734,8 +7461,8 @@
         </a:p>
       </dsp:txBody>
       <dsp:txXfrm>
-        <a:off x="1736122" y="1100"/>
-        <a:ext cx="2172539" cy="921683"/>
+        <a:off x="1343436" y="696314"/>
+        <a:ext cx="2460149" cy="1043699"/>
       </dsp:txXfrm>
     </dsp:sp>
     <dsp:sp modelId="{877528FE-A63E-4364-B832-5A94F6B8A64C}">
@@ -8745,8 +7472,8 @@
       </dsp:nvSpPr>
       <dsp:spPr>
         <a:xfrm>
-          <a:off x="4287209" y="1100"/>
-          <a:ext cx="921683" cy="921683"/>
+          <a:off x="4232248" y="696314"/>
+          <a:ext cx="1043699" cy="1043699"/>
         </a:xfrm>
         <a:prstGeom prst="ellipse">
           <a:avLst/>
@@ -8784,8 +7511,8 @@
       </dsp:nvSpPr>
       <dsp:spPr>
         <a:xfrm>
-          <a:off x="4480763" y="194654"/>
-          <a:ext cx="534576" cy="534576"/>
+          <a:off x="4451425" y="915491"/>
+          <a:ext cx="605345" cy="605345"/>
         </a:xfrm>
         <a:prstGeom prst="rect">
           <a:avLst/>
@@ -8841,8 +7568,8 @@
       </dsp:nvSpPr>
       <dsp:spPr>
         <a:xfrm>
-          <a:off x="5406396" y="1100"/>
-          <a:ext cx="2172539" cy="921683"/>
+          <a:off x="5499598" y="696314"/>
+          <a:ext cx="2460149" cy="1043699"/>
         </a:xfrm>
         <a:prstGeom prst="rect">
           <a:avLst/>
@@ -8890,8 +7617,8 @@
         </a:p>
       </dsp:txBody>
       <dsp:txXfrm>
-        <a:off x="5406396" y="1100"/>
-        <a:ext cx="2172539" cy="921683"/>
+        <a:off x="5499598" y="696314"/>
+        <a:ext cx="2460149" cy="1043699"/>
       </dsp:txXfrm>
     </dsp:sp>
     <dsp:sp modelId="{52D00348-624B-420F-8AB9-74999E2142BA}">
@@ -8901,8 +7628,8 @@
       </dsp:nvSpPr>
       <dsp:spPr>
         <a:xfrm>
-          <a:off x="616935" y="1635560"/>
-          <a:ext cx="921683" cy="921683"/>
+          <a:off x="8388410" y="696314"/>
+          <a:ext cx="1043699" cy="1043699"/>
         </a:xfrm>
         <a:prstGeom prst="ellipse">
           <a:avLst/>
@@ -8940,8 +7667,8 @@
       </dsp:nvSpPr>
       <dsp:spPr>
         <a:xfrm>
-          <a:off x="810488" y="1829114"/>
-          <a:ext cx="534576" cy="534576"/>
+          <a:off x="8607587" y="915491"/>
+          <a:ext cx="605345" cy="605345"/>
         </a:xfrm>
         <a:prstGeom prst="rect">
           <a:avLst/>
@@ -8997,8 +7724,8 @@
       </dsp:nvSpPr>
       <dsp:spPr>
         <a:xfrm>
-          <a:off x="1736122" y="1635560"/>
-          <a:ext cx="2172539" cy="921683"/>
+          <a:off x="9655760" y="696314"/>
+          <a:ext cx="2460149" cy="1043699"/>
         </a:xfrm>
         <a:prstGeom prst="rect">
           <a:avLst/>
@@ -9046,8 +7773,8 @@
         </a:p>
       </dsp:txBody>
       <dsp:txXfrm>
-        <a:off x="1736122" y="1635560"/>
-        <a:ext cx="2172539" cy="921683"/>
+        <a:off x="9655760" y="696314"/>
+        <a:ext cx="2460149" cy="1043699"/>
       </dsp:txXfrm>
     </dsp:sp>
     <dsp:sp modelId="{E788EA25-25C6-46A7-820D-365EFA024EA0}">
@@ -9057,8 +7784,8 @@
       </dsp:nvSpPr>
       <dsp:spPr>
         <a:xfrm>
-          <a:off x="4287209" y="1635560"/>
-          <a:ext cx="921683" cy="921683"/>
+          <a:off x="76086" y="2452790"/>
+          <a:ext cx="1043699" cy="1043699"/>
         </a:xfrm>
         <a:prstGeom prst="ellipse">
           <a:avLst/>
@@ -9096,8 +7823,8 @@
       </dsp:nvSpPr>
       <dsp:spPr>
         <a:xfrm>
-          <a:off x="4480763" y="1829114"/>
-          <a:ext cx="534576" cy="534576"/>
+          <a:off x="295263" y="2671967"/>
+          <a:ext cx="605345" cy="605345"/>
         </a:xfrm>
         <a:prstGeom prst="rect">
           <a:avLst/>
@@ -9153,8 +7880,8 @@
       </dsp:nvSpPr>
       <dsp:spPr>
         <a:xfrm>
-          <a:off x="5406396" y="1635560"/>
-          <a:ext cx="2172539" cy="921683"/>
+          <a:off x="1343436" y="2452790"/>
+          <a:ext cx="2460149" cy="1043699"/>
         </a:xfrm>
         <a:prstGeom prst="rect">
           <a:avLst/>
@@ -9202,8 +7929,8 @@
         </a:p>
       </dsp:txBody>
       <dsp:txXfrm>
-        <a:off x="5406396" y="1635560"/>
-        <a:ext cx="2172539" cy="921683"/>
+        <a:off x="1343436" y="2452790"/>
+        <a:ext cx="2460149" cy="1043699"/>
       </dsp:txXfrm>
     </dsp:sp>
     <dsp:sp modelId="{BE3FA907-B8CD-4018-9A32-8358B85610BF}">
@@ -9213,8 +7940,8 @@
       </dsp:nvSpPr>
       <dsp:spPr>
         <a:xfrm>
-          <a:off x="616935" y="3270020"/>
-          <a:ext cx="921683" cy="921683"/>
+          <a:off x="4232248" y="2452790"/>
+          <a:ext cx="1043699" cy="1043699"/>
         </a:xfrm>
         <a:prstGeom prst="ellipse">
           <a:avLst/>
@@ -9252,8 +7979,8 @@
       </dsp:nvSpPr>
       <dsp:spPr>
         <a:xfrm>
-          <a:off x="810488" y="3463574"/>
-          <a:ext cx="534576" cy="534576"/>
+          <a:off x="4451425" y="2671967"/>
+          <a:ext cx="605345" cy="605345"/>
         </a:xfrm>
         <a:prstGeom prst="rect">
           <a:avLst/>
@@ -9309,8 +8036,8 @@
       </dsp:nvSpPr>
       <dsp:spPr>
         <a:xfrm>
-          <a:off x="1736122" y="3270020"/>
-          <a:ext cx="2172539" cy="921683"/>
+          <a:off x="5499598" y="2452790"/>
+          <a:ext cx="2460149" cy="1043699"/>
         </a:xfrm>
         <a:prstGeom prst="rect">
           <a:avLst/>
@@ -9358,8 +8085,8 @@
         </a:p>
       </dsp:txBody>
       <dsp:txXfrm>
-        <a:off x="1736122" y="3270020"/>
-        <a:ext cx="2172539" cy="921683"/>
+        <a:off x="5499598" y="2452790"/>
+        <a:ext cx="2460149" cy="1043699"/>
       </dsp:txXfrm>
     </dsp:sp>
   </dsp:spTree>
@@ -9381,8 +8108,8 @@
       </dsp:nvSpPr>
       <dsp:spPr>
         <a:xfrm>
-          <a:off x="616935" y="1100"/>
-          <a:ext cx="921683" cy="921683"/>
+          <a:off x="353615" y="779118"/>
+          <a:ext cx="929061" cy="929061"/>
         </a:xfrm>
         <a:prstGeom prst="ellipse">
           <a:avLst/>
@@ -9421,8 +8148,8 @@
       </dsp:nvSpPr>
       <dsp:spPr>
         <a:xfrm>
-          <a:off x="810488" y="194654"/>
-          <a:ext cx="534576" cy="534576"/>
+          <a:off x="548718" y="974221"/>
+          <a:ext cx="538855" cy="538855"/>
         </a:xfrm>
         <a:prstGeom prst="rect">
           <a:avLst/>
@@ -9477,8 +8204,8 @@
       </dsp:nvSpPr>
       <dsp:spPr>
         <a:xfrm>
-          <a:off x="1736122" y="1100"/>
-          <a:ext cx="2172539" cy="921683"/>
+          <a:off x="1481761" y="779118"/>
+          <a:ext cx="2189931" cy="929061"/>
         </a:xfrm>
         <a:prstGeom prst="rect">
           <a:avLst/>
@@ -9526,8 +8253,8 @@
         </a:p>
       </dsp:txBody>
       <dsp:txXfrm>
-        <a:off x="1736122" y="1100"/>
-        <a:ext cx="2172539" cy="921683"/>
+        <a:off x="1481761" y="779118"/>
+        <a:ext cx="2189931" cy="929061"/>
       </dsp:txXfrm>
     </dsp:sp>
     <dsp:sp modelId="{32FBCDDF-EE13-43C1-8603-8FC5F9D72523}">
@@ -9537,8 +8264,8 @@
       </dsp:nvSpPr>
       <dsp:spPr>
         <a:xfrm>
-          <a:off x="4287209" y="1100"/>
-          <a:ext cx="921683" cy="921683"/>
+          <a:off x="4053271" y="779118"/>
+          <a:ext cx="929061" cy="929061"/>
         </a:xfrm>
         <a:prstGeom prst="ellipse">
           <a:avLst/>
@@ -9577,8 +8304,8 @@
       </dsp:nvSpPr>
       <dsp:spPr>
         <a:xfrm>
-          <a:off x="4480763" y="194654"/>
-          <a:ext cx="534576" cy="534576"/>
+          <a:off x="4248374" y="974221"/>
+          <a:ext cx="538855" cy="538855"/>
         </a:xfrm>
         <a:prstGeom prst="rect">
           <a:avLst/>
@@ -9633,8 +8360,8 @@
       </dsp:nvSpPr>
       <dsp:spPr>
         <a:xfrm>
-          <a:off x="5406396" y="1100"/>
-          <a:ext cx="2172539" cy="921683"/>
+          <a:off x="5181418" y="779118"/>
+          <a:ext cx="2189931" cy="929061"/>
         </a:xfrm>
         <a:prstGeom prst="rect">
           <a:avLst/>
@@ -9682,8 +8409,8 @@
         </a:p>
       </dsp:txBody>
       <dsp:txXfrm>
-        <a:off x="5406396" y="1100"/>
-        <a:ext cx="2172539" cy="921683"/>
+        <a:off x="5181418" y="779118"/>
+        <a:ext cx="2189931" cy="929061"/>
       </dsp:txXfrm>
     </dsp:sp>
     <dsp:sp modelId="{9C0F301E-65ED-4341-8B2E-11E091473946}">
@@ -9693,8 +8420,8 @@
       </dsp:nvSpPr>
       <dsp:spPr>
         <a:xfrm>
-          <a:off x="616935" y="1635560"/>
-          <a:ext cx="921683" cy="921683"/>
+          <a:off x="7752928" y="779118"/>
+          <a:ext cx="929061" cy="929061"/>
         </a:xfrm>
         <a:prstGeom prst="ellipse">
           <a:avLst/>
@@ -9733,8 +8460,8 @@
       </dsp:nvSpPr>
       <dsp:spPr>
         <a:xfrm>
-          <a:off x="810488" y="1829114"/>
-          <a:ext cx="534576" cy="534576"/>
+          <a:off x="7948031" y="974221"/>
+          <a:ext cx="538855" cy="538855"/>
         </a:xfrm>
         <a:prstGeom prst="rect">
           <a:avLst/>
@@ -9789,8 +8516,8 @@
       </dsp:nvSpPr>
       <dsp:spPr>
         <a:xfrm>
-          <a:off x="1736122" y="1635560"/>
-          <a:ext cx="2172539" cy="921683"/>
+          <a:off x="8881074" y="779118"/>
+          <a:ext cx="2189931" cy="929061"/>
         </a:xfrm>
         <a:prstGeom prst="rect">
           <a:avLst/>
@@ -9838,8 +8565,8 @@
         </a:p>
       </dsp:txBody>
       <dsp:txXfrm>
-        <a:off x="1736122" y="1635560"/>
-        <a:ext cx="2172539" cy="921683"/>
+        <a:off x="8881074" y="779118"/>
+        <a:ext cx="2189931" cy="929061"/>
       </dsp:txXfrm>
     </dsp:sp>
     <dsp:sp modelId="{66EE1735-B50E-45C9-9B57-E35512E99309}">
@@ -9849,8 +8576,8 @@
       </dsp:nvSpPr>
       <dsp:spPr>
         <a:xfrm>
-          <a:off x="4287209" y="1635560"/>
-          <a:ext cx="921683" cy="921683"/>
+          <a:off x="353615" y="2407917"/>
+          <a:ext cx="929061" cy="929061"/>
         </a:xfrm>
         <a:prstGeom prst="ellipse">
           <a:avLst/>
@@ -9889,8 +8616,8 @@
       </dsp:nvSpPr>
       <dsp:spPr>
         <a:xfrm>
-          <a:off x="4480763" y="1829114"/>
-          <a:ext cx="534576" cy="534576"/>
+          <a:off x="548718" y="2603020"/>
+          <a:ext cx="538855" cy="538855"/>
         </a:xfrm>
         <a:prstGeom prst="rect">
           <a:avLst/>
@@ -9945,8 +8672,8 @@
       </dsp:nvSpPr>
       <dsp:spPr>
         <a:xfrm>
-          <a:off x="5406396" y="1635560"/>
-          <a:ext cx="2172539" cy="921683"/>
+          <a:off x="1481761" y="2407917"/>
+          <a:ext cx="2189931" cy="929061"/>
         </a:xfrm>
         <a:prstGeom prst="rect">
           <a:avLst/>
@@ -9994,8 +8721,8 @@
         </a:p>
       </dsp:txBody>
       <dsp:txXfrm>
-        <a:off x="5406396" y="1635560"/>
-        <a:ext cx="2172539" cy="921683"/>
+        <a:off x="1481761" y="2407917"/>
+        <a:ext cx="2189931" cy="929061"/>
       </dsp:txXfrm>
     </dsp:sp>
     <dsp:sp modelId="{856AB810-2C0E-470C-BF95-52D05568B50E}">
@@ -10005,8 +8732,8 @@
       </dsp:nvSpPr>
       <dsp:spPr>
         <a:xfrm>
-          <a:off x="616935" y="3270020"/>
-          <a:ext cx="921683" cy="921683"/>
+          <a:off x="4053271" y="2407917"/>
+          <a:ext cx="929061" cy="929061"/>
         </a:xfrm>
         <a:prstGeom prst="ellipse">
           <a:avLst/>
@@ -10045,8 +8772,8 @@
       </dsp:nvSpPr>
       <dsp:spPr>
         <a:xfrm>
-          <a:off x="810488" y="3463574"/>
-          <a:ext cx="534576" cy="534576"/>
+          <a:off x="4248374" y="2603020"/>
+          <a:ext cx="538855" cy="538855"/>
         </a:xfrm>
         <a:prstGeom prst="rect">
           <a:avLst/>
@@ -10101,8 +8828,8 @@
       </dsp:nvSpPr>
       <dsp:spPr>
         <a:xfrm>
-          <a:off x="1736122" y="3270020"/>
-          <a:ext cx="2172539" cy="921683"/>
+          <a:off x="5181418" y="2407917"/>
+          <a:ext cx="2189931" cy="929061"/>
         </a:xfrm>
         <a:prstGeom prst="rect">
           <a:avLst/>
@@ -10150,8 +8877,8 @@
         </a:p>
       </dsp:txBody>
       <dsp:txXfrm>
-        <a:off x="1736122" y="3270020"/>
-        <a:ext cx="2172539" cy="921683"/>
+        <a:off x="5181418" y="2407917"/>
+        <a:ext cx="2189931" cy="929061"/>
       </dsp:txXfrm>
     </dsp:sp>
   </dsp:spTree>
@@ -10173,8 +8900,8 @@
       </dsp:nvSpPr>
       <dsp:spPr>
         <a:xfrm>
-          <a:off x="369131" y="414748"/>
-          <a:ext cx="598798" cy="598798"/>
+          <a:off x="428205" y="325120"/>
+          <a:ext cx="693720" cy="693720"/>
         </a:xfrm>
         <a:prstGeom prst="rect">
           <a:avLst/>
@@ -10229,8 +8956,8 @@
       </dsp:nvSpPr>
       <dsp:spPr>
         <a:xfrm>
-          <a:off x="91914" y="1109152"/>
-          <a:ext cx="1330664" cy="532265"/>
+          <a:off x="107043" y="1129662"/>
+          <a:ext cx="1541601" cy="616640"/>
         </a:xfrm>
         <a:prstGeom prst="rect">
           <a:avLst/>
@@ -10278,8 +9005,8 @@
         </a:p>
       </dsp:txBody>
       <dsp:txXfrm>
-        <a:off x="91914" y="1109152"/>
-        <a:ext cx="1330664" cy="532265"/>
+        <a:off x="107043" y="1129662"/>
+        <a:ext cx="1541601" cy="616640"/>
       </dsp:txXfrm>
     </dsp:sp>
     <dsp:sp modelId="{16B3EC81-D07F-46EE-920A-3D5C792F38AE}">
@@ -10289,8 +9016,8 @@
       </dsp:nvSpPr>
       <dsp:spPr>
         <a:xfrm>
-          <a:off x="1932661" y="414748"/>
-          <a:ext cx="598798" cy="598798"/>
+          <a:off x="2239586" y="325120"/>
+          <a:ext cx="693720" cy="693720"/>
         </a:xfrm>
         <a:prstGeom prst="rect">
           <a:avLst/>
@@ -10345,8 +9072,8 @@
       </dsp:nvSpPr>
       <dsp:spPr>
         <a:xfrm>
-          <a:off x="1566729" y="1213151"/>
-          <a:ext cx="1330664" cy="532265"/>
+          <a:off x="1815646" y="1250147"/>
+          <a:ext cx="1541601" cy="616640"/>
         </a:xfrm>
         <a:prstGeom prst="rect">
           <a:avLst/>
@@ -10394,8 +9121,8 @@
         </a:p>
       </dsp:txBody>
       <dsp:txXfrm>
-        <a:off x="1566729" y="1213151"/>
-        <a:ext cx="1330664" cy="532265"/>
+        <a:off x="1815646" y="1250147"/>
+        <a:ext cx="1541601" cy="616640"/>
       </dsp:txXfrm>
     </dsp:sp>
     <dsp:sp modelId="{D510F8B4-F667-481A-A60A-D5A74439BD74}">
@@ -10405,8 +9132,8 @@
       </dsp:nvSpPr>
       <dsp:spPr>
         <a:xfrm>
-          <a:off x="3496191" y="414748"/>
-          <a:ext cx="598798" cy="598798"/>
+          <a:off x="4050968" y="325120"/>
+          <a:ext cx="693720" cy="693720"/>
         </a:xfrm>
         <a:prstGeom prst="rect">
           <a:avLst/>
@@ -10461,8 +9188,8 @@
       </dsp:nvSpPr>
       <dsp:spPr>
         <a:xfrm>
-          <a:off x="3130259" y="1213151"/>
-          <a:ext cx="1330664" cy="532265"/>
+          <a:off x="3627028" y="1250147"/>
+          <a:ext cx="1541601" cy="616640"/>
         </a:xfrm>
         <a:prstGeom prst="rect">
           <a:avLst/>
@@ -10510,8 +9237,8 @@
         </a:p>
       </dsp:txBody>
       <dsp:txXfrm>
-        <a:off x="3130259" y="1213151"/>
-        <a:ext cx="1330664" cy="532265"/>
+        <a:off x="3627028" y="1250147"/>
+        <a:ext cx="1541601" cy="616640"/>
       </dsp:txXfrm>
     </dsp:sp>
     <dsp:sp modelId="{EA17F9AA-577F-4AF0-A054-5F1B730E52AA}">
@@ -10521,8 +9248,8 @@
       </dsp:nvSpPr>
       <dsp:spPr>
         <a:xfrm>
-          <a:off x="5059722" y="414748"/>
-          <a:ext cx="598798" cy="598798"/>
+          <a:off x="5862350" y="325120"/>
+          <a:ext cx="693720" cy="693720"/>
         </a:xfrm>
         <a:prstGeom prst="rect">
           <a:avLst/>
@@ -10577,8 +9304,8 @@
       </dsp:nvSpPr>
       <dsp:spPr>
         <a:xfrm>
-          <a:off x="4693789" y="1213151"/>
-          <a:ext cx="1330664" cy="532265"/>
+          <a:off x="5438410" y="1250147"/>
+          <a:ext cx="1541601" cy="616640"/>
         </a:xfrm>
         <a:prstGeom prst="rect">
           <a:avLst/>
@@ -10626,8 +9353,8 @@
         </a:p>
       </dsp:txBody>
       <dsp:txXfrm>
-        <a:off x="4693789" y="1213151"/>
-        <a:ext cx="1330664" cy="532265"/>
+        <a:off x="5438410" y="1250147"/>
+        <a:ext cx="1541601" cy="616640"/>
       </dsp:txXfrm>
     </dsp:sp>
     <dsp:sp modelId="{786B2141-86FF-4967-92EB-64B0411D13D0}">
@@ -10637,8 +9364,8 @@
       </dsp:nvSpPr>
       <dsp:spPr>
         <a:xfrm>
-          <a:off x="6623252" y="414748"/>
-          <a:ext cx="598798" cy="598798"/>
+          <a:off x="7673732" y="325120"/>
+          <a:ext cx="693720" cy="693720"/>
         </a:xfrm>
         <a:prstGeom prst="rect">
           <a:avLst/>
@@ -10693,8 +9420,8 @@
       </dsp:nvSpPr>
       <dsp:spPr>
         <a:xfrm>
-          <a:off x="6257319" y="1213151"/>
-          <a:ext cx="1330664" cy="532265"/>
+          <a:off x="7249791" y="1250147"/>
+          <a:ext cx="1541601" cy="616640"/>
         </a:xfrm>
         <a:prstGeom prst="rect">
           <a:avLst/>
@@ -10742,8 +9469,8 @@
         </a:p>
       </dsp:txBody>
       <dsp:txXfrm>
-        <a:off x="6257319" y="1213151"/>
-        <a:ext cx="1330664" cy="532265"/>
+        <a:off x="7249791" y="1250147"/>
+        <a:ext cx="1541601" cy="616640"/>
       </dsp:txXfrm>
     </dsp:sp>
     <dsp:sp modelId="{D9C856F0-4DDC-451D-9DB2-688D4F82E788}">
@@ -10753,8 +9480,8 @@
       </dsp:nvSpPr>
       <dsp:spPr>
         <a:xfrm>
-          <a:off x="8186782" y="414748"/>
-          <a:ext cx="598798" cy="598798"/>
+          <a:off x="9485114" y="325120"/>
+          <a:ext cx="693720" cy="693720"/>
         </a:xfrm>
         <a:prstGeom prst="rect">
           <a:avLst/>
@@ -10809,8 +9536,8 @@
       </dsp:nvSpPr>
       <dsp:spPr>
         <a:xfrm>
-          <a:off x="7820850" y="1213151"/>
-          <a:ext cx="1330664" cy="532265"/>
+          <a:off x="9061173" y="1250147"/>
+          <a:ext cx="1541601" cy="616640"/>
         </a:xfrm>
         <a:prstGeom prst="rect">
           <a:avLst/>
@@ -10858,8 +9585,8 @@
         </a:p>
       </dsp:txBody>
       <dsp:txXfrm>
-        <a:off x="7820850" y="1213151"/>
-        <a:ext cx="1330664" cy="532265"/>
+        <a:off x="9061173" y="1250147"/>
+        <a:ext cx="1541601" cy="616640"/>
       </dsp:txXfrm>
     </dsp:sp>
   </dsp:spTree>
@@ -10881,8 +9608,8 @@
       </dsp:nvSpPr>
       <dsp:spPr>
         <a:xfrm>
-          <a:off x="6486" y="860978"/>
-          <a:ext cx="854929" cy="854929"/>
+          <a:off x="3292" y="672683"/>
+          <a:ext cx="1126617" cy="1126617"/>
         </a:xfrm>
         <a:prstGeom prst="rect">
           <a:avLst/>
@@ -10937,8 +9664,8 @@
       </dsp:nvSpPr>
       <dsp:spPr>
         <a:xfrm>
-          <a:off x="6486" y="1822154"/>
-          <a:ext cx="2442656" cy="366398"/>
+          <a:off x="3292" y="1926717"/>
+          <a:ext cx="3218906" cy="482835"/>
         </a:xfrm>
         <a:prstGeom prst="rect">
           <a:avLst/>
@@ -10967,7 +9694,7 @@
         </a:bodyPr>
         <a:lstStyle/>
         <a:p>
-          <a:pPr marL="0" lvl="0" indent="0" algn="l" defTabSz="933450">
+          <a:pPr marL="0" lvl="0" indent="0" algn="l" defTabSz="1200150">
             <a:lnSpc>
               <a:spcPct val="100000"/>
             </a:lnSpc>
@@ -10981,14 +9708,14 @@
             <a:defRPr b="1"/>
           </a:pPr>
           <a:r>
-            <a:rPr lang="en-US" sz="2100" kern="1200"/>
+            <a:rPr lang="en-US" sz="2700" kern="1200"/>
             <a:t>Operational:</a:t>
           </a:r>
         </a:p>
       </dsp:txBody>
       <dsp:txXfrm>
-        <a:off x="6486" y="1822154"/>
-        <a:ext cx="2442656" cy="366398"/>
+        <a:off x="3292" y="1926717"/>
+        <a:ext cx="3218906" cy="482835"/>
       </dsp:txXfrm>
     </dsp:sp>
     <dsp:sp modelId="{79146AB4-CB42-4C28-808C-F7624073EF5B}">
@@ -10998,8 +9725,8 @@
       </dsp:nvSpPr>
       <dsp:spPr>
         <a:xfrm>
-          <a:off x="6486" y="2237970"/>
-          <a:ext cx="2442656" cy="1093856"/>
+          <a:off x="3292" y="2468816"/>
+          <a:ext cx="3218906" cy="1167040"/>
         </a:xfrm>
         <a:prstGeom prst="rect">
           <a:avLst/>
@@ -11028,7 +9755,7 @@
         </a:bodyPr>
         <a:lstStyle/>
         <a:p>
-          <a:pPr marL="0" lvl="0" indent="0" algn="l" defTabSz="711200">
+          <a:pPr marL="0" lvl="0" indent="0" algn="l" defTabSz="755650">
             <a:lnSpc>
               <a:spcPct val="100000"/>
             </a:lnSpc>
@@ -11041,12 +9768,12 @@
             <a:buNone/>
           </a:pPr>
           <a:r>
-            <a:rPr lang="en-US" sz="1600" kern="1200"/>
+            <a:rPr lang="en-US" sz="1700" kern="1200"/>
             <a:t>Prioritize addressing technical &amp; staffing delays.</a:t>
           </a:r>
         </a:p>
         <a:p>
-          <a:pPr marL="0" lvl="0" indent="0" algn="l" defTabSz="711200">
+          <a:pPr marL="0" lvl="0" indent="0" algn="l" defTabSz="755650">
             <a:lnSpc>
               <a:spcPct val="100000"/>
             </a:lnSpc>
@@ -11059,14 +9786,14 @@
             <a:buNone/>
           </a:pPr>
           <a:r>
-            <a:rPr lang="en-US" sz="1600" kern="1200"/>
+            <a:rPr lang="en-US" sz="1700" kern="1200" dirty="0"/>
             <a:t>Strengthen teams during peak demand slots.</a:t>
           </a:r>
         </a:p>
       </dsp:txBody>
       <dsp:txXfrm>
-        <a:off x="6486" y="2237970"/>
-        <a:ext cx="2442656" cy="1093856"/>
+        <a:off x="3292" y="2468816"/>
+        <a:ext cx="3218906" cy="1167040"/>
       </dsp:txXfrm>
     </dsp:sp>
     <dsp:sp modelId="{4D8EBFB1-E236-409F-A421-5F678DE26481}">
@@ -11076,8 +9803,8 @@
       </dsp:nvSpPr>
       <dsp:spPr>
         <a:xfrm>
-          <a:off x="2876607" y="860978"/>
-          <a:ext cx="854929" cy="854929"/>
+          <a:off x="3785506" y="672683"/>
+          <a:ext cx="1126617" cy="1126617"/>
         </a:xfrm>
         <a:prstGeom prst="rect">
           <a:avLst/>
@@ -11132,8 +9859,8 @@
       </dsp:nvSpPr>
       <dsp:spPr>
         <a:xfrm>
-          <a:off x="2876607" y="1822154"/>
-          <a:ext cx="2442656" cy="366398"/>
+          <a:off x="3785506" y="1926717"/>
+          <a:ext cx="3218906" cy="482835"/>
         </a:xfrm>
         <a:prstGeom prst="rect">
           <a:avLst/>
@@ -11162,7 +9889,7 @@
         </a:bodyPr>
         <a:lstStyle/>
         <a:p>
-          <a:pPr marL="0" lvl="0" indent="0" algn="l" defTabSz="933450">
+          <a:pPr marL="0" lvl="0" indent="0" algn="l" defTabSz="1200150">
             <a:lnSpc>
               <a:spcPct val="100000"/>
             </a:lnSpc>
@@ -11176,14 +9903,14 @@
             <a:defRPr b="1"/>
           </a:pPr>
           <a:r>
-            <a:rPr lang="en-US" sz="2100" kern="1200"/>
+            <a:rPr lang="en-US" sz="2700" kern="1200"/>
             <a:t>Commercial:</a:t>
           </a:r>
         </a:p>
       </dsp:txBody>
       <dsp:txXfrm>
-        <a:off x="2876607" y="1822154"/>
-        <a:ext cx="2442656" cy="366398"/>
+        <a:off x="3785506" y="1926717"/>
+        <a:ext cx="3218906" cy="482835"/>
       </dsp:txXfrm>
     </dsp:sp>
     <dsp:sp modelId="{A004F38D-0588-4817-BE97-D5646F679A73}">
@@ -11193,8 +9920,8 @@
       </dsp:nvSpPr>
       <dsp:spPr>
         <a:xfrm>
-          <a:off x="2876607" y="2237970"/>
-          <a:ext cx="2442656" cy="1093856"/>
+          <a:off x="3785506" y="2468816"/>
+          <a:ext cx="3218906" cy="1167040"/>
         </a:xfrm>
         <a:prstGeom prst="rect">
           <a:avLst/>
@@ -11223,7 +9950,7 @@
         </a:bodyPr>
         <a:lstStyle/>
         <a:p>
-          <a:pPr marL="0" lvl="0" indent="0" algn="l" defTabSz="711200">
+          <a:pPr marL="0" lvl="0" indent="0" algn="l" defTabSz="755650">
             <a:lnSpc>
               <a:spcPct val="100000"/>
             </a:lnSpc>
@@ -11236,12 +9963,12 @@
             <a:buNone/>
           </a:pPr>
           <a:r>
-            <a:rPr lang="en-US" sz="1600" kern="1200"/>
+            <a:rPr lang="en-US" sz="1700" kern="1200"/>
             <a:t>Expand Railcard‑based promotions.</a:t>
           </a:r>
         </a:p>
         <a:p>
-          <a:pPr marL="0" lvl="0" indent="0" algn="l" defTabSz="711200">
+          <a:pPr marL="0" lvl="0" indent="0" algn="l" defTabSz="755650">
             <a:lnSpc>
               <a:spcPct val="100000"/>
             </a:lnSpc>
@@ -11254,14 +9981,14 @@
             <a:buNone/>
           </a:pPr>
           <a:r>
-            <a:rPr lang="en-US" sz="1600" kern="1200"/>
+            <a:rPr lang="en-US" sz="1700" kern="1200"/>
             <a:t>Introduce dynamic ticket pricing for early bookings.</a:t>
           </a:r>
         </a:p>
       </dsp:txBody>
       <dsp:txXfrm>
-        <a:off x="2876607" y="2237970"/>
-        <a:ext cx="2442656" cy="1093856"/>
+        <a:off x="3785506" y="2468816"/>
+        <a:ext cx="3218906" cy="1167040"/>
       </dsp:txXfrm>
     </dsp:sp>
     <dsp:sp modelId="{370A3460-DEB3-4A24-8D86-80930D1FEB04}">
@@ -11271,8 +9998,8 @@
       </dsp:nvSpPr>
       <dsp:spPr>
         <a:xfrm>
-          <a:off x="5746728" y="860978"/>
-          <a:ext cx="854929" cy="854929"/>
+          <a:off x="7567721" y="672683"/>
+          <a:ext cx="1126617" cy="1126617"/>
         </a:xfrm>
         <a:prstGeom prst="rect">
           <a:avLst/>
@@ -11327,8 +10054,8 @@
       </dsp:nvSpPr>
       <dsp:spPr>
         <a:xfrm>
-          <a:off x="5746728" y="1822154"/>
-          <a:ext cx="2442656" cy="366398"/>
+          <a:off x="7567721" y="1926717"/>
+          <a:ext cx="3218906" cy="482835"/>
         </a:xfrm>
         <a:prstGeom prst="rect">
           <a:avLst/>
@@ -11357,7 +10084,7 @@
         </a:bodyPr>
         <a:lstStyle/>
         <a:p>
-          <a:pPr marL="0" lvl="0" indent="0" algn="l" defTabSz="933450">
+          <a:pPr marL="0" lvl="0" indent="0" algn="l" defTabSz="1200150">
             <a:lnSpc>
               <a:spcPct val="100000"/>
             </a:lnSpc>
@@ -11371,14 +10098,14 @@
             <a:defRPr b="1"/>
           </a:pPr>
           <a:r>
-            <a:rPr lang="en-US" sz="2100" kern="1200"/>
+            <a:rPr lang="en-US" sz="2700" kern="1200"/>
             <a:t>Customer Experience:</a:t>
           </a:r>
         </a:p>
       </dsp:txBody>
       <dsp:txXfrm>
-        <a:off x="5746728" y="1822154"/>
-        <a:ext cx="2442656" cy="366398"/>
+        <a:off x="7567721" y="1926717"/>
+        <a:ext cx="3218906" cy="482835"/>
       </dsp:txXfrm>
     </dsp:sp>
     <dsp:sp modelId="{74AE4CE8-0A1F-4039-A958-BDB28922D470}">
@@ -11388,8 +10115,8 @@
       </dsp:nvSpPr>
       <dsp:spPr>
         <a:xfrm>
-          <a:off x="5746728" y="2237970"/>
-          <a:ext cx="2442656" cy="1093856"/>
+          <a:off x="7567721" y="2468816"/>
+          <a:ext cx="3218906" cy="1167040"/>
         </a:xfrm>
         <a:prstGeom prst="rect">
           <a:avLst/>
@@ -11418,7 +10145,7 @@
         </a:bodyPr>
         <a:lstStyle/>
         <a:p>
-          <a:pPr marL="0" lvl="0" indent="0" algn="l" defTabSz="711200">
+          <a:pPr marL="0" lvl="0" indent="0" algn="l" defTabSz="755650">
             <a:lnSpc>
               <a:spcPct val="100000"/>
             </a:lnSpc>
@@ -11431,12 +10158,12 @@
             <a:buNone/>
           </a:pPr>
           <a:r>
-            <a:rPr lang="en-US" sz="1600" kern="1200" dirty="0"/>
+            <a:rPr lang="en-US" sz="1700" kern="1200" dirty="0"/>
             <a:t>Automate refund handling workflows.</a:t>
           </a:r>
         </a:p>
         <a:p>
-          <a:pPr marL="0" lvl="0" indent="0" algn="l" defTabSz="711200">
+          <a:pPr marL="0" lvl="0" indent="0" algn="l" defTabSz="755650">
             <a:lnSpc>
               <a:spcPct val="100000"/>
             </a:lnSpc>
@@ -11449,14 +10176,14 @@
             <a:buNone/>
           </a:pPr>
           <a:r>
-            <a:rPr lang="en-US" sz="1600" kern="1200" dirty="0"/>
+            <a:rPr lang="en-US" sz="1700" kern="1200" dirty="0"/>
             <a:t>Increase transparency of service disruptions.</a:t>
           </a:r>
         </a:p>
       </dsp:txBody>
       <dsp:txXfrm>
-        <a:off x="5746728" y="2237970"/>
-        <a:ext cx="2442656" cy="1093856"/>
+        <a:off x="7567721" y="2468816"/>
+        <a:ext cx="3218906" cy="1167040"/>
       </dsp:txXfrm>
     </dsp:sp>
   </dsp:spTree>
@@ -11478,7 +10205,7 @@
       </dsp:nvSpPr>
       <dsp:spPr>
         <a:xfrm>
-          <a:off x="376435" y="718980"/>
+          <a:off x="951240" y="941607"/>
           <a:ext cx="1098000" cy="1098000"/>
         </a:xfrm>
         <a:prstGeom prst="ellipse">
@@ -11517,7 +10244,7 @@
       </dsp:nvSpPr>
       <dsp:spPr>
         <a:xfrm>
-          <a:off x="610435" y="952980"/>
+          <a:off x="1185240" y="1175607"/>
           <a:ext cx="630000" cy="630000"/>
         </a:xfrm>
         <a:prstGeom prst="rect">
@@ -11566,8 +10293,8 @@
       </dsp:nvSpPr>
       <dsp:spPr>
         <a:xfrm>
-          <a:off x="25435" y="2158980"/>
-          <a:ext cx="1800000" cy="1314843"/>
+          <a:off x="600240" y="2381607"/>
+          <a:ext cx="1800000" cy="869589"/>
         </a:xfrm>
         <a:prstGeom prst="rect">
           <a:avLst/>
@@ -11620,8 +10347,8 @@
         </a:p>
       </dsp:txBody>
       <dsp:txXfrm>
-        <a:off x="25435" y="2158980"/>
-        <a:ext cx="1800000" cy="1314843"/>
+        <a:off x="600240" y="2381607"/>
+        <a:ext cx="1800000" cy="869589"/>
       </dsp:txXfrm>
     </dsp:sp>
     <dsp:sp modelId="{40BA8E2D-BF29-4495-AF34-72C1ECCEFBB7}">
@@ -11631,7 +10358,7 @@
       </dsp:nvSpPr>
       <dsp:spPr>
         <a:xfrm>
-          <a:off x="2491435" y="718980"/>
+          <a:off x="3066240" y="941607"/>
           <a:ext cx="1098000" cy="1098000"/>
         </a:xfrm>
         <a:prstGeom prst="ellipse">
@@ -11670,7 +10397,7 @@
       </dsp:nvSpPr>
       <dsp:spPr>
         <a:xfrm>
-          <a:off x="2725435" y="952980"/>
+          <a:off x="3300240" y="1175607"/>
           <a:ext cx="630000" cy="630000"/>
         </a:xfrm>
         <a:prstGeom prst="rect">
@@ -11719,8 +10446,8 @@
       </dsp:nvSpPr>
       <dsp:spPr>
         <a:xfrm>
-          <a:off x="2140435" y="2158980"/>
-          <a:ext cx="1800000" cy="1314843"/>
+          <a:off x="2715240" y="2381607"/>
+          <a:ext cx="1800000" cy="869589"/>
         </a:xfrm>
         <a:prstGeom prst="rect">
           <a:avLst/>
@@ -11764,23 +10491,23 @@
           </a:pPr>
           <a:r>
             <a:rPr lang="en-US" sz="1400" b="1" kern="1200" dirty="0"/>
-            <a:t>• Enhance Route-Level Performance• Strengthen Customer Experience &amp; Refund Governance.</a:t>
+            <a:t>• Enhance Route-Level Performance</a:t>
           </a:r>
         </a:p>
       </dsp:txBody>
       <dsp:txXfrm>
-        <a:off x="2140435" y="2158980"/>
-        <a:ext cx="1800000" cy="1314843"/>
+        <a:off x="2715240" y="2381607"/>
+        <a:ext cx="1800000" cy="869589"/>
       </dsp:txXfrm>
     </dsp:sp>
-    <dsp:sp modelId="{9C4AF39B-B0E9-490B-871B-5B4316A9CCA4}">
+    <dsp:sp modelId="{68DA30CA-37D9-46D4-BE81-8552844C94E2}">
       <dsp:nvSpPr>
         <dsp:cNvPr id="0" name=""/>
         <dsp:cNvSpPr/>
       </dsp:nvSpPr>
       <dsp:spPr>
         <a:xfrm>
-          <a:off x="4606435" y="718980"/>
+          <a:off x="5181240" y="941607"/>
           <a:ext cx="1098000" cy="1098000"/>
         </a:xfrm>
         <a:prstGeom prst="ellipse">
@@ -11812,6 +10539,157 @@
         <a:fontRef idx="minor"/>
       </dsp:style>
     </dsp:sp>
+    <dsp:sp modelId="{FB76394F-E746-4E81-85B5-40F1DEF4E0A4}">
+      <dsp:nvSpPr>
+        <dsp:cNvPr id="0" name=""/>
+        <dsp:cNvSpPr/>
+      </dsp:nvSpPr>
+      <dsp:spPr>
+        <a:xfrm>
+          <a:off x="5415240" y="1175607"/>
+          <a:ext cx="630000" cy="630000"/>
+        </a:xfrm>
+        <a:prstGeom prst="rect">
+          <a:avLst/>
+        </a:prstGeom>
+        <a:solidFill>
+          <a:schemeClr val="bg1">
+            <a:hueOff val="0"/>
+            <a:satOff val="0"/>
+            <a:lumOff val="0"/>
+            <a:alphaOff val="0"/>
+          </a:schemeClr>
+        </a:solidFill>
+        <a:ln w="25400" cap="flat" cmpd="sng" algn="ctr">
+          <a:solidFill>
+            <a:schemeClr val="lt1">
+              <a:alpha val="0"/>
+              <a:hueOff val="0"/>
+              <a:satOff val="0"/>
+              <a:lumOff val="0"/>
+              <a:alphaOff val="0"/>
+            </a:schemeClr>
+          </a:solidFill>
+          <a:prstDash val="solid"/>
+        </a:ln>
+        <a:effectLst/>
+      </dsp:spPr>
+      <dsp:style>
+        <a:lnRef idx="2">
+          <a:scrgbClr r="0" g="0" b="0"/>
+        </a:lnRef>
+        <a:fillRef idx="1">
+          <a:scrgbClr r="0" g="0" b="0"/>
+        </a:fillRef>
+        <a:effectRef idx="0">
+          <a:scrgbClr r="0" g="0" b="0"/>
+        </a:effectRef>
+        <a:fontRef idx="minor">
+          <a:schemeClr val="lt1"/>
+        </a:fontRef>
+      </dsp:style>
+    </dsp:sp>
+    <dsp:sp modelId="{CF7296DD-F79E-424A-A60A-A257E5A8B4B7}">
+      <dsp:nvSpPr>
+        <dsp:cNvPr id="0" name=""/>
+        <dsp:cNvSpPr/>
+      </dsp:nvSpPr>
+      <dsp:spPr>
+        <a:xfrm>
+          <a:off x="4830240" y="2381607"/>
+          <a:ext cx="1800000" cy="869589"/>
+        </a:xfrm>
+        <a:prstGeom prst="rect">
+          <a:avLst/>
+        </a:prstGeom>
+        <a:noFill/>
+        <a:ln>
+          <a:noFill/>
+        </a:ln>
+        <a:effectLst/>
+      </dsp:spPr>
+      <dsp:style>
+        <a:lnRef idx="0">
+          <a:scrgbClr r="0" g="0" b="0"/>
+        </a:lnRef>
+        <a:fillRef idx="0">
+          <a:scrgbClr r="0" g="0" b="0"/>
+        </a:fillRef>
+        <a:effectRef idx="0">
+          <a:scrgbClr r="0" g="0" b="0"/>
+        </a:effectRef>
+        <a:fontRef idx="minor"/>
+      </dsp:style>
+      <dsp:txBody>
+        <a:bodyPr spcFirstLastPara="0" vert="horz" wrap="square" lIns="0" tIns="0" rIns="0" bIns="0" numCol="1" spcCol="1270" anchor="t" anchorCtr="0">
+          <a:noAutofit/>
+        </a:bodyPr>
+        <a:lstStyle/>
+        <a:p>
+          <a:pPr marL="0" lvl="0" indent="0" algn="ctr" defTabSz="622300">
+            <a:lnSpc>
+              <a:spcPct val="100000"/>
+            </a:lnSpc>
+            <a:spcBef>
+              <a:spcPct val="0"/>
+            </a:spcBef>
+            <a:spcAft>
+              <a:spcPct val="35000"/>
+            </a:spcAft>
+            <a:buNone/>
+            <a:defRPr cap="all"/>
+          </a:pPr>
+          <a:r>
+            <a:rPr lang="en-US" sz="1400" b="1" kern="1200"/>
+            <a:t>• Strengthen Customer Experience &amp; Refund Governance.</a:t>
+          </a:r>
+          <a:endParaRPr lang="en-US" sz="1400" b="1" kern="1200" dirty="0"/>
+        </a:p>
+      </dsp:txBody>
+      <dsp:txXfrm>
+        <a:off x="4830240" y="2381607"/>
+        <a:ext cx="1800000" cy="869589"/>
+      </dsp:txXfrm>
+    </dsp:sp>
+    <dsp:sp modelId="{9C4AF39B-B0E9-490B-871B-5B4316A9CCA4}">
+      <dsp:nvSpPr>
+        <dsp:cNvPr id="0" name=""/>
+        <dsp:cNvSpPr/>
+      </dsp:nvSpPr>
+      <dsp:spPr>
+        <a:xfrm>
+          <a:off x="7296240" y="941607"/>
+          <a:ext cx="1098000" cy="1098000"/>
+        </a:xfrm>
+        <a:prstGeom prst="ellipse">
+          <a:avLst/>
+        </a:prstGeom>
+        <a:solidFill>
+          <a:schemeClr val="accent5">
+            <a:hueOff val="0"/>
+            <a:satOff val="0"/>
+            <a:lumOff val="0"/>
+            <a:alphaOff val="0"/>
+          </a:schemeClr>
+        </a:solidFill>
+        <a:ln>
+          <a:noFill/>
+        </a:ln>
+        <a:effectLst/>
+      </dsp:spPr>
+      <dsp:style>
+        <a:lnRef idx="0">
+          <a:scrgbClr r="0" g="0" b="0"/>
+        </a:lnRef>
+        <a:fillRef idx="1">
+          <a:scrgbClr r="0" g="0" b="0"/>
+        </a:fillRef>
+        <a:effectRef idx="0">
+          <a:scrgbClr r="0" g="0" b="0"/>
+        </a:effectRef>
+        <a:fontRef idx="minor"/>
+      </dsp:style>
+    </dsp:sp>
     <dsp:sp modelId="{43340B32-021A-4D9E-997C-E78FB0BD115E}">
       <dsp:nvSpPr>
         <dsp:cNvPr id="0" name=""/>
@@ -11819,7 +10697,7 @@
       </dsp:nvSpPr>
       <dsp:spPr>
         <a:xfrm>
-          <a:off x="4840435" y="952980"/>
+          <a:off x="7530240" y="1175607"/>
           <a:ext cx="630000" cy="630000"/>
         </a:xfrm>
         <a:prstGeom prst="rect">
@@ -11868,8 +10746,8 @@
       </dsp:nvSpPr>
       <dsp:spPr>
         <a:xfrm>
-          <a:off x="4255435" y="2158980"/>
-          <a:ext cx="1800000" cy="1314843"/>
+          <a:off x="6945240" y="2381607"/>
+          <a:ext cx="1800000" cy="869589"/>
         </a:xfrm>
         <a:prstGeom prst="rect">
           <a:avLst/>
@@ -11898,7 +10776,7 @@
         </a:bodyPr>
         <a:lstStyle/>
         <a:p>
-          <a:pPr marL="0" lvl="0" indent="0" algn="ctr" defTabSz="711200">
+          <a:pPr marL="0" lvl="0" indent="0" algn="ctr" defTabSz="622300">
             <a:lnSpc>
               <a:spcPct val="100000"/>
             </a:lnSpc>
@@ -11912,22 +10790,22 @@
             <a:defRPr cap="all"/>
           </a:pPr>
           <a:r>
-            <a:rPr lang="en-US" sz="1600" kern="1200" dirty="0"/>
+            <a:rPr lang="en-US" sz="1400" kern="1200" dirty="0"/>
             <a:t>• </a:t>
           </a:r>
           <a:r>
-            <a:rPr lang="en-US" sz="1600" b="1" kern="1200" dirty="0"/>
+            <a:rPr lang="en-US" sz="1400" b="1" kern="1200" dirty="0"/>
             <a:t>Improve Forecasting &amp; Automation</a:t>
           </a:r>
           <a:r>
-            <a:rPr lang="en-US" sz="1600" kern="1200" dirty="0"/>
+            <a:rPr lang="en-US" sz="1400" kern="1200" dirty="0"/>
             <a:t>.</a:t>
           </a:r>
         </a:p>
       </dsp:txBody>
       <dsp:txXfrm>
-        <a:off x="4255435" y="2158980"/>
-        <a:ext cx="1800000" cy="1314843"/>
+        <a:off x="6945240" y="2381607"/>
+        <a:ext cx="1800000" cy="869589"/>
       </dsp:txXfrm>
     </dsp:sp>
     <dsp:sp modelId="{73252C37-C64E-4605-B969-AB9EB9B64AD4}">
@@ -11937,14 +10815,14 @@
       </dsp:nvSpPr>
       <dsp:spPr>
         <a:xfrm>
-          <a:off x="6721435" y="718980"/>
+          <a:off x="9411240" y="941607"/>
           <a:ext cx="1098000" cy="1098000"/>
         </a:xfrm>
         <a:prstGeom prst="ellipse">
           <a:avLst/>
         </a:prstGeom>
         <a:solidFill>
-          <a:schemeClr val="accent5">
+          <a:schemeClr val="accent6">
             <a:hueOff val="0"/>
             <a:satOff val="0"/>
             <a:lumOff val="0"/>
@@ -11976,7 +10854,7 @@
       </dsp:nvSpPr>
       <dsp:spPr>
         <a:xfrm>
-          <a:off x="6955435" y="952980"/>
+          <a:off x="9645240" y="1175607"/>
           <a:ext cx="630000" cy="630000"/>
         </a:xfrm>
         <a:prstGeom prst="rect">
@@ -12025,8 +10903,8 @@
       </dsp:nvSpPr>
       <dsp:spPr>
         <a:xfrm>
-          <a:off x="6370435" y="2158980"/>
-          <a:ext cx="1800000" cy="1314843"/>
+          <a:off x="9060240" y="2381607"/>
+          <a:ext cx="1800000" cy="869589"/>
         </a:xfrm>
         <a:prstGeom prst="rect">
           <a:avLst/>
@@ -12055,7 +10933,7 @@
         </a:bodyPr>
         <a:lstStyle/>
         <a:p>
-          <a:pPr marL="0" lvl="0" indent="0" algn="ctr" defTabSz="711200">
+          <a:pPr marL="0" lvl="0" indent="0" algn="ctr" defTabSz="622300">
             <a:lnSpc>
               <a:spcPct val="100000"/>
             </a:lnSpc>
@@ -12069,630 +10947,22 @@
             <a:defRPr cap="all"/>
           </a:pPr>
           <a:r>
-            <a:rPr lang="en-US" sz="1600" kern="1200" dirty="0"/>
+            <a:rPr lang="en-US" sz="1400" kern="1200" dirty="0"/>
             <a:t>• </a:t>
           </a:r>
           <a:r>
-            <a:rPr lang="en-US" sz="1600" b="1" kern="1200" dirty="0"/>
+            <a:rPr lang="en-US" sz="1400" b="1" kern="1200" dirty="0"/>
             <a:t>Build a Customer-Centric Performance Culture</a:t>
           </a:r>
           <a:r>
-            <a:rPr lang="en-US" sz="1600" kern="1200" dirty="0"/>
+            <a:rPr lang="en-US" sz="1400" kern="1200" dirty="0"/>
             <a:t>.</a:t>
           </a:r>
         </a:p>
       </dsp:txBody>
       <dsp:txXfrm>
-        <a:off x="6370435" y="2158980"/>
-        <a:ext cx="1800000" cy="1314843"/>
-      </dsp:txXfrm>
-    </dsp:sp>
-  </dsp:spTree>
-</dsp:drawing>
-</file>
-
-<file path=ppt/diagrams/drawing6.xml><?xml version="1.0" encoding="utf-8"?>
-<dsp:drawing xmlns:dgm="http://schemas.openxmlformats.org/drawingml/2006/diagram" xmlns:dsp="http://schemas.microsoft.com/office/drawing/2008/diagram" xmlns:a="http://schemas.openxmlformats.org/drawingml/2006/main">
-  <dsp:spTree>
-    <dsp:nvGrpSpPr>
-      <dsp:cNvPr id="0" name=""/>
-      <dsp:cNvGrpSpPr/>
-    </dsp:nvGrpSpPr>
-    <dsp:grpSpPr/>
-    <dsp:sp modelId="{89A618F2-946B-4DBB-89CE-13F7BD6BA040}">
-      <dsp:nvSpPr>
-        <dsp:cNvPr id="0" name=""/>
-        <dsp:cNvSpPr/>
-      </dsp:nvSpPr>
-      <dsp:spPr>
-        <a:xfrm>
-          <a:off x="376435" y="746402"/>
-          <a:ext cx="1098000" cy="1098000"/>
-        </a:xfrm>
-        <a:prstGeom prst="ellipse">
-          <a:avLst/>
-        </a:prstGeom>
-        <a:solidFill>
-          <a:schemeClr val="accent2">
-            <a:hueOff val="0"/>
-            <a:satOff val="0"/>
-            <a:lumOff val="0"/>
-            <a:alphaOff val="0"/>
-          </a:schemeClr>
-        </a:solidFill>
-        <a:ln>
-          <a:noFill/>
-        </a:ln>
-        <a:effectLst/>
-      </dsp:spPr>
-      <dsp:style>
-        <a:lnRef idx="0">
-          <a:scrgbClr r="0" g="0" b="0"/>
-        </a:lnRef>
-        <a:fillRef idx="1">
-          <a:scrgbClr r="0" g="0" b="0"/>
-        </a:fillRef>
-        <a:effectRef idx="0">
-          <a:scrgbClr r="0" g="0" b="0"/>
-        </a:effectRef>
-        <a:fontRef idx="minor"/>
-      </dsp:style>
-    </dsp:sp>
-    <dsp:sp modelId="{32ECB2C2-1FF8-4FB4-AB73-8BE57BEA64EC}">
-      <dsp:nvSpPr>
-        <dsp:cNvPr id="0" name=""/>
-        <dsp:cNvSpPr/>
-      </dsp:nvSpPr>
-      <dsp:spPr>
-        <a:xfrm>
-          <a:off x="610435" y="980402"/>
-          <a:ext cx="630000" cy="630000"/>
-        </a:xfrm>
-        <a:prstGeom prst="rect">
-          <a:avLst/>
-        </a:prstGeom>
-        <a:blipFill>
-          <a:blip xmlns:r="http://schemas.openxmlformats.org/officeDocument/2006/relationships" r:embed="rId1">
-            <a:extLst>
-              <a:ext uri="{28A0092B-C50C-407E-A947-70E740481C1C}">
-                <a14:useLocalDpi xmlns:a14="http://schemas.microsoft.com/office/drawing/2010/main" val="0"/>
-              </a:ext>
-              <a:ext uri="{96DAC541-7B7A-43D3-8B79-37D633B846F1}">
-                <asvg:svgBlip xmlns:asvg="http://schemas.microsoft.com/office/drawing/2016/SVG/main" r:embed="rId2"/>
-              </a:ext>
-            </a:extLst>
-          </a:blip>
-          <a:stretch>
-            <a:fillRect/>
-          </a:stretch>
-        </a:blipFill>
-        <a:ln w="25400" cap="flat" cmpd="sng" algn="ctr">
-          <a:noFill/>
-          <a:prstDash val="solid"/>
-        </a:ln>
-        <a:effectLst/>
-      </dsp:spPr>
-      <dsp:style>
-        <a:lnRef idx="2">
-          <a:scrgbClr r="0" g="0" b="0"/>
-        </a:lnRef>
-        <a:fillRef idx="1">
-          <a:scrgbClr r="0" g="0" b="0"/>
-        </a:fillRef>
-        <a:effectRef idx="0">
-          <a:scrgbClr r="0" g="0" b="0"/>
-        </a:effectRef>
-        <a:fontRef idx="minor">
-          <a:schemeClr val="lt1"/>
-        </a:fontRef>
-      </dsp:style>
-    </dsp:sp>
-    <dsp:sp modelId="{5C5A512C-90C6-4164-B991-75FD568C40EF}">
-      <dsp:nvSpPr>
-        <dsp:cNvPr id="0" name=""/>
-        <dsp:cNvSpPr/>
-      </dsp:nvSpPr>
-      <dsp:spPr>
-        <a:xfrm>
-          <a:off x="25435" y="2186402"/>
-          <a:ext cx="1800000" cy="1260000"/>
-        </a:xfrm>
-        <a:prstGeom prst="rect">
-          <a:avLst/>
-        </a:prstGeom>
-        <a:noFill/>
-        <a:ln>
-          <a:noFill/>
-        </a:ln>
-        <a:effectLst/>
-      </dsp:spPr>
-      <dsp:style>
-        <a:lnRef idx="0">
-          <a:scrgbClr r="0" g="0" b="0"/>
-        </a:lnRef>
-        <a:fillRef idx="0">
-          <a:scrgbClr r="0" g="0" b="0"/>
-        </a:fillRef>
-        <a:effectRef idx="0">
-          <a:scrgbClr r="0" g="0" b="0"/>
-        </a:effectRef>
-        <a:fontRef idx="minor"/>
-      </dsp:style>
-      <dsp:txBody>
-        <a:bodyPr spcFirstLastPara="0" vert="horz" wrap="square" lIns="0" tIns="0" rIns="0" bIns="0" numCol="1" spcCol="1270" anchor="t" anchorCtr="0">
-          <a:noAutofit/>
-        </a:bodyPr>
-        <a:lstStyle/>
-        <a:p>
-          <a:pPr marL="0" lvl="0" indent="0" algn="ctr" defTabSz="800100">
-            <a:lnSpc>
-              <a:spcPct val="90000"/>
-            </a:lnSpc>
-            <a:spcBef>
-              <a:spcPct val="0"/>
-            </a:spcBef>
-            <a:spcAft>
-              <a:spcPct val="35000"/>
-            </a:spcAft>
-            <a:buNone/>
-            <a:defRPr cap="all"/>
-          </a:pPr>
-          <a:r>
-            <a:rPr lang="en-US" sz="1800" kern="1200" dirty="0"/>
-            <a:t>• Real-time visibility across routes and journey performance.</a:t>
-          </a:r>
-        </a:p>
-      </dsp:txBody>
-      <dsp:txXfrm>
-        <a:off x="25435" y="2186402"/>
-        <a:ext cx="1800000" cy="1260000"/>
-      </dsp:txXfrm>
-    </dsp:sp>
-    <dsp:sp modelId="{FCE603E2-DC72-46DB-882A-EB10FC95D085}">
-      <dsp:nvSpPr>
-        <dsp:cNvPr id="0" name=""/>
-        <dsp:cNvSpPr/>
-      </dsp:nvSpPr>
-      <dsp:spPr>
-        <a:xfrm>
-          <a:off x="2491435" y="746402"/>
-          <a:ext cx="1098000" cy="1098000"/>
-        </a:xfrm>
-        <a:prstGeom prst="ellipse">
-          <a:avLst/>
-        </a:prstGeom>
-        <a:solidFill>
-          <a:schemeClr val="accent3">
-            <a:hueOff val="0"/>
-            <a:satOff val="0"/>
-            <a:lumOff val="0"/>
-            <a:alphaOff val="0"/>
-          </a:schemeClr>
-        </a:solidFill>
-        <a:ln>
-          <a:noFill/>
-        </a:ln>
-        <a:effectLst/>
-      </dsp:spPr>
-      <dsp:style>
-        <a:lnRef idx="0">
-          <a:scrgbClr r="0" g="0" b="0"/>
-        </a:lnRef>
-        <a:fillRef idx="1">
-          <a:scrgbClr r="0" g="0" b="0"/>
-        </a:fillRef>
-        <a:effectRef idx="0">
-          <a:scrgbClr r="0" g="0" b="0"/>
-        </a:effectRef>
-        <a:fontRef idx="minor"/>
-      </dsp:style>
-    </dsp:sp>
-    <dsp:sp modelId="{E2EF9737-63C0-449F-990F-61F3638E46AD}">
-      <dsp:nvSpPr>
-        <dsp:cNvPr id="0" name=""/>
-        <dsp:cNvSpPr/>
-      </dsp:nvSpPr>
-      <dsp:spPr>
-        <a:xfrm>
-          <a:off x="2725435" y="980402"/>
-          <a:ext cx="630000" cy="630000"/>
-        </a:xfrm>
-        <a:prstGeom prst="rect">
-          <a:avLst/>
-        </a:prstGeom>
-        <a:blipFill>
-          <a:blip xmlns:r="http://schemas.openxmlformats.org/officeDocument/2006/relationships" r:embed="rId3">
-            <a:extLst>
-              <a:ext uri="{28A0092B-C50C-407E-A947-70E740481C1C}">
-                <a14:useLocalDpi xmlns:a14="http://schemas.microsoft.com/office/drawing/2010/main" val="0"/>
-              </a:ext>
-              <a:ext uri="{96DAC541-7B7A-43D3-8B79-37D633B846F1}">
-                <asvg:svgBlip xmlns:asvg="http://schemas.microsoft.com/office/drawing/2016/SVG/main" r:embed="rId4"/>
-              </a:ext>
-            </a:extLst>
-          </a:blip>
-          <a:stretch>
-            <a:fillRect/>
-          </a:stretch>
-        </a:blipFill>
-        <a:ln w="25400" cap="flat" cmpd="sng" algn="ctr">
-          <a:noFill/>
-          <a:prstDash val="solid"/>
-        </a:ln>
-        <a:effectLst/>
-      </dsp:spPr>
-      <dsp:style>
-        <a:lnRef idx="2">
-          <a:scrgbClr r="0" g="0" b="0"/>
-        </a:lnRef>
-        <a:fillRef idx="1">
-          <a:scrgbClr r="0" g="0" b="0"/>
-        </a:fillRef>
-        <a:effectRef idx="0">
-          <a:scrgbClr r="0" g="0" b="0"/>
-        </a:effectRef>
-        <a:fontRef idx="minor">
-          <a:schemeClr val="lt1"/>
-        </a:fontRef>
-      </dsp:style>
-    </dsp:sp>
-    <dsp:sp modelId="{C197E439-8829-45EA-A488-88818DE634DB}">
-      <dsp:nvSpPr>
-        <dsp:cNvPr id="0" name=""/>
-        <dsp:cNvSpPr/>
-      </dsp:nvSpPr>
-      <dsp:spPr>
-        <a:xfrm>
-          <a:off x="2140435" y="2186402"/>
-          <a:ext cx="1800000" cy="1260000"/>
-        </a:xfrm>
-        <a:prstGeom prst="rect">
-          <a:avLst/>
-        </a:prstGeom>
-        <a:noFill/>
-        <a:ln>
-          <a:noFill/>
-        </a:ln>
-        <a:effectLst/>
-      </dsp:spPr>
-      <dsp:style>
-        <a:lnRef idx="0">
-          <a:scrgbClr r="0" g="0" b="0"/>
-        </a:lnRef>
-        <a:fillRef idx="0">
-          <a:scrgbClr r="0" g="0" b="0"/>
-        </a:fillRef>
-        <a:effectRef idx="0">
-          <a:scrgbClr r="0" g="0" b="0"/>
-        </a:effectRef>
-        <a:fontRef idx="minor"/>
-      </dsp:style>
-      <dsp:txBody>
-        <a:bodyPr spcFirstLastPara="0" vert="horz" wrap="square" lIns="0" tIns="0" rIns="0" bIns="0" numCol="1" spcCol="1270" anchor="t" anchorCtr="0">
-          <a:noAutofit/>
-        </a:bodyPr>
-        <a:lstStyle/>
-        <a:p>
-          <a:pPr marL="0" lvl="0" indent="0" algn="ctr" defTabSz="800100">
-            <a:lnSpc>
-              <a:spcPct val="90000"/>
-            </a:lnSpc>
-            <a:spcBef>
-              <a:spcPct val="0"/>
-            </a:spcBef>
-            <a:spcAft>
-              <a:spcPct val="35000"/>
-            </a:spcAft>
-            <a:buNone/>
-            <a:defRPr cap="all"/>
-          </a:pPr>
-          <a:r>
-            <a:rPr lang="en-US" sz="1800" kern="1200"/>
-            <a:t>• Predictive disruption and refund risk indicators.</a:t>
-          </a:r>
-        </a:p>
-      </dsp:txBody>
-      <dsp:txXfrm>
-        <a:off x="2140435" y="2186402"/>
-        <a:ext cx="1800000" cy="1260000"/>
-      </dsp:txXfrm>
-    </dsp:sp>
-    <dsp:sp modelId="{27D1416A-B77F-4F43-BF69-5CE99BF33651}">
-      <dsp:nvSpPr>
-        <dsp:cNvPr id="0" name=""/>
-        <dsp:cNvSpPr/>
-      </dsp:nvSpPr>
-      <dsp:spPr>
-        <a:xfrm>
-          <a:off x="4606435" y="746402"/>
-          <a:ext cx="1098000" cy="1098000"/>
-        </a:xfrm>
-        <a:prstGeom prst="ellipse">
-          <a:avLst/>
-        </a:prstGeom>
-        <a:solidFill>
-          <a:schemeClr val="accent4">
-            <a:hueOff val="0"/>
-            <a:satOff val="0"/>
-            <a:lumOff val="0"/>
-            <a:alphaOff val="0"/>
-          </a:schemeClr>
-        </a:solidFill>
-        <a:ln>
-          <a:noFill/>
-        </a:ln>
-        <a:effectLst/>
-      </dsp:spPr>
-      <dsp:style>
-        <a:lnRef idx="0">
-          <a:scrgbClr r="0" g="0" b="0"/>
-        </a:lnRef>
-        <a:fillRef idx="1">
-          <a:scrgbClr r="0" g="0" b="0"/>
-        </a:fillRef>
-        <a:effectRef idx="0">
-          <a:scrgbClr r="0" g="0" b="0"/>
-        </a:effectRef>
-        <a:fontRef idx="minor"/>
-      </dsp:style>
-    </dsp:sp>
-    <dsp:sp modelId="{3D1CF9A1-6EA4-41DD-8ABC-394FB05DCEE7}">
-      <dsp:nvSpPr>
-        <dsp:cNvPr id="0" name=""/>
-        <dsp:cNvSpPr/>
-      </dsp:nvSpPr>
-      <dsp:spPr>
-        <a:xfrm>
-          <a:off x="4840435" y="980402"/>
-          <a:ext cx="630000" cy="630000"/>
-        </a:xfrm>
-        <a:prstGeom prst="rect">
-          <a:avLst/>
-        </a:prstGeom>
-        <a:blipFill>
-          <a:blip xmlns:r="http://schemas.openxmlformats.org/officeDocument/2006/relationships" r:embed="rId5">
-            <a:extLst>
-              <a:ext uri="{28A0092B-C50C-407E-A947-70E740481C1C}">
-                <a14:useLocalDpi xmlns:a14="http://schemas.microsoft.com/office/drawing/2010/main" val="0"/>
-              </a:ext>
-              <a:ext uri="{96DAC541-7B7A-43D3-8B79-37D633B846F1}">
-                <asvg:svgBlip xmlns:asvg="http://schemas.microsoft.com/office/drawing/2016/SVG/main" r:embed="rId6"/>
-              </a:ext>
-            </a:extLst>
-          </a:blip>
-          <a:stretch>
-            <a:fillRect/>
-          </a:stretch>
-        </a:blipFill>
-        <a:ln w="25400" cap="flat" cmpd="sng" algn="ctr">
-          <a:noFill/>
-          <a:prstDash val="solid"/>
-        </a:ln>
-        <a:effectLst/>
-      </dsp:spPr>
-      <dsp:style>
-        <a:lnRef idx="2">
-          <a:scrgbClr r="0" g="0" b="0"/>
-        </a:lnRef>
-        <a:fillRef idx="1">
-          <a:scrgbClr r="0" g="0" b="0"/>
-        </a:fillRef>
-        <a:effectRef idx="0">
-          <a:scrgbClr r="0" g="0" b="0"/>
-        </a:effectRef>
-        <a:fontRef idx="minor">
-          <a:schemeClr val="lt1"/>
-        </a:fontRef>
-      </dsp:style>
-    </dsp:sp>
-    <dsp:sp modelId="{EABB931D-60BB-4D2C-8969-7902CF2BAED6}">
-      <dsp:nvSpPr>
-        <dsp:cNvPr id="0" name=""/>
-        <dsp:cNvSpPr/>
-      </dsp:nvSpPr>
-      <dsp:spPr>
-        <a:xfrm>
-          <a:off x="4255435" y="2186402"/>
-          <a:ext cx="1800000" cy="1260000"/>
-        </a:xfrm>
-        <a:prstGeom prst="rect">
-          <a:avLst/>
-        </a:prstGeom>
-        <a:noFill/>
-        <a:ln>
-          <a:noFill/>
-        </a:ln>
-        <a:effectLst/>
-      </dsp:spPr>
-      <dsp:style>
-        <a:lnRef idx="0">
-          <a:scrgbClr r="0" g="0" b="0"/>
-        </a:lnRef>
-        <a:fillRef idx="0">
-          <a:scrgbClr r="0" g="0" b="0"/>
-        </a:fillRef>
-        <a:effectRef idx="0">
-          <a:scrgbClr r="0" g="0" b="0"/>
-        </a:effectRef>
-        <a:fontRef idx="minor"/>
-      </dsp:style>
-      <dsp:txBody>
-        <a:bodyPr spcFirstLastPara="0" vert="horz" wrap="square" lIns="0" tIns="0" rIns="0" bIns="0" numCol="1" spcCol="1270" anchor="t" anchorCtr="0">
-          <a:noAutofit/>
-        </a:bodyPr>
-        <a:lstStyle/>
-        <a:p>
-          <a:pPr marL="0" lvl="0" indent="0" algn="ctr" defTabSz="800100">
-            <a:lnSpc>
-              <a:spcPct val="90000"/>
-            </a:lnSpc>
-            <a:spcBef>
-              <a:spcPct val="0"/>
-            </a:spcBef>
-            <a:spcAft>
-              <a:spcPct val="35000"/>
-            </a:spcAft>
-            <a:buNone/>
-            <a:defRPr cap="all"/>
-          </a:pPr>
-          <a:r>
-            <a:rPr lang="en-US" sz="1800" kern="1200"/>
-            <a:t>• Stronger governance over refunds and customer satisfaction.</a:t>
-          </a:r>
-        </a:p>
-      </dsp:txBody>
-      <dsp:txXfrm>
-        <a:off x="4255435" y="2186402"/>
-        <a:ext cx="1800000" cy="1260000"/>
-      </dsp:txXfrm>
-    </dsp:sp>
-    <dsp:sp modelId="{EE5FB275-E4B7-426F-8E91-8B470FBDC1F0}">
-      <dsp:nvSpPr>
-        <dsp:cNvPr id="0" name=""/>
-        <dsp:cNvSpPr/>
-      </dsp:nvSpPr>
-      <dsp:spPr>
-        <a:xfrm>
-          <a:off x="6721435" y="746402"/>
-          <a:ext cx="1098000" cy="1098000"/>
-        </a:xfrm>
-        <a:prstGeom prst="ellipse">
-          <a:avLst/>
-        </a:prstGeom>
-        <a:solidFill>
-          <a:schemeClr val="accent5">
-            <a:hueOff val="0"/>
-            <a:satOff val="0"/>
-            <a:lumOff val="0"/>
-            <a:alphaOff val="0"/>
-          </a:schemeClr>
-        </a:solidFill>
-        <a:ln>
-          <a:noFill/>
-        </a:ln>
-        <a:effectLst/>
-      </dsp:spPr>
-      <dsp:style>
-        <a:lnRef idx="0">
-          <a:scrgbClr r="0" g="0" b="0"/>
-        </a:lnRef>
-        <a:fillRef idx="1">
-          <a:scrgbClr r="0" g="0" b="0"/>
-        </a:fillRef>
-        <a:effectRef idx="0">
-          <a:scrgbClr r="0" g="0" b="0"/>
-        </a:effectRef>
-        <a:fontRef idx="minor"/>
-      </dsp:style>
-    </dsp:sp>
-    <dsp:sp modelId="{19E23D34-B513-4BF7-9348-7151986074B3}">
-      <dsp:nvSpPr>
-        <dsp:cNvPr id="0" name=""/>
-        <dsp:cNvSpPr/>
-      </dsp:nvSpPr>
-      <dsp:spPr>
-        <a:xfrm>
-          <a:off x="6955435" y="980402"/>
-          <a:ext cx="630000" cy="630000"/>
-        </a:xfrm>
-        <a:prstGeom prst="rect">
-          <a:avLst/>
-        </a:prstGeom>
-        <a:blipFill>
-          <a:blip xmlns:r="http://schemas.openxmlformats.org/officeDocument/2006/relationships" r:embed="rId7">
-            <a:extLst>
-              <a:ext uri="{28A0092B-C50C-407E-A947-70E740481C1C}">
-                <a14:useLocalDpi xmlns:a14="http://schemas.microsoft.com/office/drawing/2010/main" val="0"/>
-              </a:ext>
-              <a:ext uri="{96DAC541-7B7A-43D3-8B79-37D633B846F1}">
-                <asvg:svgBlip xmlns:asvg="http://schemas.microsoft.com/office/drawing/2016/SVG/main" r:embed="rId8"/>
-              </a:ext>
-            </a:extLst>
-          </a:blip>
-          <a:stretch>
-            <a:fillRect/>
-          </a:stretch>
-        </a:blipFill>
-        <a:ln w="25400" cap="flat" cmpd="sng" algn="ctr">
-          <a:noFill/>
-          <a:prstDash val="solid"/>
-        </a:ln>
-        <a:effectLst/>
-      </dsp:spPr>
-      <dsp:style>
-        <a:lnRef idx="2">
-          <a:scrgbClr r="0" g="0" b="0"/>
-        </a:lnRef>
-        <a:fillRef idx="1">
-          <a:scrgbClr r="0" g="0" b="0"/>
-        </a:fillRef>
-        <a:effectRef idx="0">
-          <a:scrgbClr r="0" g="0" b="0"/>
-        </a:effectRef>
-        <a:fontRef idx="minor">
-          <a:schemeClr val="lt1"/>
-        </a:fontRef>
-      </dsp:style>
-    </dsp:sp>
-    <dsp:sp modelId="{A0356D7C-74F4-4EEB-9E19-DE0D49F24FED}">
-      <dsp:nvSpPr>
-        <dsp:cNvPr id="0" name=""/>
-        <dsp:cNvSpPr/>
-      </dsp:nvSpPr>
-      <dsp:spPr>
-        <a:xfrm>
-          <a:off x="6370435" y="2186402"/>
-          <a:ext cx="1800000" cy="1260000"/>
-        </a:xfrm>
-        <a:prstGeom prst="rect">
-          <a:avLst/>
-        </a:prstGeom>
-        <a:noFill/>
-        <a:ln>
-          <a:noFill/>
-        </a:ln>
-        <a:effectLst/>
-      </dsp:spPr>
-      <dsp:style>
-        <a:lnRef idx="0">
-          <a:scrgbClr r="0" g="0" b="0"/>
-        </a:lnRef>
-        <a:fillRef idx="0">
-          <a:scrgbClr r="0" g="0" b="0"/>
-        </a:fillRef>
-        <a:effectRef idx="0">
-          <a:scrgbClr r="0" g="0" b="0"/>
-        </a:effectRef>
-        <a:fontRef idx="minor"/>
-      </dsp:style>
-      <dsp:txBody>
-        <a:bodyPr spcFirstLastPara="0" vert="horz" wrap="square" lIns="0" tIns="0" rIns="0" bIns="0" numCol="1" spcCol="1270" anchor="t" anchorCtr="0">
-          <a:noAutofit/>
-        </a:bodyPr>
-        <a:lstStyle/>
-        <a:p>
-          <a:pPr marL="0" lvl="0" indent="0" algn="ctr" defTabSz="800100">
-            <a:lnSpc>
-              <a:spcPct val="90000"/>
-            </a:lnSpc>
-            <a:spcBef>
-              <a:spcPct val="0"/>
-            </a:spcBef>
-            <a:spcAft>
-              <a:spcPct val="35000"/>
-            </a:spcAft>
-            <a:buNone/>
-            <a:defRPr cap="all"/>
-          </a:pPr>
-          <a:r>
-            <a:rPr lang="en-US" sz="1800" kern="1200"/>
-            <a:t>• Improved operational planning and resource allocation.</a:t>
-          </a:r>
-        </a:p>
-      </dsp:txBody>
-      <dsp:txXfrm>
-        <a:off x="6370435" y="2186402"/>
-        <a:ext cx="1800000" cy="1260000"/>
+        <a:off x="9060240" y="2381607"/>
+        <a:ext cx="1800000" cy="869589"/>
       </dsp:txXfrm>
     </dsp:sp>
   </dsp:spTree>
@@ -13737,221 +12007,6 @@
 </dgm:layoutDef>
 </file>
 
-<file path=ppt/diagrams/layout6.xml><?xml version="1.0" encoding="utf-8"?>
-<dgm:layoutDef xmlns:dgm="http://schemas.openxmlformats.org/drawingml/2006/diagram" xmlns:a="http://schemas.openxmlformats.org/drawingml/2006/main" uniqueId="urn:microsoft.com/office/officeart/2018/5/layout/IconCircleLabelList">
-  <dgm:title val="Icon Circle Label List"/>
-  <dgm:desc val="Use to show non-sequential or grouped chunks of information accompanied by a related visuals. Works best with icons or small pictures with short text captions."/>
-  <dgm:catLst>
-    <dgm:cat type="icon" pri="500"/>
-  </dgm:catLst>
-  <dgm:sampData useDef="1">
-    <dgm:dataModel>
-      <dgm:ptLst/>
-      <dgm:bg/>
-      <dgm:whole/>
-    </dgm:dataModel>
-  </dgm:sampData>
-  <dgm:styleData useDef="1">
-    <dgm:dataModel>
-      <dgm:ptLst/>
-      <dgm:bg/>
-      <dgm:whole/>
-    </dgm:dataModel>
-  </dgm:styleData>
-  <dgm:clrData useDef="1">
-    <dgm:dataModel>
-      <dgm:ptLst/>
-      <dgm:bg/>
-      <dgm:whole/>
-    </dgm:dataModel>
-  </dgm:clrData>
-  <dgm:layoutNode name="root">
-    <dgm:varLst>
-      <dgm:dir/>
-      <dgm:resizeHandles val="exact"/>
-    </dgm:varLst>
-    <dgm:choose name="Name0">
-      <dgm:if name="Name1" axis="self" func="var" arg="dir" op="equ" val="norm">
-        <dgm:alg type="snake">
-          <dgm:param type="grDir" val="tL"/>
-          <dgm:param type="flowDir" val="row"/>
-          <dgm:param type="contDir" val="sameDir"/>
-          <dgm:param type="off" val="ctr"/>
-          <dgm:param type="vertAlign" val="mid"/>
-          <dgm:param type="horzAlign" val="ctr"/>
-        </dgm:alg>
-      </dgm:if>
-      <dgm:else name="Name2">
-        <dgm:alg type="snake">
-          <dgm:param type="grDir" val="tR"/>
-          <dgm:param type="flowDir" val="row"/>
-          <dgm:param type="contDir" val="sameDir"/>
-          <dgm:param type="off" val="ctr"/>
-          <dgm:param type="vertAlign" val="mid"/>
-          <dgm:param type="horzAlign" val="ctr"/>
-        </dgm:alg>
-      </dgm:else>
-    </dgm:choose>
-    <dgm:shape xmlns:r="http://schemas.openxmlformats.org/officeDocument/2006/relationships" r:blip="">
-      <dgm:adjLst/>
-    </dgm:shape>
-    <dgm:presOf/>
-    <dgm:choose name="Name3">
-      <dgm:if name="Name4" axis="ch" ptType="node" func="cnt" op="lte" val="2">
-        <dgm:constrLst>
-          <dgm:constr type="h" for="ch" forName="compNode" refType="h" fact="0.4"/>
-          <dgm:constr type="w" for="ch" forName="compNode" val="100"/>
-          <dgm:constr type="w" for="ch" forName="sibTrans" refType="w" refFor="ch" refForName="compNode" fact="0.175"/>
-          <dgm:constr type="sp" refType="w" refFor="ch" refForName="compNode" op="equ" fact="0.25"/>
-          <dgm:constr type="primFontSz" for="des" ptType="node" op="equ" val="44"/>
-          <dgm:constr type="h" for="des" forName="compNode" op="equ"/>
-          <dgm:constr type="h" for="des" forName="textRect" op="equ"/>
-        </dgm:constrLst>
-      </dgm:if>
-      <dgm:if name="Name5" axis="ch" ptType="node" func="cnt" op="lte" val="3">
-        <dgm:constrLst>
-          <dgm:constr type="h" for="ch" forName="compNode" refType="h" fact="0.4"/>
-          <dgm:constr type="w" for="ch" forName="compNode" val="100"/>
-          <dgm:constr type="w" for="ch" forName="sibTrans" refType="w" refFor="ch" refForName="compNode" fact="0.175"/>
-          <dgm:constr type="sp" refType="w" refFor="ch" refForName="compNode" op="equ" fact="0.25"/>
-          <dgm:constr type="primFontSz" for="des" ptType="node" op="equ" val="40"/>
-          <dgm:constr type="h" for="des" forName="compNode" op="equ"/>
-          <dgm:constr type="h" for="des" forName="textRect" op="equ"/>
-        </dgm:constrLst>
-      </dgm:if>
-      <dgm:if name="Name6" axis="ch" ptType="node" func="cnt" op="lte" val="4">
-        <dgm:constrLst>
-          <dgm:constr type="h" for="ch" forName="compNode" refType="h" fact="0.4"/>
-          <dgm:constr type="w" for="ch" forName="compNode" refType="w"/>
-          <dgm:constr type="w" for="ch" forName="sibTrans" refType="w" refFor="ch" refForName="compNode" fact="0.175"/>
-          <dgm:constr type="sp" refType="w" refFor="ch" refForName="compNode" op="equ" fact="0.25"/>
-          <dgm:constr type="primFontSz" for="des" ptType="node" op="equ" val="32"/>
-          <dgm:constr type="h" for="des" forName="compNode" op="equ"/>
-          <dgm:constr type="h" for="des" forName="textRect" op="equ"/>
-        </dgm:constrLst>
-      </dgm:if>
-      <dgm:else name="Name7">
-        <dgm:constrLst>
-          <dgm:constr type="h" for="ch" forName="compNode" refType="h" fact="0.4"/>
-          <dgm:constr type="w" for="ch" forName="compNode" refType="w"/>
-          <dgm:constr type="w" for="ch" forName="sibTrans" refType="w" refFor="ch" refForName="compNode" fact="0.175"/>
-          <dgm:constr type="sp" refType="w" refFor="ch" refForName="compNode" op="equ" fact="0.25"/>
-          <dgm:constr type="primFontSz" for="des" ptType="node" op="equ" val="24"/>
-          <dgm:constr type="h" for="des" forName="compNode" op="equ"/>
-          <dgm:constr type="h" for="des" forName="textRect" op="equ"/>
-        </dgm:constrLst>
-      </dgm:else>
-    </dgm:choose>
-    <dgm:ruleLst>
-      <dgm:rule type="w" for="ch" forName="compNode" val="50" fact="NaN" max="NaN"/>
-    </dgm:ruleLst>
-    <dgm:forEach name="Name8" axis="ch" ptType="node">
-      <dgm:layoutNode name="compNode">
-        <dgm:alg type="composite"/>
-        <dgm:shape xmlns:r="http://schemas.openxmlformats.org/officeDocument/2006/relationships" r:blip="">
-          <dgm:adjLst/>
-        </dgm:shape>
-        <dgm:presOf axis="self"/>
-        <dgm:constrLst>
-          <dgm:constr type="w" for="ch" forName="iconBgRect" refType="w" fact="0.61"/>
-          <dgm:constr type="h" for="ch" forName="iconBgRect" refType="w" refFor="ch" refForName="iconBgRect"/>
-          <dgm:constr type="t" for="ch" forName="iconBgRect"/>
-          <dgm:constr type="ctrX" for="ch" forName="iconBgRect" refType="w" fact="0.5"/>
-          <dgm:constr type="w" for="ch" forName="iconRect" refType="w" fact="0.35"/>
-          <dgm:constr type="h" for="ch" forName="iconRect" refType="w" refFor="ch" refForName="iconRect"/>
-          <dgm:constr type="ctrX" for="ch" forName="iconRect" refType="ctrX" refFor="ch" refForName="iconBgRect"/>
-          <dgm:constr type="ctrY" for="ch" forName="iconRect" refType="ctrY" refFor="ch" refForName="iconBgRect"/>
-          <dgm:constr type="h" for="ch" forName="spaceRect" refType="w" fact="0.19"/>
-          <dgm:constr type="w" for="ch" forName="spaceRect" refType="w"/>
-          <dgm:constr type="l" for="ch" forName="spaceRect"/>
-          <dgm:constr type="t" for="ch" forName="spaceRect" refType="b" refFor="ch" refForName="iconBgRect"/>
-          <dgm:constr type="h" for="ch" forName="textRect" val="20"/>
-          <dgm:constr type="w" for="ch" forName="textRect" refType="w"/>
-          <dgm:constr type="l" for="ch" forName="textRect"/>
-          <dgm:constr type="t" for="ch" forName="textRect" refType="b" refFor="ch" refForName="spaceRect"/>
-        </dgm:constrLst>
-        <dgm:ruleLst>
-          <dgm:rule type="h" val="INF" fact="NaN" max="NaN"/>
-        </dgm:ruleLst>
-        <dgm:layoutNode name="iconBgRect" styleLbl="bgShp">
-          <dgm:alg type="sp"/>
-          <dgm:shape xmlns:r="http://schemas.openxmlformats.org/officeDocument/2006/relationships" type="ellipse" r:blip="">
-            <dgm:adjLst/>
-          </dgm:shape>
-          <dgm:presOf/>
-          <dgm:constrLst/>
-          <dgm:ruleLst/>
-        </dgm:layoutNode>
-        <dgm:layoutNode name="iconRect" styleLbl="node1">
-          <dgm:alg type="sp"/>
-          <dgm:shape xmlns:r="http://schemas.openxmlformats.org/officeDocument/2006/relationships" type="rect" r:blip="" blipPhldr="1">
-            <dgm:adjLst/>
-          </dgm:shape>
-          <dgm:presOf/>
-          <dgm:constrLst/>
-          <dgm:ruleLst/>
-        </dgm:layoutNode>
-        <dgm:layoutNode name="spaceRect">
-          <dgm:alg type="sp"/>
-          <dgm:shape xmlns:r="http://schemas.openxmlformats.org/officeDocument/2006/relationships" r:blip="">
-            <dgm:adjLst/>
-          </dgm:shape>
-          <dgm:presOf/>
-          <dgm:constrLst/>
-          <dgm:ruleLst/>
-        </dgm:layoutNode>
-        <dgm:layoutNode name="textRect" styleLbl="revTx">
-          <dgm:varLst>
-            <dgm:chMax val="1"/>
-            <dgm:chPref val="1"/>
-          </dgm:varLst>
-          <dgm:alg type="tx">
-            <dgm:param type="txAnchorVert" val="t"/>
-          </dgm:alg>
-          <dgm:shape xmlns:r="http://schemas.openxmlformats.org/officeDocument/2006/relationships" type="rect" r:blip="">
-            <dgm:adjLst/>
-          </dgm:shape>
-          <dgm:presOf axis="self" ptType="node"/>
-          <dgm:constrLst>
-            <dgm:constr type="lMarg"/>
-            <dgm:constr type="rMarg"/>
-            <dgm:constr type="tMarg"/>
-            <dgm:constr type="bMarg"/>
-          </dgm:constrLst>
-          <dgm:ruleLst>
-            <dgm:rule type="primFontSz" val="11" fact="NaN" max="NaN"/>
-            <dgm:rule type="h" val="INF" fact="NaN" max="NaN"/>
-          </dgm:ruleLst>
-        </dgm:layoutNode>
-      </dgm:layoutNode>
-      <dgm:forEach name="Name9" axis="followSib" ptType="sibTrans" cnt="1">
-        <dgm:layoutNode name="sibTrans">
-          <dgm:alg type="sp"/>
-          <dgm:shape xmlns:r="http://schemas.openxmlformats.org/officeDocument/2006/relationships" r:blip="">
-            <dgm:adjLst/>
-          </dgm:shape>
-          <dgm:presOf axis="self"/>
-          <dgm:constrLst/>
-          <dgm:ruleLst/>
-        </dgm:layoutNode>
-      </dgm:forEach>
-    </dgm:forEach>
-  </dgm:layoutNode>
-  <dgm:extLst>
-    <a:ext uri="{68A01E43-0DF5-4B5B-8FA6-DAF915123BFB}">
-      <dgm1612:lstStyle xmlns:dgm1612="http://schemas.microsoft.com/office/drawing/2016/12/diagram">
-        <a:lvl1pPr>
-          <a:lnSpc>
-            <a:spcPct val="100000"/>
-          </a:lnSpc>
-          <a:defRPr cap="all"/>
-        </a:lvl1pPr>
-      </dgm1612:lstStyle>
-    </a:ext>
-  </dgm:extLst>
-</dgm:layoutDef>
-</file>
-
 <file path=ppt/diagrams/quickStyle1.xml><?xml version="1.0" encoding="utf-8"?>
 <dgm:styleDef xmlns:dgm="http://schemas.openxmlformats.org/drawingml/2006/diagram" xmlns:a="http://schemas.openxmlformats.org/drawingml/2006/main" uniqueId="urn:microsoft.com/office/officeart/2005/8/quickstyle/simple1">
   <dgm:title val=""/>
@@ -18089,1040 +16144,6 @@
 </file>
 
 <file path=ppt/diagrams/quickStyle5.xml><?xml version="1.0" encoding="utf-8"?>
-<dgm:styleDef xmlns:dgm="http://schemas.openxmlformats.org/drawingml/2006/diagram" xmlns:a="http://schemas.openxmlformats.org/drawingml/2006/main" uniqueId="urn:microsoft.com/office/officeart/2005/8/quickstyle/simple1">
-  <dgm:title val=""/>
-  <dgm:desc val=""/>
-  <dgm:catLst>
-    <dgm:cat type="simple" pri="10100"/>
-  </dgm:catLst>
-  <dgm:scene3d>
-    <a:camera prst="orthographicFront"/>
-    <a:lightRig rig="threePt" dir="t"/>
-  </dgm:scene3d>
-  <dgm:styleLbl name="node0">
-    <dgm:scene3d>
-      <a:camera prst="orthographicFront"/>
-      <a:lightRig rig="threePt" dir="t"/>
-    </dgm:scene3d>
-    <dgm:sp3d/>
-    <dgm:txPr/>
-    <dgm:style>
-      <a:lnRef idx="2">
-        <a:scrgbClr r="0" g="0" b="0"/>
-      </a:lnRef>
-      <a:fillRef idx="1">
-        <a:scrgbClr r="0" g="0" b="0"/>
-      </a:fillRef>
-      <a:effectRef idx="0">
-        <a:scrgbClr r="0" g="0" b="0"/>
-      </a:effectRef>
-      <a:fontRef idx="minor">
-        <a:schemeClr val="lt1"/>
-      </a:fontRef>
-    </dgm:style>
-  </dgm:styleLbl>
-  <dgm:styleLbl name="lnNode1">
-    <dgm:scene3d>
-      <a:camera prst="orthographicFront"/>
-      <a:lightRig rig="threePt" dir="t"/>
-    </dgm:scene3d>
-    <dgm:sp3d/>
-    <dgm:txPr/>
-    <dgm:style>
-      <a:lnRef idx="2">
-        <a:scrgbClr r="0" g="0" b="0"/>
-      </a:lnRef>
-      <a:fillRef idx="1">
-        <a:scrgbClr r="0" g="0" b="0"/>
-      </a:fillRef>
-      <a:effectRef idx="0">
-        <a:scrgbClr r="0" g="0" b="0"/>
-      </a:effectRef>
-      <a:fontRef idx="minor">
-        <a:schemeClr val="lt1"/>
-      </a:fontRef>
-    </dgm:style>
-  </dgm:styleLbl>
-  <dgm:styleLbl name="vennNode1">
-    <dgm:scene3d>
-      <a:camera prst="orthographicFront"/>
-      <a:lightRig rig="threePt" dir="t"/>
-    </dgm:scene3d>
-    <dgm:sp3d/>
-    <dgm:txPr/>
-    <dgm:style>
-      <a:lnRef idx="2">
-        <a:scrgbClr r="0" g="0" b="0"/>
-      </a:lnRef>
-      <a:fillRef idx="1">
-        <a:scrgbClr r="0" g="0" b="0"/>
-      </a:fillRef>
-      <a:effectRef idx="0">
-        <a:scrgbClr r="0" g="0" b="0"/>
-      </a:effectRef>
-      <a:fontRef idx="minor">
-        <a:schemeClr val="tx1"/>
-      </a:fontRef>
-    </dgm:style>
-  </dgm:styleLbl>
-  <dgm:styleLbl name="alignNode1">
-    <dgm:scene3d>
-      <a:camera prst="orthographicFront"/>
-      <a:lightRig rig="threePt" dir="t"/>
-    </dgm:scene3d>
-    <dgm:sp3d/>
-    <dgm:txPr/>
-    <dgm:style>
-      <a:lnRef idx="2">
-        <a:scrgbClr r="0" g="0" b="0"/>
-      </a:lnRef>
-      <a:fillRef idx="1">
-        <a:scrgbClr r="0" g="0" b="0"/>
-      </a:fillRef>
-      <a:effectRef idx="0">
-        <a:scrgbClr r="0" g="0" b="0"/>
-      </a:effectRef>
-      <a:fontRef idx="minor">
-        <a:schemeClr val="lt1"/>
-      </a:fontRef>
-    </dgm:style>
-  </dgm:styleLbl>
-  <dgm:styleLbl name="node1">
-    <dgm:scene3d>
-      <a:camera prst="orthographicFront"/>
-      <a:lightRig rig="threePt" dir="t"/>
-    </dgm:scene3d>
-    <dgm:sp3d/>
-    <dgm:txPr/>
-    <dgm:style>
-      <a:lnRef idx="2">
-        <a:scrgbClr r="0" g="0" b="0"/>
-      </a:lnRef>
-      <a:fillRef idx="1">
-        <a:scrgbClr r="0" g="0" b="0"/>
-      </a:fillRef>
-      <a:effectRef idx="0">
-        <a:scrgbClr r="0" g="0" b="0"/>
-      </a:effectRef>
-      <a:fontRef idx="minor">
-        <a:schemeClr val="lt1"/>
-      </a:fontRef>
-    </dgm:style>
-  </dgm:styleLbl>
-  <dgm:styleLbl name="node2">
-    <dgm:scene3d>
-      <a:camera prst="orthographicFront"/>
-      <a:lightRig rig="threePt" dir="t"/>
-    </dgm:scene3d>
-    <dgm:sp3d/>
-    <dgm:txPr/>
-    <dgm:style>
-      <a:lnRef idx="2">
-        <a:scrgbClr r="0" g="0" b="0"/>
-      </a:lnRef>
-      <a:fillRef idx="1">
-        <a:scrgbClr r="0" g="0" b="0"/>
-      </a:fillRef>
-      <a:effectRef idx="0">
-        <a:scrgbClr r="0" g="0" b="0"/>
-      </a:effectRef>
-      <a:fontRef idx="minor">
-        <a:schemeClr val="lt1"/>
-      </a:fontRef>
-    </dgm:style>
-  </dgm:styleLbl>
-  <dgm:styleLbl name="node3">
-    <dgm:scene3d>
-      <a:camera prst="orthographicFront"/>
-      <a:lightRig rig="threePt" dir="t"/>
-    </dgm:scene3d>
-    <dgm:sp3d/>
-    <dgm:txPr/>
-    <dgm:style>
-      <a:lnRef idx="2">
-        <a:scrgbClr r="0" g="0" b="0"/>
-      </a:lnRef>
-      <a:fillRef idx="1">
-        <a:scrgbClr r="0" g="0" b="0"/>
-      </a:fillRef>
-      <a:effectRef idx="0">
-        <a:scrgbClr r="0" g="0" b="0"/>
-      </a:effectRef>
-      <a:fontRef idx="minor">
-        <a:schemeClr val="lt1"/>
-      </a:fontRef>
-    </dgm:style>
-  </dgm:styleLbl>
-  <dgm:styleLbl name="node4">
-    <dgm:scene3d>
-      <a:camera prst="orthographicFront"/>
-      <a:lightRig rig="threePt" dir="t"/>
-    </dgm:scene3d>
-    <dgm:sp3d/>
-    <dgm:txPr/>
-    <dgm:style>
-      <a:lnRef idx="2">
-        <a:scrgbClr r="0" g="0" b="0"/>
-      </a:lnRef>
-      <a:fillRef idx="1">
-        <a:scrgbClr r="0" g="0" b="0"/>
-      </a:fillRef>
-      <a:effectRef idx="0">
-        <a:scrgbClr r="0" g="0" b="0"/>
-      </a:effectRef>
-      <a:fontRef idx="minor">
-        <a:schemeClr val="lt1"/>
-      </a:fontRef>
-    </dgm:style>
-  </dgm:styleLbl>
-  <dgm:styleLbl name="fgImgPlace1">
-    <dgm:scene3d>
-      <a:camera prst="orthographicFront"/>
-      <a:lightRig rig="threePt" dir="t"/>
-    </dgm:scene3d>
-    <dgm:sp3d/>
-    <dgm:txPr/>
-    <dgm:style>
-      <a:lnRef idx="2">
-        <a:scrgbClr r="0" g="0" b="0"/>
-      </a:lnRef>
-      <a:fillRef idx="1">
-        <a:scrgbClr r="0" g="0" b="0"/>
-      </a:fillRef>
-      <a:effectRef idx="0">
-        <a:scrgbClr r="0" g="0" b="0"/>
-      </a:effectRef>
-      <a:fontRef idx="minor"/>
-    </dgm:style>
-  </dgm:styleLbl>
-  <dgm:styleLbl name="alignImgPlace1">
-    <dgm:scene3d>
-      <a:camera prst="orthographicFront"/>
-      <a:lightRig rig="threePt" dir="t"/>
-    </dgm:scene3d>
-    <dgm:sp3d/>
-    <dgm:txPr/>
-    <dgm:style>
-      <a:lnRef idx="2">
-        <a:scrgbClr r="0" g="0" b="0"/>
-      </a:lnRef>
-      <a:fillRef idx="1">
-        <a:scrgbClr r="0" g="0" b="0"/>
-      </a:fillRef>
-      <a:effectRef idx="0">
-        <a:scrgbClr r="0" g="0" b="0"/>
-      </a:effectRef>
-      <a:fontRef idx="minor"/>
-    </dgm:style>
-  </dgm:styleLbl>
-  <dgm:styleLbl name="bgImgPlace1">
-    <dgm:scene3d>
-      <a:camera prst="orthographicFront"/>
-      <a:lightRig rig="threePt" dir="t"/>
-    </dgm:scene3d>
-    <dgm:sp3d/>
-    <dgm:txPr/>
-    <dgm:style>
-      <a:lnRef idx="2">
-        <a:scrgbClr r="0" g="0" b="0"/>
-      </a:lnRef>
-      <a:fillRef idx="1">
-        <a:scrgbClr r="0" g="0" b="0"/>
-      </a:fillRef>
-      <a:effectRef idx="0">
-        <a:scrgbClr r="0" g="0" b="0"/>
-      </a:effectRef>
-      <a:fontRef idx="minor"/>
-    </dgm:style>
-  </dgm:styleLbl>
-  <dgm:styleLbl name="sibTrans2D1">
-    <dgm:scene3d>
-      <a:camera prst="orthographicFront"/>
-      <a:lightRig rig="threePt" dir="t"/>
-    </dgm:scene3d>
-    <dgm:sp3d/>
-    <dgm:txPr/>
-    <dgm:style>
-      <a:lnRef idx="0">
-        <a:scrgbClr r="0" g="0" b="0"/>
-      </a:lnRef>
-      <a:fillRef idx="1">
-        <a:scrgbClr r="0" g="0" b="0"/>
-      </a:fillRef>
-      <a:effectRef idx="0">
-        <a:scrgbClr r="0" g="0" b="0"/>
-      </a:effectRef>
-      <a:fontRef idx="minor">
-        <a:schemeClr val="lt1"/>
-      </a:fontRef>
-    </dgm:style>
-  </dgm:styleLbl>
-  <dgm:styleLbl name="fgSibTrans2D1">
-    <dgm:scene3d>
-      <a:camera prst="orthographicFront"/>
-      <a:lightRig rig="threePt" dir="t"/>
-    </dgm:scene3d>
-    <dgm:sp3d/>
-    <dgm:txPr/>
-    <dgm:style>
-      <a:lnRef idx="0">
-        <a:scrgbClr r="0" g="0" b="0"/>
-      </a:lnRef>
-      <a:fillRef idx="1">
-        <a:scrgbClr r="0" g="0" b="0"/>
-      </a:fillRef>
-      <a:effectRef idx="0">
-        <a:scrgbClr r="0" g="0" b="0"/>
-      </a:effectRef>
-      <a:fontRef idx="minor">
-        <a:schemeClr val="lt1"/>
-      </a:fontRef>
-    </dgm:style>
-  </dgm:styleLbl>
-  <dgm:styleLbl name="bgSibTrans2D1">
-    <dgm:scene3d>
-      <a:camera prst="orthographicFront"/>
-      <a:lightRig rig="threePt" dir="t"/>
-    </dgm:scene3d>
-    <dgm:sp3d/>
-    <dgm:txPr/>
-    <dgm:style>
-      <a:lnRef idx="0">
-        <a:scrgbClr r="0" g="0" b="0"/>
-      </a:lnRef>
-      <a:fillRef idx="1">
-        <a:scrgbClr r="0" g="0" b="0"/>
-      </a:fillRef>
-      <a:effectRef idx="0">
-        <a:scrgbClr r="0" g="0" b="0"/>
-      </a:effectRef>
-      <a:fontRef idx="minor">
-        <a:schemeClr val="lt1"/>
-      </a:fontRef>
-    </dgm:style>
-  </dgm:styleLbl>
-  <dgm:styleLbl name="sibTrans1D1">
-    <dgm:scene3d>
-      <a:camera prst="orthographicFront"/>
-      <a:lightRig rig="threePt" dir="t"/>
-    </dgm:scene3d>
-    <dgm:sp3d/>
-    <dgm:txPr/>
-    <dgm:style>
-      <a:lnRef idx="1">
-        <a:scrgbClr r="0" g="0" b="0"/>
-      </a:lnRef>
-      <a:fillRef idx="0">
-        <a:scrgbClr r="0" g="0" b="0"/>
-      </a:fillRef>
-      <a:effectRef idx="0">
-        <a:scrgbClr r="0" g="0" b="0"/>
-      </a:effectRef>
-      <a:fontRef idx="minor"/>
-    </dgm:style>
-  </dgm:styleLbl>
-  <dgm:styleLbl name="callout">
-    <dgm:scene3d>
-      <a:camera prst="orthographicFront"/>
-      <a:lightRig rig="threePt" dir="t"/>
-    </dgm:scene3d>
-    <dgm:sp3d/>
-    <dgm:txPr/>
-    <dgm:style>
-      <a:lnRef idx="2">
-        <a:scrgbClr r="0" g="0" b="0"/>
-      </a:lnRef>
-      <a:fillRef idx="1">
-        <a:scrgbClr r="0" g="0" b="0"/>
-      </a:fillRef>
-      <a:effectRef idx="0">
-        <a:scrgbClr r="0" g="0" b="0"/>
-      </a:effectRef>
-      <a:fontRef idx="minor"/>
-    </dgm:style>
-  </dgm:styleLbl>
-  <dgm:styleLbl name="asst0">
-    <dgm:scene3d>
-      <a:camera prst="orthographicFront"/>
-      <a:lightRig rig="threePt" dir="t"/>
-    </dgm:scene3d>
-    <dgm:sp3d/>
-    <dgm:txPr/>
-    <dgm:style>
-      <a:lnRef idx="2">
-        <a:scrgbClr r="0" g="0" b="0"/>
-      </a:lnRef>
-      <a:fillRef idx="1">
-        <a:scrgbClr r="0" g="0" b="0"/>
-      </a:fillRef>
-      <a:effectRef idx="0">
-        <a:scrgbClr r="0" g="0" b="0"/>
-      </a:effectRef>
-      <a:fontRef idx="minor">
-        <a:schemeClr val="lt1"/>
-      </a:fontRef>
-    </dgm:style>
-  </dgm:styleLbl>
-  <dgm:styleLbl name="asst1">
-    <dgm:scene3d>
-      <a:camera prst="orthographicFront"/>
-      <a:lightRig rig="threePt" dir="t"/>
-    </dgm:scene3d>
-    <dgm:sp3d/>
-    <dgm:txPr/>
-    <dgm:style>
-      <a:lnRef idx="2">
-        <a:scrgbClr r="0" g="0" b="0"/>
-      </a:lnRef>
-      <a:fillRef idx="1">
-        <a:scrgbClr r="0" g="0" b="0"/>
-      </a:fillRef>
-      <a:effectRef idx="0">
-        <a:scrgbClr r="0" g="0" b="0"/>
-      </a:effectRef>
-      <a:fontRef idx="minor">
-        <a:schemeClr val="lt1"/>
-      </a:fontRef>
-    </dgm:style>
-  </dgm:styleLbl>
-  <dgm:styleLbl name="asst2">
-    <dgm:scene3d>
-      <a:camera prst="orthographicFront"/>
-      <a:lightRig rig="threePt" dir="t"/>
-    </dgm:scene3d>
-    <dgm:sp3d/>
-    <dgm:txPr/>
-    <dgm:style>
-      <a:lnRef idx="2">
-        <a:scrgbClr r="0" g="0" b="0"/>
-      </a:lnRef>
-      <a:fillRef idx="1">
-        <a:scrgbClr r="0" g="0" b="0"/>
-      </a:fillRef>
-      <a:effectRef idx="0">
-        <a:scrgbClr r="0" g="0" b="0"/>
-      </a:effectRef>
-      <a:fontRef idx="minor">
-        <a:schemeClr val="lt1"/>
-      </a:fontRef>
-    </dgm:style>
-  </dgm:styleLbl>
-  <dgm:styleLbl name="asst3">
-    <dgm:scene3d>
-      <a:camera prst="orthographicFront"/>
-      <a:lightRig rig="threePt" dir="t"/>
-    </dgm:scene3d>
-    <dgm:sp3d/>
-    <dgm:txPr/>
-    <dgm:style>
-      <a:lnRef idx="2">
-        <a:scrgbClr r="0" g="0" b="0"/>
-      </a:lnRef>
-      <a:fillRef idx="1">
-        <a:scrgbClr r="0" g="0" b="0"/>
-      </a:fillRef>
-      <a:effectRef idx="0">
-        <a:scrgbClr r="0" g="0" b="0"/>
-      </a:effectRef>
-      <a:fontRef idx="minor">
-        <a:schemeClr val="lt1"/>
-      </a:fontRef>
-    </dgm:style>
-  </dgm:styleLbl>
-  <dgm:styleLbl name="asst4">
-    <dgm:scene3d>
-      <a:camera prst="orthographicFront"/>
-      <a:lightRig rig="threePt" dir="t"/>
-    </dgm:scene3d>
-    <dgm:sp3d/>
-    <dgm:txPr/>
-    <dgm:style>
-      <a:lnRef idx="2">
-        <a:scrgbClr r="0" g="0" b="0"/>
-      </a:lnRef>
-      <a:fillRef idx="1">
-        <a:scrgbClr r="0" g="0" b="0"/>
-      </a:fillRef>
-      <a:effectRef idx="0">
-        <a:scrgbClr r="0" g="0" b="0"/>
-      </a:effectRef>
-      <a:fontRef idx="minor">
-        <a:schemeClr val="lt1"/>
-      </a:fontRef>
-    </dgm:style>
-  </dgm:styleLbl>
-  <dgm:styleLbl name="parChTrans2D1">
-    <dgm:scene3d>
-      <a:camera prst="orthographicFront"/>
-      <a:lightRig rig="threePt" dir="t"/>
-    </dgm:scene3d>
-    <dgm:sp3d/>
-    <dgm:txPr/>
-    <dgm:style>
-      <a:lnRef idx="2">
-        <a:scrgbClr r="0" g="0" b="0"/>
-      </a:lnRef>
-      <a:fillRef idx="1">
-        <a:scrgbClr r="0" g="0" b="0"/>
-      </a:fillRef>
-      <a:effectRef idx="0">
-        <a:scrgbClr r="0" g="0" b="0"/>
-      </a:effectRef>
-      <a:fontRef idx="minor">
-        <a:schemeClr val="lt1"/>
-      </a:fontRef>
-    </dgm:style>
-  </dgm:styleLbl>
-  <dgm:styleLbl name="parChTrans2D2">
-    <dgm:scene3d>
-      <a:camera prst="orthographicFront"/>
-      <a:lightRig rig="threePt" dir="t"/>
-    </dgm:scene3d>
-    <dgm:sp3d/>
-    <dgm:txPr/>
-    <dgm:style>
-      <a:lnRef idx="2">
-        <a:scrgbClr r="0" g="0" b="0"/>
-      </a:lnRef>
-      <a:fillRef idx="1">
-        <a:scrgbClr r="0" g="0" b="0"/>
-      </a:fillRef>
-      <a:effectRef idx="0">
-        <a:scrgbClr r="0" g="0" b="0"/>
-      </a:effectRef>
-      <a:fontRef idx="minor">
-        <a:schemeClr val="lt1"/>
-      </a:fontRef>
-    </dgm:style>
-  </dgm:styleLbl>
-  <dgm:styleLbl name="parChTrans2D3">
-    <dgm:scene3d>
-      <a:camera prst="orthographicFront"/>
-      <a:lightRig rig="threePt" dir="t"/>
-    </dgm:scene3d>
-    <dgm:sp3d/>
-    <dgm:txPr/>
-    <dgm:style>
-      <a:lnRef idx="2">
-        <a:scrgbClr r="0" g="0" b="0"/>
-      </a:lnRef>
-      <a:fillRef idx="1">
-        <a:scrgbClr r="0" g="0" b="0"/>
-      </a:fillRef>
-      <a:effectRef idx="0">
-        <a:scrgbClr r="0" g="0" b="0"/>
-      </a:effectRef>
-      <a:fontRef idx="minor">
-        <a:schemeClr val="lt1"/>
-      </a:fontRef>
-    </dgm:style>
-  </dgm:styleLbl>
-  <dgm:styleLbl name="parChTrans2D4">
-    <dgm:scene3d>
-      <a:camera prst="orthographicFront"/>
-      <a:lightRig rig="threePt" dir="t"/>
-    </dgm:scene3d>
-    <dgm:sp3d/>
-    <dgm:txPr/>
-    <dgm:style>
-      <a:lnRef idx="2">
-        <a:scrgbClr r="0" g="0" b="0"/>
-      </a:lnRef>
-      <a:fillRef idx="1">
-        <a:scrgbClr r="0" g="0" b="0"/>
-      </a:fillRef>
-      <a:effectRef idx="0">
-        <a:scrgbClr r="0" g="0" b="0"/>
-      </a:effectRef>
-      <a:fontRef idx="minor">
-        <a:schemeClr val="lt1"/>
-      </a:fontRef>
-    </dgm:style>
-  </dgm:styleLbl>
-  <dgm:styleLbl name="parChTrans1D1">
-    <dgm:scene3d>
-      <a:camera prst="orthographicFront"/>
-      <a:lightRig rig="threePt" dir="t"/>
-    </dgm:scene3d>
-    <dgm:sp3d/>
-    <dgm:txPr/>
-    <dgm:style>
-      <a:lnRef idx="2">
-        <a:scrgbClr r="0" g="0" b="0"/>
-      </a:lnRef>
-      <a:fillRef idx="0">
-        <a:scrgbClr r="0" g="0" b="0"/>
-      </a:fillRef>
-      <a:effectRef idx="0">
-        <a:scrgbClr r="0" g="0" b="0"/>
-      </a:effectRef>
-      <a:fontRef idx="minor"/>
-    </dgm:style>
-  </dgm:styleLbl>
-  <dgm:styleLbl name="parChTrans1D2">
-    <dgm:scene3d>
-      <a:camera prst="orthographicFront"/>
-      <a:lightRig rig="threePt" dir="t"/>
-    </dgm:scene3d>
-    <dgm:sp3d/>
-    <dgm:txPr/>
-    <dgm:style>
-      <a:lnRef idx="2">
-        <a:scrgbClr r="0" g="0" b="0"/>
-      </a:lnRef>
-      <a:fillRef idx="0">
-        <a:scrgbClr r="0" g="0" b="0"/>
-      </a:fillRef>
-      <a:effectRef idx="0">
-        <a:scrgbClr r="0" g="0" b="0"/>
-      </a:effectRef>
-      <a:fontRef idx="minor"/>
-    </dgm:style>
-  </dgm:styleLbl>
-  <dgm:styleLbl name="parChTrans1D3">
-    <dgm:scene3d>
-      <a:camera prst="orthographicFront"/>
-      <a:lightRig rig="threePt" dir="t"/>
-    </dgm:scene3d>
-    <dgm:sp3d/>
-    <dgm:txPr/>
-    <dgm:style>
-      <a:lnRef idx="2">
-        <a:scrgbClr r="0" g="0" b="0"/>
-      </a:lnRef>
-      <a:fillRef idx="0">
-        <a:scrgbClr r="0" g="0" b="0"/>
-      </a:fillRef>
-      <a:effectRef idx="0">
-        <a:scrgbClr r="0" g="0" b="0"/>
-      </a:effectRef>
-      <a:fontRef idx="minor"/>
-    </dgm:style>
-  </dgm:styleLbl>
-  <dgm:styleLbl name="parChTrans1D4">
-    <dgm:scene3d>
-      <a:camera prst="orthographicFront"/>
-      <a:lightRig rig="threePt" dir="t"/>
-    </dgm:scene3d>
-    <dgm:sp3d/>
-    <dgm:txPr/>
-    <dgm:style>
-      <a:lnRef idx="2">
-        <a:scrgbClr r="0" g="0" b="0"/>
-      </a:lnRef>
-      <a:fillRef idx="0">
-        <a:scrgbClr r="0" g="0" b="0"/>
-      </a:fillRef>
-      <a:effectRef idx="0">
-        <a:scrgbClr r="0" g="0" b="0"/>
-      </a:effectRef>
-      <a:fontRef idx="minor"/>
-    </dgm:style>
-  </dgm:styleLbl>
-  <dgm:styleLbl name="fgAcc1">
-    <dgm:scene3d>
-      <a:camera prst="orthographicFront"/>
-      <a:lightRig rig="threePt" dir="t"/>
-    </dgm:scene3d>
-    <dgm:sp3d/>
-    <dgm:txPr/>
-    <dgm:style>
-      <a:lnRef idx="2">
-        <a:scrgbClr r="0" g="0" b="0"/>
-      </a:lnRef>
-      <a:fillRef idx="1">
-        <a:scrgbClr r="0" g="0" b="0"/>
-      </a:fillRef>
-      <a:effectRef idx="0">
-        <a:scrgbClr r="0" g="0" b="0"/>
-      </a:effectRef>
-      <a:fontRef idx="minor"/>
-    </dgm:style>
-  </dgm:styleLbl>
-  <dgm:styleLbl name="conFgAcc1">
-    <dgm:scene3d>
-      <a:camera prst="orthographicFront"/>
-      <a:lightRig rig="threePt" dir="t"/>
-    </dgm:scene3d>
-    <dgm:sp3d/>
-    <dgm:txPr/>
-    <dgm:style>
-      <a:lnRef idx="2">
-        <a:scrgbClr r="0" g="0" b="0"/>
-      </a:lnRef>
-      <a:fillRef idx="1">
-        <a:scrgbClr r="0" g="0" b="0"/>
-      </a:fillRef>
-      <a:effectRef idx="0">
-        <a:scrgbClr r="0" g="0" b="0"/>
-      </a:effectRef>
-      <a:fontRef idx="minor"/>
-    </dgm:style>
-  </dgm:styleLbl>
-  <dgm:styleLbl name="alignAcc1">
-    <dgm:scene3d>
-      <a:camera prst="orthographicFront"/>
-      <a:lightRig rig="threePt" dir="t"/>
-    </dgm:scene3d>
-    <dgm:sp3d/>
-    <dgm:txPr/>
-    <dgm:style>
-      <a:lnRef idx="2">
-        <a:scrgbClr r="0" g="0" b="0"/>
-      </a:lnRef>
-      <a:fillRef idx="1">
-        <a:scrgbClr r="0" g="0" b="0"/>
-      </a:fillRef>
-      <a:effectRef idx="0">
-        <a:scrgbClr r="0" g="0" b="0"/>
-      </a:effectRef>
-      <a:fontRef idx="minor"/>
-    </dgm:style>
-  </dgm:styleLbl>
-  <dgm:styleLbl name="trAlignAcc1">
-    <dgm:scene3d>
-      <a:camera prst="orthographicFront"/>
-      <a:lightRig rig="threePt" dir="t"/>
-    </dgm:scene3d>
-    <dgm:sp3d/>
-    <dgm:txPr/>
-    <dgm:style>
-      <a:lnRef idx="1">
-        <a:scrgbClr r="0" g="0" b="0"/>
-      </a:lnRef>
-      <a:fillRef idx="1">
-        <a:scrgbClr r="0" g="0" b="0"/>
-      </a:fillRef>
-      <a:effectRef idx="0">
-        <a:scrgbClr r="0" g="0" b="0"/>
-      </a:effectRef>
-      <a:fontRef idx="minor"/>
-    </dgm:style>
-  </dgm:styleLbl>
-  <dgm:styleLbl name="bgAcc1">
-    <dgm:scene3d>
-      <a:camera prst="orthographicFront"/>
-      <a:lightRig rig="threePt" dir="t"/>
-    </dgm:scene3d>
-    <dgm:sp3d/>
-    <dgm:txPr/>
-    <dgm:style>
-      <a:lnRef idx="2">
-        <a:scrgbClr r="0" g="0" b="0"/>
-      </a:lnRef>
-      <a:fillRef idx="1">
-        <a:scrgbClr r="0" g="0" b="0"/>
-      </a:fillRef>
-      <a:effectRef idx="0">
-        <a:scrgbClr r="0" g="0" b="0"/>
-      </a:effectRef>
-      <a:fontRef idx="minor"/>
-    </dgm:style>
-  </dgm:styleLbl>
-  <dgm:styleLbl name="solidFgAcc1">
-    <dgm:scene3d>
-      <a:camera prst="orthographicFront"/>
-      <a:lightRig rig="threePt" dir="t"/>
-    </dgm:scene3d>
-    <dgm:sp3d/>
-    <dgm:txPr/>
-    <dgm:style>
-      <a:lnRef idx="2">
-        <a:scrgbClr r="0" g="0" b="0"/>
-      </a:lnRef>
-      <a:fillRef idx="1">
-        <a:scrgbClr r="0" g="0" b="0"/>
-      </a:fillRef>
-      <a:effectRef idx="0">
-        <a:scrgbClr r="0" g="0" b="0"/>
-      </a:effectRef>
-      <a:fontRef idx="minor"/>
-    </dgm:style>
-  </dgm:styleLbl>
-  <dgm:styleLbl name="solidAlignAcc1">
-    <dgm:scene3d>
-      <a:camera prst="orthographicFront"/>
-      <a:lightRig rig="threePt" dir="t"/>
-    </dgm:scene3d>
-    <dgm:sp3d/>
-    <dgm:txPr/>
-    <dgm:style>
-      <a:lnRef idx="2">
-        <a:scrgbClr r="0" g="0" b="0"/>
-      </a:lnRef>
-      <a:fillRef idx="1">
-        <a:scrgbClr r="0" g="0" b="0"/>
-      </a:fillRef>
-      <a:effectRef idx="0">
-        <a:scrgbClr r="0" g="0" b="0"/>
-      </a:effectRef>
-      <a:fontRef idx="minor"/>
-    </dgm:style>
-  </dgm:styleLbl>
-  <dgm:styleLbl name="solidBgAcc1">
-    <dgm:scene3d>
-      <a:camera prst="orthographicFront"/>
-      <a:lightRig rig="threePt" dir="t"/>
-    </dgm:scene3d>
-    <dgm:sp3d/>
-    <dgm:txPr/>
-    <dgm:style>
-      <a:lnRef idx="2">
-        <a:scrgbClr r="0" g="0" b="0"/>
-      </a:lnRef>
-      <a:fillRef idx="1">
-        <a:scrgbClr r="0" g="0" b="0"/>
-      </a:fillRef>
-      <a:effectRef idx="0">
-        <a:scrgbClr r="0" g="0" b="0"/>
-      </a:effectRef>
-      <a:fontRef idx="minor"/>
-    </dgm:style>
-  </dgm:styleLbl>
-  <dgm:styleLbl name="fgAccFollowNode1">
-    <dgm:scene3d>
-      <a:camera prst="orthographicFront"/>
-      <a:lightRig rig="threePt" dir="t"/>
-    </dgm:scene3d>
-    <dgm:sp3d/>
-    <dgm:txPr/>
-    <dgm:style>
-      <a:lnRef idx="2">
-        <a:scrgbClr r="0" g="0" b="0"/>
-      </a:lnRef>
-      <a:fillRef idx="1">
-        <a:scrgbClr r="0" g="0" b="0"/>
-      </a:fillRef>
-      <a:effectRef idx="0">
-        <a:scrgbClr r="0" g="0" b="0"/>
-      </a:effectRef>
-      <a:fontRef idx="minor"/>
-    </dgm:style>
-  </dgm:styleLbl>
-  <dgm:styleLbl name="alignAccFollowNode1">
-    <dgm:scene3d>
-      <a:camera prst="orthographicFront"/>
-      <a:lightRig rig="threePt" dir="t"/>
-    </dgm:scene3d>
-    <dgm:sp3d/>
-    <dgm:txPr/>
-    <dgm:style>
-      <a:lnRef idx="2">
-        <a:scrgbClr r="0" g="0" b="0"/>
-      </a:lnRef>
-      <a:fillRef idx="1">
-        <a:scrgbClr r="0" g="0" b="0"/>
-      </a:fillRef>
-      <a:effectRef idx="0">
-        <a:scrgbClr r="0" g="0" b="0"/>
-      </a:effectRef>
-      <a:fontRef idx="minor"/>
-    </dgm:style>
-  </dgm:styleLbl>
-  <dgm:styleLbl name="bgAccFollowNode1">
-    <dgm:scene3d>
-      <a:camera prst="orthographicFront"/>
-      <a:lightRig rig="threePt" dir="t"/>
-    </dgm:scene3d>
-    <dgm:sp3d/>
-    <dgm:txPr/>
-    <dgm:style>
-      <a:lnRef idx="2">
-        <a:scrgbClr r="0" g="0" b="0"/>
-      </a:lnRef>
-      <a:fillRef idx="1">
-        <a:scrgbClr r="0" g="0" b="0"/>
-      </a:fillRef>
-      <a:effectRef idx="0">
-        <a:scrgbClr r="0" g="0" b="0"/>
-      </a:effectRef>
-      <a:fontRef idx="minor"/>
-    </dgm:style>
-  </dgm:styleLbl>
-  <dgm:styleLbl name="fgAcc0">
-    <dgm:scene3d>
-      <a:camera prst="orthographicFront"/>
-      <a:lightRig rig="threePt" dir="t"/>
-    </dgm:scene3d>
-    <dgm:sp3d/>
-    <dgm:txPr/>
-    <dgm:style>
-      <a:lnRef idx="2">
-        <a:scrgbClr r="0" g="0" b="0"/>
-      </a:lnRef>
-      <a:fillRef idx="1">
-        <a:scrgbClr r="0" g="0" b="0"/>
-      </a:fillRef>
-      <a:effectRef idx="0">
-        <a:scrgbClr r="0" g="0" b="0"/>
-      </a:effectRef>
-      <a:fontRef idx="minor"/>
-    </dgm:style>
-  </dgm:styleLbl>
-  <dgm:styleLbl name="fgAcc2">
-    <dgm:scene3d>
-      <a:camera prst="orthographicFront"/>
-      <a:lightRig rig="threePt" dir="t"/>
-    </dgm:scene3d>
-    <dgm:sp3d/>
-    <dgm:txPr/>
-    <dgm:style>
-      <a:lnRef idx="2">
-        <a:scrgbClr r="0" g="0" b="0"/>
-      </a:lnRef>
-      <a:fillRef idx="1">
-        <a:scrgbClr r="0" g="0" b="0"/>
-      </a:fillRef>
-      <a:effectRef idx="0">
-        <a:scrgbClr r="0" g="0" b="0"/>
-      </a:effectRef>
-      <a:fontRef idx="minor"/>
-    </dgm:style>
-  </dgm:styleLbl>
-  <dgm:styleLbl name="fgAcc3">
-    <dgm:scene3d>
-      <a:camera prst="orthographicFront"/>
-      <a:lightRig rig="threePt" dir="t"/>
-    </dgm:scene3d>
-    <dgm:sp3d/>
-    <dgm:txPr/>
-    <dgm:style>
-      <a:lnRef idx="2">
-        <a:scrgbClr r="0" g="0" b="0"/>
-      </a:lnRef>
-      <a:fillRef idx="1">
-        <a:scrgbClr r="0" g="0" b="0"/>
-      </a:fillRef>
-      <a:effectRef idx="0">
-        <a:scrgbClr r="0" g="0" b="0"/>
-      </a:effectRef>
-      <a:fontRef idx="minor"/>
-    </dgm:style>
-  </dgm:styleLbl>
-  <dgm:styleLbl name="fgAcc4">
-    <dgm:scene3d>
-      <a:camera prst="orthographicFront"/>
-      <a:lightRig rig="threePt" dir="t"/>
-    </dgm:scene3d>
-    <dgm:sp3d/>
-    <dgm:txPr/>
-    <dgm:style>
-      <a:lnRef idx="2">
-        <a:scrgbClr r="0" g="0" b="0"/>
-      </a:lnRef>
-      <a:fillRef idx="1">
-        <a:scrgbClr r="0" g="0" b="0"/>
-      </a:fillRef>
-      <a:effectRef idx="0">
-        <a:scrgbClr r="0" g="0" b="0"/>
-      </a:effectRef>
-      <a:fontRef idx="minor"/>
-    </dgm:style>
-  </dgm:styleLbl>
-  <dgm:styleLbl name="bgShp">
-    <dgm:scene3d>
-      <a:camera prst="orthographicFront"/>
-      <a:lightRig rig="threePt" dir="t"/>
-    </dgm:scene3d>
-    <dgm:sp3d/>
-    <dgm:txPr/>
-    <dgm:style>
-      <a:lnRef idx="0">
-        <a:scrgbClr r="0" g="0" b="0"/>
-      </a:lnRef>
-      <a:fillRef idx="1">
-        <a:scrgbClr r="0" g="0" b="0"/>
-      </a:fillRef>
-      <a:effectRef idx="0">
-        <a:scrgbClr r="0" g="0" b="0"/>
-      </a:effectRef>
-      <a:fontRef idx="minor"/>
-    </dgm:style>
-  </dgm:styleLbl>
-  <dgm:styleLbl name="dkBgShp">
-    <dgm:scene3d>
-      <a:camera prst="orthographicFront"/>
-      <a:lightRig rig="threePt" dir="t"/>
-    </dgm:scene3d>
-    <dgm:sp3d/>
-    <dgm:txPr/>
-    <dgm:style>
-      <a:lnRef idx="0">
-        <a:scrgbClr r="0" g="0" b="0"/>
-      </a:lnRef>
-      <a:fillRef idx="1">
-        <a:scrgbClr r="0" g="0" b="0"/>
-      </a:fillRef>
-      <a:effectRef idx="0">
-        <a:scrgbClr r="0" g="0" b="0"/>
-      </a:effectRef>
-      <a:fontRef idx="minor"/>
-    </dgm:style>
-  </dgm:styleLbl>
-  <dgm:styleLbl name="trBgShp">
-    <dgm:scene3d>
-      <a:camera prst="orthographicFront"/>
-      <a:lightRig rig="threePt" dir="t"/>
-    </dgm:scene3d>
-    <dgm:sp3d/>
-    <dgm:txPr/>
-    <dgm:style>
-      <a:lnRef idx="0">
-        <a:scrgbClr r="0" g="0" b="0"/>
-      </a:lnRef>
-      <a:fillRef idx="1">
-        <a:scrgbClr r="0" g="0" b="0"/>
-      </a:fillRef>
-      <a:effectRef idx="0">
-        <a:scrgbClr r="0" g="0" b="0"/>
-      </a:effectRef>
-      <a:fontRef idx="minor"/>
-    </dgm:style>
-  </dgm:styleLbl>
-  <dgm:styleLbl name="fgShp">
-    <dgm:scene3d>
-      <a:camera prst="orthographicFront"/>
-      <a:lightRig rig="threePt" dir="t"/>
-    </dgm:scene3d>
-    <dgm:sp3d/>
-    <dgm:txPr/>
-    <dgm:style>
-      <a:lnRef idx="2">
-        <a:scrgbClr r="0" g="0" b="0"/>
-      </a:lnRef>
-      <a:fillRef idx="1">
-        <a:scrgbClr r="0" g="0" b="0"/>
-      </a:fillRef>
-      <a:effectRef idx="0">
-        <a:scrgbClr r="0" g="0" b="0"/>
-      </a:effectRef>
-      <a:fontRef idx="minor"/>
-    </dgm:style>
-  </dgm:styleLbl>
-  <dgm:styleLbl name="revTx">
-    <dgm:scene3d>
-      <a:camera prst="orthographicFront"/>
-      <a:lightRig rig="threePt" dir="t"/>
-    </dgm:scene3d>
-    <dgm:sp3d/>
-    <dgm:txPr/>
-    <dgm:style>
-      <a:lnRef idx="0">
-        <a:scrgbClr r="0" g="0" b="0"/>
-      </a:lnRef>
-      <a:fillRef idx="0">
-        <a:scrgbClr r="0" g="0" b="0"/>
-      </a:fillRef>
-      <a:effectRef idx="0">
-        <a:scrgbClr r="0" g="0" b="0"/>
-      </a:effectRef>
-      <a:fontRef idx="minor"/>
-    </dgm:style>
-  </dgm:styleLbl>
-</dgm:styleDef>
-</file>
-
-<file path=ppt/diagrams/quickStyle6.xml><?xml version="1.0" encoding="utf-8"?>
 <dgm:styleDef xmlns:dgm="http://schemas.openxmlformats.org/drawingml/2006/diagram" xmlns:a="http://schemas.openxmlformats.org/drawingml/2006/main" uniqueId="urn:microsoft.com/office/officeart/2005/8/quickstyle/simple1">
   <dgm:title val=""/>
   <dgm:desc val=""/>
@@ -20238,7 +17259,7 @@
           <a:p>
             <a:fld id="{14F9119A-F2D0-4CFF-BED2-47984A0F79E7}" type="datetimeFigureOut">
               <a:rPr lang="en-US" smtClean="0"/>
-              <a:t>5/12/2025</a:t>
+              <a:t>6/12/2025</a:t>
             </a:fld>
             <a:endParaRPr lang="en-US"/>
           </a:p>
@@ -20684,7 +17705,7 @@
           <a:p>
             <a:fld id="{5BCAD085-E8A6-8845-BD4E-CB4CCA059FC4}" type="datetimeFigureOut">
               <a:rPr lang="en-US" smtClean="0"/>
-              <a:t>5/12/2025</a:t>
+              <a:t>6/12/2025</a:t>
             </a:fld>
             <a:endParaRPr lang="en-US"/>
           </a:p>
@@ -20852,7 +17873,7 @@
           <a:p>
             <a:fld id="{5BCAD085-E8A6-8845-BD4E-CB4CCA059FC4}" type="datetimeFigureOut">
               <a:rPr lang="en-US" smtClean="0"/>
-              <a:t>5/12/2025</a:t>
+              <a:t>6/12/2025</a:t>
             </a:fld>
             <a:endParaRPr lang="en-US"/>
           </a:p>
@@ -21030,7 +18051,7 @@
           <a:p>
             <a:fld id="{5BCAD085-E8A6-8845-BD4E-CB4CCA059FC4}" type="datetimeFigureOut">
               <a:rPr lang="en-US" smtClean="0"/>
-              <a:t>5/12/2025</a:t>
+              <a:t>6/12/2025</a:t>
             </a:fld>
             <a:endParaRPr lang="en-US"/>
           </a:p>
@@ -21118,13 +18139,18 @@
             <p:ph type="title"/>
           </p:nvPr>
         </p:nvSpPr>
-        <p:spPr/>
+        <p:spPr>
+          <a:xfrm>
+            <a:off x="0" y="274638"/>
+            <a:ext cx="12192000" cy="1143000"/>
+          </a:xfrm>
+        </p:spPr>
         <p:txBody>
           <a:bodyPr/>
           <a:lstStyle/>
           <a:p>
             <a:r>
-              <a:rPr lang="en-US"/>
+              <a:rPr lang="en-US" dirty="0"/>
               <a:t>Click to edit Master title style</a:t>
             </a:r>
           </a:p>
@@ -21198,7 +18224,7 @@
           <a:p>
             <a:fld id="{5BCAD085-E8A6-8845-BD4E-CB4CCA059FC4}" type="datetimeFigureOut">
               <a:rPr lang="en-US" smtClean="0"/>
-              <a:t>5/12/2025</a:t>
+              <a:t>6/12/2025</a:t>
             </a:fld>
             <a:endParaRPr lang="en-US"/>
           </a:p>
@@ -21443,7 +18469,7 @@
           <a:p>
             <a:fld id="{5BCAD085-E8A6-8845-BD4E-CB4CCA059FC4}" type="datetimeFigureOut">
               <a:rPr lang="en-US" smtClean="0"/>
-              <a:t>5/12/2025</a:t>
+              <a:t>6/12/2025</a:t>
             </a:fld>
             <a:endParaRPr lang="en-US"/>
           </a:p>
@@ -21728,7 +18754,7 @@
           <a:p>
             <a:fld id="{5BCAD085-E8A6-8845-BD4E-CB4CCA059FC4}" type="datetimeFigureOut">
               <a:rPr lang="en-US" smtClean="0"/>
-              <a:t>5/12/2025</a:t>
+              <a:t>6/12/2025</a:t>
             </a:fld>
             <a:endParaRPr lang="en-US"/>
           </a:p>
@@ -22147,7 +19173,7 @@
           <a:p>
             <a:fld id="{5BCAD085-E8A6-8845-BD4E-CB4CCA059FC4}" type="datetimeFigureOut">
               <a:rPr lang="en-US" smtClean="0"/>
-              <a:t>5/12/2025</a:t>
+              <a:t>6/12/2025</a:t>
             </a:fld>
             <a:endParaRPr lang="en-US"/>
           </a:p>
@@ -22264,7 +19290,7 @@
           <a:p>
             <a:fld id="{5BCAD085-E8A6-8845-BD4E-CB4CCA059FC4}" type="datetimeFigureOut">
               <a:rPr lang="en-US" smtClean="0"/>
-              <a:t>5/12/2025</a:t>
+              <a:t>6/12/2025</a:t>
             </a:fld>
             <a:endParaRPr lang="en-US"/>
           </a:p>
@@ -22359,7 +19385,7 @@
           <a:p>
             <a:fld id="{5BCAD085-E8A6-8845-BD4E-CB4CCA059FC4}" type="datetimeFigureOut">
               <a:rPr lang="en-US" smtClean="0"/>
-              <a:t>5/12/2025</a:t>
+              <a:t>6/12/2025</a:t>
             </a:fld>
             <a:endParaRPr lang="en-US"/>
           </a:p>
@@ -22634,7 +19660,7 @@
           <a:p>
             <a:fld id="{5BCAD085-E8A6-8845-BD4E-CB4CCA059FC4}" type="datetimeFigureOut">
               <a:rPr lang="en-US" smtClean="0"/>
-              <a:t>5/12/2025</a:t>
+              <a:t>6/12/2025</a:t>
             </a:fld>
             <a:endParaRPr lang="en-US"/>
           </a:p>
@@ -22886,7 +19912,7 @@
           <a:p>
             <a:fld id="{5BCAD085-E8A6-8845-BD4E-CB4CCA059FC4}" type="datetimeFigureOut">
               <a:rPr lang="en-US" smtClean="0"/>
-              <a:t>5/12/2025</a:t>
+              <a:t>6/12/2025</a:t>
             </a:fld>
             <a:endParaRPr lang="en-US"/>
           </a:p>
@@ -22981,8 +20007,8 @@
         </p:nvSpPr>
         <p:spPr>
           <a:xfrm>
-            <a:off x="609600" y="274638"/>
-            <a:ext cx="10972800" cy="1143000"/>
+            <a:off x="0" y="274638"/>
+            <a:ext cx="12192000" cy="1143000"/>
           </a:xfrm>
           <a:prstGeom prst="rect">
             <a:avLst/>
@@ -22995,7 +20021,7 @@
           <a:lstStyle/>
           <a:p>
             <a:r>
-              <a:rPr lang="en-US"/>
+              <a:rPr lang="en-US" dirty="0"/>
               <a:t>Click to edit Master title style</a:t>
             </a:r>
           </a:p>
@@ -23097,7 +20123,7 @@
           <a:p>
             <a:fld id="{5BCAD085-E8A6-8845-BD4E-CB4CCA059FC4}" type="datetimeFigureOut">
               <a:rPr lang="en-US" smtClean="0"/>
-              <a:t>5/12/2025</a:t>
+              <a:t>6/12/2025</a:t>
             </a:fld>
             <a:endParaRPr lang="en-US"/>
           </a:p>
@@ -23552,8 +20578,8 @@
         </p:nvSpPr>
         <p:spPr>
           <a:xfrm>
-            <a:off x="2004061" y="325370"/>
-            <a:ext cx="3276451" cy="1956841"/>
+            <a:off x="525853" y="783203"/>
+            <a:ext cx="4660899" cy="1049037"/>
           </a:xfrm>
         </p:spPr>
         <p:txBody>
@@ -23562,13 +20588,13 @@
           </a:bodyPr>
           <a:lstStyle/>
           <a:p>
-            <a:pPr algn="l" defTabSz="914400">
+            <a:pPr defTabSz="914400">
               <a:lnSpc>
                 <a:spcPct val="90000"/>
               </a:lnSpc>
             </a:pPr>
             <a:r>
-              <a:rPr lang="en-US" sz="3300"/>
+              <a:rPr lang="en-US" sz="3300" dirty="0"/>
               <a:t>UK Rail Journey Analytics &amp; Power BI Reporting</a:t>
             </a:r>
           </a:p>
@@ -23587,7 +20613,7 @@
             </a:extLst>
           </p:cNvPr>
           <p:cNvSpPr>
-            <a:spLocks noGrp="1" noRot="1" noChangeAspect="1" noMove="1" noResize="1" noEditPoints="1" noAdjustHandles="1" noChangeArrowheads="1" noChangeShapeType="1" noTextEdit="1"/>
+            <a:spLocks noGrp="1" noRot="1" noChangeAspect="1" noMove="1" noResize="1" noEditPoints="1" noAdjustHandles="1" noChangeArrowheads="1" noChangeShapeType="1"/>
           </p:cNvSpPr>
           <p:nvPr>
             <p:extLst>
@@ -23599,7 +20625,7 @@
         </p:nvSpPr>
         <p:spPr>
           <a:xfrm>
-            <a:off x="2004060" y="2586994"/>
+            <a:off x="1435100" y="2586994"/>
             <a:ext cx="2606040" cy="18288"/>
           </a:xfrm>
           <a:custGeom>
@@ -23841,8 +20867,8 @@
         </p:nvSpPr>
         <p:spPr>
           <a:xfrm>
-            <a:off x="2004061" y="2872899"/>
-            <a:ext cx="3182691" cy="3320668"/>
+            <a:off x="754381" y="3279299"/>
+            <a:ext cx="4066611" cy="3320668"/>
           </a:xfrm>
           <a:prstGeom prst="rect">
             <a:avLst/>
@@ -23854,18 +20880,16 @@
           </a:bodyPr>
           <a:lstStyle/>
           <a:p>
-            <a:pPr indent="-228600" algn="ctr" defTabSz="914400">
+            <a:pPr algn="ctr" defTabSz="914400">
               <a:lnSpc>
                 <a:spcPct val="90000"/>
               </a:lnSpc>
               <a:spcAft>
                 <a:spcPts val="600"/>
               </a:spcAft>
-              <a:buFont typeface="Arial" panose="020B0604020202020204" pitchFamily="34" charset="0"/>
-              <a:buChar char="•"/>
             </a:pPr>
             <a:r>
-              <a:rPr lang="en-US" sz="1900" b="1" dirty="0"/>
+              <a:rPr lang="en-US" sz="2000" b="1" dirty="0"/>
               <a:t>Turning Rail Journey Data Into Actionable Insights for Performance, Customer Experience &amp; Operational Reliability</a:t>
             </a:r>
           </a:p>
@@ -23905,7 +20929,7 @@
         <p:spPr>
           <a:xfrm>
             <a:off x="5507777" y="10"/>
-            <a:ext cx="5159081" cy="6857990"/>
+            <a:ext cx="6684223" cy="6857990"/>
           </a:xfrm>
           <a:custGeom>
             <a:avLst/>
@@ -24035,17 +21059,15 @@
 <file path=ppt/slides/slide10.xml><?xml version="1.0" encoding="utf-8"?>
 <p:sld xmlns:a="http://schemas.openxmlformats.org/drawingml/2006/main" xmlns:r="http://schemas.openxmlformats.org/officeDocument/2006/relationships" xmlns:p="http://schemas.openxmlformats.org/presentationml/2006/main">
   <p:cSld>
-    <p:bg>
-      <p:bgPr>
-        <a:solidFill>
-          <a:schemeClr val="bg1"/>
-        </a:solidFill>
-        <a:effectLst/>
-      </p:bgPr>
-    </p:bg>
     <p:spTree>
       <p:nvGrpSpPr>
-        <p:cNvPr id="1" name=""/>
+        <p:cNvPr id="1" name="">
+          <a:extLst>
+            <a:ext uri="{FF2B5EF4-FFF2-40B4-BE49-F238E27FC236}">
+              <a16:creationId xmlns:a16="http://schemas.microsoft.com/office/drawing/2014/main" id="{E2A35FB4-2370-EC96-364E-9D1190C06E08}"/>
+            </a:ext>
+          </a:extLst>
+        </p:cNvPr>
         <p:cNvGrpSpPr/>
         <p:nvPr/>
       </p:nvGrpSpPr>
@@ -24057,378 +21079,54 @@
           <a:chExt cx="0" cy="0"/>
         </a:xfrm>
       </p:grpSpPr>
-      <p:sp useBgFill="1">
+      <p:sp>
         <p:nvSpPr>
-          <p:cNvPr id="9" name="Rectangle 8">
+          <p:cNvPr id="7" name="TextBox 6">
             <a:extLst>
               <a:ext uri="{FF2B5EF4-FFF2-40B4-BE49-F238E27FC236}">
-                <a16:creationId xmlns:a16="http://schemas.microsoft.com/office/drawing/2014/main" id="{BACC6370-2D7E-4714-9D71-7542949D7D5D}"/>
-              </a:ext>
-              <a:ext uri="{C183D7F6-B498-43B3-948B-1728B52AA6E4}">
-                <adec:decorative xmlns:adec="http://schemas.microsoft.com/office/drawing/2017/decorative" val="1"/>
+                <a16:creationId xmlns:a16="http://schemas.microsoft.com/office/drawing/2014/main" id="{4212EF7B-7CEA-9373-D7F1-B14E06413D6E}"/>
               </a:ext>
             </a:extLst>
           </p:cNvPr>
-          <p:cNvSpPr>
-            <a:spLocks noGrp="1" noRot="1" noChangeAspect="1" noMove="1" noResize="1" noEditPoints="1" noAdjustHandles="1" noChangeArrowheads="1" noChangeShapeType="1" noTextEdit="1"/>
-          </p:cNvSpPr>
-          <p:nvPr>
-            <p:extLst>
-              <p:ext uri="{386F3935-93C4-4BCD-93E2-E3B085C9AB24}">
-                <p16:designElem xmlns:p16="http://schemas.microsoft.com/office/powerpoint/2015/main" val="1"/>
-              </p:ext>
-            </p:extLst>
-          </p:nvPr>
+          <p:cNvSpPr txBox="1"/>
+          <p:nvPr/>
         </p:nvSpPr>
         <p:spPr>
           <a:xfrm>
-            <a:off x="1524000" y="0"/>
-            <a:ext cx="9144000" cy="6858000"/>
+            <a:off x="1404621" y="1877219"/>
+            <a:ext cx="3182691" cy="3320668"/>
           </a:xfrm>
           <a:prstGeom prst="rect">
             <a:avLst/>
           </a:prstGeom>
-          <a:ln w="12700" cap="flat" cmpd="sng" algn="ctr">
-            <a:noFill/>
-            <a:prstDash val="solid"/>
-            <a:miter lim="800000"/>
-          </a:ln>
-          <a:effectLst/>
-          <a:extLst>
-            <a:ext uri="{91240B29-F687-4F45-9708-019B960494DF}">
-              <a14:hiddenLine xmlns:a14="http://schemas.microsoft.com/office/drawing/2010/main" w="12700" cap="flat" cmpd="sng" algn="ctr">
-                <a:solidFill>
-                  <a:schemeClr val="accent1">
-                    <a:shade val="50000"/>
-                  </a:schemeClr>
-                </a:solidFill>
-                <a:prstDash val="solid"/>
-                <a:miter lim="800000"/>
-              </a14:hiddenLine>
-            </a:ext>
-          </a:extLst>
-        </p:spPr>
-        <p:style>
-          <a:lnRef idx="2">
-            <a:schemeClr val="accent1">
-              <a:shade val="50000"/>
-            </a:schemeClr>
-          </a:lnRef>
-          <a:fillRef idx="1">
-            <a:schemeClr val="accent1"/>
-          </a:fillRef>
-          <a:effectRef idx="0">
-            <a:schemeClr val="accent1"/>
-          </a:effectRef>
-          <a:fontRef idx="minor">
-            <a:schemeClr val="lt1"/>
-          </a:fontRef>
-        </p:style>
-        <p:txBody>
-          <a:bodyPr rtlCol="0" anchor="ctr"/>
-          <a:lstStyle/>
-          <a:p>
-            <a:pPr algn="ctr"/>
-            <a:endParaRPr lang="en-US"/>
-          </a:p>
-        </p:txBody>
-      </p:sp>
-      <p:sp>
-        <p:nvSpPr>
-          <p:cNvPr id="11" name="Rectangle 10">
-            <a:extLst>
-              <a:ext uri="{FF2B5EF4-FFF2-40B4-BE49-F238E27FC236}">
-                <a16:creationId xmlns:a16="http://schemas.microsoft.com/office/drawing/2014/main" id="{F68B3F68-107C-434F-AA38-110D5EA91B85}"/>
-              </a:ext>
-              <a:ext uri="{C183D7F6-B498-43B3-948B-1728B52AA6E4}">
-                <adec:decorative xmlns:adec="http://schemas.microsoft.com/office/drawing/2017/decorative" val="1"/>
-              </a:ext>
-            </a:extLst>
-          </p:cNvPr>
-          <p:cNvSpPr>
-            <a:spLocks noGrp="1" noRot="1" noChangeAspect="1" noMove="1" noResize="1" noEditPoints="1" noAdjustHandles="1" noChangeArrowheads="1" noChangeShapeType="1" noTextEdit="1"/>
-          </p:cNvSpPr>
-          <p:nvPr>
-            <p:extLst>
-              <p:ext uri="{386F3935-93C4-4BCD-93E2-E3B085C9AB24}">
-                <p16:designElem xmlns:p16="http://schemas.microsoft.com/office/powerpoint/2015/main" val="1"/>
-              </p:ext>
-            </p:extLst>
-          </p:nvPr>
-        </p:nvSpPr>
-        <p:spPr>
-          <a:xfrm flipH="1">
-            <a:off x="1524002" y="1"/>
-            <a:ext cx="9143999" cy="1575955"/>
-          </a:xfrm>
-          <a:prstGeom prst="rect">
-            <a:avLst/>
-          </a:prstGeom>
-          <a:gradFill>
-            <a:gsLst>
-              <a:gs pos="0">
-                <a:srgbClr val="000000">
-                  <a:alpha val="96000"/>
-                </a:srgbClr>
-              </a:gs>
-              <a:gs pos="100000">
-                <a:schemeClr val="accent1">
-                  <a:lumMod val="75000"/>
-                </a:schemeClr>
-              </a:gs>
-            </a:gsLst>
-            <a:lin ang="8400000" scaled="0"/>
-          </a:gradFill>
-          <a:ln>
-            <a:noFill/>
-          </a:ln>
-        </p:spPr>
-        <p:style>
-          <a:lnRef idx="2">
-            <a:schemeClr val="accent1">
-              <a:shade val="50000"/>
-            </a:schemeClr>
-          </a:lnRef>
-          <a:fillRef idx="1">
-            <a:schemeClr val="accent1"/>
-          </a:fillRef>
-          <a:effectRef idx="0">
-            <a:schemeClr val="accent1"/>
-          </a:effectRef>
-          <a:fontRef idx="minor">
-            <a:schemeClr val="lt1"/>
-          </a:fontRef>
-        </p:style>
-        <p:txBody>
-          <a:bodyPr rtlCol="0" anchor="ctr"/>
-          <a:lstStyle/>
-          <a:p>
-            <a:pPr algn="ctr"/>
-            <a:endParaRPr lang="en-US"/>
-          </a:p>
-        </p:txBody>
-      </p:sp>
-      <p:sp>
-        <p:nvSpPr>
-          <p:cNvPr id="13" name="Rectangle 12">
-            <a:extLst>
-              <a:ext uri="{FF2B5EF4-FFF2-40B4-BE49-F238E27FC236}">
-                <a16:creationId xmlns:a16="http://schemas.microsoft.com/office/drawing/2014/main" id="{AAD0DBB9-1A4B-4391-81D4-CB19F9AB918A}"/>
-              </a:ext>
-              <a:ext uri="{C183D7F6-B498-43B3-948B-1728B52AA6E4}">
-                <adec:decorative xmlns:adec="http://schemas.microsoft.com/office/drawing/2017/decorative" val="1"/>
-              </a:ext>
-            </a:extLst>
-          </p:cNvPr>
-          <p:cNvSpPr>
-            <a:spLocks noGrp="1" noRot="1" noChangeAspect="1" noMove="1" noResize="1" noEditPoints="1" noAdjustHandles="1" noChangeArrowheads="1" noChangeShapeType="1" noTextEdit="1"/>
-          </p:cNvSpPr>
-          <p:nvPr>
-            <p:extLst>
-              <p:ext uri="{386F3935-93C4-4BCD-93E2-E3B085C9AB24}">
-                <p16:designElem xmlns:p16="http://schemas.microsoft.com/office/powerpoint/2015/main" val="1"/>
-              </p:ext>
-            </p:extLst>
-          </p:nvPr>
-        </p:nvSpPr>
-        <p:spPr>
-          <a:xfrm rot="10800000" flipH="1">
-            <a:off x="7620642" y="0"/>
-            <a:ext cx="3047358" cy="1576412"/>
-          </a:xfrm>
-          <a:prstGeom prst="rect">
-            <a:avLst/>
-          </a:prstGeom>
-          <a:gradFill>
-            <a:gsLst>
-              <a:gs pos="19000">
-                <a:schemeClr val="accent1">
-                  <a:lumMod val="50000"/>
-                  <a:alpha val="68000"/>
-                </a:schemeClr>
-              </a:gs>
-              <a:gs pos="100000">
-                <a:schemeClr val="accent1">
-                  <a:alpha val="79000"/>
-                </a:schemeClr>
-              </a:gs>
-            </a:gsLst>
-            <a:lin ang="19200000" scaled="0"/>
-          </a:gradFill>
-          <a:ln>
-            <a:noFill/>
-          </a:ln>
-        </p:spPr>
-        <p:style>
-          <a:lnRef idx="2">
-            <a:schemeClr val="accent1">
-              <a:shade val="50000"/>
-            </a:schemeClr>
-          </a:lnRef>
-          <a:fillRef idx="1">
-            <a:schemeClr val="accent1"/>
-          </a:fillRef>
-          <a:effectRef idx="0">
-            <a:schemeClr val="accent1"/>
-          </a:effectRef>
-          <a:fontRef idx="minor">
-            <a:schemeClr val="lt1"/>
-          </a:fontRef>
-        </p:style>
-        <p:txBody>
-          <a:bodyPr rtlCol="0" anchor="ctr"/>
-          <a:lstStyle/>
-          <a:p>
-            <a:pPr algn="ctr"/>
-            <a:endParaRPr lang="en-US"/>
-          </a:p>
-        </p:txBody>
-      </p:sp>
-      <p:sp>
-        <p:nvSpPr>
-          <p:cNvPr id="15" name="Rectangle 14">
-            <a:extLst>
-              <a:ext uri="{FF2B5EF4-FFF2-40B4-BE49-F238E27FC236}">
-                <a16:creationId xmlns:a16="http://schemas.microsoft.com/office/drawing/2014/main" id="{063BBA22-50EA-4C4D-BE05-F1CE4E63AA56}"/>
-              </a:ext>
-              <a:ext uri="{C183D7F6-B498-43B3-948B-1728B52AA6E4}">
-                <adec:decorative xmlns:adec="http://schemas.microsoft.com/office/drawing/2017/decorative" val="1"/>
-              </a:ext>
-            </a:extLst>
-          </p:cNvPr>
-          <p:cNvSpPr>
-            <a:spLocks noGrp="1" noRot="1" noChangeAspect="1" noMove="1" noResize="1" noEditPoints="1" noAdjustHandles="1" noChangeArrowheads="1" noChangeShapeType="1" noTextEdit="1"/>
-          </p:cNvSpPr>
-          <p:nvPr>
-            <p:extLst>
-              <p:ext uri="{386F3935-93C4-4BCD-93E2-E3B085C9AB24}">
-                <p16:designElem xmlns:p16="http://schemas.microsoft.com/office/powerpoint/2015/main" val="1"/>
-              </p:ext>
-            </p:extLst>
-          </p:nvPr>
-        </p:nvSpPr>
-        <p:spPr>
-          <a:xfrm rot="5400000">
-            <a:off x="5307777" y="-3783778"/>
-            <a:ext cx="1576446" cy="9144002"/>
-          </a:xfrm>
-          <a:prstGeom prst="rect">
-            <a:avLst/>
-          </a:prstGeom>
-          <a:gradFill>
-            <a:gsLst>
-              <a:gs pos="23000">
-                <a:schemeClr val="accent1">
-                  <a:alpha val="0"/>
-                </a:schemeClr>
-              </a:gs>
-              <a:gs pos="99000">
-                <a:srgbClr val="000000">
-                  <a:alpha val="74000"/>
-                </a:srgbClr>
-              </a:gs>
-            </a:gsLst>
-            <a:lin ang="20400000" scaled="0"/>
-          </a:gradFill>
-          <a:ln>
-            <a:noFill/>
-          </a:ln>
-        </p:spPr>
-        <p:style>
-          <a:lnRef idx="2">
-            <a:schemeClr val="accent1">
-              <a:shade val="50000"/>
-            </a:schemeClr>
-          </a:lnRef>
-          <a:fillRef idx="1">
-            <a:schemeClr val="accent1"/>
-          </a:fillRef>
-          <a:effectRef idx="0">
-            <a:schemeClr val="accent1"/>
-          </a:effectRef>
-          <a:fontRef idx="minor">
-            <a:schemeClr val="lt1"/>
-          </a:fontRef>
-        </p:style>
-        <p:txBody>
-          <a:bodyPr rtlCol="0" anchor="ctr"/>
-          <a:lstStyle/>
-          <a:p>
-            <a:pPr algn="ctr"/>
-            <a:endParaRPr lang="en-US" dirty="0"/>
-          </a:p>
-        </p:txBody>
-      </p:sp>
-      <p:sp>
-        <p:nvSpPr>
-          <p:cNvPr id="2" name="Title 1"/>
-          <p:cNvSpPr>
-            <a:spLocks noGrp="1"/>
-          </p:cNvSpPr>
-          <p:nvPr>
-            <p:ph type="title"/>
-          </p:nvPr>
-        </p:nvSpPr>
-        <p:spPr>
-          <a:xfrm>
-            <a:off x="2552698" y="348866"/>
-            <a:ext cx="5951223" cy="877729"/>
-          </a:xfrm>
         </p:spPr>
         <p:txBody>
-          <a:bodyPr anchor="ctr">
+          <a:bodyPr vert="horz" lIns="91440" tIns="45720" rIns="91440" bIns="45720" rtlCol="0">
             <a:normAutofit/>
           </a:bodyPr>
           <a:lstStyle/>
           <a:p>
+            <a:pPr algn="ctr" defTabSz="914400">
+              <a:lnSpc>
+                <a:spcPct val="90000"/>
+              </a:lnSpc>
+              <a:spcAft>
+                <a:spcPts val="600"/>
+              </a:spcAft>
+            </a:pPr>
             <a:r>
-              <a:rPr lang="en-US" sz="3500" dirty="0">
-                <a:solidFill>
-                  <a:srgbClr val="FFFFFF"/>
-                </a:solidFill>
-              </a:rPr>
-              <a:t>Value for Leadership</a:t>
+              <a:rPr lang="en-US" sz="8000" b="1" dirty="0"/>
+              <a:t>Thank you</a:t>
             </a:r>
           </a:p>
         </p:txBody>
       </p:sp>
-      <p:graphicFrame>
-        <p:nvGraphicFramePr>
-          <p:cNvPr id="5" name="Content Placeholder 2">
+      <p:pic>
+        <p:nvPicPr>
+          <p:cNvPr id="4" name="Picture Placeholder 8" descr="A train on the tracks&#10;&#10;AI-generated content may be incorrect.">
             <a:extLst>
               <a:ext uri="{FF2B5EF4-FFF2-40B4-BE49-F238E27FC236}">
-                <a16:creationId xmlns:a16="http://schemas.microsoft.com/office/drawing/2014/main" id="{6D226046-7DB7-07C1-81B7-619F24A84D9E}"/>
-              </a:ext>
-            </a:extLst>
-          </p:cNvPr>
-          <p:cNvGraphicFramePr>
-            <a:graphicFrameLocks noGrp="1"/>
-          </p:cNvGraphicFramePr>
-          <p:nvPr>
-            <p:ph idx="1"/>
-            <p:extLst>
-              <p:ext uri="{D42A27DB-BD31-4B8C-83A1-F6EECF244321}">
-                <p14:modId xmlns:p14="http://schemas.microsoft.com/office/powerpoint/2010/main" val="3566384662"/>
-              </p:ext>
-            </p:extLst>
-          </p:nvPr>
-        </p:nvGraphicFramePr>
-        <p:xfrm>
-          <a:off x="2007043" y="2112580"/>
-          <a:ext cx="8195871" cy="4192805"/>
-        </p:xfrm>
-        <a:graphic>
-          <a:graphicData uri="http://schemas.openxmlformats.org/drawingml/2006/diagram">
-            <dgm:relIds xmlns:dgm="http://schemas.openxmlformats.org/drawingml/2006/diagram" xmlns:r="http://schemas.openxmlformats.org/officeDocument/2006/relationships" r:dm="rId3" r:lo="rId4" r:qs="rId5" r:cs="rId6"/>
-          </a:graphicData>
-        </a:graphic>
-      </p:graphicFrame>
-      <p:pic>
-        <p:nvPicPr>
-          <p:cNvPr id="4" name="Picture Placeholder 8">
-            <a:extLst>
-              <a:ext uri="{FF2B5EF4-FFF2-40B4-BE49-F238E27FC236}">
-                <a16:creationId xmlns:a16="http://schemas.microsoft.com/office/drawing/2014/main" id="{E55CC28C-F057-2108-F90A-53C7DE73D9AC}"/>
+                <a16:creationId xmlns:a16="http://schemas.microsoft.com/office/drawing/2014/main" id="{3DBC837F-6A5E-6753-A416-09B8C6D29F4F}"/>
               </a:ext>
             </a:extLst>
           </p:cNvPr>
@@ -24442,35 +21140,146 @@
           </p:nvPr>
         </p:nvPicPr>
         <p:blipFill rotWithShape="1">
-          <a:blip r:embed="rId8" cstate="screen">
+          <a:blip r:embed="rId3" cstate="screen">
             <a:extLst>
               <a:ext uri="{28A0092B-C50C-407E-A947-70E740481C1C}">
                 <a14:useLocalDpi xmlns:a14="http://schemas.microsoft.com/office/drawing/2010/main"/>
               </a:ext>
             </a:extLst>
           </a:blip>
-          <a:srcRect l="4761" r="4761"/>
+          <a:srcRect l="12386" r="12386"/>
           <a:stretch>
             <a:fillRect/>
           </a:stretch>
         </p:blipFill>
         <p:spPr>
           <a:xfrm>
-            <a:off x="1524020" y="6"/>
-            <a:ext cx="1605261" cy="1559957"/>
+            <a:off x="5507777" y="10"/>
+            <a:ext cx="6684223" cy="6857990"/>
           </a:xfrm>
-          <a:prstGeom prst="rect">
+          <a:custGeom>
             <a:avLst/>
-          </a:prstGeom>
-          <a:ln>
-            <a:noFill/>
-          </a:ln>
-          <a:effectLst>
-            <a:softEdge rad="112500"/>
-          </a:effectLst>
+            <a:gdLst/>
+            <a:ahLst/>
+            <a:cxnLst/>
+            <a:rect l="l" t="t" r="r" b="b"/>
+            <a:pathLst>
+              <a:path w="6878775" h="6858000">
+                <a:moveTo>
+                  <a:pt x="1102973" y="0"/>
+                </a:moveTo>
+                <a:lnTo>
+                  <a:pt x="1160688" y="0"/>
+                </a:lnTo>
+                <a:lnTo>
+                  <a:pt x="983189" y="331786"/>
+                </a:lnTo>
+                <a:cubicBezTo>
+                  <a:pt x="914866" y="469145"/>
+                  <a:pt x="850355" y="608712"/>
+                  <a:pt x="789261" y="750263"/>
+                </a:cubicBezTo>
+                <a:cubicBezTo>
+                  <a:pt x="774307" y="784928"/>
+                  <a:pt x="759992" y="819849"/>
+                  <a:pt x="745295" y="854514"/>
+                </a:cubicBezTo>
+                <a:cubicBezTo>
+                  <a:pt x="756682" y="845393"/>
+                  <a:pt x="765489" y="833492"/>
+                  <a:pt x="770857" y="819975"/>
+                </a:cubicBezTo>
+                <a:cubicBezTo>
+                  <a:pt x="879943" y="589569"/>
+                  <a:pt x="999605" y="365513"/>
+                  <a:pt x="1131329" y="148742"/>
+                </a:cubicBezTo>
+                <a:lnTo>
+                  <a:pt x="1227589" y="0"/>
+                </a:lnTo>
+                <a:lnTo>
+                  <a:pt x="6878775" y="0"/>
+                </a:lnTo>
+                <a:lnTo>
+                  <a:pt x="6878775" y="6858000"/>
+                </a:lnTo>
+                <a:lnTo>
+                  <a:pt x="713521" y="6858000"/>
+                </a:lnTo>
+                <a:lnTo>
+                  <a:pt x="625642" y="6670527"/>
+                </a:lnTo>
+                <a:cubicBezTo>
+                  <a:pt x="507232" y="6398531"/>
+                  <a:pt x="403083" y="6118381"/>
+                  <a:pt x="312785" y="5830359"/>
+                </a:cubicBezTo>
+                <a:cubicBezTo>
+                  <a:pt x="278149" y="5719759"/>
+                  <a:pt x="248879" y="5607635"/>
+                  <a:pt x="212198" y="5480401"/>
+                </a:cubicBezTo>
+                <a:cubicBezTo>
+                  <a:pt x="212208" y="5491601"/>
+                  <a:pt x="212803" y="5502788"/>
+                  <a:pt x="213988" y="5513923"/>
+                </a:cubicBezTo>
+                <a:cubicBezTo>
+                  <a:pt x="264089" y="5723695"/>
+                  <a:pt x="307290" y="5935370"/>
+                  <a:pt x="365826" y="6142729"/>
+                </a:cubicBezTo>
+                <a:cubicBezTo>
+                  <a:pt x="433152" y="6380817"/>
+                  <a:pt x="510068" y="6614016"/>
+                  <a:pt x="597975" y="6841549"/>
+                </a:cubicBezTo>
+                <a:lnTo>
+                  <a:pt x="604824" y="6858000"/>
+                </a:lnTo>
+                <a:lnTo>
+                  <a:pt x="552056" y="6858000"/>
+                </a:lnTo>
+                <a:lnTo>
+                  <a:pt x="539576" y="6828295"/>
+                </a:lnTo>
+                <a:cubicBezTo>
+                  <a:pt x="380597" y="6414594"/>
+                  <a:pt x="260223" y="5988893"/>
+                  <a:pt x="171555" y="5552906"/>
+                </a:cubicBezTo>
+                <a:cubicBezTo>
+                  <a:pt x="91163" y="5157998"/>
+                  <a:pt x="43746" y="4758899"/>
+                  <a:pt x="12305" y="4357388"/>
+                </a:cubicBezTo>
+                <a:cubicBezTo>
+                  <a:pt x="-14281" y="4013908"/>
+                  <a:pt x="4507" y="3672965"/>
+                  <a:pt x="46684" y="3331516"/>
+                </a:cubicBezTo>
+                <a:cubicBezTo>
+                  <a:pt x="127203" y="2664286"/>
+                  <a:pt x="277819" y="2007265"/>
+                  <a:pt x="496065" y="1371196"/>
+                </a:cubicBezTo>
+                <a:cubicBezTo>
+                  <a:pt x="636273" y="966066"/>
+                  <a:pt x="800445" y="573253"/>
+                  <a:pt x="995723" y="196614"/>
+                </a:cubicBezTo>
+                <a:close/>
+              </a:path>
+            </a:pathLst>
+          </a:custGeom>
         </p:spPr>
       </p:pic>
     </p:spTree>
+    <p:extLst>
+      <p:ext uri="{BB962C8B-B14F-4D97-AF65-F5344CB8AC3E}">
+        <p14:creationId xmlns:p14="http://schemas.microsoft.com/office/powerpoint/2010/main" val="56129351"/>
+      </p:ext>
+    </p:extLst>
   </p:cSld>
   <p:clrMapOvr>
     <a:masterClrMapping/>
@@ -24503,82 +21312,6 @@
           <a:chExt cx="0" cy="0"/>
         </a:xfrm>
       </p:grpSpPr>
-      <p:sp useBgFill="1">
-        <p:nvSpPr>
-          <p:cNvPr id="17" name="Rectangle 16">
-            <a:extLst>
-              <a:ext uri="{FF2B5EF4-FFF2-40B4-BE49-F238E27FC236}">
-                <a16:creationId xmlns:a16="http://schemas.microsoft.com/office/drawing/2014/main" id="{BACC6370-2D7E-4714-9D71-7542949D7D5D}"/>
-              </a:ext>
-              <a:ext uri="{C183D7F6-B498-43B3-948B-1728B52AA6E4}">
-                <adec:decorative xmlns:adec="http://schemas.microsoft.com/office/drawing/2017/decorative" val="1"/>
-              </a:ext>
-            </a:extLst>
-          </p:cNvPr>
-          <p:cNvSpPr>
-            <a:spLocks noGrp="1" noRot="1" noChangeAspect="1" noMove="1" noResize="1" noEditPoints="1" noAdjustHandles="1" noChangeArrowheads="1" noChangeShapeType="1" noTextEdit="1"/>
-          </p:cNvSpPr>
-          <p:nvPr>
-            <p:extLst>
-              <p:ext uri="{386F3935-93C4-4BCD-93E2-E3B085C9AB24}">
-                <p16:designElem xmlns:p16="http://schemas.microsoft.com/office/powerpoint/2015/main" val="1"/>
-              </p:ext>
-            </p:extLst>
-          </p:nvPr>
-        </p:nvSpPr>
-        <p:spPr>
-          <a:xfrm>
-            <a:off x="1524000" y="0"/>
-            <a:ext cx="9144000" cy="6858000"/>
-          </a:xfrm>
-          <a:prstGeom prst="rect">
-            <a:avLst/>
-          </a:prstGeom>
-          <a:ln w="12700" cap="flat" cmpd="sng" algn="ctr">
-            <a:noFill/>
-            <a:prstDash val="solid"/>
-            <a:miter lim="800000"/>
-          </a:ln>
-          <a:effectLst/>
-          <a:extLst>
-            <a:ext uri="{91240B29-F687-4F45-9708-019B960494DF}">
-              <a14:hiddenLine xmlns:a14="http://schemas.microsoft.com/office/drawing/2010/main" w="12700" cap="flat" cmpd="sng" algn="ctr">
-                <a:solidFill>
-                  <a:schemeClr val="accent1">
-                    <a:shade val="50000"/>
-                  </a:schemeClr>
-                </a:solidFill>
-                <a:prstDash val="solid"/>
-                <a:miter lim="800000"/>
-              </a14:hiddenLine>
-            </a:ext>
-          </a:extLst>
-        </p:spPr>
-        <p:style>
-          <a:lnRef idx="2">
-            <a:schemeClr val="accent1">
-              <a:shade val="50000"/>
-            </a:schemeClr>
-          </a:lnRef>
-          <a:fillRef idx="1">
-            <a:schemeClr val="accent1"/>
-          </a:fillRef>
-          <a:effectRef idx="0">
-            <a:schemeClr val="accent1"/>
-          </a:effectRef>
-          <a:fontRef idx="minor">
-            <a:schemeClr val="lt1"/>
-          </a:fontRef>
-        </p:style>
-        <p:txBody>
-          <a:bodyPr rtlCol="0" anchor="ctr"/>
-          <a:lstStyle/>
-          <a:p>
-            <a:pPr algn="ctr"/>
-            <a:endParaRPr lang="en-US"/>
-          </a:p>
-        </p:txBody>
-      </p:sp>
       <p:sp>
         <p:nvSpPr>
           <p:cNvPr id="19" name="Rectangle 18">
@@ -24592,7 +21325,7 @@
             </a:extLst>
           </p:cNvPr>
           <p:cNvSpPr>
-            <a:spLocks noGrp="1" noRot="1" noChangeAspect="1" noMove="1" noResize="1" noEditPoints="1" noAdjustHandles="1" noChangeArrowheads="1" noChangeShapeType="1" noTextEdit="1"/>
+            <a:spLocks noChangeAspect="1"/>
           </p:cNvSpPr>
           <p:nvPr>
             <p:extLst>
@@ -24604,8 +21337,8 @@
         </p:nvSpPr>
         <p:spPr>
           <a:xfrm flipH="1">
-            <a:off x="1524002" y="1"/>
-            <a:ext cx="9143999" cy="1575955"/>
+            <a:off x="-2" y="1"/>
+            <a:ext cx="12191999" cy="1575955"/>
           </a:xfrm>
           <a:prstGeom prst="rect">
             <a:avLst/>
@@ -24667,7 +21400,7 @@
             </a:extLst>
           </p:cNvPr>
           <p:cNvSpPr>
-            <a:spLocks noGrp="1" noRot="1" noChangeAspect="1" noMove="1" noResize="1" noEditPoints="1" noAdjustHandles="1" noChangeArrowheads="1" noChangeShapeType="1" noTextEdit="1"/>
+            <a:spLocks noChangeAspect="1"/>
           </p:cNvSpPr>
           <p:nvPr>
             <p:extLst>
@@ -24680,7 +21413,7 @@
         <p:spPr>
           <a:xfrm rot="10800000" flipH="1">
             <a:off x="7620642" y="0"/>
-            <a:ext cx="3047358" cy="1576412"/>
+            <a:ext cx="4571358" cy="1576412"/>
           </a:xfrm>
           <a:prstGeom prst="rect">
             <a:avLst/>
@@ -24743,7 +21476,7 @@
             </a:extLst>
           </p:cNvPr>
           <p:cNvSpPr>
-            <a:spLocks noGrp="1" noRot="1" noChangeAspect="1" noMove="1" noResize="1" noEditPoints="1" noAdjustHandles="1" noChangeArrowheads="1" noChangeShapeType="1" noTextEdit="1"/>
+            <a:spLocks noChangeAspect="1"/>
           </p:cNvSpPr>
           <p:nvPr>
             <p:extLst>
@@ -24755,8 +21488,8 @@
         </p:nvSpPr>
         <p:spPr>
           <a:xfrm rot="5400000">
-            <a:off x="5307777" y="-3783778"/>
-            <a:ext cx="1576446" cy="9144002"/>
+            <a:off x="5307777" y="-5307777"/>
+            <a:ext cx="1576446" cy="12192000"/>
           </a:xfrm>
           <a:prstGeom prst="rect">
             <a:avLst/>
@@ -24871,7 +21604,7 @@
         </p:blipFill>
         <p:spPr>
           <a:xfrm>
-            <a:off x="1524020" y="6"/>
+            <a:off x="121940" y="6"/>
             <a:ext cx="1605261" cy="1559957"/>
           </a:xfrm>
           <a:prstGeom prst="rect">
@@ -26361,12 +23094,12 @@
           <a:chExt cx="0" cy="0"/>
         </a:xfrm>
       </p:grpSpPr>
-      <p:sp useBgFill="1">
+      <p:sp>
         <p:nvSpPr>
-          <p:cNvPr id="17" name="Rectangle 16">
+          <p:cNvPr id="7" name="Rectangle 6">
             <a:extLst>
               <a:ext uri="{FF2B5EF4-FFF2-40B4-BE49-F238E27FC236}">
-                <a16:creationId xmlns:a16="http://schemas.microsoft.com/office/drawing/2014/main" id="{1BD2BCA4-DFD8-8356-FFC4-6046B76A3648}"/>
+                <a16:creationId xmlns:a16="http://schemas.microsoft.com/office/drawing/2014/main" id="{FF2A10A3-2C0D-5139-4163-20723A7EBB37}"/>
               </a:ext>
               <a:ext uri="{C183D7F6-B498-43B3-948B-1728B52AA6E4}">
                 <adec:decorative xmlns:adec="http://schemas.microsoft.com/office/drawing/2017/decorative" val="1"/>
@@ -26374,83 +23107,7 @@
             </a:extLst>
           </p:cNvPr>
           <p:cNvSpPr>
-            <a:spLocks noGrp="1" noRot="1" noChangeAspect="1" noMove="1" noResize="1" noEditPoints="1" noAdjustHandles="1" noChangeArrowheads="1" noChangeShapeType="1" noTextEdit="1"/>
-          </p:cNvSpPr>
-          <p:nvPr>
-            <p:extLst>
-              <p:ext uri="{386F3935-93C4-4BCD-93E2-E3B085C9AB24}">
-                <p16:designElem xmlns:p16="http://schemas.microsoft.com/office/powerpoint/2015/main" val="1"/>
-              </p:ext>
-            </p:extLst>
-          </p:nvPr>
-        </p:nvSpPr>
-        <p:spPr>
-          <a:xfrm>
-            <a:off x="1524000" y="0"/>
-            <a:ext cx="9144000" cy="6858000"/>
-          </a:xfrm>
-          <a:prstGeom prst="rect">
-            <a:avLst/>
-          </a:prstGeom>
-          <a:ln w="12700" cap="flat" cmpd="sng" algn="ctr">
-            <a:noFill/>
-            <a:prstDash val="solid"/>
-            <a:miter lim="800000"/>
-          </a:ln>
-          <a:effectLst/>
-          <a:extLst>
-            <a:ext uri="{91240B29-F687-4F45-9708-019B960494DF}">
-              <a14:hiddenLine xmlns:a14="http://schemas.microsoft.com/office/drawing/2010/main" w="12700" cap="flat" cmpd="sng" algn="ctr">
-                <a:solidFill>
-                  <a:schemeClr val="accent1">
-                    <a:shade val="50000"/>
-                  </a:schemeClr>
-                </a:solidFill>
-                <a:prstDash val="solid"/>
-                <a:miter lim="800000"/>
-              </a14:hiddenLine>
-            </a:ext>
-          </a:extLst>
-        </p:spPr>
-        <p:style>
-          <a:lnRef idx="2">
-            <a:schemeClr val="accent1">
-              <a:shade val="50000"/>
-            </a:schemeClr>
-          </a:lnRef>
-          <a:fillRef idx="1">
-            <a:schemeClr val="accent1"/>
-          </a:fillRef>
-          <a:effectRef idx="0">
-            <a:schemeClr val="accent1"/>
-          </a:effectRef>
-          <a:fontRef idx="minor">
-            <a:schemeClr val="lt1"/>
-          </a:fontRef>
-        </p:style>
-        <p:txBody>
-          <a:bodyPr rtlCol="0" anchor="ctr"/>
-          <a:lstStyle/>
-          <a:p>
-            <a:pPr algn="ctr"/>
-            <a:endParaRPr lang="en-US"/>
-          </a:p>
-        </p:txBody>
-      </p:sp>
-      <p:sp>
-        <p:nvSpPr>
-          <p:cNvPr id="19" name="Rectangle 18">
-            <a:extLst>
-              <a:ext uri="{FF2B5EF4-FFF2-40B4-BE49-F238E27FC236}">
-                <a16:creationId xmlns:a16="http://schemas.microsoft.com/office/drawing/2014/main" id="{48814D55-F64C-8D0D-8B38-8A3B60339B78}"/>
-              </a:ext>
-              <a:ext uri="{C183D7F6-B498-43B3-948B-1728B52AA6E4}">
-                <adec:decorative xmlns:adec="http://schemas.microsoft.com/office/drawing/2017/decorative" val="1"/>
-              </a:ext>
-            </a:extLst>
-          </p:cNvPr>
-          <p:cNvSpPr>
-            <a:spLocks noGrp="1" noRot="1" noChangeAspect="1" noMove="1" noResize="1" noEditPoints="1" noAdjustHandles="1" noChangeArrowheads="1" noChangeShapeType="1" noTextEdit="1"/>
+            <a:spLocks noChangeAspect="1"/>
           </p:cNvSpPr>
           <p:nvPr>
             <p:extLst>
@@ -26462,8 +23119,8 @@
         </p:nvSpPr>
         <p:spPr>
           <a:xfrm flipH="1">
-            <a:off x="1524002" y="1"/>
-            <a:ext cx="9143999" cy="1575955"/>
+            <a:off x="-2" y="1"/>
+            <a:ext cx="12191999" cy="1575955"/>
           </a:xfrm>
           <a:prstGeom prst="rect">
             <a:avLst/>
@@ -26514,10 +23171,10 @@
       </p:sp>
       <p:sp>
         <p:nvSpPr>
-          <p:cNvPr id="21" name="Rectangle 20">
+          <p:cNvPr id="8" name="Rectangle 7">
             <a:extLst>
               <a:ext uri="{FF2B5EF4-FFF2-40B4-BE49-F238E27FC236}">
-                <a16:creationId xmlns:a16="http://schemas.microsoft.com/office/drawing/2014/main" id="{F0FA6AB9-1DAE-092C-7EA1-310CF116DCA0}"/>
+                <a16:creationId xmlns:a16="http://schemas.microsoft.com/office/drawing/2014/main" id="{8AEE3AD7-E12F-7F85-C2C0-A09BB09A49E6}"/>
               </a:ext>
               <a:ext uri="{C183D7F6-B498-43B3-948B-1728B52AA6E4}">
                 <adec:decorative xmlns:adec="http://schemas.microsoft.com/office/drawing/2017/decorative" val="1"/>
@@ -26525,7 +23182,7 @@
             </a:extLst>
           </p:cNvPr>
           <p:cNvSpPr>
-            <a:spLocks noGrp="1" noRot="1" noChangeAspect="1" noMove="1" noResize="1" noEditPoints="1" noAdjustHandles="1" noChangeArrowheads="1" noChangeShapeType="1" noTextEdit="1"/>
+            <a:spLocks noChangeAspect="1"/>
           </p:cNvSpPr>
           <p:nvPr>
             <p:extLst>
@@ -26538,7 +23195,7 @@
         <p:spPr>
           <a:xfrm rot="10800000" flipH="1">
             <a:off x="7620642" y="0"/>
-            <a:ext cx="3047358" cy="1576412"/>
+            <a:ext cx="4571358" cy="1576412"/>
           </a:xfrm>
           <a:prstGeom prst="rect">
             <a:avLst/>
@@ -26590,10 +23247,10 @@
       </p:sp>
       <p:sp>
         <p:nvSpPr>
-          <p:cNvPr id="23" name="Rectangle 22">
+          <p:cNvPr id="9" name="Rectangle 8">
             <a:extLst>
               <a:ext uri="{FF2B5EF4-FFF2-40B4-BE49-F238E27FC236}">
-                <a16:creationId xmlns:a16="http://schemas.microsoft.com/office/drawing/2014/main" id="{51B83B60-A611-5648-6E62-127EA2D4FE29}"/>
+                <a16:creationId xmlns:a16="http://schemas.microsoft.com/office/drawing/2014/main" id="{7960C006-504A-1D0E-593F-35BB6C97CD8F}"/>
               </a:ext>
               <a:ext uri="{C183D7F6-B498-43B3-948B-1728B52AA6E4}">
                 <adec:decorative xmlns:adec="http://schemas.microsoft.com/office/drawing/2017/decorative" val="1"/>
@@ -26601,7 +23258,7 @@
             </a:extLst>
           </p:cNvPr>
           <p:cNvSpPr>
-            <a:spLocks noGrp="1" noRot="1" noChangeAspect="1" noMove="1" noResize="1" noEditPoints="1" noAdjustHandles="1" noChangeArrowheads="1" noChangeShapeType="1" noTextEdit="1"/>
+            <a:spLocks noChangeAspect="1"/>
           </p:cNvSpPr>
           <p:nvPr>
             <p:extLst>
@@ -26613,8 +23270,8 @@
         </p:nvSpPr>
         <p:spPr>
           <a:xfrm rot="5400000">
-            <a:off x="5307777" y="-3783778"/>
-            <a:ext cx="1576446" cy="9144002"/>
+            <a:off x="5307777" y="-5307777"/>
+            <a:ext cx="1576446" cy="12192000"/>
           </a:xfrm>
           <a:prstGeom prst="rect">
             <a:avLst/>
@@ -26716,11 +23373,16 @@
           </p:cNvGraphicFramePr>
           <p:nvPr>
             <p:ph idx="1"/>
+            <p:extLst>
+              <p:ext uri="{D42A27DB-BD31-4B8C-83A1-F6EECF244321}">
+                <p14:modId xmlns:p14="http://schemas.microsoft.com/office/powerpoint/2010/main" val="2295102196"/>
+              </p:ext>
+            </p:extLst>
           </p:nvPr>
         </p:nvGraphicFramePr>
         <p:xfrm>
-          <a:off x="2007043" y="2112580"/>
-          <a:ext cx="8195871" cy="4192805"/>
+          <a:off x="0" y="2112580"/>
+          <a:ext cx="12191997" cy="4192805"/>
         </p:xfrm>
         <a:graphic>
           <a:graphicData uri="http://schemas.openxmlformats.org/drawingml/2006/diagram">
@@ -26730,10 +23392,10 @@
       </p:graphicFrame>
       <p:pic>
         <p:nvPicPr>
-          <p:cNvPr id="4" name="Picture Placeholder 8">
+          <p:cNvPr id="10" name="Picture Placeholder 8">
             <a:extLst>
               <a:ext uri="{FF2B5EF4-FFF2-40B4-BE49-F238E27FC236}">
-                <a16:creationId xmlns:a16="http://schemas.microsoft.com/office/drawing/2014/main" id="{ED4CFA30-7099-F833-AC89-48EC4350D142}"/>
+                <a16:creationId xmlns:a16="http://schemas.microsoft.com/office/drawing/2014/main" id="{A2EF1C9C-8D47-F4EA-5348-C98C00CBC386}"/>
               </a:ext>
             </a:extLst>
           </p:cNvPr>
@@ -26761,7 +23423,7 @@
         </p:blipFill>
         <p:spPr>
           <a:xfrm>
-            <a:off x="1524020" y="6"/>
+            <a:off x="121940" y="6"/>
             <a:ext cx="1605261" cy="1559957"/>
           </a:xfrm>
           <a:prstGeom prst="rect">
@@ -26813,12 +23475,12 @@
           <a:chExt cx="0" cy="0"/>
         </a:xfrm>
       </p:grpSpPr>
-      <p:sp useBgFill="1">
+      <p:sp>
         <p:nvSpPr>
-          <p:cNvPr id="10" name="Rectangle 9">
+          <p:cNvPr id="4" name="Rectangle 3">
             <a:extLst>
               <a:ext uri="{FF2B5EF4-FFF2-40B4-BE49-F238E27FC236}">
-                <a16:creationId xmlns:a16="http://schemas.microsoft.com/office/drawing/2014/main" id="{BACC6370-2D7E-4714-9D71-7542949D7D5D}"/>
+                <a16:creationId xmlns:a16="http://schemas.microsoft.com/office/drawing/2014/main" id="{485B56FB-6C10-1A2C-AF8D-BAD3AF6F77F0}"/>
               </a:ext>
               <a:ext uri="{C183D7F6-B498-43B3-948B-1728B52AA6E4}">
                 <adec:decorative xmlns:adec="http://schemas.microsoft.com/office/drawing/2017/decorative" val="1"/>
@@ -26826,83 +23488,7 @@
             </a:extLst>
           </p:cNvPr>
           <p:cNvSpPr>
-            <a:spLocks noGrp="1" noRot="1" noChangeAspect="1" noMove="1" noResize="1" noEditPoints="1" noAdjustHandles="1" noChangeArrowheads="1" noChangeShapeType="1" noTextEdit="1"/>
-          </p:cNvSpPr>
-          <p:nvPr>
-            <p:extLst>
-              <p:ext uri="{386F3935-93C4-4BCD-93E2-E3B085C9AB24}">
-                <p16:designElem xmlns:p16="http://schemas.microsoft.com/office/powerpoint/2015/main" val="1"/>
-              </p:ext>
-            </p:extLst>
-          </p:nvPr>
-        </p:nvSpPr>
-        <p:spPr>
-          <a:xfrm>
-            <a:off x="1524000" y="0"/>
-            <a:ext cx="9144000" cy="6858000"/>
-          </a:xfrm>
-          <a:prstGeom prst="rect">
-            <a:avLst/>
-          </a:prstGeom>
-          <a:ln w="12700" cap="flat" cmpd="sng" algn="ctr">
-            <a:noFill/>
-            <a:prstDash val="solid"/>
-            <a:miter lim="800000"/>
-          </a:ln>
-          <a:effectLst/>
-          <a:extLst>
-            <a:ext uri="{91240B29-F687-4F45-9708-019B960494DF}">
-              <a14:hiddenLine xmlns:a14="http://schemas.microsoft.com/office/drawing/2010/main" w="12700" cap="flat" cmpd="sng" algn="ctr">
-                <a:solidFill>
-                  <a:schemeClr val="accent1">
-                    <a:shade val="50000"/>
-                  </a:schemeClr>
-                </a:solidFill>
-                <a:prstDash val="solid"/>
-                <a:miter lim="800000"/>
-              </a14:hiddenLine>
-            </a:ext>
-          </a:extLst>
-        </p:spPr>
-        <p:style>
-          <a:lnRef idx="2">
-            <a:schemeClr val="accent1">
-              <a:shade val="50000"/>
-            </a:schemeClr>
-          </a:lnRef>
-          <a:fillRef idx="1">
-            <a:schemeClr val="accent1"/>
-          </a:fillRef>
-          <a:effectRef idx="0">
-            <a:schemeClr val="accent1"/>
-          </a:effectRef>
-          <a:fontRef idx="minor">
-            <a:schemeClr val="lt1"/>
-          </a:fontRef>
-        </p:style>
-        <p:txBody>
-          <a:bodyPr rtlCol="0" anchor="ctr"/>
-          <a:lstStyle/>
-          <a:p>
-            <a:pPr algn="ctr"/>
-            <a:endParaRPr lang="en-US"/>
-          </a:p>
-        </p:txBody>
-      </p:sp>
-      <p:sp>
-        <p:nvSpPr>
-          <p:cNvPr id="12" name="Rectangle 11">
-            <a:extLst>
-              <a:ext uri="{FF2B5EF4-FFF2-40B4-BE49-F238E27FC236}">
-                <a16:creationId xmlns:a16="http://schemas.microsoft.com/office/drawing/2014/main" id="{F68B3F68-107C-434F-AA38-110D5EA91B85}"/>
-              </a:ext>
-              <a:ext uri="{C183D7F6-B498-43B3-948B-1728B52AA6E4}">
-                <adec:decorative xmlns:adec="http://schemas.microsoft.com/office/drawing/2017/decorative" val="1"/>
-              </a:ext>
-            </a:extLst>
-          </p:cNvPr>
-          <p:cNvSpPr>
-            <a:spLocks noGrp="1" noRot="1" noChangeAspect="1" noMove="1" noResize="1" noEditPoints="1" noAdjustHandles="1" noChangeArrowheads="1" noChangeShapeType="1" noTextEdit="1"/>
+            <a:spLocks noChangeAspect="1"/>
           </p:cNvSpPr>
           <p:nvPr>
             <p:extLst>
@@ -26914,8 +23500,8 @@
         </p:nvSpPr>
         <p:spPr>
           <a:xfrm flipH="1">
-            <a:off x="1524002" y="1"/>
-            <a:ext cx="9143999" cy="1575955"/>
+            <a:off x="-2" y="1"/>
+            <a:ext cx="12191999" cy="1575955"/>
           </a:xfrm>
           <a:prstGeom prst="rect">
             <a:avLst/>
@@ -26966,10 +23552,10 @@
       </p:sp>
       <p:sp>
         <p:nvSpPr>
-          <p:cNvPr id="14" name="Rectangle 13">
+          <p:cNvPr id="6" name="Rectangle 5">
             <a:extLst>
               <a:ext uri="{FF2B5EF4-FFF2-40B4-BE49-F238E27FC236}">
-                <a16:creationId xmlns:a16="http://schemas.microsoft.com/office/drawing/2014/main" id="{AAD0DBB9-1A4B-4391-81D4-CB19F9AB918A}"/>
+                <a16:creationId xmlns:a16="http://schemas.microsoft.com/office/drawing/2014/main" id="{3B680343-C526-648A-3A16-3D850A2B82AA}"/>
               </a:ext>
               <a:ext uri="{C183D7F6-B498-43B3-948B-1728B52AA6E4}">
                 <adec:decorative xmlns:adec="http://schemas.microsoft.com/office/drawing/2017/decorative" val="1"/>
@@ -26977,7 +23563,7 @@
             </a:extLst>
           </p:cNvPr>
           <p:cNvSpPr>
-            <a:spLocks noGrp="1" noRot="1" noChangeAspect="1" noMove="1" noResize="1" noEditPoints="1" noAdjustHandles="1" noChangeArrowheads="1" noChangeShapeType="1" noTextEdit="1"/>
+            <a:spLocks noChangeAspect="1"/>
           </p:cNvSpPr>
           <p:nvPr>
             <p:extLst>
@@ -26990,7 +23576,7 @@
         <p:spPr>
           <a:xfrm rot="10800000" flipH="1">
             <a:off x="7620642" y="0"/>
-            <a:ext cx="3047358" cy="1576412"/>
+            <a:ext cx="4571358" cy="1576412"/>
           </a:xfrm>
           <a:prstGeom prst="rect">
             <a:avLst/>
@@ -27042,10 +23628,10 @@
       </p:sp>
       <p:sp>
         <p:nvSpPr>
-          <p:cNvPr id="16" name="Rectangle 15">
+          <p:cNvPr id="7" name="Rectangle 6">
             <a:extLst>
               <a:ext uri="{FF2B5EF4-FFF2-40B4-BE49-F238E27FC236}">
-                <a16:creationId xmlns:a16="http://schemas.microsoft.com/office/drawing/2014/main" id="{063BBA22-50EA-4C4D-BE05-F1CE4E63AA56}"/>
+                <a16:creationId xmlns:a16="http://schemas.microsoft.com/office/drawing/2014/main" id="{7FC911F9-A19E-D9DB-001A-75EC61E2DC15}"/>
               </a:ext>
               <a:ext uri="{C183D7F6-B498-43B3-948B-1728B52AA6E4}">
                 <adec:decorative xmlns:adec="http://schemas.microsoft.com/office/drawing/2017/decorative" val="1"/>
@@ -27053,7 +23639,7 @@
             </a:extLst>
           </p:cNvPr>
           <p:cNvSpPr>
-            <a:spLocks noGrp="1" noRot="1" noChangeAspect="1" noMove="1" noResize="1" noEditPoints="1" noAdjustHandles="1" noChangeArrowheads="1" noChangeShapeType="1" noTextEdit="1"/>
+            <a:spLocks noChangeAspect="1"/>
           </p:cNvSpPr>
           <p:nvPr>
             <p:extLst>
@@ -27065,8 +23651,8 @@
         </p:nvSpPr>
         <p:spPr>
           <a:xfrm rot="5400000">
-            <a:off x="5307777" y="-3783778"/>
-            <a:ext cx="1576446" cy="9144002"/>
+            <a:off x="5307777" y="-5307777"/>
+            <a:ext cx="1576446" cy="12192000"/>
           </a:xfrm>
           <a:prstGeom prst="rect">
             <a:avLst/>
@@ -27164,14 +23750,14 @@
             <p:ph idx="1"/>
             <p:extLst>
               <p:ext uri="{D42A27DB-BD31-4B8C-83A1-F6EECF244321}">
-                <p14:modId xmlns:p14="http://schemas.microsoft.com/office/powerpoint/2010/main" val="2903508360"/>
+                <p14:modId xmlns:p14="http://schemas.microsoft.com/office/powerpoint/2010/main" val="2465955676"/>
               </p:ext>
             </p:extLst>
           </p:nvPr>
         </p:nvGraphicFramePr>
         <p:xfrm>
-          <a:off x="2007043" y="2112580"/>
-          <a:ext cx="8195871" cy="4192805"/>
+          <a:off x="387275" y="2112581"/>
+          <a:ext cx="11424621" cy="4116098"/>
         </p:xfrm>
         <a:graphic>
           <a:graphicData uri="http://schemas.openxmlformats.org/drawingml/2006/diagram">
@@ -27181,10 +23767,10 @@
       </p:graphicFrame>
       <p:pic>
         <p:nvPicPr>
-          <p:cNvPr id="3" name="Picture Placeholder 8">
+          <p:cNvPr id="8" name="Picture Placeholder 8">
             <a:extLst>
               <a:ext uri="{FF2B5EF4-FFF2-40B4-BE49-F238E27FC236}">
-                <a16:creationId xmlns:a16="http://schemas.microsoft.com/office/drawing/2014/main" id="{3C601B5D-FF84-C4D1-1EE0-01A6844759A9}"/>
+                <a16:creationId xmlns:a16="http://schemas.microsoft.com/office/drawing/2014/main" id="{98824730-2AA7-FEC1-D7C4-9649411ECCA9}"/>
               </a:ext>
             </a:extLst>
           </p:cNvPr>
@@ -27212,7 +23798,7 @@
         </p:blipFill>
         <p:spPr>
           <a:xfrm>
-            <a:off x="1524020" y="6"/>
+            <a:off x="121940" y="6"/>
             <a:ext cx="1605261" cy="1559957"/>
           </a:xfrm>
           <a:prstGeom prst="rect">
@@ -27265,12 +23851,12 @@
           <a:chExt cx="0" cy="0"/>
         </a:xfrm>
       </p:grpSpPr>
-      <p:sp useBgFill="1">
+      <p:sp>
         <p:nvSpPr>
-          <p:cNvPr id="25" name="Rectangle 24">
+          <p:cNvPr id="3" name="Rectangle 2">
             <a:extLst>
               <a:ext uri="{FF2B5EF4-FFF2-40B4-BE49-F238E27FC236}">
-                <a16:creationId xmlns:a16="http://schemas.microsoft.com/office/drawing/2014/main" id="{B712E947-0734-45F9-9C4F-41114EC3A33E}"/>
+                <a16:creationId xmlns:a16="http://schemas.microsoft.com/office/drawing/2014/main" id="{4463A132-EA33-0288-2AC9-4D9EBBF007A5}"/>
               </a:ext>
               <a:ext uri="{C183D7F6-B498-43B3-948B-1728B52AA6E4}">
                 <adec:decorative xmlns:adec="http://schemas.microsoft.com/office/drawing/2017/decorative" val="1"/>
@@ -27278,7 +23864,7 @@
             </a:extLst>
           </p:cNvPr>
           <p:cNvSpPr>
-            <a:spLocks noGrp="1" noRot="1" noChangeAspect="1" noMove="1" noResize="1" noEditPoints="1" noAdjustHandles="1" noChangeArrowheads="1" noChangeShapeType="1" noTextEdit="1"/>
+            <a:spLocks noChangeAspect="1"/>
           </p:cNvSpPr>
           <p:nvPr>
             <p:extLst>
@@ -27289,32 +23875,31 @@
           </p:nvPr>
         </p:nvSpPr>
         <p:spPr>
-          <a:xfrm>
-            <a:off x="1534713" y="0"/>
-            <a:ext cx="9144000" cy="6858000"/>
+          <a:xfrm flipH="1">
+            <a:off x="-2" y="1"/>
+            <a:ext cx="12191999" cy="1575955"/>
           </a:xfrm>
           <a:prstGeom prst="rect">
             <a:avLst/>
           </a:prstGeom>
-          <a:ln w="12700" cap="flat" cmpd="sng" algn="ctr">
+          <a:gradFill>
+            <a:gsLst>
+              <a:gs pos="0">
+                <a:srgbClr val="000000">
+                  <a:alpha val="96000"/>
+                </a:srgbClr>
+              </a:gs>
+              <a:gs pos="100000">
+                <a:schemeClr val="accent1">
+                  <a:lumMod val="75000"/>
+                </a:schemeClr>
+              </a:gs>
+            </a:gsLst>
+            <a:lin ang="8400000" scaled="0"/>
+          </a:gradFill>
+          <a:ln>
             <a:noFill/>
-            <a:prstDash val="solid"/>
-            <a:miter lim="800000"/>
           </a:ln>
-          <a:effectLst/>
-          <a:extLst>
-            <a:ext uri="{91240B29-F687-4F45-9708-019B960494DF}">
-              <a14:hiddenLine xmlns:a14="http://schemas.microsoft.com/office/drawing/2010/main" w="12700" cap="flat" cmpd="sng" algn="ctr">
-                <a:solidFill>
-                  <a:schemeClr val="accent1">
-                    <a:shade val="50000"/>
-                  </a:schemeClr>
-                </a:solidFill>
-                <a:prstDash val="solid"/>
-                <a:miter lim="800000"/>
-              </a14:hiddenLine>
-            </a:ext>
-          </a:extLst>
         </p:spPr>
         <p:style>
           <a:lnRef idx="2">
@@ -27341,21 +23926,21 @@
           </a:p>
         </p:txBody>
       </p:sp>
-      <p:grpSp>
-        <p:nvGrpSpPr>
-          <p:cNvPr id="27" name="Group 26">
+      <p:sp>
+        <p:nvSpPr>
+          <p:cNvPr id="4" name="Rectangle 3">
             <a:extLst>
               <a:ext uri="{FF2B5EF4-FFF2-40B4-BE49-F238E27FC236}">
-                <a16:creationId xmlns:a16="http://schemas.microsoft.com/office/drawing/2014/main" id="{12B3290A-D3BF-4B87-B55B-FD9A98B49727}"/>
+                <a16:creationId xmlns:a16="http://schemas.microsoft.com/office/drawing/2014/main" id="{13C4A325-2446-DEB1-9180-9E93320A3E98}"/>
               </a:ext>
               <a:ext uri="{C183D7F6-B498-43B3-948B-1728B52AA6E4}">
                 <adec:decorative xmlns:adec="http://schemas.microsoft.com/office/drawing/2017/decorative" val="1"/>
               </a:ext>
             </a:extLst>
           </p:cNvPr>
-          <p:cNvGrpSpPr>
-            <a:grpSpLocks noGrp="1" noUngrp="1" noRot="1" noChangeAspect="1" noMove="1" noResize="1"/>
-          </p:cNvGrpSpPr>
+          <p:cNvSpPr>
+            <a:spLocks noChangeAspect="1"/>
+          </p:cNvSpPr>
           <p:nvPr>
             <p:extLst>
               <p:ext uri="{386F3935-93C4-4BCD-93E2-E3B085C9AB24}">
@@ -27363,236 +23948,135 @@
               </p:ext>
             </p:extLst>
           </p:nvPr>
-        </p:nvGrpSpPr>
-        <p:grpSpPr>
-          <a:xfrm>
-            <a:off x="1524000" y="0"/>
-            <a:ext cx="9149272" cy="1576446"/>
-            <a:chOff x="0" y="0"/>
-            <a:chExt cx="12192002" cy="1576446"/>
+        </p:nvSpPr>
+        <p:spPr>
+          <a:xfrm rot="10800000" flipH="1">
+            <a:off x="7620642" y="0"/>
+            <a:ext cx="4571358" cy="1576412"/>
           </a:xfrm>
-        </p:grpSpPr>
-        <p:sp>
-          <p:nvSpPr>
-            <p:cNvPr id="28" name="Rectangle 27">
-              <a:extLst>
-                <a:ext uri="{FF2B5EF4-FFF2-40B4-BE49-F238E27FC236}">
-                  <a16:creationId xmlns:a16="http://schemas.microsoft.com/office/drawing/2014/main" id="{033A715A-0686-440A-8F40-441B42A6605C}"/>
-                </a:ext>
-                <a:ext uri="{C183D7F6-B498-43B3-948B-1728B52AA6E4}">
-                  <adec:decorative xmlns:adec="http://schemas.microsoft.com/office/drawing/2017/decorative" val="1"/>
-                </a:ext>
-              </a:extLst>
-            </p:cNvPr>
-            <p:cNvSpPr/>
-            <p:nvPr>
-              <p:extLst>
-                <p:ext uri="{386F3935-93C4-4BCD-93E2-E3B085C9AB24}">
-                  <p16:designElem xmlns:p16="http://schemas.microsoft.com/office/powerpoint/2015/main" val="1"/>
-                </p:ext>
-              </p:extLst>
-            </p:nvPr>
-          </p:nvSpPr>
-          <p:spPr>
-            <a:xfrm rot="10800000" flipH="1">
-              <a:off x="2" y="0"/>
-              <a:ext cx="12191998" cy="1575955"/>
-            </a:xfrm>
-            <a:prstGeom prst="rect">
-              <a:avLst/>
-            </a:prstGeom>
-            <a:gradFill>
-              <a:gsLst>
-                <a:gs pos="0">
-                  <a:srgbClr val="000000">
-                    <a:alpha val="96000"/>
-                  </a:srgbClr>
-                </a:gs>
-                <a:gs pos="100000">
-                  <a:schemeClr val="accent1">
-                    <a:lumMod val="75000"/>
-                  </a:schemeClr>
-                </a:gs>
-              </a:gsLst>
-              <a:lin ang="8400000" scaled="0"/>
-            </a:gradFill>
-            <a:ln>
-              <a:noFill/>
-            </a:ln>
-          </p:spPr>
-          <p:style>
-            <a:lnRef idx="2">
-              <a:schemeClr val="accent1">
-                <a:shade val="50000"/>
-              </a:schemeClr>
-            </a:lnRef>
-            <a:fillRef idx="1">
-              <a:schemeClr val="accent1"/>
-            </a:fillRef>
-            <a:effectRef idx="0">
-              <a:schemeClr val="accent1"/>
-            </a:effectRef>
-            <a:fontRef idx="minor">
-              <a:schemeClr val="lt1"/>
-            </a:fontRef>
-          </p:style>
-          <p:txBody>
-            <a:bodyPr rtlCol="0" anchor="ctr"/>
-            <a:lstStyle/>
-            <a:p>
-              <a:pPr algn="ctr"/>
-              <a:endParaRPr lang="en-US"/>
-            </a:p>
-          </p:txBody>
-        </p:sp>
-        <p:sp>
-          <p:nvSpPr>
-            <p:cNvPr id="29" name="Rectangle 28">
-              <a:extLst>
-                <a:ext uri="{FF2B5EF4-FFF2-40B4-BE49-F238E27FC236}">
-                  <a16:creationId xmlns:a16="http://schemas.microsoft.com/office/drawing/2014/main" id="{4761657F-19F2-425B-B7E9-0118CD13C334}"/>
-                </a:ext>
-                <a:ext uri="{C183D7F6-B498-43B3-948B-1728B52AA6E4}">
-                  <adec:decorative xmlns:adec="http://schemas.microsoft.com/office/drawing/2017/decorative" val="1"/>
-                </a:ext>
-              </a:extLst>
-            </p:cNvPr>
-            <p:cNvSpPr/>
-            <p:nvPr>
-              <p:extLst>
-                <p:ext uri="{386F3935-93C4-4BCD-93E2-E3B085C9AB24}">
-                  <p16:designElem xmlns:p16="http://schemas.microsoft.com/office/powerpoint/2015/main" val="1"/>
-                </p:ext>
-              </p:extLst>
-            </p:nvPr>
-          </p:nvSpPr>
-          <p:spPr>
-            <a:xfrm rot="16200000">
-              <a:off x="5307778" y="-5307778"/>
-              <a:ext cx="1576446" cy="12192002"/>
-            </a:xfrm>
-            <a:prstGeom prst="rect">
-              <a:avLst/>
-            </a:prstGeom>
-            <a:gradFill>
-              <a:gsLst>
-                <a:gs pos="45000">
-                  <a:schemeClr val="accent1">
-                    <a:alpha val="0"/>
-                  </a:schemeClr>
-                </a:gs>
-                <a:gs pos="99000">
-                  <a:srgbClr val="000000">
-                    <a:alpha val="74000"/>
-                  </a:srgbClr>
-                </a:gs>
-              </a:gsLst>
-              <a:lin ang="11400000" scaled="0"/>
-            </a:gradFill>
-            <a:ln>
-              <a:noFill/>
-            </a:ln>
-          </p:spPr>
-          <p:style>
-            <a:lnRef idx="2">
-              <a:schemeClr val="accent1">
-                <a:shade val="50000"/>
-              </a:schemeClr>
-            </a:lnRef>
-            <a:fillRef idx="1">
-              <a:schemeClr val="accent1"/>
-            </a:fillRef>
-            <a:effectRef idx="0">
-              <a:schemeClr val="accent1"/>
-            </a:effectRef>
-            <a:fontRef idx="minor">
-              <a:schemeClr val="lt1"/>
-            </a:fontRef>
-          </p:style>
-          <p:txBody>
-            <a:bodyPr rtlCol="0" anchor="ctr"/>
-            <a:lstStyle/>
-            <a:p>
-              <a:pPr algn="ctr"/>
-              <a:endParaRPr lang="en-US" dirty="0"/>
-            </a:p>
-          </p:txBody>
-        </p:sp>
-        <p:sp>
-          <p:nvSpPr>
-            <p:cNvPr id="30" name="Rectangle 29">
-              <a:extLst>
-                <a:ext uri="{FF2B5EF4-FFF2-40B4-BE49-F238E27FC236}">
-                  <a16:creationId xmlns:a16="http://schemas.microsoft.com/office/drawing/2014/main" id="{E27B6634-79D3-4EDD-A77A-1065D6F3A4F2}"/>
-                </a:ext>
-                <a:ext uri="{C183D7F6-B498-43B3-948B-1728B52AA6E4}">
-                  <adec:decorative xmlns:adec="http://schemas.microsoft.com/office/drawing/2017/decorative" val="1"/>
-                </a:ext>
-              </a:extLst>
-            </p:cNvPr>
-            <p:cNvSpPr/>
-            <p:nvPr>
-              <p:extLst>
-                <p:ext uri="{386F3935-93C4-4BCD-93E2-E3B085C9AB24}">
-                  <p16:designElem xmlns:p16="http://schemas.microsoft.com/office/powerpoint/2015/main" val="1"/>
-                </p:ext>
-              </p:extLst>
-            </p:nvPr>
-          </p:nvSpPr>
-          <p:spPr>
-            <a:xfrm>
-              <a:off x="3825434" y="0"/>
-              <a:ext cx="4303422" cy="1575461"/>
-            </a:xfrm>
-            <a:prstGeom prst="rect">
-              <a:avLst/>
-            </a:prstGeom>
-            <a:gradFill>
-              <a:gsLst>
-                <a:gs pos="0">
-                  <a:schemeClr val="accent1">
-                    <a:alpha val="17000"/>
-                  </a:schemeClr>
-                </a:gs>
-                <a:gs pos="74000">
-                  <a:schemeClr val="accent1">
-                    <a:lumMod val="50000"/>
-                    <a:alpha val="0"/>
-                  </a:schemeClr>
-                </a:gs>
-              </a:gsLst>
-              <a:lin ang="14400000" scaled="0"/>
-            </a:gradFill>
-            <a:ln>
-              <a:noFill/>
-            </a:ln>
-          </p:spPr>
-          <p:style>
-            <a:lnRef idx="2">
-              <a:schemeClr val="accent1">
-                <a:shade val="50000"/>
-              </a:schemeClr>
-            </a:lnRef>
-            <a:fillRef idx="1">
-              <a:schemeClr val="accent1"/>
-            </a:fillRef>
-            <a:effectRef idx="0">
-              <a:schemeClr val="accent1"/>
-            </a:effectRef>
-            <a:fontRef idx="minor">
-              <a:schemeClr val="lt1"/>
-            </a:fontRef>
-          </p:style>
-          <p:txBody>
-            <a:bodyPr rtlCol="0" anchor="ctr"/>
-            <a:lstStyle/>
-            <a:p>
-              <a:pPr algn="ctr"/>
-              <a:endParaRPr lang="en-US"/>
-            </a:p>
-          </p:txBody>
-        </p:sp>
-      </p:grpSp>
+          <a:prstGeom prst="rect">
+            <a:avLst/>
+          </a:prstGeom>
+          <a:gradFill>
+            <a:gsLst>
+              <a:gs pos="19000">
+                <a:schemeClr val="accent1">
+                  <a:lumMod val="50000"/>
+                  <a:alpha val="68000"/>
+                </a:schemeClr>
+              </a:gs>
+              <a:gs pos="100000">
+                <a:schemeClr val="accent1">
+                  <a:alpha val="79000"/>
+                </a:schemeClr>
+              </a:gs>
+            </a:gsLst>
+            <a:lin ang="19200000" scaled="0"/>
+          </a:gradFill>
+          <a:ln>
+            <a:noFill/>
+          </a:ln>
+        </p:spPr>
+        <p:style>
+          <a:lnRef idx="2">
+            <a:schemeClr val="accent1">
+              <a:shade val="50000"/>
+            </a:schemeClr>
+          </a:lnRef>
+          <a:fillRef idx="1">
+            <a:schemeClr val="accent1"/>
+          </a:fillRef>
+          <a:effectRef idx="0">
+            <a:schemeClr val="accent1"/>
+          </a:effectRef>
+          <a:fontRef idx="minor">
+            <a:schemeClr val="lt1"/>
+          </a:fontRef>
+        </p:style>
+        <p:txBody>
+          <a:bodyPr rtlCol="0" anchor="ctr"/>
+          <a:lstStyle/>
+          <a:p>
+            <a:pPr algn="ctr"/>
+            <a:endParaRPr lang="en-US"/>
+          </a:p>
+        </p:txBody>
+      </p:sp>
+      <p:sp>
+        <p:nvSpPr>
+          <p:cNvPr id="5" name="Rectangle 4">
+            <a:extLst>
+              <a:ext uri="{FF2B5EF4-FFF2-40B4-BE49-F238E27FC236}">
+                <a16:creationId xmlns:a16="http://schemas.microsoft.com/office/drawing/2014/main" id="{234A757F-1CBA-17D8-7A99-9A3E41FBF2F0}"/>
+              </a:ext>
+              <a:ext uri="{C183D7F6-B498-43B3-948B-1728B52AA6E4}">
+                <adec:decorative xmlns:adec="http://schemas.microsoft.com/office/drawing/2017/decorative" val="1"/>
+              </a:ext>
+            </a:extLst>
+          </p:cNvPr>
+          <p:cNvSpPr>
+            <a:spLocks noChangeAspect="1"/>
+          </p:cNvSpPr>
+          <p:nvPr>
+            <p:extLst>
+              <p:ext uri="{386F3935-93C4-4BCD-93E2-E3B085C9AB24}">
+                <p16:designElem xmlns:p16="http://schemas.microsoft.com/office/powerpoint/2015/main" val="1"/>
+              </p:ext>
+            </p:extLst>
+          </p:nvPr>
+        </p:nvSpPr>
+        <p:spPr>
+          <a:xfrm rot="5400000">
+            <a:off x="5307777" y="-5307777"/>
+            <a:ext cx="1576446" cy="12192000"/>
+          </a:xfrm>
+          <a:prstGeom prst="rect">
+            <a:avLst/>
+          </a:prstGeom>
+          <a:gradFill>
+            <a:gsLst>
+              <a:gs pos="23000">
+                <a:schemeClr val="accent1">
+                  <a:alpha val="0"/>
+                </a:schemeClr>
+              </a:gs>
+              <a:gs pos="99000">
+                <a:srgbClr val="000000">
+                  <a:alpha val="74000"/>
+                </a:srgbClr>
+              </a:gs>
+            </a:gsLst>
+            <a:lin ang="20400000" scaled="0"/>
+          </a:gradFill>
+          <a:ln>
+            <a:noFill/>
+          </a:ln>
+        </p:spPr>
+        <p:style>
+          <a:lnRef idx="2">
+            <a:schemeClr val="accent1">
+              <a:shade val="50000"/>
+            </a:schemeClr>
+          </a:lnRef>
+          <a:fillRef idx="1">
+            <a:schemeClr val="accent1"/>
+          </a:fillRef>
+          <a:effectRef idx="0">
+            <a:schemeClr val="accent1"/>
+          </a:effectRef>
+          <a:fontRef idx="minor">
+            <a:schemeClr val="lt1"/>
+          </a:fontRef>
+        </p:style>
+        <p:txBody>
+          <a:bodyPr rtlCol="0" anchor="ctr"/>
+          <a:lstStyle/>
+          <a:p>
+            <a:pPr algn="ctr"/>
+            <a:endParaRPr lang="en-US" dirty="0"/>
+          </a:p>
+        </p:txBody>
+      </p:sp>
       <p:sp>
         <p:nvSpPr>
           <p:cNvPr id="2" name="Title 1">
@@ -27667,7 +24151,7 @@
         <p:spPr>
           <a:xfrm>
             <a:off x="6396054" y="1656628"/>
-            <a:ext cx="3936668" cy="3028691"/>
+            <a:ext cx="5084746" cy="3028691"/>
           </a:xfrm>
           <a:prstGeom prst="rect">
             <a:avLst/>
@@ -27703,8 +24187,8 @@
         </p:blipFill>
         <p:spPr>
           <a:xfrm>
-            <a:off x="1859280" y="1656628"/>
-            <a:ext cx="3936668" cy="3041207"/>
+            <a:off x="873760" y="1656628"/>
+            <a:ext cx="4922188" cy="3041207"/>
           </a:xfrm>
           <a:prstGeom prst="rect">
             <a:avLst/>
@@ -27725,12 +24209,40 @@
           </a:effectLst>
         </p:spPr>
       </p:pic>
+      <p:graphicFrame>
+        <p:nvGraphicFramePr>
+          <p:cNvPr id="32" name="TextBox 3">
+            <a:extLst>
+              <a:ext uri="{FF2B5EF4-FFF2-40B4-BE49-F238E27FC236}">
+                <a16:creationId xmlns:a16="http://schemas.microsoft.com/office/drawing/2014/main" id="{07A13FD9-E03F-3E80-E5E9-44FDD1C41BEF}"/>
+              </a:ext>
+            </a:extLst>
+          </p:cNvPr>
+          <p:cNvGraphicFramePr/>
+          <p:nvPr>
+            <p:extLst>
+              <p:ext uri="{D42A27DB-BD31-4B8C-83A1-F6EECF244321}">
+                <p14:modId xmlns:p14="http://schemas.microsoft.com/office/powerpoint/2010/main" val="1731507263"/>
+              </p:ext>
+            </p:extLst>
+          </p:nvPr>
+        </p:nvGraphicFramePr>
+        <p:xfrm>
+          <a:off x="873760" y="4666090"/>
+          <a:ext cx="10607040" cy="2191909"/>
+        </p:xfrm>
+        <a:graphic>
+          <a:graphicData uri="http://schemas.openxmlformats.org/drawingml/2006/diagram">
+            <dgm:relIds xmlns:dgm="http://schemas.openxmlformats.org/drawingml/2006/diagram" xmlns:r="http://schemas.openxmlformats.org/officeDocument/2006/relationships" r:dm="rId5" r:lo="rId6" r:qs="rId7" r:cs="rId8"/>
+          </a:graphicData>
+        </a:graphic>
+      </p:graphicFrame>
       <p:pic>
         <p:nvPicPr>
-          <p:cNvPr id="15" name="Picture Placeholder 8" descr="A train on the tracks&#10;&#10;AI-generated content may be incorrect.">
+          <p:cNvPr id="6" name="Picture Placeholder 8">
             <a:extLst>
               <a:ext uri="{FF2B5EF4-FFF2-40B4-BE49-F238E27FC236}">
-                <a16:creationId xmlns:a16="http://schemas.microsoft.com/office/drawing/2014/main" id="{F2302AA5-046A-64C4-7E21-04912147044E}"/>
+                <a16:creationId xmlns:a16="http://schemas.microsoft.com/office/drawing/2014/main" id="{4CAF9566-93FD-47E1-503A-B707B23EC65C}"/>
               </a:ext>
             </a:extLst>
           </p:cNvPr>
@@ -27744,7 +24256,7 @@
           </p:nvPr>
         </p:nvPicPr>
         <p:blipFill rotWithShape="1">
-          <a:blip r:embed="rId5" cstate="screen">
+          <a:blip r:embed="rId10" cstate="screen">
             <a:extLst>
               <a:ext uri="{28A0092B-C50C-407E-A947-70E740481C1C}">
                 <a14:useLocalDpi xmlns:a14="http://schemas.microsoft.com/office/drawing/2010/main"/>
@@ -27758,7 +24270,7 @@
         </p:blipFill>
         <p:spPr>
           <a:xfrm>
-            <a:off x="1524020" y="6"/>
+            <a:off x="121940" y="6"/>
             <a:ext cx="1605261" cy="1559957"/>
           </a:xfrm>
           <a:prstGeom prst="rect">
@@ -27772,34 +24284,6 @@
           </a:effectLst>
         </p:spPr>
       </p:pic>
-      <p:graphicFrame>
-        <p:nvGraphicFramePr>
-          <p:cNvPr id="32" name="TextBox 3">
-            <a:extLst>
-              <a:ext uri="{FF2B5EF4-FFF2-40B4-BE49-F238E27FC236}">
-                <a16:creationId xmlns:a16="http://schemas.microsoft.com/office/drawing/2014/main" id="{07A13FD9-E03F-3E80-E5E9-44FDD1C41BEF}"/>
-              </a:ext>
-            </a:extLst>
-          </p:cNvPr>
-          <p:cNvGraphicFramePr/>
-          <p:nvPr>
-            <p:extLst>
-              <p:ext uri="{D42A27DB-BD31-4B8C-83A1-F6EECF244321}">
-                <p14:modId xmlns:p14="http://schemas.microsoft.com/office/powerpoint/2010/main" val="3783960254"/>
-              </p:ext>
-            </p:extLst>
-          </p:nvPr>
-        </p:nvGraphicFramePr>
-        <p:xfrm>
-          <a:off x="1432086" y="4666091"/>
-          <a:ext cx="9154713" cy="2160166"/>
-        </p:xfrm>
-        <a:graphic>
-          <a:graphicData uri="http://schemas.openxmlformats.org/drawingml/2006/diagram">
-            <dgm:relIds xmlns:dgm="http://schemas.openxmlformats.org/drawingml/2006/diagram" xmlns:r="http://schemas.openxmlformats.org/officeDocument/2006/relationships" r:dm="rId6" r:lo="rId7" r:qs="rId8" r:cs="rId9"/>
-          </a:graphicData>
-        </a:graphic>
-      </p:graphicFrame>
     </p:spTree>
     <p:extLst>
       <p:ext uri="{BB962C8B-B14F-4D97-AF65-F5344CB8AC3E}">
@@ -27844,12 +24328,12 @@
           <a:chExt cx="0" cy="0"/>
         </a:xfrm>
       </p:grpSpPr>
-      <p:sp useBgFill="1">
+      <p:sp>
         <p:nvSpPr>
-          <p:cNvPr id="25" name="Rectangle 24">
+          <p:cNvPr id="4" name="Rectangle 3">
             <a:extLst>
               <a:ext uri="{FF2B5EF4-FFF2-40B4-BE49-F238E27FC236}">
-                <a16:creationId xmlns:a16="http://schemas.microsoft.com/office/drawing/2014/main" id="{18DB9D57-0BA8-B219-BAE8-14A1033782E9}"/>
+                <a16:creationId xmlns:a16="http://schemas.microsoft.com/office/drawing/2014/main" id="{75F98BB4-4EDD-7037-9B8D-82A49ECC10A6}"/>
               </a:ext>
               <a:ext uri="{C183D7F6-B498-43B3-948B-1728B52AA6E4}">
                 <adec:decorative xmlns:adec="http://schemas.microsoft.com/office/drawing/2017/decorative" val="1"/>
@@ -27857,7 +24341,7 @@
             </a:extLst>
           </p:cNvPr>
           <p:cNvSpPr>
-            <a:spLocks noGrp="1" noRot="1" noChangeAspect="1" noMove="1" noResize="1" noEditPoints="1" noAdjustHandles="1" noChangeArrowheads="1" noChangeShapeType="1" noTextEdit="1"/>
+            <a:spLocks noChangeAspect="1"/>
           </p:cNvSpPr>
           <p:nvPr>
             <p:extLst>
@@ -27868,32 +24352,31 @@
           </p:nvPr>
         </p:nvSpPr>
         <p:spPr>
-          <a:xfrm>
-            <a:off x="1534713" y="0"/>
-            <a:ext cx="9144000" cy="6858000"/>
+          <a:xfrm flipH="1">
+            <a:off x="-2" y="1"/>
+            <a:ext cx="12191999" cy="1575955"/>
           </a:xfrm>
           <a:prstGeom prst="rect">
             <a:avLst/>
           </a:prstGeom>
-          <a:ln w="12700" cap="flat" cmpd="sng" algn="ctr">
+          <a:gradFill>
+            <a:gsLst>
+              <a:gs pos="0">
+                <a:srgbClr val="000000">
+                  <a:alpha val="96000"/>
+                </a:srgbClr>
+              </a:gs>
+              <a:gs pos="100000">
+                <a:schemeClr val="accent1">
+                  <a:lumMod val="75000"/>
+                </a:schemeClr>
+              </a:gs>
+            </a:gsLst>
+            <a:lin ang="8400000" scaled="0"/>
+          </a:gradFill>
+          <a:ln>
             <a:noFill/>
-            <a:prstDash val="solid"/>
-            <a:miter lim="800000"/>
           </a:ln>
-          <a:effectLst/>
-          <a:extLst>
-            <a:ext uri="{91240B29-F687-4F45-9708-019B960494DF}">
-              <a14:hiddenLine xmlns:a14="http://schemas.microsoft.com/office/drawing/2010/main" w="12700" cap="flat" cmpd="sng" algn="ctr">
-                <a:solidFill>
-                  <a:schemeClr val="accent1">
-                    <a:shade val="50000"/>
-                  </a:schemeClr>
-                </a:solidFill>
-                <a:prstDash val="solid"/>
-                <a:miter lim="800000"/>
-              </a14:hiddenLine>
-            </a:ext>
-          </a:extLst>
         </p:spPr>
         <p:style>
           <a:lnRef idx="2">
@@ -27915,33 +24398,26 @@
           <a:bodyPr rtlCol="0" anchor="ctr"/>
           <a:lstStyle/>
           <a:p>
-            <a:pPr algn="ctr">
-              <a:defRPr/>
-            </a:pPr>
-            <a:endParaRPr lang="en-US">
-              <a:solidFill>
-                <a:prstClr val="white"/>
-              </a:solidFill>
-              <a:latin typeface="Calibri"/>
-            </a:endParaRPr>
+            <a:pPr algn="ctr"/>
+            <a:endParaRPr lang="en-US"/>
           </a:p>
         </p:txBody>
       </p:sp>
-      <p:grpSp>
-        <p:nvGrpSpPr>
-          <p:cNvPr id="27" name="Group 26">
+      <p:sp>
+        <p:nvSpPr>
+          <p:cNvPr id="6" name="Rectangle 5">
             <a:extLst>
               <a:ext uri="{FF2B5EF4-FFF2-40B4-BE49-F238E27FC236}">
-                <a16:creationId xmlns:a16="http://schemas.microsoft.com/office/drawing/2014/main" id="{C4EDF1FF-843D-09B2-9DD1-96C5A68165B2}"/>
+                <a16:creationId xmlns:a16="http://schemas.microsoft.com/office/drawing/2014/main" id="{7B36B1E3-3544-3EB6-5057-5083495BCAB6}"/>
               </a:ext>
               <a:ext uri="{C183D7F6-B498-43B3-948B-1728B52AA6E4}">
                 <adec:decorative xmlns:adec="http://schemas.microsoft.com/office/drawing/2017/decorative" val="1"/>
               </a:ext>
             </a:extLst>
           </p:cNvPr>
-          <p:cNvGrpSpPr>
-            <a:grpSpLocks noGrp="1" noUngrp="1" noRot="1" noChangeAspect="1" noMove="1" noResize="1"/>
-          </p:cNvGrpSpPr>
+          <p:cNvSpPr>
+            <a:spLocks noChangeAspect="1"/>
+          </p:cNvSpPr>
           <p:nvPr>
             <p:extLst>
               <p:ext uri="{386F3935-93C4-4BCD-93E2-E3B085C9AB24}">
@@ -27949,257 +24425,135 @@
               </p:ext>
             </p:extLst>
           </p:nvPr>
-        </p:nvGrpSpPr>
-        <p:grpSpPr>
-          <a:xfrm>
-            <a:off x="1524000" y="0"/>
-            <a:ext cx="9149272" cy="1576446"/>
-            <a:chOff x="0" y="0"/>
-            <a:chExt cx="12192002" cy="1576446"/>
+        </p:nvSpPr>
+        <p:spPr>
+          <a:xfrm rot="10800000" flipH="1">
+            <a:off x="7620642" y="0"/>
+            <a:ext cx="4571358" cy="1576412"/>
           </a:xfrm>
-        </p:grpSpPr>
-        <p:sp>
-          <p:nvSpPr>
-            <p:cNvPr id="28" name="Rectangle 27">
-              <a:extLst>
-                <a:ext uri="{FF2B5EF4-FFF2-40B4-BE49-F238E27FC236}">
-                  <a16:creationId xmlns:a16="http://schemas.microsoft.com/office/drawing/2014/main" id="{DF9BA4FC-77B1-3FED-A509-44BBA3E09531}"/>
-                </a:ext>
-                <a:ext uri="{C183D7F6-B498-43B3-948B-1728B52AA6E4}">
-                  <adec:decorative xmlns:adec="http://schemas.microsoft.com/office/drawing/2017/decorative" val="1"/>
-                </a:ext>
-              </a:extLst>
-            </p:cNvPr>
-            <p:cNvSpPr/>
-            <p:nvPr>
-              <p:extLst>
-                <p:ext uri="{386F3935-93C4-4BCD-93E2-E3B085C9AB24}">
-                  <p16:designElem xmlns:p16="http://schemas.microsoft.com/office/powerpoint/2015/main" val="1"/>
-                </p:ext>
-              </p:extLst>
-            </p:nvPr>
-          </p:nvSpPr>
-          <p:spPr>
-            <a:xfrm rot="10800000" flipH="1">
-              <a:off x="2" y="0"/>
-              <a:ext cx="12191998" cy="1575955"/>
-            </a:xfrm>
-            <a:prstGeom prst="rect">
-              <a:avLst/>
-            </a:prstGeom>
-            <a:gradFill>
-              <a:gsLst>
-                <a:gs pos="0">
-                  <a:srgbClr val="000000">
-                    <a:alpha val="96000"/>
-                  </a:srgbClr>
-                </a:gs>
-                <a:gs pos="100000">
-                  <a:schemeClr val="accent1">
-                    <a:lumMod val="75000"/>
-                  </a:schemeClr>
-                </a:gs>
-              </a:gsLst>
-              <a:lin ang="8400000" scaled="0"/>
-            </a:gradFill>
-            <a:ln>
-              <a:noFill/>
-            </a:ln>
-          </p:spPr>
-          <p:style>
-            <a:lnRef idx="2">
-              <a:schemeClr val="accent1">
-                <a:shade val="50000"/>
-              </a:schemeClr>
-            </a:lnRef>
-            <a:fillRef idx="1">
-              <a:schemeClr val="accent1"/>
-            </a:fillRef>
-            <a:effectRef idx="0">
-              <a:schemeClr val="accent1"/>
-            </a:effectRef>
-            <a:fontRef idx="minor">
-              <a:schemeClr val="lt1"/>
-            </a:fontRef>
-          </p:style>
-          <p:txBody>
-            <a:bodyPr rtlCol="0" anchor="ctr"/>
-            <a:lstStyle/>
-            <a:p>
-              <a:pPr algn="ctr">
-                <a:defRPr/>
-              </a:pPr>
-              <a:endParaRPr lang="en-US">
-                <a:solidFill>
-                  <a:prstClr val="white"/>
-                </a:solidFill>
-                <a:latin typeface="Calibri"/>
-              </a:endParaRPr>
-            </a:p>
-          </p:txBody>
-        </p:sp>
-        <p:sp>
-          <p:nvSpPr>
-            <p:cNvPr id="29" name="Rectangle 28">
-              <a:extLst>
-                <a:ext uri="{FF2B5EF4-FFF2-40B4-BE49-F238E27FC236}">
-                  <a16:creationId xmlns:a16="http://schemas.microsoft.com/office/drawing/2014/main" id="{25D6C5E7-E64C-7688-EB02-D01008602899}"/>
-                </a:ext>
-                <a:ext uri="{C183D7F6-B498-43B3-948B-1728B52AA6E4}">
-                  <adec:decorative xmlns:adec="http://schemas.microsoft.com/office/drawing/2017/decorative" val="1"/>
-                </a:ext>
-              </a:extLst>
-            </p:cNvPr>
-            <p:cNvSpPr/>
-            <p:nvPr>
-              <p:extLst>
-                <p:ext uri="{386F3935-93C4-4BCD-93E2-E3B085C9AB24}">
-                  <p16:designElem xmlns:p16="http://schemas.microsoft.com/office/powerpoint/2015/main" val="1"/>
-                </p:ext>
-              </p:extLst>
-            </p:nvPr>
-          </p:nvSpPr>
-          <p:spPr>
-            <a:xfrm rot="16200000">
-              <a:off x="5307778" y="-5307778"/>
-              <a:ext cx="1576446" cy="12192002"/>
-            </a:xfrm>
-            <a:prstGeom prst="rect">
-              <a:avLst/>
-            </a:prstGeom>
-            <a:gradFill>
-              <a:gsLst>
-                <a:gs pos="45000">
-                  <a:schemeClr val="accent1">
-                    <a:alpha val="0"/>
-                  </a:schemeClr>
-                </a:gs>
-                <a:gs pos="99000">
-                  <a:srgbClr val="000000">
-                    <a:alpha val="74000"/>
-                  </a:srgbClr>
-                </a:gs>
-              </a:gsLst>
-              <a:lin ang="11400000" scaled="0"/>
-            </a:gradFill>
-            <a:ln>
-              <a:noFill/>
-            </a:ln>
-          </p:spPr>
-          <p:style>
-            <a:lnRef idx="2">
-              <a:schemeClr val="accent1">
-                <a:shade val="50000"/>
-              </a:schemeClr>
-            </a:lnRef>
-            <a:fillRef idx="1">
-              <a:schemeClr val="accent1"/>
-            </a:fillRef>
-            <a:effectRef idx="0">
-              <a:schemeClr val="accent1"/>
-            </a:effectRef>
-            <a:fontRef idx="minor">
-              <a:schemeClr val="lt1"/>
-            </a:fontRef>
-          </p:style>
-          <p:txBody>
-            <a:bodyPr rtlCol="0" anchor="ctr"/>
-            <a:lstStyle/>
-            <a:p>
-              <a:pPr algn="ctr">
-                <a:defRPr/>
-              </a:pPr>
-              <a:endParaRPr lang="en-US" dirty="0">
-                <a:solidFill>
-                  <a:prstClr val="white"/>
-                </a:solidFill>
-                <a:latin typeface="Calibri"/>
-              </a:endParaRPr>
-            </a:p>
-          </p:txBody>
-        </p:sp>
-        <p:sp>
-          <p:nvSpPr>
-            <p:cNvPr id="30" name="Rectangle 29">
-              <a:extLst>
-                <a:ext uri="{FF2B5EF4-FFF2-40B4-BE49-F238E27FC236}">
-                  <a16:creationId xmlns:a16="http://schemas.microsoft.com/office/drawing/2014/main" id="{DCA3232E-FBD4-FC34-90BF-733B18AE5AC1}"/>
-                </a:ext>
-                <a:ext uri="{C183D7F6-B498-43B3-948B-1728B52AA6E4}">
-                  <adec:decorative xmlns:adec="http://schemas.microsoft.com/office/drawing/2017/decorative" val="1"/>
-                </a:ext>
-              </a:extLst>
-            </p:cNvPr>
-            <p:cNvSpPr/>
-            <p:nvPr>
-              <p:extLst>
-                <p:ext uri="{386F3935-93C4-4BCD-93E2-E3B085C9AB24}">
-                  <p16:designElem xmlns:p16="http://schemas.microsoft.com/office/powerpoint/2015/main" val="1"/>
-                </p:ext>
-              </p:extLst>
-            </p:nvPr>
-          </p:nvSpPr>
-          <p:spPr>
-            <a:xfrm>
-              <a:off x="3825434" y="0"/>
-              <a:ext cx="4303422" cy="1575461"/>
-            </a:xfrm>
-            <a:prstGeom prst="rect">
-              <a:avLst/>
-            </a:prstGeom>
-            <a:gradFill>
-              <a:gsLst>
-                <a:gs pos="0">
-                  <a:schemeClr val="accent1">
-                    <a:alpha val="17000"/>
-                  </a:schemeClr>
-                </a:gs>
-                <a:gs pos="74000">
-                  <a:schemeClr val="accent1">
-                    <a:lumMod val="50000"/>
-                    <a:alpha val="0"/>
-                  </a:schemeClr>
-                </a:gs>
-              </a:gsLst>
-              <a:lin ang="14400000" scaled="0"/>
-            </a:gradFill>
-            <a:ln>
-              <a:noFill/>
-            </a:ln>
-          </p:spPr>
-          <p:style>
-            <a:lnRef idx="2">
-              <a:schemeClr val="accent1">
-                <a:shade val="50000"/>
-              </a:schemeClr>
-            </a:lnRef>
-            <a:fillRef idx="1">
-              <a:schemeClr val="accent1"/>
-            </a:fillRef>
-            <a:effectRef idx="0">
-              <a:schemeClr val="accent1"/>
-            </a:effectRef>
-            <a:fontRef idx="minor">
-              <a:schemeClr val="lt1"/>
-            </a:fontRef>
-          </p:style>
-          <p:txBody>
-            <a:bodyPr rtlCol="0" anchor="ctr"/>
-            <a:lstStyle/>
-            <a:p>
-              <a:pPr algn="ctr">
-                <a:defRPr/>
-              </a:pPr>
-              <a:endParaRPr lang="en-US">
-                <a:solidFill>
-                  <a:prstClr val="white"/>
-                </a:solidFill>
-                <a:latin typeface="Calibri"/>
-              </a:endParaRPr>
-            </a:p>
-          </p:txBody>
-        </p:sp>
-      </p:grpSp>
+          <a:prstGeom prst="rect">
+            <a:avLst/>
+          </a:prstGeom>
+          <a:gradFill>
+            <a:gsLst>
+              <a:gs pos="19000">
+                <a:schemeClr val="accent1">
+                  <a:lumMod val="50000"/>
+                  <a:alpha val="68000"/>
+                </a:schemeClr>
+              </a:gs>
+              <a:gs pos="100000">
+                <a:schemeClr val="accent1">
+                  <a:alpha val="79000"/>
+                </a:schemeClr>
+              </a:gs>
+            </a:gsLst>
+            <a:lin ang="19200000" scaled="0"/>
+          </a:gradFill>
+          <a:ln>
+            <a:noFill/>
+          </a:ln>
+        </p:spPr>
+        <p:style>
+          <a:lnRef idx="2">
+            <a:schemeClr val="accent1">
+              <a:shade val="50000"/>
+            </a:schemeClr>
+          </a:lnRef>
+          <a:fillRef idx="1">
+            <a:schemeClr val="accent1"/>
+          </a:fillRef>
+          <a:effectRef idx="0">
+            <a:schemeClr val="accent1"/>
+          </a:effectRef>
+          <a:fontRef idx="minor">
+            <a:schemeClr val="lt1"/>
+          </a:fontRef>
+        </p:style>
+        <p:txBody>
+          <a:bodyPr rtlCol="0" anchor="ctr"/>
+          <a:lstStyle/>
+          <a:p>
+            <a:pPr algn="ctr"/>
+            <a:endParaRPr lang="en-US"/>
+          </a:p>
+        </p:txBody>
+      </p:sp>
+      <p:sp>
+        <p:nvSpPr>
+          <p:cNvPr id="8" name="Rectangle 7">
+            <a:extLst>
+              <a:ext uri="{FF2B5EF4-FFF2-40B4-BE49-F238E27FC236}">
+                <a16:creationId xmlns:a16="http://schemas.microsoft.com/office/drawing/2014/main" id="{A28BE185-591D-E920-905E-12970491E3FA}"/>
+              </a:ext>
+              <a:ext uri="{C183D7F6-B498-43B3-948B-1728B52AA6E4}">
+                <adec:decorative xmlns:adec="http://schemas.microsoft.com/office/drawing/2017/decorative" val="1"/>
+              </a:ext>
+            </a:extLst>
+          </p:cNvPr>
+          <p:cNvSpPr>
+            <a:spLocks noChangeAspect="1"/>
+          </p:cNvSpPr>
+          <p:nvPr>
+            <p:extLst>
+              <p:ext uri="{386F3935-93C4-4BCD-93E2-E3B085C9AB24}">
+                <p16:designElem xmlns:p16="http://schemas.microsoft.com/office/powerpoint/2015/main" val="1"/>
+              </p:ext>
+            </p:extLst>
+          </p:nvPr>
+        </p:nvSpPr>
+        <p:spPr>
+          <a:xfrm rot="5400000">
+            <a:off x="5307777" y="-5307777"/>
+            <a:ext cx="1576446" cy="12192000"/>
+          </a:xfrm>
+          <a:prstGeom prst="rect">
+            <a:avLst/>
+          </a:prstGeom>
+          <a:gradFill>
+            <a:gsLst>
+              <a:gs pos="23000">
+                <a:schemeClr val="accent1">
+                  <a:alpha val="0"/>
+                </a:schemeClr>
+              </a:gs>
+              <a:gs pos="99000">
+                <a:srgbClr val="000000">
+                  <a:alpha val="74000"/>
+                </a:srgbClr>
+              </a:gs>
+            </a:gsLst>
+            <a:lin ang="20400000" scaled="0"/>
+          </a:gradFill>
+          <a:ln>
+            <a:noFill/>
+          </a:ln>
+        </p:spPr>
+        <p:style>
+          <a:lnRef idx="2">
+            <a:schemeClr val="accent1">
+              <a:shade val="50000"/>
+            </a:schemeClr>
+          </a:lnRef>
+          <a:fillRef idx="1">
+            <a:schemeClr val="accent1"/>
+          </a:fillRef>
+          <a:effectRef idx="0">
+            <a:schemeClr val="accent1"/>
+          </a:effectRef>
+          <a:fontRef idx="minor">
+            <a:schemeClr val="lt1"/>
+          </a:fontRef>
+        </p:style>
+        <p:txBody>
+          <a:bodyPr rtlCol="0" anchor="ctr"/>
+          <a:lstStyle/>
+          <a:p>
+            <a:pPr algn="ctr"/>
+            <a:endParaRPr lang="en-US" dirty="0"/>
+          </a:p>
+        </p:txBody>
+      </p:sp>
       <p:sp>
         <p:nvSpPr>
           <p:cNvPr id="2" name="Title 1">
@@ -28246,55 +24600,7 @@
       </p:sp>
       <p:pic>
         <p:nvPicPr>
-          <p:cNvPr id="15" name="Picture Placeholder 8" descr="A train on the tracks&#10;&#10;AI-generated content may be incorrect.">
-            <a:extLst>
-              <a:ext uri="{FF2B5EF4-FFF2-40B4-BE49-F238E27FC236}">
-                <a16:creationId xmlns:a16="http://schemas.microsoft.com/office/drawing/2014/main" id="{9F1AF42E-F6E7-D0F7-4372-84962285CC64}"/>
-              </a:ext>
-            </a:extLst>
-          </p:cNvPr>
-          <p:cNvPicPr>
-            <a:picLocks noChangeAspect="1"/>
-          </p:cNvPicPr>
-          <p:nvPr>
-            <p:custDataLst>
-              <p:tags r:id="rId1"/>
-            </p:custDataLst>
-          </p:nvPr>
-        </p:nvPicPr>
-        <p:blipFill rotWithShape="1">
-          <a:blip r:embed="rId5" cstate="screen">
-            <a:extLst>
-              <a:ext uri="{28A0092B-C50C-407E-A947-70E740481C1C}">
-                <a14:useLocalDpi xmlns:a14="http://schemas.microsoft.com/office/drawing/2010/main"/>
-              </a:ext>
-            </a:extLst>
-          </a:blip>
-          <a:srcRect l="4761" r="4761"/>
-          <a:stretch>
-            <a:fillRect/>
-          </a:stretch>
-        </p:blipFill>
-        <p:spPr>
-          <a:xfrm>
-            <a:off x="1524020" y="6"/>
-            <a:ext cx="1605261" cy="1559957"/>
-          </a:xfrm>
-          <a:prstGeom prst="rect">
-            <a:avLst/>
-          </a:prstGeom>
-          <a:ln>
-            <a:noFill/>
-          </a:ln>
-          <a:effectLst>
-            <a:softEdge rad="112500"/>
-          </a:effectLst>
-        </p:spPr>
-      </p:pic>
-      <p:pic>
-        <p:nvPicPr>
           <p:cNvPr id="3" name="Picture 2">
-            <a:hlinkClick r:id="rId6"/>
             <a:extLst>
               <a:ext uri="{FF2B5EF4-FFF2-40B4-BE49-F238E27FC236}">
                 <a16:creationId xmlns:a16="http://schemas.microsoft.com/office/drawing/2014/main" id="{FD604BF6-DDA1-79DE-0757-92C81774C51E}"/>
@@ -28307,7 +24613,7 @@
           <p:nvPr/>
         </p:nvPicPr>
         <p:blipFill>
-          <a:blip r:embed="rId7">
+          <a:blip r:embed="rId5">
             <a:extLst>
               <a:ext uri="{28A0092B-C50C-407E-A947-70E740481C1C}">
                 <a14:useLocalDpi xmlns:a14="http://schemas.microsoft.com/office/drawing/2010/main" val="0"/>
@@ -28320,12 +24626,26 @@
         </p:blipFill>
         <p:spPr>
           <a:xfrm>
-            <a:off x="4815840" y="1559962"/>
-            <a:ext cx="5800808" cy="5086546"/>
+            <a:off x="4917440" y="1661562"/>
+            <a:ext cx="7051040" cy="5086546"/>
           </a:xfrm>
           <a:prstGeom prst="rect">
             <a:avLst/>
           </a:prstGeom>
+          <a:ln w="19050" cap="sq">
+            <a:solidFill>
+              <a:srgbClr val="000000"/>
+            </a:solidFill>
+            <a:prstDash val="solid"/>
+            <a:miter lim="800000"/>
+          </a:ln>
+          <a:effectLst>
+            <a:outerShdw blurRad="50800" dist="38100" dir="2700000" algn="tl" rotWithShape="0">
+              <a:srgbClr val="000000">
+                <a:alpha val="43000"/>
+              </a:srgbClr>
+            </a:outerShdw>
+          </a:effectLst>
         </p:spPr>
       </p:pic>
       <p:sp>
@@ -28342,14 +24662,14 @@
           </p:cNvSpPr>
           <p:nvPr>
             <p:custDataLst>
-              <p:tags r:id="rId2"/>
+              <p:tags r:id="rId1"/>
             </p:custDataLst>
           </p:nvPr>
         </p:nvSpPr>
         <p:spPr>
           <a:xfrm>
-            <a:off x="1676401" y="2586901"/>
-            <a:ext cx="3077375" cy="2584539"/>
+            <a:off x="223521" y="2586901"/>
+            <a:ext cx="4124960" cy="3407499"/>
           </a:xfrm>
           <a:prstGeom prst="rect">
             <a:avLst/>
@@ -28529,7 +24849,7 @@
             </a:lvl9pPr>
           </a:lstStyle>
           <a:p>
-            <a:pPr marL="11113" indent="0">
+            <a:pPr marL="11113" indent="0" algn="just">
               <a:lnSpc>
                 <a:spcPct val="114000"/>
               </a:lnSpc>
@@ -28537,7 +24857,7 @@
               <a:defRPr/>
             </a:pPr>
             <a:r>
-              <a:rPr lang="en-US" sz="2000" noProof="1"/>
+              <a:rPr lang="en-US" sz="2400" noProof="1"/>
               <a:t>Implemented a star schema with fact tables for journeys and revenue, and dimension tables for stations, routes, and dates to optimize query performance and reporting.</a:t>
             </a:r>
           </a:p>
@@ -28557,13 +24877,13 @@
           </p:cNvSpPr>
           <p:nvPr>
             <p:custDataLst>
-              <p:tags r:id="rId3"/>
+              <p:tags r:id="rId2"/>
             </p:custDataLst>
           </p:nvPr>
         </p:nvSpPr>
         <p:spPr>
           <a:xfrm>
-            <a:off x="1943101" y="2179469"/>
+            <a:off x="1028701" y="2179469"/>
             <a:ext cx="2608580" cy="407432"/>
           </a:xfrm>
           <a:prstGeom prst="rect">
@@ -28759,6 +25079,53 @@
           </a:p>
         </p:txBody>
       </p:sp>
+      <p:pic>
+        <p:nvPicPr>
+          <p:cNvPr id="9" name="Picture Placeholder 8">
+            <a:extLst>
+              <a:ext uri="{FF2B5EF4-FFF2-40B4-BE49-F238E27FC236}">
+                <a16:creationId xmlns:a16="http://schemas.microsoft.com/office/drawing/2014/main" id="{640743A3-C3BF-9A41-4603-F88E8E46B634}"/>
+              </a:ext>
+            </a:extLst>
+          </p:cNvPr>
+          <p:cNvPicPr>
+            <a:picLocks noChangeAspect="1"/>
+          </p:cNvPicPr>
+          <p:nvPr>
+            <p:custDataLst>
+              <p:tags r:id="rId3"/>
+            </p:custDataLst>
+          </p:nvPr>
+        </p:nvPicPr>
+        <p:blipFill rotWithShape="1">
+          <a:blip r:embed="rId6" cstate="screen">
+            <a:extLst>
+              <a:ext uri="{28A0092B-C50C-407E-A947-70E740481C1C}">
+                <a14:useLocalDpi xmlns:a14="http://schemas.microsoft.com/office/drawing/2010/main"/>
+              </a:ext>
+            </a:extLst>
+          </a:blip>
+          <a:srcRect l="4761" r="4761"/>
+          <a:stretch>
+            <a:fillRect/>
+          </a:stretch>
+        </p:blipFill>
+        <p:spPr>
+          <a:xfrm>
+            <a:off x="121940" y="6"/>
+            <a:ext cx="1605261" cy="1559957"/>
+          </a:xfrm>
+          <a:prstGeom prst="rect">
+            <a:avLst/>
+          </a:prstGeom>
+          <a:ln>
+            <a:noFill/>
+          </a:ln>
+          <a:effectLst>
+            <a:softEdge rad="112500"/>
+          </a:effectLst>
+        </p:spPr>
+      </p:pic>
     </p:spTree>
     <p:extLst>
       <p:ext uri="{BB962C8B-B14F-4D97-AF65-F5344CB8AC3E}">
@@ -28800,14 +25167,14 @@
               <p:nvPr>
                 <p:extLst>
                   <p:ext uri="{D42A27DB-BD31-4B8C-83A1-F6EECF244321}">
-                    <p14:modId xmlns:p14="http://schemas.microsoft.com/office/powerpoint/2010/main" val="1416743559"/>
+                    <p14:modId xmlns:p14="http://schemas.microsoft.com/office/powerpoint/2010/main" val="916614992"/>
                   </p:ext>
                 </p:extLst>
               </p:nvPr>
             </p:nvGraphicFramePr>
             <p:xfrm>
               <a:off x="0" y="0"/>
-              <a:ext cx="12192000" cy="6858000"/>
+              <a:ext cx="12192000" cy="6857999"/>
             </p:xfrm>
             <a:graphic>
               <a:graphicData uri="http://schemas.microsoft.com/office/webextensions/webextension/2010/11">
@@ -28834,7 +25201,7 @@
             <p:spPr>
               <a:xfrm>
                 <a:off x="0" y="0"/>
-                <a:ext cx="12192000" cy="6858000"/>
+                <a:ext cx="12192000" cy="6857999"/>
               </a:xfrm>
               <a:prstGeom prst="rect">
                 <a:avLst/>
@@ -28846,7 +25213,7 @@
     </p:spTree>
     <p:extLst>
       <p:ext uri="{BB962C8B-B14F-4D97-AF65-F5344CB8AC3E}">
-        <p14:creationId xmlns:p14="http://schemas.microsoft.com/office/powerpoint/2010/main" val="3211859542"/>
+        <p14:creationId xmlns:p14="http://schemas.microsoft.com/office/powerpoint/2010/main" val="4219666092"/>
       </p:ext>
     </p:extLst>
   </p:cSld>
@@ -28881,12 +25248,12 @@
           <a:chExt cx="0" cy="0"/>
         </a:xfrm>
       </p:grpSpPr>
-      <p:sp useBgFill="1">
+      <p:sp>
         <p:nvSpPr>
-          <p:cNvPr id="16" name="Rectangle 15">
+          <p:cNvPr id="4" name="Rectangle 3">
             <a:extLst>
               <a:ext uri="{FF2B5EF4-FFF2-40B4-BE49-F238E27FC236}">
-                <a16:creationId xmlns:a16="http://schemas.microsoft.com/office/drawing/2014/main" id="{BACC6370-2D7E-4714-9D71-7542949D7D5D}"/>
+                <a16:creationId xmlns:a16="http://schemas.microsoft.com/office/drawing/2014/main" id="{D9F01EE9-8F40-8AC2-7E4E-A5877C258351}"/>
               </a:ext>
               <a:ext uri="{C183D7F6-B498-43B3-948B-1728B52AA6E4}">
                 <adec:decorative xmlns:adec="http://schemas.microsoft.com/office/drawing/2017/decorative" val="1"/>
@@ -28894,83 +25261,7 @@
             </a:extLst>
           </p:cNvPr>
           <p:cNvSpPr>
-            <a:spLocks noGrp="1" noRot="1" noChangeAspect="1" noMove="1" noResize="1" noEditPoints="1" noAdjustHandles="1" noChangeArrowheads="1" noChangeShapeType="1" noTextEdit="1"/>
-          </p:cNvSpPr>
-          <p:nvPr>
-            <p:extLst>
-              <p:ext uri="{386F3935-93C4-4BCD-93E2-E3B085C9AB24}">
-                <p16:designElem xmlns:p16="http://schemas.microsoft.com/office/powerpoint/2015/main" val="1"/>
-              </p:ext>
-            </p:extLst>
-          </p:nvPr>
-        </p:nvSpPr>
-        <p:spPr>
-          <a:xfrm>
-            <a:off x="1524000" y="0"/>
-            <a:ext cx="9144000" cy="6858000"/>
-          </a:xfrm>
-          <a:prstGeom prst="rect">
-            <a:avLst/>
-          </a:prstGeom>
-          <a:ln w="12700" cap="flat" cmpd="sng" algn="ctr">
-            <a:noFill/>
-            <a:prstDash val="solid"/>
-            <a:miter lim="800000"/>
-          </a:ln>
-          <a:effectLst/>
-          <a:extLst>
-            <a:ext uri="{91240B29-F687-4F45-9708-019B960494DF}">
-              <a14:hiddenLine xmlns:a14="http://schemas.microsoft.com/office/drawing/2010/main" w="12700" cap="flat" cmpd="sng" algn="ctr">
-                <a:solidFill>
-                  <a:schemeClr val="accent1">
-                    <a:shade val="50000"/>
-                  </a:schemeClr>
-                </a:solidFill>
-                <a:prstDash val="solid"/>
-                <a:miter lim="800000"/>
-              </a14:hiddenLine>
-            </a:ext>
-          </a:extLst>
-        </p:spPr>
-        <p:style>
-          <a:lnRef idx="2">
-            <a:schemeClr val="accent1">
-              <a:shade val="50000"/>
-            </a:schemeClr>
-          </a:lnRef>
-          <a:fillRef idx="1">
-            <a:schemeClr val="accent1"/>
-          </a:fillRef>
-          <a:effectRef idx="0">
-            <a:schemeClr val="accent1"/>
-          </a:effectRef>
-          <a:fontRef idx="minor">
-            <a:schemeClr val="lt1"/>
-          </a:fontRef>
-        </p:style>
-        <p:txBody>
-          <a:bodyPr rtlCol="0" anchor="ctr"/>
-          <a:lstStyle/>
-          <a:p>
-            <a:pPr algn="ctr"/>
-            <a:endParaRPr lang="en-US"/>
-          </a:p>
-        </p:txBody>
-      </p:sp>
-      <p:sp>
-        <p:nvSpPr>
-          <p:cNvPr id="18" name="Rectangle 17">
-            <a:extLst>
-              <a:ext uri="{FF2B5EF4-FFF2-40B4-BE49-F238E27FC236}">
-                <a16:creationId xmlns:a16="http://schemas.microsoft.com/office/drawing/2014/main" id="{F68B3F68-107C-434F-AA38-110D5EA91B85}"/>
-              </a:ext>
-              <a:ext uri="{C183D7F6-B498-43B3-948B-1728B52AA6E4}">
-                <adec:decorative xmlns:adec="http://schemas.microsoft.com/office/drawing/2017/decorative" val="1"/>
-              </a:ext>
-            </a:extLst>
-          </p:cNvPr>
-          <p:cNvSpPr>
-            <a:spLocks noGrp="1" noRot="1" noChangeAspect="1" noMove="1" noResize="1" noEditPoints="1" noAdjustHandles="1" noChangeArrowheads="1" noChangeShapeType="1" noTextEdit="1"/>
+            <a:spLocks noChangeAspect="1"/>
           </p:cNvSpPr>
           <p:nvPr>
             <p:extLst>
@@ -28982,8 +25273,8 @@
         </p:nvSpPr>
         <p:spPr>
           <a:xfrm flipH="1">
-            <a:off x="1524002" y="1"/>
-            <a:ext cx="9143999" cy="1575955"/>
+            <a:off x="-2" y="1"/>
+            <a:ext cx="12191999" cy="1575955"/>
           </a:xfrm>
           <a:prstGeom prst="rect">
             <a:avLst/>
@@ -29034,10 +25325,10 @@
       </p:sp>
       <p:sp>
         <p:nvSpPr>
-          <p:cNvPr id="20" name="Rectangle 19">
+          <p:cNvPr id="6" name="Rectangle 5">
             <a:extLst>
               <a:ext uri="{FF2B5EF4-FFF2-40B4-BE49-F238E27FC236}">
-                <a16:creationId xmlns:a16="http://schemas.microsoft.com/office/drawing/2014/main" id="{AAD0DBB9-1A4B-4391-81D4-CB19F9AB918A}"/>
+                <a16:creationId xmlns:a16="http://schemas.microsoft.com/office/drawing/2014/main" id="{7A301AD8-095D-90CC-98A5-1926A0C8691A}"/>
               </a:ext>
               <a:ext uri="{C183D7F6-B498-43B3-948B-1728B52AA6E4}">
                 <adec:decorative xmlns:adec="http://schemas.microsoft.com/office/drawing/2017/decorative" val="1"/>
@@ -29045,7 +25336,7 @@
             </a:extLst>
           </p:cNvPr>
           <p:cNvSpPr>
-            <a:spLocks noGrp="1" noRot="1" noChangeAspect="1" noMove="1" noResize="1" noEditPoints="1" noAdjustHandles="1" noChangeArrowheads="1" noChangeShapeType="1" noTextEdit="1"/>
+            <a:spLocks noChangeAspect="1"/>
           </p:cNvSpPr>
           <p:nvPr>
             <p:extLst>
@@ -29058,7 +25349,7 @@
         <p:spPr>
           <a:xfrm rot="10800000" flipH="1">
             <a:off x="7620642" y="0"/>
-            <a:ext cx="3047358" cy="1576412"/>
+            <a:ext cx="4571358" cy="1576412"/>
           </a:xfrm>
           <a:prstGeom prst="rect">
             <a:avLst/>
@@ -29110,10 +25401,10 @@
       </p:sp>
       <p:sp>
         <p:nvSpPr>
-          <p:cNvPr id="22" name="Rectangle 21">
+          <p:cNvPr id="7" name="Rectangle 6">
             <a:extLst>
               <a:ext uri="{FF2B5EF4-FFF2-40B4-BE49-F238E27FC236}">
-                <a16:creationId xmlns:a16="http://schemas.microsoft.com/office/drawing/2014/main" id="{063BBA22-50EA-4C4D-BE05-F1CE4E63AA56}"/>
+                <a16:creationId xmlns:a16="http://schemas.microsoft.com/office/drawing/2014/main" id="{A567CDBA-7AF4-0C77-706F-EA7067E40075}"/>
               </a:ext>
               <a:ext uri="{C183D7F6-B498-43B3-948B-1728B52AA6E4}">
                 <adec:decorative xmlns:adec="http://schemas.microsoft.com/office/drawing/2017/decorative" val="1"/>
@@ -29121,7 +25412,7 @@
             </a:extLst>
           </p:cNvPr>
           <p:cNvSpPr>
-            <a:spLocks noGrp="1" noRot="1" noChangeAspect="1" noMove="1" noResize="1" noEditPoints="1" noAdjustHandles="1" noChangeArrowheads="1" noChangeShapeType="1" noTextEdit="1"/>
+            <a:spLocks noChangeAspect="1"/>
           </p:cNvSpPr>
           <p:nvPr>
             <p:extLst>
@@ -29133,8 +25424,8 @@
         </p:nvSpPr>
         <p:spPr>
           <a:xfrm rot="5400000">
-            <a:off x="5307777" y="-3783778"/>
-            <a:ext cx="1576446" cy="9144002"/>
+            <a:off x="5307777" y="-5307777"/>
+            <a:ext cx="1576446" cy="12192000"/>
           </a:xfrm>
           <a:prstGeom prst="rect">
             <a:avLst/>
@@ -29232,14 +25523,14 @@
             <p:ph idx="1"/>
             <p:extLst>
               <p:ext uri="{D42A27DB-BD31-4B8C-83A1-F6EECF244321}">
-                <p14:modId xmlns:p14="http://schemas.microsoft.com/office/powerpoint/2010/main" val="4237865132"/>
+                <p14:modId xmlns:p14="http://schemas.microsoft.com/office/powerpoint/2010/main" val="713574767"/>
               </p:ext>
             </p:extLst>
           </p:nvPr>
         </p:nvGraphicFramePr>
         <p:xfrm>
-          <a:off x="2007043" y="1563940"/>
-          <a:ext cx="8195871" cy="4192805"/>
+          <a:off x="721361" y="1563940"/>
+          <a:ext cx="10789920" cy="4308540"/>
         </p:xfrm>
         <a:graphic>
           <a:graphicData uri="http://schemas.openxmlformats.org/drawingml/2006/diagram">
@@ -29249,10 +25540,10 @@
       </p:graphicFrame>
       <p:pic>
         <p:nvPicPr>
-          <p:cNvPr id="3" name="Picture Placeholder 8">
+          <p:cNvPr id="8" name="Picture Placeholder 8">
             <a:extLst>
               <a:ext uri="{FF2B5EF4-FFF2-40B4-BE49-F238E27FC236}">
-                <a16:creationId xmlns:a16="http://schemas.microsoft.com/office/drawing/2014/main" id="{6E1FFA30-8518-E607-38D7-5F42BB157FED}"/>
+                <a16:creationId xmlns:a16="http://schemas.microsoft.com/office/drawing/2014/main" id="{82E75B83-40CD-8F49-644C-613032841AB8}"/>
               </a:ext>
             </a:extLst>
           </p:cNvPr>
@@ -29280,7 +25571,7 @@
         </p:blipFill>
         <p:spPr>
           <a:xfrm>
-            <a:off x="1524020" y="6"/>
+            <a:off x="121940" y="6"/>
             <a:ext cx="1605261" cy="1559957"/>
           </a:xfrm>
           <a:prstGeom prst="rect">
@@ -29327,12 +25618,12 @@
           <a:chExt cx="0" cy="0"/>
         </a:xfrm>
       </p:grpSpPr>
-      <p:sp useBgFill="1">
+      <p:sp>
         <p:nvSpPr>
-          <p:cNvPr id="17" name="Rectangle 16">
+          <p:cNvPr id="4" name="Rectangle 3">
             <a:extLst>
               <a:ext uri="{FF2B5EF4-FFF2-40B4-BE49-F238E27FC236}">
-                <a16:creationId xmlns:a16="http://schemas.microsoft.com/office/drawing/2014/main" id="{BACC6370-2D7E-4714-9D71-7542949D7D5D}"/>
+                <a16:creationId xmlns:a16="http://schemas.microsoft.com/office/drawing/2014/main" id="{EFF5EC0E-D16E-3034-39DF-6BDA3E6272C6}"/>
               </a:ext>
               <a:ext uri="{C183D7F6-B498-43B3-948B-1728B52AA6E4}">
                 <adec:decorative xmlns:adec="http://schemas.microsoft.com/office/drawing/2017/decorative" val="1"/>
@@ -29340,83 +25631,7 @@
             </a:extLst>
           </p:cNvPr>
           <p:cNvSpPr>
-            <a:spLocks noGrp="1" noRot="1" noChangeAspect="1" noMove="1" noResize="1" noEditPoints="1" noAdjustHandles="1" noChangeArrowheads="1" noChangeShapeType="1" noTextEdit="1"/>
-          </p:cNvSpPr>
-          <p:nvPr>
-            <p:extLst>
-              <p:ext uri="{386F3935-93C4-4BCD-93E2-E3B085C9AB24}">
-                <p16:designElem xmlns:p16="http://schemas.microsoft.com/office/powerpoint/2015/main" val="1"/>
-              </p:ext>
-            </p:extLst>
-          </p:nvPr>
-        </p:nvSpPr>
-        <p:spPr>
-          <a:xfrm>
-            <a:off x="1524000" y="0"/>
-            <a:ext cx="9144000" cy="6858000"/>
-          </a:xfrm>
-          <a:prstGeom prst="rect">
-            <a:avLst/>
-          </a:prstGeom>
-          <a:ln w="12700" cap="flat" cmpd="sng" algn="ctr">
-            <a:noFill/>
-            <a:prstDash val="solid"/>
-            <a:miter lim="800000"/>
-          </a:ln>
-          <a:effectLst/>
-          <a:extLst>
-            <a:ext uri="{91240B29-F687-4F45-9708-019B960494DF}">
-              <a14:hiddenLine xmlns:a14="http://schemas.microsoft.com/office/drawing/2010/main" w="12700" cap="flat" cmpd="sng" algn="ctr">
-                <a:solidFill>
-                  <a:schemeClr val="accent1">
-                    <a:shade val="50000"/>
-                  </a:schemeClr>
-                </a:solidFill>
-                <a:prstDash val="solid"/>
-                <a:miter lim="800000"/>
-              </a14:hiddenLine>
-            </a:ext>
-          </a:extLst>
-        </p:spPr>
-        <p:style>
-          <a:lnRef idx="2">
-            <a:schemeClr val="accent1">
-              <a:shade val="50000"/>
-            </a:schemeClr>
-          </a:lnRef>
-          <a:fillRef idx="1">
-            <a:schemeClr val="accent1"/>
-          </a:fillRef>
-          <a:effectRef idx="0">
-            <a:schemeClr val="accent1"/>
-          </a:effectRef>
-          <a:fontRef idx="minor">
-            <a:schemeClr val="lt1"/>
-          </a:fontRef>
-        </p:style>
-        <p:txBody>
-          <a:bodyPr rtlCol="0" anchor="ctr"/>
-          <a:lstStyle/>
-          <a:p>
-            <a:pPr algn="ctr"/>
-            <a:endParaRPr lang="en-US"/>
-          </a:p>
-        </p:txBody>
-      </p:sp>
-      <p:sp>
-        <p:nvSpPr>
-          <p:cNvPr id="19" name="Rectangle 18">
-            <a:extLst>
-              <a:ext uri="{FF2B5EF4-FFF2-40B4-BE49-F238E27FC236}">
-                <a16:creationId xmlns:a16="http://schemas.microsoft.com/office/drawing/2014/main" id="{F68B3F68-107C-434F-AA38-110D5EA91B85}"/>
-              </a:ext>
-              <a:ext uri="{C183D7F6-B498-43B3-948B-1728B52AA6E4}">
-                <adec:decorative xmlns:adec="http://schemas.microsoft.com/office/drawing/2017/decorative" val="1"/>
-              </a:ext>
-            </a:extLst>
-          </p:cNvPr>
-          <p:cNvSpPr>
-            <a:spLocks noGrp="1" noRot="1" noChangeAspect="1" noMove="1" noResize="1" noEditPoints="1" noAdjustHandles="1" noChangeArrowheads="1" noChangeShapeType="1" noTextEdit="1"/>
+            <a:spLocks noChangeAspect="1"/>
           </p:cNvSpPr>
           <p:nvPr>
             <p:extLst>
@@ -29428,8 +25643,8 @@
         </p:nvSpPr>
         <p:spPr>
           <a:xfrm flipH="1">
-            <a:off x="1524002" y="1"/>
-            <a:ext cx="9143999" cy="1575955"/>
+            <a:off x="-2" y="1"/>
+            <a:ext cx="12191999" cy="1575955"/>
           </a:xfrm>
           <a:prstGeom prst="rect">
             <a:avLst/>
@@ -29480,10 +25695,10 @@
       </p:sp>
       <p:sp>
         <p:nvSpPr>
-          <p:cNvPr id="21" name="Rectangle 20">
+          <p:cNvPr id="5" name="Rectangle 4">
             <a:extLst>
               <a:ext uri="{FF2B5EF4-FFF2-40B4-BE49-F238E27FC236}">
-                <a16:creationId xmlns:a16="http://schemas.microsoft.com/office/drawing/2014/main" id="{AAD0DBB9-1A4B-4391-81D4-CB19F9AB918A}"/>
+                <a16:creationId xmlns:a16="http://schemas.microsoft.com/office/drawing/2014/main" id="{BD013244-F37F-E849-675B-69F3D4DB47CE}"/>
               </a:ext>
               <a:ext uri="{C183D7F6-B498-43B3-948B-1728B52AA6E4}">
                 <adec:decorative xmlns:adec="http://schemas.microsoft.com/office/drawing/2017/decorative" val="1"/>
@@ -29491,7 +25706,7 @@
             </a:extLst>
           </p:cNvPr>
           <p:cNvSpPr>
-            <a:spLocks noGrp="1" noRot="1" noChangeAspect="1" noMove="1" noResize="1" noEditPoints="1" noAdjustHandles="1" noChangeArrowheads="1" noChangeShapeType="1" noTextEdit="1"/>
+            <a:spLocks noChangeAspect="1"/>
           </p:cNvSpPr>
           <p:nvPr>
             <p:extLst>
@@ -29504,7 +25719,7 @@
         <p:spPr>
           <a:xfrm rot="10800000" flipH="1">
             <a:off x="7620642" y="0"/>
-            <a:ext cx="3047358" cy="1576412"/>
+            <a:ext cx="4571358" cy="1576412"/>
           </a:xfrm>
           <a:prstGeom prst="rect">
             <a:avLst/>
@@ -29556,10 +25771,10 @@
       </p:sp>
       <p:sp>
         <p:nvSpPr>
-          <p:cNvPr id="23" name="Rectangle 22">
+          <p:cNvPr id="6" name="Rectangle 5">
             <a:extLst>
               <a:ext uri="{FF2B5EF4-FFF2-40B4-BE49-F238E27FC236}">
-                <a16:creationId xmlns:a16="http://schemas.microsoft.com/office/drawing/2014/main" id="{063BBA22-50EA-4C4D-BE05-F1CE4E63AA56}"/>
+                <a16:creationId xmlns:a16="http://schemas.microsoft.com/office/drawing/2014/main" id="{BA9FFAB0-FF19-88BA-395B-760CE6C29ED9}"/>
               </a:ext>
               <a:ext uri="{C183D7F6-B498-43B3-948B-1728B52AA6E4}">
                 <adec:decorative xmlns:adec="http://schemas.microsoft.com/office/drawing/2017/decorative" val="1"/>
@@ -29567,7 +25782,7 @@
             </a:extLst>
           </p:cNvPr>
           <p:cNvSpPr>
-            <a:spLocks noGrp="1" noRot="1" noChangeAspect="1" noMove="1" noResize="1" noEditPoints="1" noAdjustHandles="1" noChangeArrowheads="1" noChangeShapeType="1" noTextEdit="1"/>
+            <a:spLocks noChangeAspect="1"/>
           </p:cNvSpPr>
           <p:nvPr>
             <p:extLst>
@@ -29579,8 +25794,8 @@
         </p:nvSpPr>
         <p:spPr>
           <a:xfrm rot="5400000">
-            <a:off x="5307777" y="-3783778"/>
-            <a:ext cx="1576446" cy="9144002"/>
+            <a:off x="5307777" y="-5307777"/>
+            <a:ext cx="1576446" cy="12192000"/>
           </a:xfrm>
           <a:prstGeom prst="rect">
             <a:avLst/>
@@ -29642,14 +25857,14 @@
           <p:nvPr>
             <p:extLst>
               <p:ext uri="{D42A27DB-BD31-4B8C-83A1-F6EECF244321}">
-                <p14:modId xmlns:p14="http://schemas.microsoft.com/office/powerpoint/2010/main" val="1611553064"/>
+                <p14:modId xmlns:p14="http://schemas.microsoft.com/office/powerpoint/2010/main" val="1779149304"/>
               </p:ext>
             </p:extLst>
           </p:nvPr>
         </p:nvGraphicFramePr>
         <p:xfrm>
-          <a:off x="2007043" y="2112580"/>
-          <a:ext cx="8195871" cy="4192805"/>
+          <a:off x="487681" y="2112580"/>
+          <a:ext cx="11460480" cy="4192805"/>
         </p:xfrm>
         <a:graphic>
           <a:graphicData uri="http://schemas.openxmlformats.org/drawingml/2006/diagram">
@@ -29657,53 +25872,6 @@
           </a:graphicData>
         </a:graphic>
       </p:graphicFrame>
-      <p:pic>
-        <p:nvPicPr>
-          <p:cNvPr id="2" name="Picture Placeholder 8">
-            <a:extLst>
-              <a:ext uri="{FF2B5EF4-FFF2-40B4-BE49-F238E27FC236}">
-                <a16:creationId xmlns:a16="http://schemas.microsoft.com/office/drawing/2014/main" id="{267920DF-B7D7-58D0-A81A-E46FA918F8DB}"/>
-              </a:ext>
-            </a:extLst>
-          </p:cNvPr>
-          <p:cNvPicPr>
-            <a:picLocks noChangeAspect="1"/>
-          </p:cNvPicPr>
-          <p:nvPr>
-            <p:custDataLst>
-              <p:tags r:id="rId1"/>
-            </p:custDataLst>
-          </p:nvPr>
-        </p:nvPicPr>
-        <p:blipFill rotWithShape="1">
-          <a:blip r:embed="rId8" cstate="screen">
-            <a:extLst>
-              <a:ext uri="{28A0092B-C50C-407E-A947-70E740481C1C}">
-                <a14:useLocalDpi xmlns:a14="http://schemas.microsoft.com/office/drawing/2010/main"/>
-              </a:ext>
-            </a:extLst>
-          </a:blip>
-          <a:srcRect l="4761" r="4761"/>
-          <a:stretch>
-            <a:fillRect/>
-          </a:stretch>
-        </p:blipFill>
-        <p:spPr>
-          <a:xfrm>
-            <a:off x="1524020" y="6"/>
-            <a:ext cx="1605261" cy="1559957"/>
-          </a:xfrm>
-          <a:prstGeom prst="rect">
-            <a:avLst/>
-          </a:prstGeom>
-          <a:ln>
-            <a:noFill/>
-          </a:ln>
-          <a:effectLst>
-            <a:softEdge rad="112500"/>
-          </a:effectLst>
-        </p:spPr>
-      </p:pic>
       <p:sp>
         <p:nvSpPr>
           <p:cNvPr id="3" name="Title 1">
@@ -29743,6 +25911,53 @@
           </a:p>
         </p:txBody>
       </p:sp>
+      <p:pic>
+        <p:nvPicPr>
+          <p:cNvPr id="7" name="Picture Placeholder 8">
+            <a:extLst>
+              <a:ext uri="{FF2B5EF4-FFF2-40B4-BE49-F238E27FC236}">
+                <a16:creationId xmlns:a16="http://schemas.microsoft.com/office/drawing/2014/main" id="{27E82967-73CF-73E5-EF20-D799D4173A7F}"/>
+              </a:ext>
+            </a:extLst>
+          </p:cNvPr>
+          <p:cNvPicPr>
+            <a:picLocks noChangeAspect="1"/>
+          </p:cNvPicPr>
+          <p:nvPr>
+            <p:custDataLst>
+              <p:tags r:id="rId1"/>
+            </p:custDataLst>
+          </p:nvPr>
+        </p:nvPicPr>
+        <p:blipFill rotWithShape="1">
+          <a:blip r:embed="rId8" cstate="screen">
+            <a:extLst>
+              <a:ext uri="{28A0092B-C50C-407E-A947-70E740481C1C}">
+                <a14:useLocalDpi xmlns:a14="http://schemas.microsoft.com/office/drawing/2010/main"/>
+              </a:ext>
+            </a:extLst>
+          </a:blip>
+          <a:srcRect l="4761" r="4761"/>
+          <a:stretch>
+            <a:fillRect/>
+          </a:stretch>
+        </p:blipFill>
+        <p:spPr>
+          <a:xfrm>
+            <a:off x="121940" y="6"/>
+            <a:ext cx="1605261" cy="1559957"/>
+          </a:xfrm>
+          <a:prstGeom prst="rect">
+            <a:avLst/>
+          </a:prstGeom>
+          <a:ln>
+            <a:noFill/>
+          </a:ln>
+          <a:effectLst>
+            <a:softEdge rad="112500"/>
+          </a:effectLst>
+        </p:spPr>
+      </p:pic>
     </p:spTree>
     <p:extLst>
       <p:ext uri="{BB962C8B-B14F-4D97-AF65-F5344CB8AC3E}">
@@ -29782,19 +25997,19 @@
 
 <file path=ppt/tags/tag13.xml><?xml version="1.0" encoding="utf-8"?>
 <p:tagLst xmlns:a="http://schemas.openxmlformats.org/drawingml/2006/main" xmlns:r="http://schemas.openxmlformats.org/officeDocument/2006/relationships" xmlns:p="http://schemas.openxmlformats.org/presentationml/2006/main">
-  <p:tag name="PLUS_ID" val="image"/>
+  <p:tag name="PLUS_ID" val="detail_2"/>
 </p:tagLst>
 </file>
 
 <file path=ppt/tags/tag14.xml><?xml version="1.0" encoding="utf-8"?>
 <p:tagLst xmlns:a="http://schemas.openxmlformats.org/drawingml/2006/main" xmlns:r="http://schemas.openxmlformats.org/officeDocument/2006/relationships" xmlns:p="http://schemas.openxmlformats.org/presentationml/2006/main">
-  <p:tag name="PLUS_ID" val="detail_2"/>
+  <p:tag name="PLUS_ID" val="header_2"/>
 </p:tagLst>
 </file>
 
 <file path=ppt/tags/tag15.xml><?xml version="1.0" encoding="utf-8"?>
 <p:tagLst xmlns:a="http://schemas.openxmlformats.org/drawingml/2006/main" xmlns:r="http://schemas.openxmlformats.org/officeDocument/2006/relationships" xmlns:p="http://schemas.openxmlformats.org/presentationml/2006/main">
-  <p:tag name="PLUS_ID" val="header_2"/>
+  <p:tag name="PLUS_ID" val="image"/>
 </p:tagLst>
 </file>
 
@@ -30520,28 +26735,28 @@
 </file>
 
 <file path=ppt/webextensions/webextension2.xml><?xml version="1.0" encoding="utf-8"?>
-<we:webextension xmlns:we="http://schemas.microsoft.com/office/webextensions/webextension/2010/11" id="{e8df99cc-b256-4084-b154-521f9ed472d0}">
+<we:webextension xmlns:we="http://schemas.microsoft.com/office/webextensions/webextension/2010/11" id="{3b3e6c4b-9cd9-488e-9db2-6d6bc58bedae}">
   <we:reference id="WA200003233" version="2.0.0.3" store="en-US" storeType="OMEX"/>
   <we:alternateReferences/>
   <we:properties>
     <we:property name="Microsoft.Office.CampaignId" value="&quot;none&quot;"/>
     <we:property name="artifactViewState" value="&quot;live&quot;"/>
     <we:property name="backgroundColor" value="&quot;#EFF7F9&quot;"/>
-    <we:property name="bookmark" value="&quot;H4sIAAAAAAAAA+1ab2/bNhP/KoaAIXsAYyBFiZT6rk2aLU/TIkuCDkMRFEfyZGuRJU+S03hFvvuOku04jh07dlKkQ/1K4tHH3/0/nv3Vs2k1zGD8AQbovfLeFMXlAMrLDo+8rpe3ixa0AMFCqZTGONY+jxlRi2GdFnnlvfrq1VD2sP6YViPIHCda/HTR9SDLTqDn3hLIKux6QyyrIocs/QfbzUSqyxHedD28HmZFCY7lWQ01OrZXtJ3eCQL/hXM6EkydXuEZmrpd1lIaw4MoZEz7PmcCQoe7ajc00JZucbyb8/eLvIY0p3PcmmUMQ6EUY0YyjdwGMnbrSZrVky16/PZ6WJJ4JPR46LSzT2B7RZkayLxGjBKrFvVXb7/IRoPm6e2d9bNiVBo8xaQh5XVaj4nTCYwHmNef32PdL6x3Q1o5KQvS2Ty1M0ftF1/2S6TzrfeK3XRnkF7bK8gNrS7ied3rldiDevL6dgewJaTZFxh/Pi8hr6A1yALiOVLn6KChHo7yie3ChwR4Op2ep+YS688N30V4DalzPiXdBXNBK1Wa97KJp976zHmL0WSjirwCbQtovw9l7aJC/0Xe53yFGBSlxfLNuHGXg7Sc+q3fXcD+suxyczGNNPrSX3OxNDFLK88z2eHixpGjJBYsiSOrQ9Q+MFAB/4aReJ4O8PMp5L0lYAfYuaU8vwPvQ4Y5edEikAMYd5qk/R0kgv/TF3Mcd1xiH1Ub5YK14TdMr4r6HHSGGwYdXwy6J7fDyrg5Lb5UW8TMBkfSiS3Pbfhv6OUXbXUm605rc3tYWWTNUyseIcnwCrOW9vcIyzGd19CncvwyA06b04rAZjCsnL1dD+CWTtI8n7472cqiqB3k1GID+iNkI3dmPsqyJlV0PRGYgIdBwFgYM8ljjQrXZooXEhcvoUCucrKjqvMH4iXRtimOtshH9Y+SuLvm23JopI8YmiRmoGXEmMXggcZ00rbTbgYsZrHmoeJRGPlBSNZY6kEtI8fn47TnJosclsWg4Ti5HZS0cwb/lLS6D6WLodbozCnpjz61RBNl5Dadmu9DG8d31XK0oKpH5LD2pYG0oD0HyzhYjc2mCeMTMT5OScTWV5tl2rz3ochxz211ep6luq09baaT1aC2KNbvEapRiZuCeEeVdvKVakUlrjpf0rrfeTGwXl/1OscIttMUnp8tjKv/vQhQh1BudTlY3Z08ZYOwgbu1+cOPmAyDxEiI/SgIFBOKfcN2+mBMKSk1nXcnR/d6mQXSI/UMEz84y1KD5WTTvMa9AZa9xh16mLfhTxIOWwApVrdauPv0UBq082lwXoBNMuFTJL17Bp8D0TlMMbPVZulvb28+APb2Pk0KT+eMSjd2frqY5caLNj26WgSmj/aw0dRBOzw6qnHQypFax78yhOzIto4yGEKZVlO3mb69S3Nn4a53jEn9XB51q4uud5r2+s1BW+uhiaS747KFbd5EQxKBQ+AbFSoMWEAV+1Et6WZeeDnvhXfy2CZu+LBd+K1dNkuoM9e8vNdZFTVknWndWWsKduytqMRPmNmXYHp0ofktJeil6Y+P3a3nPqoZ/T5piuQjqbwdeE60t0XfOHGGGStv4aZYt+VrDk2z2LldcOSJDN6fCOXWc43/pEZ+H9EdBn8o5Y5S3hd53f8RNjN9HMD4G00Dn2+cnaU5Lr2wr7/2/idtOvXxtoHGSPiRUkaGAi36yIIgekxJf7ZSNm31Z9XMdSFb/JjRXuS3mtQ8uzRtVxUnECBPrEamkDMWCRAvwgQbXl6/FxusEKc1ggYVoEjCwAdNV0pm4xCajv/BS1qD+s2orpugnBPQsaRGWYWxZBgDCxgIwUKxI8s4SpjmCfXdNo5EyE0sza4sSSOxb4REZGAYU0oFO7JkAixCQFdyHUsR+ozLXQUPRKQVhFIKLqxkjHGmdkWZJCJSNuARWO2HBnW8K8vIWm7DSAoZmlAx7ut2GrGLeYSSlBCkiNxP+FJriHBXlHHk2ygmoxNGJpjhIl7LMh1AD5f4uI5EYjHCWLMQlPZ9pdfyqvG61sX1fW5aoyCvjpBx1BSHDNV6ZCu5xbHxrQmNYdoiSl+LYBdsfkLxBjEzxJNFlCKM3J4boFU60BQpKoKQUW6AHbiRK/uS8QTJh10QSyb9bS0aWJ/FWnLiY30jrdZiPa+VyDhpn0nJICYpI82jOFzvviu5kdNiHFlBkWD8wChULNqem68xosJLGiM2KpQGcQdulI4TjUEgITAUYEJQTlnLrerDcIkNEu5La30AYBGpTJEx1ifQFbxMGBidoLWRYehTIMRsfU5awSsAFiKGilSGEQ8YF0q9iE7l3rjqu21S7kviZl3Du5eU2fTzmY92ShtCSdePqXnnTsbGzs84MU/pAnTdjFLpLtSjO8sr3k5ru4v/cfu1LEbDBp8MdSIoF1J7xFzjgX7roaafZrbEBhinGqWE5ZKap1jwkPl+ExFp9VtqrdvT/KnvZjIYXTZyL0Z1NQSDJ5Djkrl786cCi3by3KhpyUiwOWY6FaTPv+66Mva0KAAA&quot;"/>
-    <we:property name="creatorSessionId" value="&quot;af07b493-7afe-4206-8f57-e873817eed98&quot;"/>
+    <we:property name="bookmark" value="&quot;H4sIAAAAAAAAA+1abW/bRhL+KwK/9AoIh33lcvtNVpJrL05gOEbuQ1EYs7tDmQ1F6kjKsc7wf78hKTuOJFe25BhxasM2yN3lcJ6ZZ16W5GUUsnqWw+I9TDH6JTooy09TqD4NeBINo6IfFI77lDljfWASPHAWW5otZ01WFnX0y2XUQDXB5mNWzyFvJdHg738MI8jzI5i0ZynkNQ6jGVZ1WUCe/Q/7xTTVVHO8GkZ4McvLClqRHxposBV7TsvpnFTg/5R0R/BNdo4f0Df9qOZeQeqF5yhRaJOYJNCyul/QabZxCY2nWd6Q9PbQLV5fzCrS+PIasBHOJhA0SJcELUEnMZLcZjFrZ8ek3aSsMg951OldYd2reRmNy3w+7Y5efzX+oZxXHo8x7aaKJmsWnaQci4BVdEUGOKpKMk83/q4smrNB55J25qz8PK6Q7kqa66s/aOS8M96YlkFWLGFw4ZxDabxmUhoFisn4bqRLLKNwDoXHsAZkNJlUOIFmefp6D5QVZPlnWJyeVFDU0PtuBfARWbPH+mZeLL3LVqGzDnqdFZN8yZ6OI93RSQ/HQ9VCKd2fRIEWMl1QVmThg0WH+lVWXZNHDFeU/y4QE0Qacqn2DDQzArVwCccU1e6ufIdQzyu8r/JvcTFYXlKvak1r50UYjGazqjxHOpiW86JZI+k39tRTAOodYbVyaZKmXkKaWpNwSJ9NTJ1k/hM2g9beg99erVBN/9DBtQ1671wpsHUtA28tYkhjE8vn4txN6YP/0D69A/EyYQaDXAvmYqNYEJJ59SBX9uvaZR+vWw6C+6Yqp90Fy+ao4rT0L3UeRr1dyfLD6D9n2Cap31tjFCG7ttP7stlkrukMqqxePXubFa0jh9Ehps3jGL0/6eHctwwfZ5Oz7vaHGdmp59FHyOetmGKe523CvOqc8f2FxYY+Ynj5+L3cEQ2eQY2nHQNW9VpODm4mHxinswzHZ1A1zzdWu+bmuoWntX/eatKXXlgsg+WbmZ1yRUtQljJtlBNBpLFXtLkR+Jzz/lMRHBZTLJrTd9iclWFNsX52cGv2gRSnRqzA/IXg+5m9pzg1ql5yl8TSSyFsjMaLrRR/PKr0/ddpsyEkb7VmG0gyfKbxtpXcoSzmzUsG34ssPbVNyjhY4yyLEy2NMIqzl+x9XyuPc6jXNsFLM3+ZeyH3I5P7Pmbv6Z1qlyY+oe1MrIWQLqQy2Stz/5pRw05t0OIQzzFf1/tmfn3qWtePtBfpH8wutw47PN1cbqFuREVfmeJV+8C3XXZLm25w8GWgnV5i6B+Q/p3qx2daWaWQ512YidEbMR4fsJEexYqp0YEYMTEaj1+bg7FkbLwahhtZ7W+z+odmSR9ZClhIuEDq/WOb8pAE7V4Kx2No17mgTAf/JgEFLnYpIXUDlAzDiC55SCHhq4XkCbB9izKxkyI9rV3slPDOGqG9kt7aVG8vGE/xruCkbCC/VndTX3GPZP3o6ozb++Q5hn3IOoH5BHdtdd5DS51eMuU+P89vksghFJM5TLqWCi6ir6+MDg5H79/+4+foJkseIZmA9n5EignxJgyaFuLNuwuXcBnHUrSvAlPPjeCwx7uLR/fEMSXpYo53v0J6Wno83put58EOqQIIAOdRcwYOjUL+hE8InqaqnGRTzLMCuVLGWs4M/bHvurS0S7Ry0ps4YZohSB1rUPCErjku5w2e9puTNZVxRsWZ4mfQfqNxjemhtT6nZqb6yg3RFKtJF8cBGuhwzfq7ZtjPl6Gbxg72xvcQP72iK0L5ufgp6gpjVv9WnJMEDB8w7736bruU9muUaPku467OuVtb71DmH2ravsJrkXqihGNSuMBC8Mrs0bh+w5x5jP8lu/xInwN8QdTTISCz1ljvHZeISayk6T7M+EtsffQfzJum29DcwtgxTNtglBHMCSdQxcxxt6dI9BKNYV5KzVHpWAW1r0idorPK+YSZRLDECROHPUVaE7R3QJBb3E4DS/SeIkNQBrUFa2KlGSOFbbKnSKFSm6oEqFhaG5ObGO6rZaI115LQI7FJgeOc7Usi7oGDFalz9N9y4y0ze4pMXUxShWAarLMaNBi/VWQ2hdXep2s24lQpSbzhyIRJXIz3QNzgRePKi3VpDFVwHCTzTDJKi7EJfHdpLqA2iaZKK5mwJDrgdtPdKU0J4J5zikCImXHOcbsHUpnGCFwTVQyjH8WcFLtLo8ilfBCCVD6AskLGwHb1KHHWeJ5wAQG0s9JLK3fXLEULwUsDistEMvJDsLtLS5CjbUnhfGAodcL99vR3t27exgkKFktjaIPtPMftOeVOaYHHDAS3sZMKvJWUqrb7oD6D2QYfGA6C6o8WJIWphH52l+WSFp3lnn4Tb3TQbrvNNsq6Wvs69V9VOZ91bUoMDkQCCeqYgk4yJWRXRfxZlocKu6LNeGriNholj7VKFBmoW5PVv2YUm8XyW+L+e5PNPSR1WfUMPB5BgRt6SeqHaD+EYUsn2N3mphW8uvo/D2o8EystAAA=&quot;"/>
+    <we:property name="creatorSessionId" value="&quot;35ab3dca-48e7-45ce-857f-4cfdfbe98de9&quot;"/>
     <we:property name="creatorTenantId" value="&quot;2ebd1adb-7a61-4d99-9b72-8a52b2766b4c&quot;"/>
     <we:property name="creatorUserId" value="&quot;10032005449B8D91&quot;"/>
-    <we:property name="datasetId" value="&quot;69f22828-40c4-4c2f-b741-0e829c58fdcd&quot;"/>
-    <we:property name="embedUrl" value="&quot;/reportEmbed?reportId=8e5cb3cf-89bd-4167-96d3-da9bcf968549&amp;config=eyJjbHVzdGVyVXJsIjoiaHR0cHM6Ly9XQUJJLVNPVVRILUFGUklDQS1OT1JUSC1BLVBSSU1BUlktcmVkaXJlY3QuYW5hbHlzaXMud2luZG93cy5uZXQiLCJlbWJlZEZlYXR1cmVzIjp7InVzYWdlTWV0cmljc1ZOZXh0Ijp0cnVlfX0%3D&amp;disableSensitivityBanner=true&amp;storytellingChangeViewModeShortcutKeys=true&quot;"/>
-    <we:property name="initialStateBookmark" value="&quot;H4sIAAAAAAAAA+1bW2/bOhL+K4afdoHsgqR4PW9p2u4520uCJug+HBTFkBwlamTJK8lpvUX/+44k59LEju04yXGC9qGISHo433wzw+HI/j6MWT3OYfoeRjj8bfiiLE9HUJ0OuB3uDIvZ4P7+m3e7H958fr/77hUNl+MmK4t6+Nv3YQPVMTYfs3oCeSuCBv/8tDOEPD+A4/YphbzGneEYq7osIM/+h/1immqqCf7YGeK3cV5W0Io8bKDBVuwZLadn2pv/M6EdITTZGR5iaPpRZyJXyLkKOqjgXLDG0bK6X9BpNndJK7rbfq8sGsgK2qYdSxOudUL/BeMSNNyljnXjWd7Mlvjpq2/jitAR5um4tcpuPIMiYBx2ECqse42/D3ePjys8hmb2+Oqnyb0yn4zmjB+WkyrgB0y7qaLJmintUUGWf4Xp56MKihp69D/IZgdVSRbtlhxUWcBu8PWkmNmHtY8n5de9CsmgsR34RCN1VhznM/tfmuKohxOgaqGU/gsZsYVMHyiriNWLaYf6ZVadm1/sXFN+KxATRBqyARNnbeTaeeak0amXd6fyHUI9qXBV5d/gdDD7SH1da1o7KeJgdzyuyjOkP0blpGiGj8zUYwDqiQhRMIsm+Oh8BAja8/BUYuooC6fYDFp7D/54ec3V1LMOrmXQe3Il8zJJhUo0F1IyLTHBrYiyw8lo8IU+VeC0HtDgIML0CcfYAjg9CS5KFU1UAEaBA6ulga0g4ahsIB/stfvkOWWGf/cInjAPixH1VGBMQTohvLQhlZFTSOitoGK/+MdRNsLBAVZpWY3a/QZ/2z86+PsTJuM2TD0dXEsZtEYfLBgfpHYgltKxR3Y4Lqm2IOTXGbn3NPuSNhuU6S2hsbNth+J9FZo5ld17J1A1K7oSv+5Kj0DGj0/ndw5a9uXKrWLmJL2Sj6AIuXNbS6WgQkBGdxOmBDCp+7vML3/epNK5nLqfIu+XY6/t2JpbCClLRBLIqYPjiXgyl4QV8+HOSgH5e4YVVOFk+hbPML+p5cX8zalzlT5ClfVdlA7Rqkj3IMeC/LNDMusCXYga3mCxW3ZFm57ay4F2eoZh+K4smpO7FBpfaWWVQp7PDafl/vusrdlHDuNCRECQQSAKpqxK0sWRM2vkpZ4ZhUqyGI2xyiScKVJqrn/2glo5H8+bcVTUva7KUSdxhq0NwgvwLzGnkPlAZVuHtSeTtSnnPyfY1n5dailidh6h78vmpmH/uBak9eop6ZwrUutGs6JVakD14qDTcthlwo+QT7qWJW3wNiO4vS92w/ShYpLn7cLW4j86r93kFP3JOsvVu8v5WWXNyQibrMuhbzFtHuQa1Gn400n/ITs+6fY6DLQ2vjqDOUH3CHp027cd6PZhn1ZDU5ILJ3dIQbEsJs06p/nNvs0vNhax8RBVyJrh1WdRGaVIWUpXRBcjKKUgjU+l/li3fl2tEFlPzRndn9sXN5MbjjGbHVyZffwo3CpOHsLx1+Sgd3wU1msuQUcOKTrpU7Udr0kOqzMqqwevydY0PajOi6Sn2aqaj2bWvoWUGW4Md8am3LDoIl+HgtUKtNOrBdpPqq5SoO2VozFVr/X1pzdZEbsL7Pmxtslhd1G1nc4/WWYuXN/34bbWvreVFhc6zakh2dvhgurxkeqDh7LeXVVYvUZ7iAOrf731uZO7+M3XreX3/Snz02XxiibdTW/QBfAdUt/JpIgVxgOkHYuG8j7Bir1id7xOPwCq/hQCSD0w72N0aRI1RBOfY19zK79F8KtbuXa3MmHWy+ACZ2nquIgu4HP7mtAD5ty9HOqbB0SfdC/nnvkFYeF3l+7f0dcw+8y9QYBMtNfRsxQ9Z0Esf4m9NXfJrXu/tBuayWXxM1P8L7up9wfH5w/43wnWzYJj5ersuheufFKTl9xaaWxnSK7O0/bc3k3CUs/AGRMxRC6EUa3UWxnq0b+YNE3Xnb/CTCvSG+OZTpiRzCQYWNAMNxQppPZJ+9UkJZ3nzqIzyYYiIU0Tm2jBmOIBELUNfkORjmNijGAxYdI5xQTgplqqRCdgLXcxeI/MJ8zrDUVyz5x1hnAnCbcxGGfthiKDQivTVEofgbQUMsCmthRKJ5pbyaLgglltkkRsKDKJRhqmDXjvhXDOesaXisxGcIw3ZaHwRnGPVkcpmBPeWrZUVoPfGl9+mxMxKCACcIfAuFAhMLbcfgul2cgjCMWkdkIji1bJ5SG9UBpEYZyKzHNya+WEinEDpJJ5pR2kTlCoSBeI4OUcLJRmtIzIgrRS8GBV0MIszzQLGKX7o4XECOEpIgguha+8u2bctgRQuHLGgXwOddhAGoPoUwEMMdpIfCbg492lRZEIIYEb5MLZEFS0G+imFQCLCIZCi2kEwfxy/6hPYDyHg1SqiAhOxyR64aRFtjw1LZBFZoKglJEgidDANMDyKJgri4Rd+6XHv6pyMu6Oa2WiAxEDc0Bca/Jm06EPJ1keK+xO61RzQ4lRMiA8EnUisUtlWf17FmO7pvtlS9fb+3F17+EIq+POoctJU48h4AEUfWt13B/sGXbrqJqDImKc/d11cuc0ELtthueAMp/jkg+0P6s57znSv/8DsaJZj+IzAAA=&quot;"/>
+    <we:property name="datasetId" value="&quot;0e8f677d-4df5-40ef-ad83-43d1b09826e2&quot;"/>
+    <we:property name="embedUrl" value="&quot;/reportEmbed?reportId=074a426c-2ce3-46f4-8b01-9ded694b7c65&amp;config=eyJjbHVzdGVyVXJsIjoiaHR0cHM6Ly9XQUJJLVNPVVRILUFGUklDQS1OT1JUSC1BLVBSSU1BUlktcmVkaXJlY3QuYW5hbHlzaXMud2luZG93cy5uZXQiLCJlbWJlZEZlYXR1cmVzIjp7InVzYWdlTWV0cmljc1ZOZXh0Ijp0cnVlfX0%3D&amp;disableSensitivityBanner=true&amp;storytellingChangeViewModeShortcutKeys=true&quot;"/>
+    <we:property name="initialStateBookmark" value="&quot;H4sIAAAAAAAAA+1abU/jSBL+K5G/7J2ETv3qdu+3kGFu93hZxKC5D6sVqu4uB+84ds52GHKI/35lOzBMCBtIGDTMgQDZ3e1yPVVPvbTtqyhk9TSH+RFMMPo52i3LTxOoPg14Eu1ExWLwt9/2D4cn+2dHw8M9Gi6nTVYWdfTzVdRANcbmY1bPIG9F0ODvf+xEkOfHMG7PUshr3ImmWNVlAXn2X+wX01RTzfB6J8LLaV5W0Ir80ECDrdgLWk7ndG/+D0l3BN9kF/gBfdOPau4VpF54jhKFNolJAi2r+wWdZiuX0Hia5Q1Jbw/dfO9yWpHGVzdIjXA2gaBBuiRoCTqJkeQ282k7OyLtxmWVecijTu8K617Nq2hU5rNJd7T31fiHclZ5PMG0myqarJl3knIsAlbRNRnguCrJPN34YVk054POF+3Mefl5VCHdlTTX13/QyEVnvBEtg6xYwODCOYfSeM2kNAoUk/HDSBdYhuECCo/hHpDheFzhGJrF6d4WKCvI8s8wPzutoKih990S4GOyZo/1/axYeJctQ2cd9DorxvmCPR1HuqPTHo6HqoVSuj+JAi1kuqCsyMK78w71u6y6IY/YWVL+u0BMEGnIpdoz0MwI1MIlHFNUm7vyEKGeVfhY5fdxPlhcUi9rTWtnRRgMp9OqvEA6mJSzorlH0m/sqZcA1DvCauXSJE29hDS1JuGQvpqYOs38J2wGrb0Hv75bopr+oYNrHfTeuVJg61oG3lrEkMYmlq/FuavSB/+hffoA4kXCDAa5FszFRrEgJPPqSa7s17XLPt60HAT3fVVOugsWXVHFaelf6rwT9XYly+9E/z7HNkn93hqjCNmNnY7KZpW5JlOosnr5bD8rWkfuRAeYNs9j9P6kh/PYMnySjc+72x9kZKeeRx8hn7ViilmetwnzunPG9xcWK/qInavn7+WOafAcajzrGLCs12JycDv5xDidZjg6h6p5vbHaNTc3LTyt/fNOk77wwnwRLN/M7JQrWoKylGmjnAgijb1y3At8zXn/pQgO8wkWzdkhNudluKdYPzu4M/tEilMjVmD+RvDtzN5TnBpVL7lLYumlEDZG48Vaij8fVfr+66xZEZJ3WrMVJNl5pfG2ltyhLGbNWwbfiiw9tU3KOFjjLIsTLY0wirO37P1YK49yqO9tghdm/jL3Ru5nJvdjzN7TO9UuTXxC25lYCyFdSGWyVeb+JaOGndqg+QFeYH5f79v5+1M3un6kvUj/YHaxddjg6eZiC3UrKvrKFO/aB77tsjvadIODLwPt9AJD/4D0/6l+fKaVVQp53oWZGL4Xo9EuG+phrJga7oohE8PRaM/sjiRjo+UwXMlqf5fVPzRL+shSwELCBVLvH9uUhyRo91Y4nkO7zgVlOvgXCShwvkkJqRugZBiGdMlTCglfLiQvgO1blImNFOlp7WKnhHfWCO2V9Namen3BeIl3BadlA/mNuqv6ikck62dXZ9TeJ88xbEPWMczGuGmrcwQtdXrJlPv8LL9NIgdQjGcw7loquIy+vjLaPRge7f/t79FtljxGMgHt/YgUY+JNGDQtxNt3Fy7hMo6laF8Fpp4bwWGLdxfP7okTStLFDB9+hfSy9Hi+N1uvgx1SBRAAzqPmDBwahfwFnxC8TFU5zSaYZwVypYy1nBn6Y991aWmXaOWkN3HCNEOQOtag4AVdc1LOGjzrNyf3VMYpFWeKn0H7jcYNpqfW+pyameorN0QTrMZdHAdooMM17e+aYT9fhm4aO9gr30P89I6uCOXn4qeoK4xZ/WtxQRIwfMC89+rheint1yjR4l3GQ51zt7beoMw/1bR9hdci9UQJx6RwgYXgldmicf2GOfME/0N2+ZE+B/iCqKdDQGatsd47LhGTWEnTfZjxl9j66N+dNU23obmDsWOYtsEoI5gTTqCKmeNuS5HoJRrDvJSao9KxCmpbkTpFZ5XzCTOJYIkTJg5birQmaO+AILe4nQaW6C1FhqAMagvWxEozRgrbZEuRQqU2VQlQsbQ2Jjcx3FbLRGuuJaFHYpMCxznblkTcAwcrUufov+XGW2a2FJm6mKQKwTRYZzVoMH6tyGwCy71P12zEqVKSeMORCZO4GB+BuMHLxpWX96UxVMFxkMwzySgtxibwzaW5gNokmiqtZMKS6IDrTfegNCWAe84pAiFmxjnH7RZIZRojcE1UMYx+FHNSbC6NIpfyQQhS+QDKChkD29SjxFnjecIFBNDOSi+t3FyzFC0ELw0oLhPJyA/Bbi4tQY62JYXzgaHUCffr09/DunkbJyhYLI2hDbbzHNfnlAelBR4zENzGTirwVlKqWu+D+hymK3xgOAiqP1qQFKYS+tlclktadJZ7+k280UG79TZbKev63tep/6zK2bRrU2JwIBJIUMcUdJIpIbsq4s+zPFTYFW3GUxO30Sh5rFWiyEDdmqz+JaPYLBbfEvffm6zuIanLqqfg8RgKXNFLUj9E+yEMazrB7jbRDaDM5U9qHa+v/wdkszu2VC0AAA==&quot;"/>
     <we:property name="isFiltersActionButtonVisible" value="true"/>
     <we:property name="isVisualContainerHeaderHidden" value="false"/>
-    <we:property name="pageDisplayName" value="&quot;Demand &quot;"/>
-    <we:property name="pageName" value="&quot;b66cc148500b22103a58&quot;"/>
-    <we:property name="reportEmbeddedTime" value="&quot;2025-12-05T14:04:35.422Z&quot;"/>
-    <we:property name="reportName" value="&quot;UK Railway Train #9.4.8&quot;"/>
+    <we:property name="pageDisplayName" value="&quot;Financial &quot;"/>
+    <we:property name="pageName" value="&quot;51c4afc2c1e3e257878d&quot;"/>
+    <we:property name="reportEmbeddedTime" value="&quot;2025-12-06T06:06:49.476Z&quot;"/>
+    <we:property name="reportName" value="&quot;UK Railway Train #9.4.9&quot;"/>
     <we:property name="reportState" value="&quot;CONNECTED&quot;"/>
-    <we:property name="reportUrl" value="&quot;/groups/me/reports/8e5cb3cf-89bd-4167-96d3-da9bcf968549/b66cc148500b22103a58?bookmarkGuid=c823fb4f-a214-440f-9364-748239e6e182&amp;bookmarkUsage=1&amp;ctid=2ebd1adb-7a61-4d99-9b72-8a52b2766b4c&amp;fromEntryPoint=export&amp;pbi_source=storytelling_addin&quot;"/>
+    <we:property name="reportUrl" value="&quot;/groups/me/reports/074a426c-2ce3-46f4-8b01-9ded694b7c65/51c4afc2c1e3e257878d?bookmarkGuid=2eecbee4-3090-439e-a3f2-7c693107d5fe&amp;bookmarkUsage=1&amp;ctid=2ebd1adb-7a61-4d99-9b72-8a52b2766b4c&amp;fromEntryPoint=export&amp;pbi_source=storytelling_addin&quot;"/>
   </we:properties>
   <we:bindings/>
   <we:snapshot xmlns:r="http://schemas.openxmlformats.org/officeDocument/2006/relationships"/>
